--- a/materials/week9/w9-slides.pptx
+++ b/materials/week9/w9-slides.pptx
@@ -80,6 +80,8 @@
     <p:sldId id="328" r:id="rId80"/>
     <p:sldId id="329" r:id="rId81"/>
     <p:sldId id="330" r:id="rId82"/>
+    <p:sldId id="331" r:id="rId83"/>
+    <p:sldId id="332" r:id="rId84"/>
   </p:sldIdLst>
   <p:sldSz cx="12191695" cy="6858000" type="screen4x3"/>
   <p:notesSz cx="6858000" cy="9144000"/>
@@ -2186,7 +2188,7 @@
           <a:lstStyle/>
           <a:p>
             <a:r>
-              <a:t>พูดว่า "คนส่วนใหญ่ทดสอบแต่กลุ่มแรก ซึ่งเป็นกลุ่มที่พังน้อยที่สุด" · บอกว่าบ่ายนี้ต้องมีครบกลุ่ม 1 · 2 · 4 เป็นอย่างน้อย กลุ่ม 3 เป็นงานต่อยอด</a:t>
+              <a:t>พูดว่า "คนส่วนใหญ่ทดสอบแต่กลุ่มแรก ซึ่งเป็นกลุ่มที่พังน้อยที่สุด" · บอกว่าบ่ายนี้ต้องมีอย่างน้อยกลุ่ม 1 · 2 · 3 และถ้าระบบกลุ่มมีปุ่ม AI ให้มีกลุ่ม 4 ด้วย · กลุ่ม 5 (ข้อมูลว่าง) เป็นงานต่อยอด</a:t>
             </a:r>
           </a:p>
         </p:txBody>
@@ -2256,7 +2258,7 @@
           <a:lstStyle/>
           <a:p>
             <a:r>
-              <a:t>อ่านทีละบรรทัดแล้วพูดว่า "นี่คือสิ่งที่ผู้ใช้จริงทำทุกวัน ถ้าเส้นนี้พัง ระบบใช้ไม่ได้เลย" · ชี้ข้อ 6 ว่าคือการตรวจว่าข้อมูลเปลี่ยนจริง ไม่ใช่แค่หน้าจอเด้ง</a:t>
+              <a:t>อ่านทีละบรรทัดแล้วพูดว่า "นี่คือสิ่งที่ผู้ใช้จริงทำทุกวัน ถ้าเส้นนี้พัง ระบบใช้ไม่ได้เลย" · ชี้ข้อ 6 ว่าคือการตรวจว่าข้อมูลเปลี่ยนจริง ไม่ใช่หน้าจอเด้งเฉย ๆ</a:t>
             </a:r>
           </a:p>
         </p:txBody>
@@ -2396,7 +2398,7 @@
           <a:lstStyle/>
           <a:p>
             <a:r>
-              <a:t>พูดว่า "ผู้ใช้จริงกรอกไม่ครบทุกวัน นี่ไม่ใช่กรณีพิเศษ" · ย้ำว่าเทสต์ต้องตรวจ ข้อความที่ขึ้น ด้วย ไม่ใช่ตรวจแค่ว่าไม่มีข้อมูลเพิ่ม</a:t>
+              <a:t>พูดว่า "ผู้ใช้จริงกรอกไม่ครบทุกวัน นี่ไม่ใช่กรณีพิเศษ" · ย้ำว่าเทสต์ต้องตรวจ ข้อความที่ขึ้น ด้วย ไม่ใช่ตรวจว่าไม่มีข้อมูลเพิ่มอย่างเดียว</a:t>
             </a:r>
           </a:p>
         </p:txBody>
@@ -2676,7 +2678,7 @@
           <a:lstStyle/>
           <a:p>
             <a:r>
-              <a:t>พูดว่า "นาทีนี้คือนาทีที่คนส่วนใหญ่ตัดสินใจผิด — รีบแก้โค้ดให้เทสต์เขียว แล้วระบบพังเงียบ ๆ" · บอกว่าเดี๋ยวจะให้ดูของจริงตอนสาธิต</a:t>
+              <a:t>อ้างกลับสัปดาห์ที่ 8 — "ตอนนั้นเราตั้งกติกา 3 อย่างของผู้ช่วย AI ไว้ หนึ่งในนั้นคือเรียกไม่สำเร็จแล้วระบบห้ามค้าง วันนี้เราให้เทสต์เป็นคนพิสูจน์ข้อนั้นแทนเรา" · บอกวิธีทำให้เรียกไม่สำเร็จแบบปลอดภัย: ใส่คีย์ผิดชั่วคราวในหน้าเว็บ แล้วค่อยใส่คีย์จริงกลับหลังเทสต์เสร็จ</a:t>
             </a:r>
           </a:p>
         </p:txBody>
@@ -2746,7 +2748,7 @@
           <a:lstStyle/>
           <a:p>
             <a:r>
-              <a:t>ชี้กล่องแรก "ตรงนี้ยังไม่ต้องแก้อะไรทั้งนั้น" · หยุดค้างที่กล่องเข้มกล่องที่สอง พูดว่า "ทุกอย่างขึ้นอยู่กับกล่องนี้ เปิดเว็บกดเองด้วยมือ 30 วินาที" · แล้วชี้สองกล่องขวาทีละกล่อง "พังเหมือนกัน แปลว่าโค้ดผิด ไปแก้โค้ด · กดเองใช้ได้ปกติ แปลว่าเทสต์เขียนผิด ไปแก้เทสต์" · ย้ำว่าห้ามข้ามกล่องที่สองไปเดาเอง</a:t>
+              <a:t>อ่าน prompt ออกเสียง แล้วบอกว่า "เทสต์ตัวนี้กับเทสต์ความปลอดภัยเป็นญาติกัน — ทั้งคู่ทดสอบวันที่แย่ ไม่ใช่วันที่ดี" · ย้ำว่าถ้าระบบของกลุ่มไม่มีปุ่ม AI ให้ข้ามเทสต์ตัวนี้ได้ แต่ต้องมีเทสต์ครบ 5 ตัวจากกลุ่มอื่นแทน</a:t>
             </a:r>
           </a:p>
         </p:txBody>
@@ -2816,7 +2818,7 @@
           <a:lstStyle/>
           <a:p>
             <a:r>
-              <a:t>พูดว่า "วิธีตัดสินคือเปิดเว็บกดเองด้วยมือ 30 วินาที จบ" · ย้ำว่าอย่าเดา ให้กดจริง · บอกว่าในกลุ่มให้คนที่ไม่ได้พิมพ์เป็นคนกดทดสอบด้วยมือ</a:t>
+              <a:t>พูดว่า "นาทีนี้คือนาทีที่คนส่วนใหญ่ตัดสินใจผิด — รีบแก้โค้ดให้เทสต์เขียว แล้วระบบพังเงียบ ๆ" · บอกว่าเดี๋ยวจะให้ดูของจริงตอนสาธิต</a:t>
             </a:r>
           </a:p>
         </p:txBody>
@@ -2956,7 +2958,7 @@
           <a:lstStyle/>
           <a:p>
             <a:r>
-              <a:t>พูดว่า "เทสต์มีไว้จับปัญหา ไม่ได้มีไว้ให้ผ่าน" · เล่าว่าการลบเทสต์ที่ fail ทิ้งคือการปิดตาตัวเอง · บอกว่าถ้าเจอเทสต์ที่ fail แล้วยังแก้ไม่ทัน ให้เขียนลงบันทึกสิ่งที่ยังไม่เสร็จ ไม่ใช่ลบทิ้ง</a:t>
+              <a:t>ชี้กล่องแรก "ตรงนี้ยังไม่ต้องแก้อะไรทั้งนั้น" · หยุดค้างที่กล่องเข้มกล่องที่สอง พูดว่า "ทุกอย่างขึ้นอยู่กับกล่องนี้ เปิดเว็บกดเองด้วยมือ 30 วินาที" · แล้วชี้สองกล่องขวาทีละกล่อง "พังเหมือนกัน แปลว่าโค้ดผิด ไปแก้โค้ด · กดเองใช้ได้ปกติ แปลว่าเทสต์เขียนผิด ไปแก้เทสต์" · ย้ำว่าห้ามข้ามกล่องที่สองไปเดาเอง</a:t>
             </a:r>
           </a:p>
         </p:txBody>
@@ -3026,7 +3028,7 @@
           <a:lstStyle/>
           <a:p>
             <a:r>
-              <a:t>พูดว่า "ถ้าเจออาการนี้ ถือว่าปกติมาก ทุกคนที่ทำเทสต์เจอ" · ย้ำว่าอย่าไปนั่งรันซ้ำหวังว่ามันจะหาย</a:t>
+              <a:t>พูดว่า "วิธีตัดสินคือเปิดเว็บกดเองด้วยมือ 30 วินาที จบ" · ย้ำว่าอย่าเดา ให้กดจริง · บอกว่าในกลุ่มให้คนที่ไม่ได้พิมพ์เป็นคนกดทดสอบด้วยมือ</a:t>
             </a:r>
           </a:p>
         </p:txBody>
@@ -3096,7 +3098,7 @@
           <a:lstStyle/>
           <a:p>
             <a:r>
-              <a:t>ให้แต่ละกลุ่มพิมพ์ 🟢🟡🔴 ลงแชท · จดชื่อกลุ่มที่พิมพ์ 🔴 ไว้ให้ TA ตามในคาบบ่ายทันทีที่เปิด breakout</a:t>
+              <a:t>พูดว่า "เทสต์มีไว้จับปัญหา ไม่ได้มีไว้ให้ผ่าน" · เล่าว่าการลบเทสต์ที่ fail ทิ้งคือการปิดตาตัวเอง · บอกว่าถ้าเจอเทสต์ที่ fail แล้วยังแก้ไม่ทัน ให้เขียนลงบันทึกสิ่งที่ยังไม่เสร็จ ไม่ใช่ลบทิ้ง</a:t>
             </a:r>
           </a:p>
         </p:txBody>
@@ -3166,7 +3168,7 @@
           <a:lstStyle/>
           <a:p>
             <a:r>
-              <a:t>ลดความกดดันก่อนเข้าเนื้อหา — "บ่ายนี้ทุกกลุ่มจะได้นำเสนอ 5 นาที ไม่ใช่การสอบ และไม่ใช่การประกวดว่าระบบใครสวยกว่า สิ่งที่เราอยากฟังคือ กลุ่มคุณเจอปัญหาอะไรและแก้ยังไง" · บอกล่วงหน้าว่าจะแยกเป็น 3 ห้องขนานกัน จะได้ไม่ตกใจตอนถูกย้ายห้อง</a:t>
+              <a:t>พูดว่า "ถ้าเจออาการนี้ ถือว่าปกติมาก ทุกคนที่ทำเทสต์เจอ" · ย้ำว่าอย่าไปนั่งรันซ้ำหวังว่ามันจะหาย</a:t>
             </a:r>
           </a:p>
         </p:txBody>
@@ -3236,7 +3238,7 @@
           <a:lstStyle/>
           <a:p>
             <a:r>
-              <a:t>พูดว่า "ถ้านำเสนอจบแล้วไม่มีใครถามอะไรเลย แปลว่าเรายังไม่ได้อะไรกลับมา" · บอกว่าเราจะบังคับให้ผู้ฟังเขียน feedback ทุกคน</a:t>
+              <a:t>ให้แต่ละกลุ่มพิมพ์ 🟢🟡🔴 ลงแชท · จดชื่อกลุ่มที่พิมพ์ 🔴 ไว้ให้ TA ตามในคาบบ่ายทันทีที่เปิด breakout</a:t>
             </a:r>
           </a:p>
         </p:txBody>
@@ -3306,7 +3308,7 @@
           <a:lstStyle/>
           <a:p>
             <a:r>
-              <a:t>พูดว่า "ทุกกลุ่มได้นำเสนอ ไม่มีกลุ่มไหนนั่งดูอย่างเดียว" · บอกว่าลำดับผู้นำเสนอและเลขห้องส่งให้แล้วในใบงาน ให้เปิดดูตอนพักเที่ยง · ย้ำว่าเวลาแน่นมาก เข้าห้องช้าคือเสียคิวของกลุ่มตัวเอง</a:t>
+              <a:t>ลดความกดดันก่อนเข้าเนื้อหา — "บ่ายนี้ทุกกลุ่มจะได้นำเสนอ 5 นาที ไม่ใช่การสอบ และไม่ใช่การประกวดว่าระบบใครสวยกว่า สิ่งที่เราอยากฟังคือ กลุ่มคุณเจอปัญหาอะไรและแก้ยังไง" · บอกล่วงหน้าว่าจะแยกเป็น 3 ห้องขนานกัน จะได้ไม่ตกใจตอนถูกย้ายห้อง</a:t>
             </a:r>
           </a:p>
         </p:txBody>
@@ -3376,7 +3378,7 @@
           <a:lstStyle/>
           <a:p>
             <a:r>
-              <a:t>ย้ำให้ชัดเพราะทุกรุ่นมีคนเข้าใจผิด · บอกว่าถ้าโครงงานของกลุ่มยังไม่เสร็จ ให้นำเสนอเท่าที่มีจริง ไม่ต้องแต่ง — สิ่งที่ยังไม่เสร็จให้พูดออกมาตรง ๆ แล้วบอกว่าอยู่ใน Backlog Sprint 2 แล้ว</a:t>
+              <a:t>พูดว่า "ถ้านำเสนอจบแล้วไม่มีใครถามอะไรเลย แปลว่าเรายังไม่ได้อะไรกลับมา" · บอกว่าเราจะบังคับให้ผู้ฟังเขียน feedback ทุกคน</a:t>
             </a:r>
           </a:p>
         </p:txBody>
@@ -3446,7 +3448,7 @@
           <a:lstStyle/>
           <a:p>
             <a:r>
-              <a:t>พูดตรง ๆ ว่า "ข้อนี้ผมพูดล่วงหน้าตั้งแต่เช้า เพราะมันแก้ตอนบ่ายไม่ทัน" · บอกให้แบ่งท่อนกันตั้งแต่ตอนพักเที่ยง และให้คนที่พิมพ์น้อยที่สุดในกลุ่มเป็นคนสาธิตสด · เชื่อมกับกติกา commit ในชื่อตัวเอง</a:t>
+              <a:t>พูดว่า "ทุกกลุ่มได้นำเสนอ ไม่มีกลุ่มไหนนั่งดูอย่างเดียว" · บอกว่าลำดับผู้นำเสนอและเลขห้องส่งให้แล้วในใบงาน ให้เปิดดูตอนพักเที่ยง · ย้ำว่าเวลาแน่นมาก เข้าห้องช้าคือเสียคิวของกลุ่มตัวเอง</a:t>
             </a:r>
           </a:p>
         </p:txBody>
@@ -3516,7 +3518,7 @@
           <a:lstStyle/>
           <a:p>
             <a:r>
-              <a:t>พูดว่า "ช่องที่ 3 คือหัวใจ อีกสี่ช่องคือกรอบให้ช่องที่ 3 เข้าใจได้" · เตือนว่าห้ามใช้เวลาไปกับสไลด์แนะนำตัวสมาชิก</a:t>
+              <a:t>ย้ำให้ชัดเพราะทุกรุ่นมีคนเข้าใจผิด · บอกว่าถ้าโครงงานของกลุ่มยังไม่เสร็จ ให้นำเสนอเท่าที่มีจริง ไม่ต้องแต่ง — สิ่งที่ยังไม่เสร็จให้พูดออกมาตรง ๆ แล้วบอกว่าอยู่ใน Backlog Sprint 2 แล้ว</a:t>
             </a:r>
           </a:p>
         </p:txBody>
@@ -3586,7 +3588,7 @@
           <a:lstStyle/>
           <a:p>
             <a:r>
-              <a:t>พูดว่า "จับเวลาเข้ม มีนาฬิกาขึ้นหน้าจอ หมดเวลาแล้วหยุดจริง" · ชี้บรรทัดที่สองแล้วบอกว่า "คนที่พิมพ์น้อยที่สุดในกลุ่มเป็นคนสาธิต เพราะสาธิตได้แปลว่าเข้าใจจริง" · ให้ซ้อมกับกลุ่มตอนบ่ายอย่างน้อย 1 รอบ</a:t>
+              <a:t>พูดตรง ๆ ว่า "ข้อนี้ผมพูดล่วงหน้าตั้งแต่เช้า เพราะมันแก้ตอนบ่ายไม่ทัน" · บอกให้แบ่งท่อนกันตั้งแต่ตอนพักเที่ยง และให้คนที่พิมพ์น้อยที่สุดในกลุ่มเป็นคนสาธิตสด · เชื่อมกับกติกา commit ในชื่อตัวเอง</a:t>
             </a:r>
           </a:p>
         </p:txBody>
@@ -3726,7 +3728,7 @@
           <a:lstStyle/>
           <a:p>
             <a:r>
-              <a:t>พูดว่า "การตอบว่ายังไม่ทราบแล้วจดไว้ ได้คะแนนมากกว่าการเดา" · บอกว่าผู้สอนและ TA จะเป็นคนถามอย่างน้อยกลุ่มละ 1 คำถาม และจะถามเจาะไปที่คนที่ยังไม่ได้พูด</a:t>
+              <a:t>พูดว่า "ช่องที่ 3 คือหัวใจ อีกสี่ช่องคือกรอบให้ช่องที่ 3 เข้าใจได้" · เตือนว่าห้ามใช้เวลาไปกับสไลด์แนะนำตัวสมาชิก</a:t>
             </a:r>
           </a:p>
         </p:txBody>
@@ -3796,7 +3798,7 @@
           <a:lstStyle/>
           <a:p>
             <a:r>
-              <a:t>พูดว่า "ประกาศเกณฑ์นี้ก่อนเริ่มโหวตทุกห้อง" · บอกว่ากลุ่มที่พังเยอะแล้วเล่าได้ว่าแก้อย่างไร มักได้รับเลือก · ให้คนคุมห้องเป็นคนสรุปผลโหวต ไม่ปล่อยให้เถียงกันในแชท</a:t>
+              <a:t>พูดว่า "จับเวลาเข้ม มีนาฬิกาขึ้นหน้าจอ หมดเวลาแล้วหยุดจริง" · ชี้บรรทัดที่สองแล้วบอกว่า "คนที่พิมพ์น้อยที่สุดในกลุ่มเป็นคนสาธิต เพราะสาธิตได้แปลว่าเข้าใจจริง" · ให้ซ้อมกับกลุ่มตอนบ่ายอย่างน้อย 1 รอบ</a:t>
             </a:r>
           </a:p>
         </p:txBody>
@@ -3866,7 +3868,7 @@
           <a:lstStyle/>
           <a:p>
             <a:r>
-              <a:t>พูดว่า "การสาธิตพังไม่หักคะแนน แต่การไม่เตรียมสำรองหักคะแนน" · ให้ทุกกลุ่มอัดวิดีโอสำรองตอนบ่ายก่อนเข้าห้องนำเสนอ · บอกว่าคนที่แชร์จอควรเป็นคนเดียวกันทั้ง 5 นาที เพื่อไม่ให้เสียเวลาสลับจอ</a:t>
+              <a:t>พูดว่า "การตอบว่ายังไม่ทราบแล้วจดไว้ ได้คะแนนมากกว่าการเดา" · บอกว่าผู้สอนและ TA จะเป็นคนถามอย่างน้อยกลุ่มละ 1 คำถาม และจะถามเจาะไปที่คนที่ยังไม่ได้พูด</a:t>
             </a:r>
           </a:p>
         </p:txBody>
@@ -3936,7 +3938,7 @@
           <a:lstStyle/>
           <a:p>
             <a:r>
-              <a:t>พูดว่า "คนฟังจำได้ว่ากลุ่มคุณรับมือยังไง มากกว่าจำว่ามันพัง" · นี่คือประโยคที่ควรพูดจริง ๆ ในห้อง</a:t>
+              <a:t>พูดว่า "ประกาศเกณฑ์นี้ก่อนเริ่มโหวตทุกห้อง" · บอกว่ากลุ่มที่พังเยอะแล้วเล่าได้ว่าแก้อย่างไร มักได้รับเลือก · ให้คนคุมห้องเป็นคนสรุปผลโหวต ไม่ปล่อยให้เถียงกันในแชท</a:t>
             </a:r>
           </a:p>
         </p:txBody>
@@ -4006,7 +4008,7 @@
           <a:lstStyle/>
           <a:p>
             <a:r>
-              <a:t>พูดว่า "feedback ที่ไม่ได้จดภายในหนึ่งนาที จะหายไปเสมอ" · ให้กลุ่มมอบหมายคนหนึ่งเปิดไฟล์ Backlog ค้างไว้ตลอดตอนที่กลุ่มตัวเองนำเสนอ</a:t>
+              <a:t>พูดว่า "การสาธิตพังไม่หักคะแนน แต่การไม่เตรียมสำรองหักคะแนน" · ให้ทุกกลุ่มอัดวิดีโอสำรองตอนบ่ายก่อนเข้าห้องนำเสนอ · บอกว่าคนที่แชร์จอควรเป็นคนเดียวกันทั้ง 5 นาที เพื่อไม่ให้เสียเวลาสลับจอ</a:t>
             </a:r>
           </a:p>
         </p:txBody>
@@ -4076,7 +4078,7 @@
           <a:lstStyle/>
           <a:p>
             <a:r>
-              <a:t>พูดว่า "ผู้ฟังทุกคนกรอกอย่างน้อย 1 ช่องต่อกลุ่มที่นำเสนอ 1 กลุ่ม กรอกได้ภายใน 30 วินาที" · บอกว่าลิงก์ฟอร์มอยู่ในใบงาน และคนคุมห้องจะส่งซ้ำในแชทของห้องย่อย</a:t>
+              <a:t>พูดว่า "คนฟังจำได้ว่ากลุ่มคุณรับมือยังไง มากกว่าจำว่ามันพัง" · นี่คือประโยคที่ควรพูดจริง ๆ ในห้อง</a:t>
             </a:r>
           </a:p>
         </p:txBody>
@@ -4146,7 +4148,7 @@
           <a:lstStyle/>
           <a:p>
             <a:r>
-              <a:t>ชี้ฝั่งซ้ายแล้วพูดว่า "ฝั่งซ้ายคือคำพูดของผู้ใช้ ฝั่งขวาคืองานที่ทำได้จริง — การแปลงนี้คือทักษะของช่วงนี้" · ชี้บรรทัดสุดท้ายแล้วบอกว่า "อันนี้เป็นเรื่องของ Module 3 เราจดไว้ ไม่ได้ทำวันนี้"</a:t>
+              <a:t>พูดว่า "feedback ที่ไม่ได้จดภายในหนึ่งนาที จะหายไปเสมอ" · ให้กลุ่มมอบหมายคนหนึ่งเปิดไฟล์ Backlog ค้างไว้ตลอดตอนที่กลุ่มตัวเองนำเสนอ</a:t>
             </a:r>
           </a:p>
         </p:txBody>
@@ -4216,7 +4218,7 @@
           <a:lstStyle/>
           <a:p>
             <a:r>
-              <a:t>ให้ทุกกลุ่มพิมพ์ชื่อคนที่จะพูดช่องที่ 3 (สาธิตสด) ลงแชทเดี๋ยวนี้ 30 วินาที · อ่านออกเสียง 3–4 ชื่อให้ห้องฟัง เพื่อให้รู้ว่าเอาจริง</a:t>
+              <a:t>พูดว่า "ผู้ฟังทุกคนกรอกอย่างน้อย 1 ช่องต่อกลุ่มที่นำเสนอ 1 กลุ่ม กรอกได้ภายใน 30 วินาที" · บอกว่าลิงก์ฟอร์มอยู่ในใบงาน และคนคุมห้องจะส่งซ้ำในแชทของห้องย่อย</a:t>
             </a:r>
           </a:p>
         </p:txBody>
@@ -4286,7 +4288,7 @@
           <a:lstStyle/>
           <a:p>
             <a:r>
-              <a:t>เปิดช่วงด้วย — "สี่สิบห้านาทีสุดท้ายนี้ไม่ใช่การสรุปสวย ๆ นะครับ เราจะไล่ทีละรายการว่าของที่ต้องส่งครบหรือยัง" · ให้ทุกกลุ่มเปิดโฟลเดอร์โครงงานของตัวเองค้างไว้ข้างจอ</a:t>
+              <a:t>ชี้ฝั่งซ้ายแล้วพูดว่า "ฝั่งซ้ายคือคำพูดของผู้ใช้ ฝั่งขวาคืองานที่ทำได้จริง — การแปลงนี้คือทักษะของช่วงนี้" · ชี้บรรทัดกลางแล้วบอกว่า "อันนี้เป็นเรื่องของ Module 3 เราจดไว้ ไม่ได้ทำวันนี้" · ชี้บรรทัดสุดท้าย — "ข้อนี้ไม่ได้มาจาก feedback แต่มาจากการบ้านที่เราค้างไว้เองตั้งแต่สัปดาห์ที่ 8 ตอนเปิดดูคีย์ตัวเองในเว็บ — Backlog รับได้ทั้งสองแบบ"</a:t>
             </a:r>
           </a:p>
         </p:txBody>
@@ -4356,7 +4358,7 @@
           <a:lstStyle/>
           <a:p>
             <a:r>
-              <a:t>อ่านทั้งห้าข้อช้า ๆ แล้วพูดว่า "ห้าข้อนี้คือสิ่งที่ Module 3 จะหยิบไปใช้ต่อวันแรก ขาดข้อไหนคือเริ่มช้าไปหนึ่งสัปดาห์" · บอกว่าเราจะไล่ทีละข้อในสไลด์ถัดไป</a:t>
+              <a:t>ให้ทุกกลุ่มพิมพ์ชื่อคนที่จะพูดช่องที่ 3 (สาธิตสด) ลงแชทเดี๋ยวนี้ 30 วินาที · อ่านออกเสียง 3–4 ชื่อให้ห้องฟัง เพื่อให้รู้ว่าเอาจริง</a:t>
             </a:r>
           </a:p>
         </p:txBody>
@@ -4496,7 +4498,7 @@
           <a:lstStyle/>
           <a:p>
             <a:r>
-              <a:t>พูดว่า "URL ที่เปิดได้เฉพาะบนเครื่องตัวเอง ยังไม่นับว่าออนไลน์" · ให้จับคู่กลุ่มสลับกันเปิด URL ของอีกกลุ่มเดี๋ยวนี้ 1 นาที แล้วรายงานในแชท</a:t>
+              <a:t>เปิดช่วงด้วย — "สี่สิบห้านาทีสุดท้ายนี้ไม่ใช่การสรุปสวย ๆ นะครับ เราจะไล่ทีละรายการว่าของที่ต้องส่งครบหรือยัง" · ให้ทุกกลุ่มเปิดโฟลเดอร์โครงงานของตัวเองค้างไว้ข้างจอ</a:t>
             </a:r>
           </a:p>
         </p:txBody>
@@ -4566,7 +4568,7 @@
           <a:lstStyle/>
           <a:p>
             <a:r>
-              <a:t>พูดตรง ๆ ว่า "ข้อนี้เป็นเกณฑ์รายบุคคล ไม่ใช่รายกลุ่ม" · ให้ทุกกลุ่มเปิดหน้าประวัติ commit ของ repo ตัวเองเดี๋ยวนี้ แล้วนับว่าเห็นชื่อครบทุกคนไหม · ใครยังไม่มี ให้แก้ตั้งแต่บ่ายนี้ อย่ารอถึงศุกร์</a:t>
+              <a:t>อ่านทั้งห้าข้อช้า ๆ แล้วพูดว่า "ห้าข้อนี้คือสิ่งที่ Module 3 จะหยิบไปใช้ต่อวันแรก ขาดข้อไหนคือเริ่มช้าไปหนึ่งสัปดาห์" · บอกว่าเราจะไล่ทีละข้อในสไลด์ถัดไป</a:t>
             </a:r>
           </a:p>
         </p:txBody>
@@ -4636,7 +4638,7 @@
           <a:lstStyle/>
           <a:p>
             <a:r>
-              <a:t>พูดว่า "ผมรู้ว่าบางกลุ่มมีคนหนึ่งที่พิมพ์เร็วกว่าคนอื่นมาก และมันเลยกลายเป็นแบบนี้ ไม่ใช่ความผิดใคร แต่ต้องแก้วันนี้" · บอกว่า TA จะเดินตรวจหน้าประวัติ commit ของทุกกลุ่มในช่วง 15:35 ตามที่นัดไว้</a:t>
+              <a:t>พูดว่า "URL ที่เปิดได้เฉพาะบนเครื่องตัวเอง ยังไม่นับว่าออนไลน์" · ให้จับคู่กลุ่มสลับกันเปิด URL ของอีกกลุ่มเดี๋ยวนี้ 1 นาที แล้วรายงานในแชท</a:t>
             </a:r>
           </a:p>
         </p:txBody>
@@ -4706,7 +4708,7 @@
           <a:lstStyle/>
           <a:p>
             <a:r>
-              <a:t>ย้ำประโยคสุดท้ายเป็นครั้งที่สองของวัน · พูดว่า "เทสต์ที่ fail และเราจดไว้ มีค่ามากกว่าเทสต์ที่เราลบทิ้งเพื่อให้รายงานสวย"</a:t>
+              <a:t>พูดตรง ๆ ว่า "ข้อนี้เป็นเกณฑ์รายบุคคล ไม่ใช่รายกลุ่ม" · ให้ทุกกลุ่มเปิดหน้าประวัติ commit ของ repo ตัวเองเดี๋ยวนี้ แล้วนับว่าเห็นชื่อครบทุกคนไหม · ใครยังไม่มี ให้แก้ตั้งแต่บ่ายนี้ อย่ารอถึงศุกร์</a:t>
             </a:r>
           </a:p>
         </p:txBody>
@@ -4776,7 +4778,7 @@
           <a:lstStyle/>
           <a:p>
             <a:r>
-              <a:t>พูดว่า "ถ้าเขียนว่า ปรับ UI ให้ดีขึ้น Module 3 หยิบไปทำต่อไม่ได้ ต้องเขียนว่า ทำให้ปุ่มบันทึกอยู่ในจอบนมือถือ" · ให้กลุ่มเขียนอย่างน้อย 5 ข้อ</a:t>
+              <a:t>พูดว่า "ผมรู้ว่าบางกลุ่มมีคนหนึ่งที่พิมพ์เร็วกว่าคนอื่นมาก และมันเลยกลายเป็นแบบนี้ ไม่ใช่ความผิดใคร แต่ต้องแก้วันนี้" · บอกว่า TA จะเดินตรวจหน้าประวัติ commit ของทุกกลุ่มในช่วง 15:35 ตามที่นัดไว้</a:t>
             </a:r>
           </a:p>
         </p:txBody>
@@ -4846,7 +4848,7 @@
           <a:lstStyle/>
           <a:p>
             <a:r>
-              <a:t>พูดว่า "ผมรู้ว่าหลายกลุ่มอยากทำหน้าสรุปหรือกราฟตั้งแต่วันนี้ ขอให้เก็บไว้ก่อน เพราะ Module 3 สอนเรื่องนี้ทั้ง Module และจะทำได้ดีกว่ามาก" · ย้ำว่าจดลง Backlog ถือว่าไม่เสียของ</a:t>
+              <a:t>ย้ำประโยคสุดท้ายเป็นครั้งที่สองของวัน · พูดว่า "เทสต์ที่ fail และเราจดไว้ มีค่ามากกว่าเทสต์ที่เราลบทิ้งเพื่อให้รายงานสวย"</a:t>
             </a:r>
           </a:p>
         </p:txBody>
@@ -4916,7 +4918,7 @@
           <a:lstStyle/>
           <a:p>
             <a:r>
-              <a:t>พูดว่า "เขียนสามหัวข้อนี้ ครึ่งหน้ากระดาษพอ" · ย้ำว่า "ข้อ 5 ไม่ใช่การสารภาพผิด — กลุ่มที่รู้ว่าตัวเองทำลวกตรงไหน คือกลุ่มที่ควบคุมงานอยู่" · บอกว่าไฟล์นี้ทำให้ผู้สอน Module 3 ช่วยได้ตรงจุดตั้งแต่วันแรก</a:t>
+              <a:t>พูดว่า "ถ้าเขียนว่า ปรับ UI ให้ดีขึ้น Module 3 หยิบไปทำต่อไม่ได้ ต้องเขียนว่า ทำให้ปุ่มบันทึกอยู่ในจอบนมือถือ" · ให้กลุ่มเขียนอย่างน้อย 5 ข้อ</a:t>
             </a:r>
           </a:p>
         </p:txBody>
@@ -4986,7 +4988,7 @@
           <a:lstStyle/>
           <a:p>
             <a:r>
-              <a:t>พูดว่า "หลายกลุ่มคิดว่าระบบตัวเองเกือบครบแล้ว พอไล่จริงมักเจอว่าขาดสองสามข้อ" · ย้ำว่าไล่วันนี้เพื่อ จดไว้ ไม่ใช่เพื่อรีบทำให้เสร็จตอนบ่าย</a:t>
+              <a:t>พูดว่า "ผมรู้ว่าหลายกลุ่มอยากทำหน้าสรุปหรือกราฟตั้งแต่วันนี้ ขอให้เก็บไว้ก่อน เพราะ Module 3 สอนเรื่องนี้ทั้ง Module และจะทำได้ดีกว่ามาก" · ย้ำว่าจดลง Backlog ถือว่าไม่เสียของ</a:t>
             </a:r>
           </a:p>
         </p:txBody>
@@ -5056,7 +5058,7 @@
           <a:lstStyle/>
           <a:p>
             <a:r>
-              <a:t>ชี้บรรทัด ⚠️ และ ❌ แล้วพูดว่า "สองบรรทัดนี้ของ FixIt ผมไม่ได้ทำวันนี้ครับ ผมจดลง Backlog Sprint 2" · ให้กลุ่มทำตารางแบบนี้ของตัวเองตอนบ่าย</a:t>
+              <a:t>พูดว่า "เขียนสามหัวข้อนี้ ครึ่งหน้ากระดาษพอ" · ย้ำว่า "ข้อ 5 ไม่ใช่การสารภาพผิด — กลุ่มที่รู้ว่าตัวเองทำลวกตรงไหน คือกลุ่มที่ควบคุมงานอยู่" · บอกว่าไฟล์นี้ทำให้ผู้สอน Module 3 ช่วยได้ตรงจุดตั้งแต่วันแรก</a:t>
             </a:r>
           </a:p>
         </p:txBody>
@@ -5126,7 +5128,7 @@
           <a:lstStyle/>
           <a:p>
             <a:r>
-              <a:t>ให้ทุกกลุ่มพิมพ์ลงแชทว่าตอนนี้ขาดของส่งมอบข้อไหนบ้าง เป็นตัวเลข เช่น "กลุ่ม 4 — ขาดข้อ 3 กับ 5" · TA จดไว้ใช้จัดคิว Consult วันอาทิตย์</a:t>
+              <a:t>พูดว่า "หลายกลุ่มคิดว่าระบบตัวเองเกือบครบแล้ว พอไล่จริงมักเจอว่าขาดสองสามข้อ" · ย้ำว่าไล่วันนี้เพื่อ จดไว้ ไม่ใช่เพื่อรีบทำให้เสร็จตอนบ่าย</a:t>
             </a:r>
           </a:p>
         </p:txBody>
@@ -5266,7 +5268,7 @@
           <a:lstStyle/>
           <a:p>
             <a:r>
-              <a:t>ปิดคาบเช้าด้วยการชี้เป้าบ่ายให้ชัด — "บ่ายนี้ 13:00 ถึง 14:45 คือทำเทสต์ให้ผ่าน แล้ว 14:45 คือนำเสนอจริง เวลาแน่นมาก" · ย้ำให้กินข้าวจริง ๆ และให้แบ่งท่อนพูดกันตอนพักเที่ยงเลย</a:t>
+              <a:t>ชี้บรรทัด ⚠️ และ ❌ แล้วพูดว่า "สองบรรทัดนี้ของ FixIt ผมไม่ได้ทำวันนี้ครับ ผมจดลง Backlog Sprint 2" · ให้กลุ่มทำตารางแบบนี้ของตัวเองตอนบ่าย</a:t>
             </a:r>
           </a:p>
         </p:txBody>
@@ -5336,7 +5338,7 @@
           <a:lstStyle/>
           <a:p>
             <a:r>
-              <a:t>ฉายค้างไว้ 1 นาทีเต็ม แล้วพูดว่า "ช่องขวาสุดคือของกลุ่มคุณ และมีแต่พวกคุณที่เติมได้" · ให้แต่ละกลุ่มพิมพ์คำตอบช่องขวาสุดแถวแรกลงแชท</a:t>
+              <a:t>ให้ทุกกลุ่มพิมพ์ลงแชทว่าตอนนี้ขาดของส่งมอบข้อไหนบ้าง เป็นตัวเลข เช่น "กลุ่ม 4 — ขาดข้อ 3 กับ 5" · TA จดไว้ใช้จัดคิว Consult วันอาทิตย์</a:t>
             </a:r>
           </a:p>
         </p:txBody>
@@ -5406,7 +5408,7 @@
           <a:lstStyle/>
           <a:p>
             <a:r>
-              <a:t>พูดว่า "โครงเดียวกัน เปลี่ยนชื่อเรื่อง" · ย้ำว่า LeaveEasy อยู่ในใบงานเป็นตัวอย่างเทียบ ไม่ใช่สิ่งที่กลุ่มต้องสร้าง · ให้ถ่ายรูปสไลด์นี้เก็บไว้</a:t>
+              <a:t>ปิดคาบเช้าด้วยการชี้เป้าบ่ายให้ชัด — "บ่ายนี้ 13:00 ถึง 14:45 คือทำเทสต์ให้ผ่าน แล้ว 14:45 คือนำเสนอจริง เวลาแน่นมาก" · ย้ำให้กินข้าวจริง ๆ และให้แบ่งท่อนพูดกันตอนพักเที่ยงเลย</a:t>
             </a:r>
           </a:p>
         </p:txBody>
@@ -5476,7 +5478,7 @@
           <a:lstStyle/>
           <a:p>
             <a:r>
-              <a:t>ย้ำว่า "ถ้าเวลาไม่พอ ให้ถึง Checkpoint 2 เป็นอย่างน้อย แล้วไปซ้อมนำเสนอ เพราะ Sprint Review เริ่มตรงเวลาแน่นอน" · บอกว่าใบงานแจกไว้แล้วตั้งแต่เช้า และมีคลิปสั้นประกอบทุก Checkpoint</a:t>
+              <a:t>ฉายค้างไว้ 1 นาทีเต็ม แล้วพูดว่า "ช่องขวาสุดคือของกลุ่มคุณ และมีแต่พวกคุณที่เติมได้" · ให้แต่ละกลุ่มพิมพ์คำตอบช่องขวาสุดแถวแรกลงแชท</a:t>
             </a:r>
           </a:p>
         </p:txBody>
@@ -5546,6 +5548,146 @@
           <a:lstStyle/>
           <a:p>
             <a:r>
+              <a:t>พูดว่า "โครงเดียวกัน เปลี่ยนชื่อเรื่อง" · ย้ำว่า LeaveEasy อยู่ในใบงานเป็นตัวอย่างเทียบ ไม่ใช่สิ่งที่กลุ่มต้องสร้าง · ให้ถ่ายรูปสไลด์นี้เก็บไว้</a:t>
+            </a:r>
+          </a:p>
+        </p:txBody>
+      </p:sp>
+      <p:sp>
+        <p:nvSpPr>
+          <p:cNvPr id="4" name="Slide Number Placeholder 3"/>
+          <p:cNvSpPr>
+            <a:spLocks noGrp="1"/>
+          </p:cNvSpPr>
+          <p:nvPr>
+            <p:ph type="sldNum" idx="5" sz="quarter"/>
+          </p:nvPr>
+        </p:nvSpPr>
+        <p:spPr/>
+      </p:sp>
+    </p:spTree>
+  </p:cSld>
+  <p:clrMapOvr>
+    <a:masterClrMapping/>
+  </p:clrMapOvr>
+</p:notes>
+</file>
+
+<file path=ppt/notesSlides/notesSlide75.xml><?xml version="1.0" encoding="utf-8"?>
+<p:notes xmlns:a="http://schemas.openxmlformats.org/drawingml/2006/main" xmlns:p="http://schemas.openxmlformats.org/presentationml/2006/main" xmlns:r="http://schemas.openxmlformats.org/officeDocument/2006/relationships">
+  <p:cSld>
+    <p:spTree>
+      <p:nvGrpSpPr>
+        <p:cNvPr id="1" name=""/>
+        <p:cNvGrpSpPr/>
+        <p:nvPr/>
+      </p:nvGrpSpPr>
+      <p:grpSpPr>
+        <a:xfrm>
+          <a:off x="0" y="0"/>
+          <a:ext cx="0" cy="0"/>
+          <a:chOff x="0" y="0"/>
+          <a:chExt cx="0" cy="0"/>
+        </a:xfrm>
+      </p:grpSpPr>
+      <p:sp>
+        <p:nvSpPr>
+          <p:cNvPr id="2" name="Slide Image Placeholder 1"/>
+          <p:cNvSpPr>
+            <a:spLocks noGrp="1"/>
+          </p:cNvSpPr>
+          <p:nvPr>
+            <p:ph type="sldImg" idx="2"/>
+          </p:nvPr>
+        </p:nvSpPr>
+        <p:spPr/>
+      </p:sp>
+      <p:sp>
+        <p:nvSpPr>
+          <p:cNvPr id="3" name="Notes Placeholder 2"/>
+          <p:cNvSpPr>
+            <a:spLocks noGrp="1"/>
+          </p:cNvSpPr>
+          <p:nvPr>
+            <p:ph type="body" idx="3" sz="quarter"/>
+          </p:nvPr>
+        </p:nvSpPr>
+        <p:spPr/>
+        <p:txBody>
+          <a:bodyPr/>
+          <a:lstStyle/>
+          <a:p>
+            <a:r>
+              <a:t>ย้ำว่า "ถ้าเวลาไม่พอ ให้ถึง Checkpoint 2 เป็นอย่างน้อย แล้วไปซ้อมนำเสนอ เพราะ Sprint Review เริ่มตรงเวลาแน่นอน" · บอกว่าใบงานแจกไว้แล้วตั้งแต่เช้า และมีคลิปสั้นประกอบทุก Checkpoint</a:t>
+            </a:r>
+          </a:p>
+        </p:txBody>
+      </p:sp>
+      <p:sp>
+        <p:nvSpPr>
+          <p:cNvPr id="4" name="Slide Number Placeholder 3"/>
+          <p:cNvSpPr>
+            <a:spLocks noGrp="1"/>
+          </p:cNvSpPr>
+          <p:nvPr>
+            <p:ph type="sldNum" idx="5" sz="quarter"/>
+          </p:nvPr>
+        </p:nvSpPr>
+        <p:spPr/>
+      </p:sp>
+    </p:spTree>
+  </p:cSld>
+  <p:clrMapOvr>
+    <a:masterClrMapping/>
+  </p:clrMapOvr>
+</p:notes>
+</file>
+
+<file path=ppt/notesSlides/notesSlide76.xml><?xml version="1.0" encoding="utf-8"?>
+<p:notes xmlns:a="http://schemas.openxmlformats.org/drawingml/2006/main" xmlns:p="http://schemas.openxmlformats.org/presentationml/2006/main" xmlns:r="http://schemas.openxmlformats.org/officeDocument/2006/relationships">
+  <p:cSld>
+    <p:spTree>
+      <p:nvGrpSpPr>
+        <p:cNvPr id="1" name=""/>
+        <p:cNvGrpSpPr/>
+        <p:nvPr/>
+      </p:nvGrpSpPr>
+      <p:grpSpPr>
+        <a:xfrm>
+          <a:off x="0" y="0"/>
+          <a:ext cx="0" cy="0"/>
+          <a:chOff x="0" y="0"/>
+          <a:chExt cx="0" cy="0"/>
+        </a:xfrm>
+      </p:grpSpPr>
+      <p:sp>
+        <p:nvSpPr>
+          <p:cNvPr id="2" name="Slide Image Placeholder 1"/>
+          <p:cNvSpPr>
+            <a:spLocks noGrp="1"/>
+          </p:cNvSpPr>
+          <p:nvPr>
+            <p:ph type="sldImg" idx="2"/>
+          </p:nvPr>
+        </p:nvSpPr>
+        <p:spPr/>
+      </p:sp>
+      <p:sp>
+        <p:nvSpPr>
+          <p:cNvPr id="3" name="Notes Placeholder 2"/>
+          <p:cNvSpPr>
+            <a:spLocks noGrp="1"/>
+          </p:cNvSpPr>
+          <p:nvPr>
+            <p:ph type="body" idx="3" sz="quarter"/>
+          </p:nvPr>
+        </p:nvSpPr>
+        <p:spPr/>
+        <p:txBody>
+          <a:bodyPr/>
+          <a:lstStyle/>
+          <a:p>
+            <a:r>
               <a:t>ให้ทุกกลุ่มพิมพ์คำตอบลงแชท 1 บรรทัดก่อนออกจากห้อง · อ่านออกเสียง 3–4 คำตอบให้ห้องฟัง แล้วปิดคาบ</a:t>
             </a:r>
           </a:p>
@@ -5616,7 +5758,7 @@
           <a:lstStyle/>
           <a:p>
             <a:r>
-              <a:t>พูดว่า "ช่วงนี้ผมให้เวลาแค่บรรทัดเดียวบนสไลด์ เพราะคาบวันนี้ไม่ใช่คาบเติมฟีเจอร์แล้ว" · MVP แปลว่า ชุดฟีเจอร์ขั้นต่ำที่ทำให้ระบบใช้งานได้จริง · ย้ำว่าให้กลุ่มนัดกันเก็บงานค้างระหว่างสัปดาห์ และส่งผ่าน Google Classroom</a:t>
+              <a:t>พูดว่า "ช่วงนี้ผมให้เวลาบรรทัดเดียวบนสไลด์เท่านั้น เพราะคาบวันนี้ไม่ใช่คาบเติมฟีเจอร์แล้ว" · MVP แปลว่า ชุดฟีเจอร์ขั้นต่ำที่ทำให้ระบบใช้งานได้จริง · ย้ำว่าให้กลุ่มนัดกันเก็บงานค้างระหว่างสัปดาห์ และส่งผ่าน Google Classroom</a:t>
             </a:r>
           </a:p>
         </p:txBody>
@@ -8991,7 +9133,7 @@
                 <a:ea typeface="Leelawadee UI"/>
                 <a:cs typeface="Leelawadee UI"/>
               </a:rPr>
-              <a:t>🧪 ช่วงที่ 1 — ให้ AI ทดสอบระบบแทนเรา · 1 ชม. 30 นาที</a:t>
+              <a:t>🧪 ช่วงที่ 1 — ให้ AI ทดสอบระบบแทนเรา · 1 ชม. 20 นาที</a:t>
             </a:r>
           </a:p>
         </p:txBody>
@@ -13486,7 +13628,7 @@
         <p:spPr>
           <a:xfrm>
             <a:off x="822960" y="1472184"/>
-            <a:ext cx="10545775" cy="4663434"/>
+            <a:ext cx="10545775" cy="4663432"/>
           </a:xfrm>
           <a:prstGeom prst="roundRect">
             <a:avLst/>
@@ -13530,7 +13672,7 @@
         <p:spPr>
           <a:xfrm>
             <a:off x="822960" y="1472184"/>
-            <a:ext cx="100584" cy="4663434"/>
+            <a:ext cx="100584" cy="4663432"/>
           </a:xfrm>
           <a:prstGeom prst="roundRect">
             <a:avLst/>
@@ -13611,7 +13753,7 @@
         <p:spPr>
           <a:xfrm>
             <a:off x="1097280" y="1856232"/>
-            <a:ext cx="10088575" cy="4005066"/>
+            <a:ext cx="10088575" cy="4005064"/>
           </a:xfrm>
           <a:prstGeom prst="rect">
             <a:avLst/>
@@ -13630,7 +13772,7 @@
               </a:spcAft>
             </a:pPr>
             <a:r>
-              <a:rPr sz="1600" b="0">
+              <a:rPr sz="1500" b="0">
                 <a:solidFill>
                   <a:srgbClr val="1A1A1A"/>
                 </a:solidFill>
@@ -13648,7 +13790,7 @@
               </a:spcAft>
             </a:pPr>
             <a:r>
-              <a:rPr sz="1600" b="0">
+              <a:rPr sz="1500" b="0">
                 <a:solidFill>
                   <a:srgbClr val="1A1A1A"/>
                 </a:solidFill>
@@ -13666,7 +13808,7 @@
               </a:spcAft>
             </a:pPr>
             <a:r>
-              <a:rPr sz="1600" b="0">
+              <a:rPr sz="1500" b="0">
                 <a:solidFill>
                   <a:srgbClr val="1A1A1A"/>
                 </a:solidFill>
@@ -13684,7 +13826,7 @@
               </a:spcAft>
             </a:pPr>
             <a:r>
-              <a:rPr sz="1600" b="0">
+              <a:rPr sz="1500" b="0">
                 <a:solidFill>
                   <a:srgbClr val="1A1A1A"/>
                 </a:solidFill>
@@ -13702,7 +13844,7 @@
               </a:spcAft>
             </a:pPr>
             <a:r>
-              <a:rPr sz="1600" b="0">
+              <a:rPr sz="1500" b="0">
                 <a:solidFill>
                   <a:srgbClr val="1A1A1A"/>
                 </a:solidFill>
@@ -13720,7 +13862,7 @@
               </a:spcAft>
             </a:pPr>
             <a:r>
-              <a:rPr sz="1600" b="0">
+              <a:rPr sz="1500" b="0">
                 <a:solidFill>
                   <a:srgbClr val="1A1A1A"/>
                 </a:solidFill>
@@ -13738,7 +13880,7 @@
               </a:spcAft>
             </a:pPr>
             <a:r>
-              <a:rPr sz="1600" b="0">
+              <a:rPr sz="1500" b="0">
                 <a:solidFill>
                   <a:srgbClr val="1A1A1A"/>
                 </a:solidFill>
@@ -13746,7 +13888,7 @@
                 <a:ea typeface="Leelawadee UI"/>
                 <a:cs typeface="Leelawadee UI"/>
               </a:rPr>
-              <a:t>กติกา</a:t>
+              <a:t>- บัญชีทดสอบผู้ดูแล: somsri.test@example.com</a:t>
             </a:r>
           </a:p>
           <a:p>
@@ -13756,7 +13898,7 @@
               </a:spcAft>
             </a:pPr>
             <a:r>
-              <a:rPr sz="1600" b="0">
+              <a:rPr sz="1500" b="0">
                 <a:solidFill>
                   <a:srgbClr val="1A1A1A"/>
                 </a:solidFill>
@@ -13764,7 +13906,7 @@
                 <a:ea typeface="Leelawadee UI"/>
                 <a:cs typeface="Leelawadee UI"/>
               </a:rPr>
-              <a:t>1. ทดสอบตาม Acceptance Criteria ในไฟล์ spec เท่านั้น</a:t>
+              <a:t>กติกา</a:t>
             </a:r>
           </a:p>
           <a:p>
@@ -13774,7 +13916,7 @@
               </a:spcAft>
             </a:pPr>
             <a:r>
-              <a:rPr sz="1600" b="0">
+              <a:rPr sz="1500" b="0">
                 <a:solidFill>
                   <a:srgbClr val="1A1A1A"/>
                 </a:solidFill>
@@ -13782,7 +13924,7 @@
                 <a:ea typeface="Leelawadee UI"/>
                 <a:cs typeface="Leelawadee UI"/>
               </a:rPr>
-              <a:t>2. เทสต์หนึ่งตัวทดสอบเรื่องเดียว ตั้งชื่อเป็นภาษาไทย</a:t>
+              <a:t>1. ทดสอบตาม Acceptance Criteria ในไฟล์ spec เท่านั้น</a:t>
             </a:r>
           </a:p>
           <a:p>
@@ -13792,7 +13934,7 @@
               </a:spcAft>
             </a:pPr>
             <a:r>
-              <a:rPr sz="1600" b="0">
+              <a:rPr sz="1500" b="0">
                 <a:solidFill>
                   <a:srgbClr val="1A1A1A"/>
                 </a:solidFill>
@@ -13800,7 +13942,7 @@
                 <a:ea typeface="Leelawadee UI"/>
                 <a:cs typeface="Leelawadee UI"/>
               </a:rPr>
-              <a:t>3. รอจนกว่าองค์ประกอบที่ต้องการจะขึ้นจริง</a:t>
+              <a:t>2. เทสต์หนึ่งตัวทดสอบเรื่องเดียว ตั้งชื่อเป็นภาษาไทย</a:t>
             </a:r>
           </a:p>
           <a:p>
@@ -13810,7 +13952,7 @@
               </a:spcAft>
             </a:pPr>
             <a:r>
-              <a:rPr sz="1600" b="0">
+              <a:rPr sz="1500" b="0">
                 <a:solidFill>
                   <a:srgbClr val="1A1A1A"/>
                 </a:solidFill>
@@ -13818,7 +13960,7 @@
                 <a:ea typeface="Leelawadee UI"/>
                 <a:cs typeface="Leelawadee UI"/>
               </a:rPr>
-              <a:t>   ห้ามใช้การรอแบบนับเวลาเฉย ๆ</a:t>
+              <a:t>3. รอจนกว่าองค์ประกอบที่ต้องการจะขึ้นจริง</a:t>
             </a:r>
           </a:p>
           <a:p>
@@ -13828,7 +13970,7 @@
               </a:spcAft>
             </a:pPr>
             <a:r>
-              <a:rPr sz="1600" b="0">
+              <a:rPr sz="1500" b="0">
                 <a:solidFill>
                   <a:srgbClr val="1A1A1A"/>
                 </a:solidFill>
@@ -13836,7 +13978,7 @@
                 <a:ea typeface="Leelawadee UI"/>
                 <a:cs typeface="Leelawadee UI"/>
               </a:rPr>
-              <a:t>4. ห้ามแก้ไขโค้ดของระบบเพื่อให้เทสต์ผ่านเด็ดขาด</a:t>
+              <a:t>   ห้ามใช้การรอแบบนับเวลาเฉย ๆ</a:t>
             </a:r>
           </a:p>
           <a:p>
@@ -13846,7 +13988,25 @@
               </a:spcAft>
             </a:pPr>
             <a:r>
-              <a:rPr sz="1600" b="0">
+              <a:rPr sz="1500" b="0">
+                <a:solidFill>
+                  <a:srgbClr val="1A1A1A"/>
+                </a:solidFill>
+                <a:latin typeface="Leelawadee UI"/>
+                <a:ea typeface="Leelawadee UI"/>
+                <a:cs typeface="Leelawadee UI"/>
+              </a:rPr>
+              <a:t>4. ห้ามแก้ไขโค้ดของระบบเพื่อให้เทสต์ผ่านเด็ดขาด</a:t>
+            </a:r>
+          </a:p>
+          <a:p>
+            <a:pPr algn="l">
+              <a:spcAft>
+                <a:spcPts val="0"/>
+              </a:spcAft>
+            </a:pPr>
+            <a:r>
+              <a:rPr sz="1500" b="0">
                 <a:solidFill>
                   <a:srgbClr val="1A1A1A"/>
                 </a:solidFill>
@@ -14772,7 +14932,7 @@
                 <a:ea typeface="Leelawadee UI"/>
                 <a:cs typeface="Leelawadee UI"/>
               </a:rPr>
-              <a:t>• 🧪 ช่วงที่ 1 · 1 ชม. 30 นาที — Tester + Playwright MCP</a:t>
+              <a:t>• 🧪 ช่วงที่ 1 · 1 ชม. 20 นาที — Tester + Playwright MCP</a:t>
             </a:r>
           </a:p>
         </p:txBody>
@@ -14809,7 +14969,7 @@
                 <a:ea typeface="Leelawadee UI"/>
                 <a:cs typeface="Leelawadee UI"/>
               </a:rPr>
-              <a:t>• 🎤 ช่วงที่ 2 · 45 นาที — Sprint 1 Review</a:t>
+              <a:t>• 🎤 ช่วงที่ 2 · 40 นาที — Sprint 1 Review</a:t>
             </a:r>
           </a:p>
         </p:txBody>
@@ -14846,7 +15006,7 @@
                 <a:ea typeface="Leelawadee UI"/>
                 <a:cs typeface="Leelawadee UI"/>
               </a:rPr>
-              <a:t>• 📦 ช่วงที่ 3 · 45 นาที — เตรียมส่งมอบให้ Module 3</a:t>
+              <a:t>• 📦 ช่วงที่ 3 · 35 นาที — เตรียมส่งมอบให้ Module 3</a:t>
             </a:r>
           </a:p>
         </p:txBody>
@@ -15139,7 +15299,7 @@
                 <a:ea typeface="Leelawadee UI"/>
                 <a:cs typeface="Leelawadee UI"/>
               </a:rPr>
-              <a:t>ทดสอบอะไรบ้าง — 4 กลุ่ม</a:t>
+              <a:t>ทดสอบอะไรบ้าง — 5 กลุ่ม</a:t>
             </a:r>
           </a:p>
         </p:txBody>
@@ -15250,7 +15410,7 @@
                 <a:ea typeface="Leelawadee UI"/>
                 <a:cs typeface="Leelawadee UI"/>
               </a:rPr>
-              <a:t>• ⚪ ข้อมูลว่าง — ยังไม่มีข้อมูลเลยหน้าจอต้องไม่พัง</a:t>
+              <a:t>• 🔒 ความปลอดภัย — เปิดของคนอื่นต้องไม่ได้</a:t>
             </a:r>
           </a:p>
         </p:txBody>
@@ -15287,7 +15447,7 @@
                 <a:ea typeface="Leelawadee UI"/>
                 <a:cs typeface="Leelawadee UI"/>
               </a:rPr>
-              <a:t>• 🔒 ความปลอดภัย — เปิดของคนอื่นต้องไม่ได้</a:t>
+              <a:t>• 🤖 ปุ่ม AI — เรียกไม่สำเร็จแล้วระบบต้องไม่ค้าง</a:t>
             </a:r>
           </a:p>
         </p:txBody>
@@ -15295,6 +15455,43 @@
       <p:sp>
         <p:nvSpPr>
           <p:cNvPr id="7" name="TextBox 6"/>
+          <p:cNvSpPr txBox="1"/>
+          <p:nvPr/>
+        </p:nvSpPr>
+        <p:spPr>
+          <a:xfrm>
+            <a:off x="822960" y="3932936"/>
+            <a:ext cx="10545775" cy="560324"/>
+          </a:xfrm>
+          <a:prstGeom prst="rect">
+            <a:avLst/>
+          </a:prstGeom>
+          <a:noFill/>
+        </p:spPr>
+        <p:txBody>
+          <a:bodyPr wrap="square">
+            <a:spAutoFit/>
+          </a:bodyPr>
+          <a:lstStyle/>
+          <a:p>
+            <a:pPr algn="l"/>
+            <a:r>
+              <a:rPr sz="2600" b="0">
+                <a:solidFill>
+                  <a:srgbClr val="1A1A1A"/>
+                </a:solidFill>
+                <a:latin typeface="Leelawadee UI"/>
+                <a:ea typeface="Leelawadee UI"/>
+                <a:cs typeface="Leelawadee UI"/>
+              </a:rPr>
+              <a:t>• ⚪ ข้อมูลว่าง — ไม่มีข้อมูลเลยหน้าจอต้องไม่พัง</a:t>
+            </a:r>
+          </a:p>
+        </p:txBody>
+      </p:sp>
+      <p:sp>
+        <p:nvSpPr>
+          <p:cNvPr id="8" name="TextBox 7"/>
           <p:cNvSpPr txBox="1"/>
           <p:nvPr/>
         </p:nvSpPr>
@@ -17131,7 +17328,7 @@
         <p:spPr>
           <a:xfrm>
             <a:off x="822960" y="502920"/>
-            <a:ext cx="10545775" cy="804672"/>
+            <a:ext cx="10545775" cy="1408176"/>
           </a:xfrm>
           <a:prstGeom prst="rect">
             <a:avLst/>
@@ -17154,7 +17351,7 @@
                 <a:ea typeface="Leelawadee UI"/>
                 <a:cs typeface="Leelawadee UI"/>
               </a:rPr>
-              <a:t>เทสต์ fail — โค้ดผิด หรือเทสต์เขียนผิด</a:t>
+              <a:t>🤖 เทสต์ปุ่ม AI — เรียกไม่สำเร็จแล้วต้องไม่ค้าง</a:t>
             </a:r>
           </a:p>
         </p:txBody>
@@ -17167,7 +17364,7 @@
         </p:nvSpPr>
         <p:spPr>
           <a:xfrm>
-            <a:off x="822960" y="1472184"/>
+            <a:off x="822960" y="2075688"/>
             <a:ext cx="10545775" cy="560324"/>
           </a:xfrm>
           <a:prstGeom prst="rect">
@@ -17191,7 +17388,7 @@
                 <a:ea typeface="Leelawadee UI"/>
                 <a:cs typeface="Leelawadee UI"/>
               </a:rPr>
-              <a:t>• เจอ fail แล้ว อย่าเพิ่งแก้อะไรทั้งนั้น</a:t>
+              <a:t>• สัปดาห์ที่ 8 ระบบเรามีผู้ช่วย AIแล้ว</a:t>
             </a:r>
           </a:p>
         </p:txBody>
@@ -17204,7 +17401,7 @@
         </p:nvSpPr>
         <p:spPr>
           <a:xfrm>
-            <a:off x="822960" y="2087372"/>
+            <a:off x="822960" y="2690876"/>
             <a:ext cx="10545775" cy="560324"/>
           </a:xfrm>
           <a:prstGeom prst="rect">
@@ -17228,7 +17425,7 @@
                 <a:ea typeface="Leelawadee UI"/>
                 <a:cs typeface="Leelawadee UI"/>
               </a:rPr>
-              <a:t>• อ่านก่อนว่ามันคาดว่าจะเห็นอะไร และเห็นอะไรจริง</a:t>
+              <a:t>• ผู้ช่วย AI เรียกบริการภายนอก ซึ่งล่มได้ทุกเมื่อ</a:t>
             </a:r>
           </a:p>
         </p:txBody>
@@ -17241,7 +17438,7 @@
         </p:nvSpPr>
         <p:spPr>
           <a:xfrm>
-            <a:off x="822960" y="2702560"/>
+            <a:off x="822960" y="3306064"/>
             <a:ext cx="10545775" cy="560324"/>
           </a:xfrm>
           <a:prstGeom prst="rect">
@@ -17265,7 +17462,7 @@
                 <a:ea typeface="Leelawadee UI"/>
                 <a:cs typeface="Leelawadee UI"/>
               </a:rPr>
-              <a:t>• แล้วจึงตัดสินว่า โค้ดผิด หรือ เทสต์เขียนผิด</a:t>
+              <a:t>• เทสต์: เรียกไม่สำเร็จ → ระบบต้องใช้งานต่อได้</a:t>
             </a:r>
           </a:p>
         </p:txBody>
@@ -17273,6 +17470,43 @@
       <p:sp>
         <p:nvSpPr>
           <p:cNvPr id="6" name="TextBox 5"/>
+          <p:cNvSpPr txBox="1"/>
+          <p:nvPr/>
+        </p:nvSpPr>
+        <p:spPr>
+          <a:xfrm>
+            <a:off x="822960" y="3921252"/>
+            <a:ext cx="10545775" cy="560324"/>
+          </a:xfrm>
+          <a:prstGeom prst="rect">
+            <a:avLst/>
+          </a:prstGeom>
+          <a:noFill/>
+        </p:spPr>
+        <p:txBody>
+          <a:bodyPr wrap="square">
+            <a:spAutoFit/>
+          </a:bodyPr>
+          <a:lstStyle/>
+          <a:p>
+            <a:pPr algn="l"/>
+            <a:r>
+              <a:rPr sz="2600" b="0">
+                <a:solidFill>
+                  <a:srgbClr val="1A1A1A"/>
+                </a:solidFill>
+                <a:latin typeface="Leelawadee UI"/>
+                <a:ea typeface="Leelawadee UI"/>
+                <a:cs typeface="Leelawadee UI"/>
+              </a:rPr>
+              <a:t>• ต้องเห็นข้อความภาษาไทย ไม่ใช่หน้าจอค้าง</a:t>
+            </a:r>
+          </a:p>
+        </p:txBody>
+      </p:sp>
+      <p:sp>
+        <p:nvSpPr>
+          <p:cNvPr id="7" name="TextBox 6"/>
           <p:cNvSpPr txBox="1"/>
           <p:nvPr/>
         </p:nvSpPr>
@@ -17356,7 +17590,7 @@
                 <a:ea typeface="Leelawadee UI"/>
                 <a:cs typeface="Leelawadee UI"/>
               </a:rPr>
-              <a:t>เทสต์ fail แล้วทำอย่างไรต่อ</a:t>
+              <a:t>💬 prompt เทสต์ปุ่ม AI</a:t>
             </a:r>
           </a:p>
         </p:txBody>
@@ -17369,18 +17603,18 @@
         </p:nvSpPr>
         <p:spPr>
           <a:xfrm>
-            <a:off x="822960" y="1563624"/>
-            <a:ext cx="2348407" cy="1051560"/>
+            <a:off x="822960" y="1472184"/>
+            <a:ext cx="10545775" cy="1463040"/>
           </a:xfrm>
           <a:prstGeom prst="roundRect">
             <a:avLst/>
           </a:prstGeom>
           <a:solidFill>
-            <a:srgbClr val="E8EFF7"/>
+            <a:srgbClr val="FFF7E6"/>
           </a:solidFill>
-          <a:ln w="15875">
+          <a:ln w="22225">
             <a:solidFill>
-              <a:srgbClr val="9CB5D1"/>
+              <a:srgbClr val="E0A02C"/>
             </a:solidFill>
           </a:ln>
           <a:effectLst/>
@@ -17400,40 +17634,27 @@
           </a:fontRef>
         </p:style>
         <p:txBody>
-          <a:bodyPr rtlCol="0" anchor="ctr" wrap="square" lIns="54864" rIns="54864" tIns="27432" bIns="27432"/>
-          <a:lstStyle/>
-          <a:p>
-            <a:pPr algn="ctr"/>
-            <a:r>
-              <a:rPr sz="1400" b="0">
-                <a:solidFill>
-                  <a:srgbClr val="1A1A1A"/>
-                </a:solidFill>
-                <a:latin typeface="Leelawadee UI"/>
-                <a:ea typeface="Leelawadee UI"/>
-                <a:cs typeface="Leelawadee UI"/>
-              </a:rPr>
-              <a:t>เทสต์ fail</a:t>
-            </a:r>
-          </a:p>
-        </p:txBody>
-      </p:sp>
-      <p:sp>
-        <p:nvSpPr>
-          <p:cNvPr id="4" name="Right Arrow 3"/>
+          <a:bodyPr rtlCol="0" anchor="ctr"/>
+          <a:lstStyle/>
+          <a:p/>
+        </p:txBody>
+      </p:sp>
+      <p:sp>
+        <p:nvSpPr>
+          <p:cNvPr id="4" name="Rounded Rectangle 3"/>
           <p:cNvSpPr/>
           <p:nvPr/>
         </p:nvSpPr>
         <p:spPr>
           <a:xfrm>
-            <a:off x="3217452" y="1931670"/>
-            <a:ext cx="291876" cy="315468"/>
-          </a:xfrm>
-          <a:prstGeom prst="rightArrow">
+            <a:off x="822960" y="1472184"/>
+            <a:ext cx="100584" cy="1463040"/>
+          </a:xfrm>
+          <a:prstGeom prst="roundRect">
             <a:avLst/>
           </a:prstGeom>
           <a:solidFill>
-            <a:srgbClr val="7A91A8"/>
+            <a:srgbClr val="E0A02C"/>
           </a:solidFill>
           <a:ln>
             <a:noFill/>
@@ -17464,150 +17685,70 @@
       </p:sp>
       <p:sp>
         <p:nvSpPr>
-          <p:cNvPr id="5" name="Rounded Rectangle 4"/>
-          <p:cNvSpPr/>
-          <p:nvPr/>
-        </p:nvSpPr>
-        <p:spPr>
-          <a:xfrm>
-            <a:off x="3555415" y="1563624"/>
-            <a:ext cx="2348407" cy="1051560"/>
-          </a:xfrm>
-          <a:prstGeom prst="roundRect">
-            <a:avLst/>
-          </a:prstGeom>
-          <a:solidFill>
-            <a:srgbClr val="1F5FA8"/>
-          </a:solidFill>
-          <a:ln w="15875">
-            <a:solidFill>
-              <a:srgbClr val="9CB5D1"/>
-            </a:solidFill>
-          </a:ln>
-          <a:effectLst/>
-        </p:spPr>
-        <p:style>
-          <a:lnRef idx="1">
-            <a:schemeClr val="accent1"/>
-          </a:lnRef>
-          <a:fillRef idx="3">
-            <a:schemeClr val="accent1"/>
-          </a:fillRef>
-          <a:effectRef idx="2">
-            <a:schemeClr val="accent1"/>
-          </a:effectRef>
-          <a:fontRef idx="minor">
-            <a:schemeClr val="lt1"/>
-          </a:fontRef>
-        </p:style>
-        <p:txBody>
-          <a:bodyPr rtlCol="0" anchor="ctr" wrap="square" lIns="54864" rIns="54864" tIns="27432" bIns="27432"/>
-          <a:lstStyle/>
-          <a:p>
-            <a:pPr algn="ctr"/>
+          <p:cNvPr id="5" name="TextBox 4"/>
+          <p:cNvSpPr txBox="1"/>
+          <p:nvPr/>
+        </p:nvSpPr>
+        <p:spPr>
+          <a:xfrm>
+            <a:off x="1097280" y="1527048"/>
+            <a:ext cx="10088575" cy="310896"/>
+          </a:xfrm>
+          <a:prstGeom prst="rect">
+            <a:avLst/>
+          </a:prstGeom>
+          <a:noFill/>
+        </p:spPr>
+        <p:txBody>
+          <a:bodyPr wrap="square">
+            <a:spAutoFit/>
+          </a:bodyPr>
+          <a:lstStyle/>
+          <a:p>
+            <a:pPr algn="l"/>
             <a:r>
               <a:rPr sz="1400" b="1">
                 <a:solidFill>
-                  <a:srgbClr val="FFFFFF"/>
-                </a:solidFill>
-                <a:latin typeface="Leelawadee UI"/>
-                <a:ea typeface="Leelawadee UI"/>
-                <a:cs typeface="Leelawadee UI"/>
-              </a:rPr>
-              <a:t>กดเองแล้วพังไหม</a:t>
-            </a:r>
-          </a:p>
-        </p:txBody>
-      </p:sp>
-      <p:sp>
-        <p:nvSpPr>
-          <p:cNvPr id="6" name="Right Arrow 5"/>
-          <p:cNvSpPr/>
-          <p:nvPr/>
-        </p:nvSpPr>
-        <p:spPr>
-          <a:xfrm>
-            <a:off x="5949907" y="1931670"/>
-            <a:ext cx="291876" cy="315468"/>
-          </a:xfrm>
-          <a:prstGeom prst="rightArrow">
-            <a:avLst/>
-          </a:prstGeom>
-          <a:solidFill>
-            <a:srgbClr val="7A91A8"/>
-          </a:solidFill>
-          <a:ln>
-            <a:noFill/>
-          </a:ln>
-          <a:effectLst/>
-        </p:spPr>
-        <p:style>
-          <a:lnRef idx="1">
-            <a:schemeClr val="accent1"/>
-          </a:lnRef>
-          <a:fillRef idx="3">
-            <a:schemeClr val="accent1"/>
-          </a:fillRef>
-          <a:effectRef idx="2">
-            <a:schemeClr val="accent1"/>
-          </a:effectRef>
-          <a:fontRef idx="minor">
-            <a:schemeClr val="lt1"/>
-          </a:fontRef>
-        </p:style>
-        <p:txBody>
-          <a:bodyPr rtlCol="0" anchor="ctr"/>
-          <a:lstStyle/>
-          <a:p>
-            <a:pPr algn="ctr"/>
-          </a:p>
-        </p:txBody>
-      </p:sp>
-      <p:sp>
-        <p:nvSpPr>
-          <p:cNvPr id="7" name="Rounded Rectangle 6"/>
-          <p:cNvSpPr/>
-          <p:nvPr/>
-        </p:nvSpPr>
-        <p:spPr>
-          <a:xfrm>
-            <a:off x="6287870" y="1563624"/>
-            <a:ext cx="2348407" cy="1051560"/>
-          </a:xfrm>
-          <a:prstGeom prst="roundRect">
-            <a:avLst/>
-          </a:prstGeom>
-          <a:solidFill>
-            <a:srgbClr val="E8EFF7"/>
-          </a:solidFill>
-          <a:ln w="15875">
-            <a:solidFill>
-              <a:srgbClr val="9CB5D1"/>
-            </a:solidFill>
-          </a:ln>
-          <a:effectLst/>
-        </p:spPr>
-        <p:style>
-          <a:lnRef idx="1">
-            <a:schemeClr val="accent1"/>
-          </a:lnRef>
-          <a:fillRef idx="3">
-            <a:schemeClr val="accent1"/>
-          </a:fillRef>
-          <a:effectRef idx="2">
-            <a:schemeClr val="accent1"/>
-          </a:effectRef>
-          <a:fontRef idx="minor">
-            <a:schemeClr val="lt1"/>
-          </a:fontRef>
-        </p:style>
-        <p:txBody>
-          <a:bodyPr rtlCol="0" anchor="ctr" wrap="square" lIns="54864" rIns="54864" tIns="27432" bIns="27432"/>
-          <a:lstStyle/>
-          <a:p>
-            <a:pPr algn="ctr"/>
-            <a:r>
-              <a:rPr sz="1400" b="0">
+                  <a:srgbClr val="A86C0A"/>
+                </a:solidFill>
+                <a:latin typeface="Leelawadee UI"/>
+                <a:ea typeface="Leelawadee UI"/>
+                <a:cs typeface="Leelawadee UI"/>
+              </a:rPr>
+              <a:t>💬 จังหวะที่ 1 — ขอแผนก่อน</a:t>
+            </a:r>
+          </a:p>
+        </p:txBody>
+      </p:sp>
+      <p:sp>
+        <p:nvSpPr>
+          <p:cNvPr id="6" name="TextBox 5"/>
+          <p:cNvSpPr txBox="1"/>
+          <p:nvPr/>
+        </p:nvSpPr>
+        <p:spPr>
+          <a:xfrm>
+            <a:off x="1097280" y="1856232"/>
+            <a:ext cx="10088575" cy="768096"/>
+          </a:xfrm>
+          <a:prstGeom prst="rect">
+            <a:avLst/>
+          </a:prstGeom>
+          <a:noFill/>
+        </p:spPr>
+        <p:txBody>
+          <a:bodyPr wrap="square">
+            <a:spAutoFit/>
+          </a:bodyPr>
+          <a:lstStyle/>
+          <a:p>
+            <a:pPr algn="l">
+              <a:spcAft>
+                <a:spcPts val="0"/>
+              </a:spcAft>
+            </a:pPr>
+            <a:r>
+              <a:rPr sz="2000" b="0">
                 <a:solidFill>
                   <a:srgbClr val="1A1A1A"/>
                 </a:solidFill>
@@ -17615,100 +17756,17 @@
                 <a:ea typeface="Leelawadee UI"/>
                 <a:cs typeface="Leelawadee UI"/>
               </a:rPr>
-              <a:t>พังจริง = โค้ดผิด</a:t>
-            </a:r>
-          </a:p>
-        </p:txBody>
-      </p:sp>
-      <p:sp>
-        <p:nvSpPr>
-          <p:cNvPr id="8" name="Right Arrow 7"/>
-          <p:cNvSpPr/>
-          <p:nvPr/>
-        </p:nvSpPr>
-        <p:spPr>
-          <a:xfrm>
-            <a:off x="8682362" y="1931670"/>
-            <a:ext cx="291876" cy="315468"/>
-          </a:xfrm>
-          <a:prstGeom prst="rightArrow">
-            <a:avLst/>
-          </a:prstGeom>
-          <a:solidFill>
-            <a:srgbClr val="7A91A8"/>
-          </a:solidFill>
-          <a:ln>
-            <a:noFill/>
-          </a:ln>
-          <a:effectLst/>
-        </p:spPr>
-        <p:style>
-          <a:lnRef idx="1">
-            <a:schemeClr val="accent1"/>
-          </a:lnRef>
-          <a:fillRef idx="3">
-            <a:schemeClr val="accent1"/>
-          </a:fillRef>
-          <a:effectRef idx="2">
-            <a:schemeClr val="accent1"/>
-          </a:effectRef>
-          <a:fontRef idx="minor">
-            <a:schemeClr val="lt1"/>
-          </a:fontRef>
-        </p:style>
-        <p:txBody>
-          <a:bodyPr rtlCol="0" anchor="ctr"/>
-          <a:lstStyle/>
-          <a:p>
-            <a:pPr algn="ctr"/>
-          </a:p>
-        </p:txBody>
-      </p:sp>
-      <p:sp>
-        <p:nvSpPr>
-          <p:cNvPr id="9" name="Rounded Rectangle 8"/>
-          <p:cNvSpPr/>
-          <p:nvPr/>
-        </p:nvSpPr>
-        <p:spPr>
-          <a:xfrm>
-            <a:off x="9020325" y="1563624"/>
-            <a:ext cx="2348407" cy="1051560"/>
-          </a:xfrm>
-          <a:prstGeom prst="roundRect">
-            <a:avLst/>
-          </a:prstGeom>
-          <a:solidFill>
-            <a:srgbClr val="E8EFF7"/>
-          </a:solidFill>
-          <a:ln w="15875">
-            <a:solidFill>
-              <a:srgbClr val="9CB5D1"/>
-            </a:solidFill>
-          </a:ln>
-          <a:effectLst/>
-        </p:spPr>
-        <p:style>
-          <a:lnRef idx="1">
-            <a:schemeClr val="accent1"/>
-          </a:lnRef>
-          <a:fillRef idx="3">
-            <a:schemeClr val="accent1"/>
-          </a:fillRef>
-          <a:effectRef idx="2">
-            <a:schemeClr val="accent1"/>
-          </a:effectRef>
-          <a:fontRef idx="minor">
-            <a:schemeClr val="lt1"/>
-          </a:fontRef>
-        </p:style>
-        <p:txBody>
-          <a:bodyPr rtlCol="0" anchor="ctr" wrap="square" lIns="54864" rIns="54864" tIns="27432" bIns="27432"/>
-          <a:lstStyle/>
-          <a:p>
-            <a:pPr algn="ctr"/>
-            <a:r>
-              <a:rPr sz="1400" b="0">
+              <a:t>ให้ tester วางแผนเทสต์ว่าถ้าเรียก AI ไม่สำเร็จ ระบบต้องไม่ค้าง</a:t>
+            </a:r>
+          </a:p>
+          <a:p>
+            <a:pPr algn="l">
+              <a:spcAft>
+                <a:spcPts val="0"/>
+              </a:spcAft>
+            </a:pPr>
+            <a:r>
+              <a:rPr sz="2000" b="0">
                 <a:solidFill>
                   <a:srgbClr val="1A1A1A"/>
                 </a:solidFill>
@@ -17716,14 +17774,51 @@
                 <a:ea typeface="Leelawadee UI"/>
                 <a:cs typeface="Leelawadee UI"/>
               </a:rPr>
-              <a:t>ไม่พัง = เทสต์ผิด</a:t>
-            </a:r>
-          </a:p>
-        </p:txBody>
-      </p:sp>
-      <p:sp>
-        <p:nvSpPr>
-          <p:cNvPr id="10" name="TextBox 9"/>
+              <a:t>ร่างให้ผมดูก่อน ยังไม่ต้องรัน</a:t>
+            </a:r>
+          </a:p>
+        </p:txBody>
+      </p:sp>
+      <p:sp>
+        <p:nvSpPr>
+          <p:cNvPr id="7" name="TextBox 6"/>
+          <p:cNvSpPr txBox="1"/>
+          <p:nvPr/>
+        </p:nvSpPr>
+        <p:spPr>
+          <a:xfrm>
+            <a:off x="822960" y="3136392"/>
+            <a:ext cx="10545775" cy="1029208"/>
+          </a:xfrm>
+          <a:prstGeom prst="rect">
+            <a:avLst/>
+          </a:prstGeom>
+          <a:noFill/>
+        </p:spPr>
+        <p:txBody>
+          <a:bodyPr wrap="square">
+            <a:spAutoFit/>
+          </a:bodyPr>
+          <a:lstStyle/>
+          <a:p>
+            <a:pPr algn="l"/>
+            <a:r>
+              <a:rPr sz="2600" b="0">
+                <a:solidFill>
+                  <a:srgbClr val="1A1A1A"/>
+                </a:solidFill>
+                <a:latin typeface="Leelawadee UI"/>
+                <a:ea typeface="Leelawadee UI"/>
+                <a:cs typeface="Leelawadee UI"/>
+              </a:rPr>
+              <a:t>• ⭐ ตอนแก้แผน ให้เพิ่มว่า "ต้องเห็นข้อความภาษาไทย และปุ่มอื่นยังกดได้"</a:t>
+            </a:r>
+          </a:p>
+        </p:txBody>
+      </p:sp>
+      <p:sp>
+        <p:nvSpPr>
+          <p:cNvPr id="8" name="TextBox 7"/>
           <p:cNvSpPr txBox="1"/>
           <p:nvPr/>
         </p:nvSpPr>
@@ -17821,7 +17916,7 @@
         <p:spPr>
           <a:xfrm>
             <a:off x="822960" y="1472184"/>
-            <a:ext cx="10545775" cy="1920240"/>
+            <a:ext cx="10545775" cy="2231136"/>
           </a:xfrm>
           <a:prstGeom prst="rect">
             <a:avLst/>
@@ -17861,7 +17956,7 @@
                 <a:ea typeface="Consolas"/>
                 <a:cs typeface="Consolas"/>
               </a:rPr>
-              <a:t>09:00 – 09:50   🧪 ช่วงที่ 1A  Tester + Playwright MCP</a:t>
+              <a:t>09:00 – 09:10   เปิดคาบ</a:t>
             </a:r>
           </a:p>
           <a:p>
@@ -17875,7 +17970,7 @@
                 <a:ea typeface="Consolas"/>
                 <a:cs typeface="Consolas"/>
               </a:rPr>
-              <a:t>09:50 – 10:00   ☕ พัก</a:t>
+              <a:t>09:10 – 09:50   🧪 ช่วงที่ 1A  Tester + Playwright MCP</a:t>
             </a:r>
           </a:p>
           <a:p>
@@ -17889,7 +17984,7 @@
                 <a:ea typeface="Consolas"/>
                 <a:cs typeface="Consolas"/>
               </a:rPr>
-              <a:t>10:00 – 10:30   🧪 ช่วงที่ 1B  เขียนเทสต์ และอ่านผล</a:t>
+              <a:t>09:50 – 10:00   ☕ พัก</a:t>
             </a:r>
           </a:p>
           <a:p>
@@ -17903,7 +17998,7 @@
                 <a:ea typeface="Consolas"/>
                 <a:cs typeface="Consolas"/>
               </a:rPr>
-              <a:t>10:30 – 11:15   🎤 ช่วงที่ 2   Sprint 1 Review</a:t>
+              <a:t>10:00 – 10:40   🧪 ช่วงที่ 1B  เขียนเทสต์ และอ่านผล</a:t>
             </a:r>
           </a:p>
           <a:p>
@@ -17917,7 +18012,21 @@
                 <a:ea typeface="Consolas"/>
                 <a:cs typeface="Consolas"/>
               </a:rPr>
-              <a:t>11:15 – 12:00   📦 ช่วงที่ 3   เตรียมส่งมอบ + ปิดคาบ</a:t>
+              <a:t>10:40 – 11:20   🎤 ช่วงที่ 2   Sprint 1 Review</a:t>
+            </a:r>
+          </a:p>
+          <a:p>
+            <a:pPr algn="l"/>
+            <a:r>
+              <a:rPr sz="1800" b="0">
+                <a:solidFill>
+                  <a:srgbClr val="1A1A1A"/>
+                </a:solidFill>
+                <a:latin typeface="Consolas"/>
+                <a:ea typeface="Consolas"/>
+                <a:cs typeface="Consolas"/>
+              </a:rPr>
+              <a:t>11:20 – 12:00   📦 ช่วงที่ 3   เตรียมส่งมอบ + ปิดคาบ</a:t>
             </a:r>
           </a:p>
         </p:txBody>
@@ -17967,6 +18076,659 @@
 </file>
 
 <file path=ppt/slides/slide40.xml><?xml version="1.0" encoding="utf-8"?>
+<p:sld xmlns:a="http://schemas.openxmlformats.org/drawingml/2006/main" xmlns:p="http://schemas.openxmlformats.org/presentationml/2006/main" xmlns:r="http://schemas.openxmlformats.org/officeDocument/2006/relationships">
+  <p:cSld>
+    <p:spTree>
+      <p:nvGrpSpPr>
+        <p:cNvPr id="1" name=""/>
+        <p:cNvGrpSpPr/>
+        <p:nvPr/>
+      </p:nvGrpSpPr>
+      <p:grpSpPr/>
+      <p:sp>
+        <p:nvSpPr>
+          <p:cNvPr id="2" name="TextBox 1"/>
+          <p:cNvSpPr txBox="1"/>
+          <p:nvPr/>
+        </p:nvSpPr>
+        <p:spPr>
+          <a:xfrm>
+            <a:off x="822960" y="502920"/>
+            <a:ext cx="10545775" cy="804672"/>
+          </a:xfrm>
+          <a:prstGeom prst="rect">
+            <a:avLst/>
+          </a:prstGeom>
+          <a:noFill/>
+        </p:spPr>
+        <p:txBody>
+          <a:bodyPr wrap="square">
+            <a:spAutoFit/>
+          </a:bodyPr>
+          <a:lstStyle/>
+          <a:p>
+            <a:pPr algn="l"/>
+            <a:r>
+              <a:rPr sz="3600" b="1">
+                <a:solidFill>
+                  <a:srgbClr val="1F5FA8"/>
+                </a:solidFill>
+                <a:latin typeface="Leelawadee UI"/>
+                <a:ea typeface="Leelawadee UI"/>
+                <a:cs typeface="Leelawadee UI"/>
+              </a:rPr>
+              <a:t>เทสต์ fail — โค้ดผิด หรือเทสต์เขียนผิด</a:t>
+            </a:r>
+          </a:p>
+        </p:txBody>
+      </p:sp>
+      <p:sp>
+        <p:nvSpPr>
+          <p:cNvPr id="3" name="TextBox 2"/>
+          <p:cNvSpPr txBox="1"/>
+          <p:nvPr/>
+        </p:nvSpPr>
+        <p:spPr>
+          <a:xfrm>
+            <a:off x="822960" y="1472184"/>
+            <a:ext cx="10545775" cy="560324"/>
+          </a:xfrm>
+          <a:prstGeom prst="rect">
+            <a:avLst/>
+          </a:prstGeom>
+          <a:noFill/>
+        </p:spPr>
+        <p:txBody>
+          <a:bodyPr wrap="square">
+            <a:spAutoFit/>
+          </a:bodyPr>
+          <a:lstStyle/>
+          <a:p>
+            <a:pPr algn="l"/>
+            <a:r>
+              <a:rPr sz="2600" b="0">
+                <a:solidFill>
+                  <a:srgbClr val="1A1A1A"/>
+                </a:solidFill>
+                <a:latin typeface="Leelawadee UI"/>
+                <a:ea typeface="Leelawadee UI"/>
+                <a:cs typeface="Leelawadee UI"/>
+              </a:rPr>
+              <a:t>• เจอ fail แล้ว อย่าเพิ่งแก้อะไรทั้งนั้น</a:t>
+            </a:r>
+          </a:p>
+        </p:txBody>
+      </p:sp>
+      <p:sp>
+        <p:nvSpPr>
+          <p:cNvPr id="4" name="TextBox 3"/>
+          <p:cNvSpPr txBox="1"/>
+          <p:nvPr/>
+        </p:nvSpPr>
+        <p:spPr>
+          <a:xfrm>
+            <a:off x="822960" y="2087372"/>
+            <a:ext cx="10545775" cy="560324"/>
+          </a:xfrm>
+          <a:prstGeom prst="rect">
+            <a:avLst/>
+          </a:prstGeom>
+          <a:noFill/>
+        </p:spPr>
+        <p:txBody>
+          <a:bodyPr wrap="square">
+            <a:spAutoFit/>
+          </a:bodyPr>
+          <a:lstStyle/>
+          <a:p>
+            <a:pPr algn="l"/>
+            <a:r>
+              <a:rPr sz="2600" b="0">
+                <a:solidFill>
+                  <a:srgbClr val="1A1A1A"/>
+                </a:solidFill>
+                <a:latin typeface="Leelawadee UI"/>
+                <a:ea typeface="Leelawadee UI"/>
+                <a:cs typeface="Leelawadee UI"/>
+              </a:rPr>
+              <a:t>• อ่านก่อนว่ามันคาดว่าจะเห็นอะไร และเห็นอะไรจริง</a:t>
+            </a:r>
+          </a:p>
+        </p:txBody>
+      </p:sp>
+      <p:sp>
+        <p:nvSpPr>
+          <p:cNvPr id="5" name="TextBox 4"/>
+          <p:cNvSpPr txBox="1"/>
+          <p:nvPr/>
+        </p:nvSpPr>
+        <p:spPr>
+          <a:xfrm>
+            <a:off x="822960" y="2702560"/>
+            <a:ext cx="10545775" cy="560324"/>
+          </a:xfrm>
+          <a:prstGeom prst="rect">
+            <a:avLst/>
+          </a:prstGeom>
+          <a:noFill/>
+        </p:spPr>
+        <p:txBody>
+          <a:bodyPr wrap="square">
+            <a:spAutoFit/>
+          </a:bodyPr>
+          <a:lstStyle/>
+          <a:p>
+            <a:pPr algn="l"/>
+            <a:r>
+              <a:rPr sz="2600" b="0">
+                <a:solidFill>
+                  <a:srgbClr val="1A1A1A"/>
+                </a:solidFill>
+                <a:latin typeface="Leelawadee UI"/>
+                <a:ea typeface="Leelawadee UI"/>
+                <a:cs typeface="Leelawadee UI"/>
+              </a:rPr>
+              <a:t>• แล้วจึงตัดสินว่า โค้ดผิด หรือ เทสต์เขียนผิด</a:t>
+            </a:r>
+          </a:p>
+        </p:txBody>
+      </p:sp>
+      <p:sp>
+        <p:nvSpPr>
+          <p:cNvPr id="6" name="TextBox 5"/>
+          <p:cNvSpPr txBox="1"/>
+          <p:nvPr/>
+        </p:nvSpPr>
+        <p:spPr>
+          <a:xfrm>
+            <a:off x="822960" y="6355080"/>
+            <a:ext cx="10545775" cy="320040"/>
+          </a:xfrm>
+          <a:prstGeom prst="rect">
+            <a:avLst/>
+          </a:prstGeom>
+          <a:noFill/>
+        </p:spPr>
+        <p:txBody>
+          <a:bodyPr wrap="square">
+            <a:spAutoFit/>
+          </a:bodyPr>
+          <a:lstStyle/>
+          <a:p>
+            <a:r>
+              <a:rPr sz="1200" b="0">
+                <a:solidFill>
+                  <a:srgbClr val="6B6B6B"/>
+                </a:solidFill>
+                <a:latin typeface="Leelawadee UI"/>
+                <a:ea typeface="Leelawadee UI"/>
+                <a:cs typeface="Leelawadee UI"/>
+              </a:rPr>
+              <a:t>RAISE 2 · เดือนที่ 2 · สัปดาห์ที่ 9          40</a:t>
+            </a:r>
+          </a:p>
+        </p:txBody>
+      </p:sp>
+    </p:spTree>
+  </p:cSld>
+  <p:clrMapOvr>
+    <a:masterClrMapping/>
+  </p:clrMapOvr>
+</p:sld>
+</file>
+
+<file path=ppt/slides/slide41.xml><?xml version="1.0" encoding="utf-8"?>
+<p:sld xmlns:a="http://schemas.openxmlformats.org/drawingml/2006/main" xmlns:p="http://schemas.openxmlformats.org/presentationml/2006/main" xmlns:r="http://schemas.openxmlformats.org/officeDocument/2006/relationships">
+  <p:cSld>
+    <p:spTree>
+      <p:nvGrpSpPr>
+        <p:cNvPr id="1" name=""/>
+        <p:cNvGrpSpPr/>
+        <p:nvPr/>
+      </p:nvGrpSpPr>
+      <p:grpSpPr/>
+      <p:sp>
+        <p:nvSpPr>
+          <p:cNvPr id="2" name="TextBox 1"/>
+          <p:cNvSpPr txBox="1"/>
+          <p:nvPr/>
+        </p:nvSpPr>
+        <p:spPr>
+          <a:xfrm>
+            <a:off x="822960" y="502920"/>
+            <a:ext cx="10545775" cy="804672"/>
+          </a:xfrm>
+          <a:prstGeom prst="rect">
+            <a:avLst/>
+          </a:prstGeom>
+          <a:noFill/>
+        </p:spPr>
+        <p:txBody>
+          <a:bodyPr wrap="square">
+            <a:spAutoFit/>
+          </a:bodyPr>
+          <a:lstStyle/>
+          <a:p>
+            <a:pPr algn="l"/>
+            <a:r>
+              <a:rPr sz="3600" b="1">
+                <a:solidFill>
+                  <a:srgbClr val="1F5FA8"/>
+                </a:solidFill>
+                <a:latin typeface="Leelawadee UI"/>
+                <a:ea typeface="Leelawadee UI"/>
+                <a:cs typeface="Leelawadee UI"/>
+              </a:rPr>
+              <a:t>เทสต์ fail แล้วทำอย่างไรต่อ</a:t>
+            </a:r>
+          </a:p>
+        </p:txBody>
+      </p:sp>
+      <p:sp>
+        <p:nvSpPr>
+          <p:cNvPr id="3" name="Rounded Rectangle 2"/>
+          <p:cNvSpPr/>
+          <p:nvPr/>
+        </p:nvSpPr>
+        <p:spPr>
+          <a:xfrm>
+            <a:off x="822960" y="1563624"/>
+            <a:ext cx="2348407" cy="1051560"/>
+          </a:xfrm>
+          <a:prstGeom prst="roundRect">
+            <a:avLst/>
+          </a:prstGeom>
+          <a:solidFill>
+            <a:srgbClr val="E8EFF7"/>
+          </a:solidFill>
+          <a:ln w="15875">
+            <a:solidFill>
+              <a:srgbClr val="9CB5D1"/>
+            </a:solidFill>
+          </a:ln>
+          <a:effectLst/>
+        </p:spPr>
+        <p:style>
+          <a:lnRef idx="1">
+            <a:schemeClr val="accent1"/>
+          </a:lnRef>
+          <a:fillRef idx="3">
+            <a:schemeClr val="accent1"/>
+          </a:fillRef>
+          <a:effectRef idx="2">
+            <a:schemeClr val="accent1"/>
+          </a:effectRef>
+          <a:fontRef idx="minor">
+            <a:schemeClr val="lt1"/>
+          </a:fontRef>
+        </p:style>
+        <p:txBody>
+          <a:bodyPr rtlCol="0" anchor="ctr" wrap="square" lIns="54864" rIns="54864" tIns="27432" bIns="27432"/>
+          <a:lstStyle/>
+          <a:p>
+            <a:pPr algn="ctr"/>
+            <a:r>
+              <a:rPr sz="1400" b="0">
+                <a:solidFill>
+                  <a:srgbClr val="1A1A1A"/>
+                </a:solidFill>
+                <a:latin typeface="Leelawadee UI"/>
+                <a:ea typeface="Leelawadee UI"/>
+                <a:cs typeface="Leelawadee UI"/>
+              </a:rPr>
+              <a:t>เทสต์ fail</a:t>
+            </a:r>
+          </a:p>
+        </p:txBody>
+      </p:sp>
+      <p:sp>
+        <p:nvSpPr>
+          <p:cNvPr id="4" name="Right Arrow 3"/>
+          <p:cNvSpPr/>
+          <p:nvPr/>
+        </p:nvSpPr>
+        <p:spPr>
+          <a:xfrm>
+            <a:off x="3217452" y="1931670"/>
+            <a:ext cx="291876" cy="315468"/>
+          </a:xfrm>
+          <a:prstGeom prst="rightArrow">
+            <a:avLst/>
+          </a:prstGeom>
+          <a:solidFill>
+            <a:srgbClr val="7A91A8"/>
+          </a:solidFill>
+          <a:ln>
+            <a:noFill/>
+          </a:ln>
+          <a:effectLst/>
+        </p:spPr>
+        <p:style>
+          <a:lnRef idx="1">
+            <a:schemeClr val="accent1"/>
+          </a:lnRef>
+          <a:fillRef idx="3">
+            <a:schemeClr val="accent1"/>
+          </a:fillRef>
+          <a:effectRef idx="2">
+            <a:schemeClr val="accent1"/>
+          </a:effectRef>
+          <a:fontRef idx="minor">
+            <a:schemeClr val="lt1"/>
+          </a:fontRef>
+        </p:style>
+        <p:txBody>
+          <a:bodyPr rtlCol="0" anchor="ctr"/>
+          <a:lstStyle/>
+          <a:p>
+            <a:pPr algn="ctr"/>
+          </a:p>
+        </p:txBody>
+      </p:sp>
+      <p:sp>
+        <p:nvSpPr>
+          <p:cNvPr id="5" name="Rounded Rectangle 4"/>
+          <p:cNvSpPr/>
+          <p:nvPr/>
+        </p:nvSpPr>
+        <p:spPr>
+          <a:xfrm>
+            <a:off x="3555415" y="1563624"/>
+            <a:ext cx="2348407" cy="1051560"/>
+          </a:xfrm>
+          <a:prstGeom prst="roundRect">
+            <a:avLst/>
+          </a:prstGeom>
+          <a:solidFill>
+            <a:srgbClr val="1F5FA8"/>
+          </a:solidFill>
+          <a:ln w="15875">
+            <a:solidFill>
+              <a:srgbClr val="9CB5D1"/>
+            </a:solidFill>
+          </a:ln>
+          <a:effectLst/>
+        </p:spPr>
+        <p:style>
+          <a:lnRef idx="1">
+            <a:schemeClr val="accent1"/>
+          </a:lnRef>
+          <a:fillRef idx="3">
+            <a:schemeClr val="accent1"/>
+          </a:fillRef>
+          <a:effectRef idx="2">
+            <a:schemeClr val="accent1"/>
+          </a:effectRef>
+          <a:fontRef idx="minor">
+            <a:schemeClr val="lt1"/>
+          </a:fontRef>
+        </p:style>
+        <p:txBody>
+          <a:bodyPr rtlCol="0" anchor="ctr" wrap="square" lIns="54864" rIns="54864" tIns="27432" bIns="27432"/>
+          <a:lstStyle/>
+          <a:p>
+            <a:pPr algn="ctr"/>
+            <a:r>
+              <a:rPr sz="1400" b="1">
+                <a:solidFill>
+                  <a:srgbClr val="FFFFFF"/>
+                </a:solidFill>
+                <a:latin typeface="Leelawadee UI"/>
+                <a:ea typeface="Leelawadee UI"/>
+                <a:cs typeface="Leelawadee UI"/>
+              </a:rPr>
+              <a:t>กดเองแล้วพังไหม</a:t>
+            </a:r>
+          </a:p>
+        </p:txBody>
+      </p:sp>
+      <p:sp>
+        <p:nvSpPr>
+          <p:cNvPr id="6" name="Right Arrow 5"/>
+          <p:cNvSpPr/>
+          <p:nvPr/>
+        </p:nvSpPr>
+        <p:spPr>
+          <a:xfrm>
+            <a:off x="5949907" y="1931670"/>
+            <a:ext cx="291876" cy="315468"/>
+          </a:xfrm>
+          <a:prstGeom prst="rightArrow">
+            <a:avLst/>
+          </a:prstGeom>
+          <a:solidFill>
+            <a:srgbClr val="7A91A8"/>
+          </a:solidFill>
+          <a:ln>
+            <a:noFill/>
+          </a:ln>
+          <a:effectLst/>
+        </p:spPr>
+        <p:style>
+          <a:lnRef idx="1">
+            <a:schemeClr val="accent1"/>
+          </a:lnRef>
+          <a:fillRef idx="3">
+            <a:schemeClr val="accent1"/>
+          </a:fillRef>
+          <a:effectRef idx="2">
+            <a:schemeClr val="accent1"/>
+          </a:effectRef>
+          <a:fontRef idx="minor">
+            <a:schemeClr val="lt1"/>
+          </a:fontRef>
+        </p:style>
+        <p:txBody>
+          <a:bodyPr rtlCol="0" anchor="ctr"/>
+          <a:lstStyle/>
+          <a:p>
+            <a:pPr algn="ctr"/>
+          </a:p>
+        </p:txBody>
+      </p:sp>
+      <p:sp>
+        <p:nvSpPr>
+          <p:cNvPr id="7" name="Rounded Rectangle 6"/>
+          <p:cNvSpPr/>
+          <p:nvPr/>
+        </p:nvSpPr>
+        <p:spPr>
+          <a:xfrm>
+            <a:off x="6287870" y="1563624"/>
+            <a:ext cx="2348407" cy="1051560"/>
+          </a:xfrm>
+          <a:prstGeom prst="roundRect">
+            <a:avLst/>
+          </a:prstGeom>
+          <a:solidFill>
+            <a:srgbClr val="E8EFF7"/>
+          </a:solidFill>
+          <a:ln w="15875">
+            <a:solidFill>
+              <a:srgbClr val="9CB5D1"/>
+            </a:solidFill>
+          </a:ln>
+          <a:effectLst/>
+        </p:spPr>
+        <p:style>
+          <a:lnRef idx="1">
+            <a:schemeClr val="accent1"/>
+          </a:lnRef>
+          <a:fillRef idx="3">
+            <a:schemeClr val="accent1"/>
+          </a:fillRef>
+          <a:effectRef idx="2">
+            <a:schemeClr val="accent1"/>
+          </a:effectRef>
+          <a:fontRef idx="minor">
+            <a:schemeClr val="lt1"/>
+          </a:fontRef>
+        </p:style>
+        <p:txBody>
+          <a:bodyPr rtlCol="0" anchor="ctr" wrap="square" lIns="54864" rIns="54864" tIns="27432" bIns="27432"/>
+          <a:lstStyle/>
+          <a:p>
+            <a:pPr algn="ctr"/>
+            <a:r>
+              <a:rPr sz="1400" b="0">
+                <a:solidFill>
+                  <a:srgbClr val="1A1A1A"/>
+                </a:solidFill>
+                <a:latin typeface="Leelawadee UI"/>
+                <a:ea typeface="Leelawadee UI"/>
+                <a:cs typeface="Leelawadee UI"/>
+              </a:rPr>
+              <a:t>พังจริง = โค้ดผิด</a:t>
+            </a:r>
+          </a:p>
+        </p:txBody>
+      </p:sp>
+      <p:sp>
+        <p:nvSpPr>
+          <p:cNvPr id="8" name="Right Arrow 7"/>
+          <p:cNvSpPr/>
+          <p:nvPr/>
+        </p:nvSpPr>
+        <p:spPr>
+          <a:xfrm>
+            <a:off x="8682362" y="1931670"/>
+            <a:ext cx="291876" cy="315468"/>
+          </a:xfrm>
+          <a:prstGeom prst="rightArrow">
+            <a:avLst/>
+          </a:prstGeom>
+          <a:solidFill>
+            <a:srgbClr val="7A91A8"/>
+          </a:solidFill>
+          <a:ln>
+            <a:noFill/>
+          </a:ln>
+          <a:effectLst/>
+        </p:spPr>
+        <p:style>
+          <a:lnRef idx="1">
+            <a:schemeClr val="accent1"/>
+          </a:lnRef>
+          <a:fillRef idx="3">
+            <a:schemeClr val="accent1"/>
+          </a:fillRef>
+          <a:effectRef idx="2">
+            <a:schemeClr val="accent1"/>
+          </a:effectRef>
+          <a:fontRef idx="minor">
+            <a:schemeClr val="lt1"/>
+          </a:fontRef>
+        </p:style>
+        <p:txBody>
+          <a:bodyPr rtlCol="0" anchor="ctr"/>
+          <a:lstStyle/>
+          <a:p>
+            <a:pPr algn="ctr"/>
+          </a:p>
+        </p:txBody>
+      </p:sp>
+      <p:sp>
+        <p:nvSpPr>
+          <p:cNvPr id="9" name="Rounded Rectangle 8"/>
+          <p:cNvSpPr/>
+          <p:nvPr/>
+        </p:nvSpPr>
+        <p:spPr>
+          <a:xfrm>
+            <a:off x="9020325" y="1563624"/>
+            <a:ext cx="2348407" cy="1051560"/>
+          </a:xfrm>
+          <a:prstGeom prst="roundRect">
+            <a:avLst/>
+          </a:prstGeom>
+          <a:solidFill>
+            <a:srgbClr val="E8EFF7"/>
+          </a:solidFill>
+          <a:ln w="15875">
+            <a:solidFill>
+              <a:srgbClr val="9CB5D1"/>
+            </a:solidFill>
+          </a:ln>
+          <a:effectLst/>
+        </p:spPr>
+        <p:style>
+          <a:lnRef idx="1">
+            <a:schemeClr val="accent1"/>
+          </a:lnRef>
+          <a:fillRef idx="3">
+            <a:schemeClr val="accent1"/>
+          </a:fillRef>
+          <a:effectRef idx="2">
+            <a:schemeClr val="accent1"/>
+          </a:effectRef>
+          <a:fontRef idx="minor">
+            <a:schemeClr val="lt1"/>
+          </a:fontRef>
+        </p:style>
+        <p:txBody>
+          <a:bodyPr rtlCol="0" anchor="ctr" wrap="square" lIns="54864" rIns="54864" tIns="27432" bIns="27432"/>
+          <a:lstStyle/>
+          <a:p>
+            <a:pPr algn="ctr"/>
+            <a:r>
+              <a:rPr sz="1400" b="0">
+                <a:solidFill>
+                  <a:srgbClr val="1A1A1A"/>
+                </a:solidFill>
+                <a:latin typeface="Leelawadee UI"/>
+                <a:ea typeface="Leelawadee UI"/>
+                <a:cs typeface="Leelawadee UI"/>
+              </a:rPr>
+              <a:t>ไม่พัง = เทสต์ผิด</a:t>
+            </a:r>
+          </a:p>
+        </p:txBody>
+      </p:sp>
+      <p:sp>
+        <p:nvSpPr>
+          <p:cNvPr id="10" name="TextBox 9"/>
+          <p:cNvSpPr txBox="1"/>
+          <p:nvPr/>
+        </p:nvSpPr>
+        <p:spPr>
+          <a:xfrm>
+            <a:off x="822960" y="6355080"/>
+            <a:ext cx="10545775" cy="320040"/>
+          </a:xfrm>
+          <a:prstGeom prst="rect">
+            <a:avLst/>
+          </a:prstGeom>
+          <a:noFill/>
+        </p:spPr>
+        <p:txBody>
+          <a:bodyPr wrap="square">
+            <a:spAutoFit/>
+          </a:bodyPr>
+          <a:lstStyle/>
+          <a:p>
+            <a:r>
+              <a:rPr sz="1200" b="0">
+                <a:solidFill>
+                  <a:srgbClr val="6B6B6B"/>
+                </a:solidFill>
+                <a:latin typeface="Leelawadee UI"/>
+                <a:ea typeface="Leelawadee UI"/>
+                <a:cs typeface="Leelawadee UI"/>
+              </a:rPr>
+              <a:t>RAISE 2 · เดือนที่ 2 · สัปดาห์ที่ 9          41</a:t>
+            </a:r>
+          </a:p>
+        </p:txBody>
+      </p:sp>
+    </p:spTree>
+  </p:cSld>
+  <p:clrMapOvr>
+    <a:masterClrMapping/>
+  </p:clrMapOvr>
+</p:sld>
+</file>
+
+<file path=ppt/slides/slide42.xml><?xml version="1.0" encoding="utf-8"?>
 <p:sld xmlns:a="http://schemas.openxmlformats.org/drawingml/2006/main" xmlns:p="http://schemas.openxmlformats.org/presentationml/2006/main" xmlns:r="http://schemas.openxmlformats.org/officeDocument/2006/relationships">
   <p:cSld>
     <p:spTree>
@@ -18226,336 +18988,6 @@
                 <a:ea typeface="Leelawadee UI"/>
                 <a:cs typeface="Leelawadee UI"/>
               </a:rPr>
-              <a:t>RAISE 2 · เดือนที่ 2 · สัปดาห์ที่ 9          40</a:t>
-            </a:r>
-          </a:p>
-        </p:txBody>
-      </p:sp>
-    </p:spTree>
-  </p:cSld>
-  <p:clrMapOvr>
-    <a:masterClrMapping/>
-  </p:clrMapOvr>
-</p:sld>
-</file>
-
-<file path=ppt/slides/slide41.xml><?xml version="1.0" encoding="utf-8"?>
-<p:sld xmlns:a="http://schemas.openxmlformats.org/drawingml/2006/main" xmlns:p="http://schemas.openxmlformats.org/presentationml/2006/main" xmlns:r="http://schemas.openxmlformats.org/officeDocument/2006/relationships">
-  <p:cSld>
-    <p:spTree>
-      <p:nvGrpSpPr>
-        <p:cNvPr id="1" name=""/>
-        <p:cNvGrpSpPr/>
-        <p:nvPr/>
-      </p:nvGrpSpPr>
-      <p:grpSpPr/>
-      <p:sp>
-        <p:nvSpPr>
-          <p:cNvPr id="2" name="TextBox 1"/>
-          <p:cNvSpPr txBox="1"/>
-          <p:nvPr/>
-        </p:nvSpPr>
-        <p:spPr>
-          <a:xfrm>
-            <a:off x="822960" y="2011680"/>
-            <a:ext cx="10545775" cy="2743200"/>
-          </a:xfrm>
-          <a:prstGeom prst="rect">
-            <a:avLst/>
-          </a:prstGeom>
-          <a:noFill/>
-        </p:spPr>
-        <p:txBody>
-          <a:bodyPr wrap="square" anchor="ctr">
-            <a:spAutoFit/>
-          </a:bodyPr>
-          <a:lstStyle/>
-          <a:p>
-            <a:pPr algn="ctr"/>
-            <a:r>
-              <a:rPr sz="5400" b="1">
-                <a:solidFill>
-                  <a:srgbClr val="1F5FA8"/>
-                </a:solidFill>
-                <a:latin typeface="Leelawadee UI"/>
-                <a:ea typeface="Leelawadee UI"/>
-                <a:cs typeface="Leelawadee UI"/>
-              </a:rPr>
-              <a:t>ห้ามแก้โค้ดเพื่อให้เทสต์ผ่าน</a:t>
-            </a:r>
-          </a:p>
-        </p:txBody>
-      </p:sp>
-      <p:sp>
-        <p:nvSpPr>
-          <p:cNvPr id="3" name="TextBox 2"/>
-          <p:cNvSpPr txBox="1"/>
-          <p:nvPr/>
-        </p:nvSpPr>
-        <p:spPr>
-          <a:xfrm>
-            <a:off x="822960" y="6355080"/>
-            <a:ext cx="10545775" cy="320040"/>
-          </a:xfrm>
-          <a:prstGeom prst="rect">
-            <a:avLst/>
-          </a:prstGeom>
-          <a:noFill/>
-        </p:spPr>
-        <p:txBody>
-          <a:bodyPr wrap="square">
-            <a:spAutoFit/>
-          </a:bodyPr>
-          <a:lstStyle/>
-          <a:p>
-            <a:r>
-              <a:rPr sz="1200" b="0">
-                <a:solidFill>
-                  <a:srgbClr val="6B6B6B"/>
-                </a:solidFill>
-                <a:latin typeface="Leelawadee UI"/>
-                <a:ea typeface="Leelawadee UI"/>
-                <a:cs typeface="Leelawadee UI"/>
-              </a:rPr>
-              <a:t>RAISE 2 · เดือนที่ 2 · สัปดาห์ที่ 9          41</a:t>
-            </a:r>
-          </a:p>
-        </p:txBody>
-      </p:sp>
-    </p:spTree>
-  </p:cSld>
-  <p:clrMapOvr>
-    <a:masterClrMapping/>
-  </p:clrMapOvr>
-</p:sld>
-</file>
-
-<file path=ppt/slides/slide42.xml><?xml version="1.0" encoding="utf-8"?>
-<p:sld xmlns:a="http://schemas.openxmlformats.org/drawingml/2006/main" xmlns:p="http://schemas.openxmlformats.org/presentationml/2006/main" xmlns:r="http://schemas.openxmlformats.org/officeDocument/2006/relationships">
-  <p:cSld>
-    <p:spTree>
-      <p:nvGrpSpPr>
-        <p:cNvPr id="1" name=""/>
-        <p:cNvGrpSpPr/>
-        <p:nvPr/>
-      </p:nvGrpSpPr>
-      <p:grpSpPr/>
-      <p:sp>
-        <p:nvSpPr>
-          <p:cNvPr id="2" name="TextBox 1"/>
-          <p:cNvSpPr txBox="1"/>
-          <p:nvPr/>
-        </p:nvSpPr>
-        <p:spPr>
-          <a:xfrm>
-            <a:off x="822960" y="502920"/>
-            <a:ext cx="10545775" cy="804672"/>
-          </a:xfrm>
-          <a:prstGeom prst="rect">
-            <a:avLst/>
-          </a:prstGeom>
-          <a:noFill/>
-        </p:spPr>
-        <p:txBody>
-          <a:bodyPr wrap="square">
-            <a:spAutoFit/>
-          </a:bodyPr>
-          <a:lstStyle/>
-          <a:p>
-            <a:pPr algn="l"/>
-            <a:r>
-              <a:rPr sz="3600" b="1">
-                <a:solidFill>
-                  <a:srgbClr val="1F5FA8"/>
-                </a:solidFill>
-                <a:latin typeface="Leelawadee UI"/>
-                <a:ea typeface="Leelawadee UI"/>
-                <a:cs typeface="Leelawadee UI"/>
-              </a:rPr>
-              <a:t>เทสต์ผ่านบ้างไม่ผ่านบ้างแบบสุ่ม</a:t>
-            </a:r>
-          </a:p>
-        </p:txBody>
-      </p:sp>
-      <p:sp>
-        <p:nvSpPr>
-          <p:cNvPr id="3" name="TextBox 2"/>
-          <p:cNvSpPr txBox="1"/>
-          <p:nvPr/>
-        </p:nvSpPr>
-        <p:spPr>
-          <a:xfrm>
-            <a:off x="822960" y="1472184"/>
-            <a:ext cx="10545775" cy="560324"/>
-          </a:xfrm>
-          <a:prstGeom prst="rect">
-            <a:avLst/>
-          </a:prstGeom>
-          <a:noFill/>
-        </p:spPr>
-        <p:txBody>
-          <a:bodyPr wrap="square">
-            <a:spAutoFit/>
-          </a:bodyPr>
-          <a:lstStyle/>
-          <a:p>
-            <a:pPr algn="l"/>
-            <a:r>
-              <a:rPr sz="2600" b="0">
-                <a:solidFill>
-                  <a:srgbClr val="1A1A1A"/>
-                </a:solidFill>
-                <a:latin typeface="Leelawadee UI"/>
-                <a:ea typeface="Leelawadee UI"/>
-                <a:cs typeface="Leelawadee UI"/>
-              </a:rPr>
-              <a:t>• อาการ: รันรอบนี้ผ่าน รอบหน้าไม่ผ่าน โดยไม่ได้แก้อะไร</a:t>
-            </a:r>
-          </a:p>
-        </p:txBody>
-      </p:sp>
-      <p:sp>
-        <p:nvSpPr>
-          <p:cNvPr id="4" name="TextBox 3"/>
-          <p:cNvSpPr txBox="1"/>
-          <p:nvPr/>
-        </p:nvSpPr>
-        <p:spPr>
-          <a:xfrm>
-            <a:off x="822960" y="2087372"/>
-            <a:ext cx="10545775" cy="560324"/>
-          </a:xfrm>
-          <a:prstGeom prst="rect">
-            <a:avLst/>
-          </a:prstGeom>
-          <a:noFill/>
-        </p:spPr>
-        <p:txBody>
-          <a:bodyPr wrap="square">
-            <a:spAutoFit/>
-          </a:bodyPr>
-          <a:lstStyle/>
-          <a:p>
-            <a:pPr algn="l"/>
-            <a:r>
-              <a:rPr sz="2600" b="0">
-                <a:solidFill>
-                  <a:srgbClr val="1A1A1A"/>
-                </a:solidFill>
-                <a:latin typeface="Leelawadee UI"/>
-                <a:ea typeface="Leelawadee UI"/>
-                <a:cs typeface="Leelawadee UI"/>
-              </a:rPr>
-              <a:t>• สาเหตุที่พบบ่อยที่สุด: หน้าเว็บโหลดไม่ทัน</a:t>
-            </a:r>
-          </a:p>
-        </p:txBody>
-      </p:sp>
-      <p:sp>
-        <p:nvSpPr>
-          <p:cNvPr id="5" name="TextBox 4"/>
-          <p:cNvSpPr txBox="1"/>
-          <p:nvPr/>
-        </p:nvSpPr>
-        <p:spPr>
-          <a:xfrm>
-            <a:off x="822960" y="2702560"/>
-            <a:ext cx="10545775" cy="1029208"/>
-          </a:xfrm>
-          <a:prstGeom prst="rect">
-            <a:avLst/>
-          </a:prstGeom>
-          <a:noFill/>
-        </p:spPr>
-        <p:txBody>
-          <a:bodyPr wrap="square">
-            <a:spAutoFit/>
-          </a:bodyPr>
-          <a:lstStyle/>
-          <a:p>
-            <a:pPr algn="l"/>
-            <a:r>
-              <a:rPr sz="2600" b="0">
-                <a:solidFill>
-                  <a:srgbClr val="1A1A1A"/>
-                </a:solidFill>
-                <a:latin typeface="Leelawadee UI"/>
-                <a:ea typeface="Leelawadee UI"/>
-                <a:cs typeface="Leelawadee UI"/>
-              </a:rPr>
-              <a:t>• ทางแก้: ให้ AI รอจนกว่าองค์ประกอบที่ต้องการจะขึ้นจริง</a:t>
-            </a:r>
-          </a:p>
-        </p:txBody>
-      </p:sp>
-      <p:sp>
-        <p:nvSpPr>
-          <p:cNvPr id="6" name="TextBox 5"/>
-          <p:cNvSpPr txBox="1"/>
-          <p:nvPr/>
-        </p:nvSpPr>
-        <p:spPr>
-          <a:xfrm>
-            <a:off x="822960" y="3786632"/>
-            <a:ext cx="10545775" cy="1029208"/>
-          </a:xfrm>
-          <a:prstGeom prst="rect">
-            <a:avLst/>
-          </a:prstGeom>
-          <a:noFill/>
-        </p:spPr>
-        <p:txBody>
-          <a:bodyPr wrap="square">
-            <a:spAutoFit/>
-          </a:bodyPr>
-          <a:lstStyle/>
-          <a:p>
-            <a:pPr algn="l"/>
-            <a:r>
-              <a:rPr sz="2600" b="0">
-                <a:solidFill>
-                  <a:srgbClr val="1A1A1A"/>
-                </a:solidFill>
-                <a:latin typeface="Leelawadee UI"/>
-                <a:ea typeface="Leelawadee UI"/>
-                <a:cs typeface="Leelawadee UI"/>
-              </a:rPr>
-              <a:t>• 💬 "ให้เทสต์รอจนกว่าปุ่มบันทึกจะขึ้นบนหน้าจอก่อนจึงกด"</a:t>
-            </a:r>
-          </a:p>
-        </p:txBody>
-      </p:sp>
-      <p:sp>
-        <p:nvSpPr>
-          <p:cNvPr id="7" name="TextBox 6"/>
-          <p:cNvSpPr txBox="1"/>
-          <p:nvPr/>
-        </p:nvSpPr>
-        <p:spPr>
-          <a:xfrm>
-            <a:off x="822960" y="6355080"/>
-            <a:ext cx="10545775" cy="320040"/>
-          </a:xfrm>
-          <a:prstGeom prst="rect">
-            <a:avLst/>
-          </a:prstGeom>
-          <a:noFill/>
-        </p:spPr>
-        <p:txBody>
-          <a:bodyPr wrap="square">
-            <a:spAutoFit/>
-          </a:bodyPr>
-          <a:lstStyle/>
-          <a:p>
-            <a:r>
-              <a:rPr sz="1200" b="0">
-                <a:solidFill>
-                  <a:srgbClr val="6B6B6B"/>
-                </a:solidFill>
-                <a:latin typeface="Leelawadee UI"/>
-                <a:ea typeface="Leelawadee UI"/>
-                <a:cs typeface="Leelawadee UI"/>
-              </a:rPr>
               <a:t>RAISE 2 · เดือนที่ 2 · สัปดาห์ที่ 9          42</a:t>
             </a:r>
           </a:p>
@@ -18587,23 +19019,23 @@
         </p:nvSpPr>
         <p:spPr>
           <a:xfrm>
-            <a:off x="822960" y="502920"/>
-            <a:ext cx="10545775" cy="804672"/>
-          </a:xfrm>
-          <a:prstGeom prst="rect">
-            <a:avLst/>
-          </a:prstGeom>
-          <a:noFill/>
-        </p:spPr>
-        <p:txBody>
-          <a:bodyPr wrap="square">
-            <a:spAutoFit/>
-          </a:bodyPr>
-          <a:lstStyle/>
-          <a:p>
-            <a:pPr algn="l"/>
-            <a:r>
-              <a:rPr sz="3600" b="1">
+            <a:off x="822960" y="2011680"/>
+            <a:ext cx="10545775" cy="2743200"/>
+          </a:xfrm>
+          <a:prstGeom prst="rect">
+            <a:avLst/>
+          </a:prstGeom>
+          <a:noFill/>
+        </p:spPr>
+        <p:txBody>
+          <a:bodyPr wrap="square" anchor="ctr">
+            <a:spAutoFit/>
+          </a:bodyPr>
+          <a:lstStyle/>
+          <a:p>
+            <a:pPr algn="ctr"/>
+            <a:r>
+              <a:rPr sz="5400" b="1">
                 <a:solidFill>
                   <a:srgbClr val="1F5FA8"/>
                 </a:solidFill>
@@ -18611,7 +19043,7 @@
                 <a:ea typeface="Leelawadee UI"/>
                 <a:cs typeface="Leelawadee UI"/>
               </a:rPr>
-              <a:t>✅ ช่วงนี้คุณต้องได้</a:t>
+              <a:t>ห้ามแก้โค้ดเพื่อให้เทสต์ผ่าน</a:t>
             </a:r>
           </a:p>
         </p:txBody>
@@ -18619,154 +19051,6 @@
       <p:sp>
         <p:nvSpPr>
           <p:cNvPr id="3" name="TextBox 2"/>
-          <p:cNvSpPr txBox="1"/>
-          <p:nvPr/>
-        </p:nvSpPr>
-        <p:spPr>
-          <a:xfrm>
-            <a:off x="822960" y="1472184"/>
-            <a:ext cx="10545775" cy="560324"/>
-          </a:xfrm>
-          <a:prstGeom prst="rect">
-            <a:avLst/>
-          </a:prstGeom>
-          <a:noFill/>
-        </p:spPr>
-        <p:txBody>
-          <a:bodyPr wrap="square">
-            <a:spAutoFit/>
-          </a:bodyPr>
-          <a:lstStyle/>
-          <a:p>
-            <a:pPr algn="l"/>
-            <a:r>
-              <a:rPr sz="2600" b="0">
-                <a:solidFill>
-                  <a:srgbClr val="1A1A1A"/>
-                </a:solidFill>
-                <a:latin typeface="Leelawadee UI"/>
-                <a:ea typeface="Leelawadee UI"/>
-                <a:cs typeface="Leelawadee UI"/>
-              </a:rPr>
-              <a:t>• /mcp ที่ขึ้นว่า Playwright เชื่อมต่อแล้ว</a:t>
-            </a:r>
-          </a:p>
-        </p:txBody>
-      </p:sp>
-      <p:sp>
-        <p:nvSpPr>
-          <p:cNvPr id="4" name="TextBox 3"/>
-          <p:cNvSpPr txBox="1"/>
-          <p:nvPr/>
-        </p:nvSpPr>
-        <p:spPr>
-          <a:xfrm>
-            <a:off x="822960" y="2087372"/>
-            <a:ext cx="10545775" cy="560324"/>
-          </a:xfrm>
-          <a:prstGeom prst="rect">
-            <a:avLst/>
-          </a:prstGeom>
-          <a:noFill/>
-        </p:spPr>
-        <p:txBody>
-          <a:bodyPr wrap="square">
-            <a:spAutoFit/>
-          </a:bodyPr>
-          <a:lstStyle/>
-          <a:p>
-            <a:pPr algn="l"/>
-            <a:r>
-              <a:rPr sz="2600" b="0">
-                <a:solidFill>
-                  <a:srgbClr val="1A1A1A"/>
-                </a:solidFill>
-                <a:latin typeface="Leelawadee UI"/>
-                <a:ea typeface="Leelawadee UI"/>
-                <a:cs typeface="Leelawadee UI"/>
-              </a:rPr>
-              <a:t>• ไฟล์ตั้งค่า Tester ที่เปิดอ่านแล้ว</a:t>
-            </a:r>
-          </a:p>
-        </p:txBody>
-      </p:sp>
-      <p:sp>
-        <p:nvSpPr>
-          <p:cNvPr id="5" name="TextBox 4"/>
-          <p:cNvSpPr txBox="1"/>
-          <p:nvPr/>
-        </p:nvSpPr>
-        <p:spPr>
-          <a:xfrm>
-            <a:off x="822960" y="2702560"/>
-            <a:ext cx="10545775" cy="560324"/>
-          </a:xfrm>
-          <a:prstGeom prst="rect">
-            <a:avLst/>
-          </a:prstGeom>
-          <a:noFill/>
-        </p:spPr>
-        <p:txBody>
-          <a:bodyPr wrap="square">
-            <a:spAutoFit/>
-          </a:bodyPr>
-          <a:lstStyle/>
-          <a:p>
-            <a:pPr algn="l"/>
-            <a:r>
-              <a:rPr sz="2600" b="0">
-                <a:solidFill>
-                  <a:srgbClr val="1A1A1A"/>
-                </a:solidFill>
-                <a:latin typeface="Leelawadee UI"/>
-                <a:ea typeface="Leelawadee UI"/>
-                <a:cs typeface="Leelawadee UI"/>
-              </a:rPr>
-              <a:t>• เทสต์เส้นทางหลักที่รันแล้วเห็นผล</a:t>
-            </a:r>
-          </a:p>
-        </p:txBody>
-      </p:sp>
-      <p:sp>
-        <p:nvSpPr>
-          <p:cNvPr id="6" name="TextBox 5"/>
-          <p:cNvSpPr txBox="1"/>
-          <p:nvPr/>
-        </p:nvSpPr>
-        <p:spPr>
-          <a:xfrm>
-            <a:off x="822960" y="3317748"/>
-            <a:ext cx="10545775" cy="560324"/>
-          </a:xfrm>
-          <a:prstGeom prst="rect">
-            <a:avLst/>
-          </a:prstGeom>
-          <a:noFill/>
-        </p:spPr>
-        <p:txBody>
-          <a:bodyPr wrap="square">
-            <a:spAutoFit/>
-          </a:bodyPr>
-          <a:lstStyle/>
-          <a:p>
-            <a:pPr algn="l"/>
-            <a:r>
-              <a:rPr sz="2600" b="0">
-                <a:solidFill>
-                  <a:srgbClr val="1A1A1A"/>
-                </a:solidFill>
-                <a:latin typeface="Leelawadee UI"/>
-                <a:ea typeface="Leelawadee UI"/>
-                <a:cs typeface="Leelawadee UI"/>
-              </a:rPr>
-              <a:t>• เทสต์ความปลอดภัยที่ "เข้าไม่ได้ = ผ่าน"</a:t>
-            </a:r>
-          </a:p>
-        </p:txBody>
-      </p:sp>
-      <p:sp>
-        <p:nvSpPr>
-          <p:cNvPr id="7" name="TextBox 6"/>
           <p:cNvSpPr txBox="1"/>
           <p:nvPr/>
         </p:nvSpPr>
@@ -18820,44 +19104,38 @@
       <p:grpSpPr/>
       <p:sp>
         <p:nvSpPr>
-          <p:cNvPr id="2" name="Rectangle 1"/>
-          <p:cNvSpPr/>
-          <p:nvPr/>
-        </p:nvSpPr>
-        <p:spPr>
-          <a:xfrm>
-            <a:off x="0" y="0"/>
-            <a:ext cx="12191695" cy="6858000"/>
-          </a:xfrm>
-          <a:prstGeom prst="rect">
-            <a:avLst/>
-          </a:prstGeom>
-          <a:solidFill>
-            <a:srgbClr val="1F5FA8"/>
-          </a:solidFill>
-          <a:ln>
-            <a:noFill/>
-          </a:ln>
-        </p:spPr>
-        <p:style>
-          <a:lnRef idx="1">
-            <a:schemeClr val="accent1"/>
-          </a:lnRef>
-          <a:fillRef idx="3">
-            <a:schemeClr val="accent1"/>
-          </a:fillRef>
-          <a:effectRef idx="2">
-            <a:schemeClr val="accent1"/>
-          </a:effectRef>
-          <a:fontRef idx="minor">
-            <a:schemeClr val="lt1"/>
-          </a:fontRef>
-        </p:style>
-        <p:txBody>
-          <a:bodyPr rtlCol="0" anchor="ctr"/>
-          <a:lstStyle/>
-          <a:p>
-            <a:pPr algn="ctr"/>
+          <p:cNvPr id="2" name="TextBox 1"/>
+          <p:cNvSpPr txBox="1"/>
+          <p:nvPr/>
+        </p:nvSpPr>
+        <p:spPr>
+          <a:xfrm>
+            <a:off x="822960" y="502920"/>
+            <a:ext cx="10545775" cy="804672"/>
+          </a:xfrm>
+          <a:prstGeom prst="rect">
+            <a:avLst/>
+          </a:prstGeom>
+          <a:noFill/>
+        </p:spPr>
+        <p:txBody>
+          <a:bodyPr wrap="square">
+            <a:spAutoFit/>
+          </a:bodyPr>
+          <a:lstStyle/>
+          <a:p>
+            <a:pPr algn="l"/>
+            <a:r>
+              <a:rPr sz="3600" b="1">
+                <a:solidFill>
+                  <a:srgbClr val="1F5FA8"/>
+                </a:solidFill>
+                <a:latin typeface="Leelawadee UI"/>
+                <a:ea typeface="Leelawadee UI"/>
+                <a:cs typeface="Leelawadee UI"/>
+              </a:rPr>
+              <a:t>เทสต์ผ่านบ้างไม่ผ่านบ้างแบบสุ่ม</a:t>
+            </a:r>
           </a:p>
         </p:txBody>
       </p:sp>
@@ -18869,31 +19147,31 @@
         </p:nvSpPr>
         <p:spPr>
           <a:xfrm>
-            <a:off x="822960" y="2743200"/>
-            <a:ext cx="10545775" cy="1463040"/>
-          </a:xfrm>
-          <a:prstGeom prst="rect">
-            <a:avLst/>
-          </a:prstGeom>
-          <a:noFill/>
-        </p:spPr>
-        <p:txBody>
-          <a:bodyPr wrap="square" anchor="ctr">
-            <a:spAutoFit/>
-          </a:bodyPr>
-          <a:lstStyle/>
-          <a:p>
-            <a:pPr algn="ctr"/>
-            <a:r>
-              <a:rPr sz="4000" b="1">
-                <a:solidFill>
-                  <a:srgbClr val="FFFFFF"/>
-                </a:solidFill>
-                <a:latin typeface="Leelawadee UI"/>
-                <a:ea typeface="Leelawadee UI"/>
-                <a:cs typeface="Leelawadee UI"/>
-              </a:rPr>
-              <a:t>🎤 ช่วงที่ 2 — Sprint 1 Review · 45 นาที</a:t>
+            <a:off x="822960" y="1472184"/>
+            <a:ext cx="10545775" cy="560324"/>
+          </a:xfrm>
+          <a:prstGeom prst="rect">
+            <a:avLst/>
+          </a:prstGeom>
+          <a:noFill/>
+        </p:spPr>
+        <p:txBody>
+          <a:bodyPr wrap="square">
+            <a:spAutoFit/>
+          </a:bodyPr>
+          <a:lstStyle/>
+          <a:p>
+            <a:pPr algn="l"/>
+            <a:r>
+              <a:rPr sz="2600" b="0">
+                <a:solidFill>
+                  <a:srgbClr val="1A1A1A"/>
+                </a:solidFill>
+                <a:latin typeface="Leelawadee UI"/>
+                <a:ea typeface="Leelawadee UI"/>
+                <a:cs typeface="Leelawadee UI"/>
+              </a:rPr>
+              <a:t>• อาการ: รันรอบนี้ผ่าน รอบหน้าไม่ผ่าน โดยไม่ได้แก้อะไร</a:t>
             </a:r>
           </a:p>
         </p:txBody>
@@ -18901,6 +19179,117 @@
       <p:sp>
         <p:nvSpPr>
           <p:cNvPr id="4" name="TextBox 3"/>
+          <p:cNvSpPr txBox="1"/>
+          <p:nvPr/>
+        </p:nvSpPr>
+        <p:spPr>
+          <a:xfrm>
+            <a:off x="822960" y="2087372"/>
+            <a:ext cx="10545775" cy="560324"/>
+          </a:xfrm>
+          <a:prstGeom prst="rect">
+            <a:avLst/>
+          </a:prstGeom>
+          <a:noFill/>
+        </p:spPr>
+        <p:txBody>
+          <a:bodyPr wrap="square">
+            <a:spAutoFit/>
+          </a:bodyPr>
+          <a:lstStyle/>
+          <a:p>
+            <a:pPr algn="l"/>
+            <a:r>
+              <a:rPr sz="2600" b="0">
+                <a:solidFill>
+                  <a:srgbClr val="1A1A1A"/>
+                </a:solidFill>
+                <a:latin typeface="Leelawadee UI"/>
+                <a:ea typeface="Leelawadee UI"/>
+                <a:cs typeface="Leelawadee UI"/>
+              </a:rPr>
+              <a:t>• สาเหตุที่พบบ่อยที่สุด: หน้าเว็บโหลดไม่ทัน</a:t>
+            </a:r>
+          </a:p>
+        </p:txBody>
+      </p:sp>
+      <p:sp>
+        <p:nvSpPr>
+          <p:cNvPr id="5" name="TextBox 4"/>
+          <p:cNvSpPr txBox="1"/>
+          <p:nvPr/>
+        </p:nvSpPr>
+        <p:spPr>
+          <a:xfrm>
+            <a:off x="822960" y="2702560"/>
+            <a:ext cx="10545775" cy="1029208"/>
+          </a:xfrm>
+          <a:prstGeom prst="rect">
+            <a:avLst/>
+          </a:prstGeom>
+          <a:noFill/>
+        </p:spPr>
+        <p:txBody>
+          <a:bodyPr wrap="square">
+            <a:spAutoFit/>
+          </a:bodyPr>
+          <a:lstStyle/>
+          <a:p>
+            <a:pPr algn="l"/>
+            <a:r>
+              <a:rPr sz="2600" b="0">
+                <a:solidFill>
+                  <a:srgbClr val="1A1A1A"/>
+                </a:solidFill>
+                <a:latin typeface="Leelawadee UI"/>
+                <a:ea typeface="Leelawadee UI"/>
+                <a:cs typeface="Leelawadee UI"/>
+              </a:rPr>
+              <a:t>• ทางแก้: ให้ AI รอจนกว่าองค์ประกอบที่ต้องการจะขึ้นจริง</a:t>
+            </a:r>
+          </a:p>
+        </p:txBody>
+      </p:sp>
+      <p:sp>
+        <p:nvSpPr>
+          <p:cNvPr id="6" name="TextBox 5"/>
+          <p:cNvSpPr txBox="1"/>
+          <p:nvPr/>
+        </p:nvSpPr>
+        <p:spPr>
+          <a:xfrm>
+            <a:off x="822960" y="3786632"/>
+            <a:ext cx="10545775" cy="1029208"/>
+          </a:xfrm>
+          <a:prstGeom prst="rect">
+            <a:avLst/>
+          </a:prstGeom>
+          <a:noFill/>
+        </p:spPr>
+        <p:txBody>
+          <a:bodyPr wrap="square">
+            <a:spAutoFit/>
+          </a:bodyPr>
+          <a:lstStyle/>
+          <a:p>
+            <a:pPr algn="l"/>
+            <a:r>
+              <a:rPr sz="2600" b="0">
+                <a:solidFill>
+                  <a:srgbClr val="1A1A1A"/>
+                </a:solidFill>
+                <a:latin typeface="Leelawadee UI"/>
+                <a:ea typeface="Leelawadee UI"/>
+                <a:cs typeface="Leelawadee UI"/>
+              </a:rPr>
+              <a:t>• 💬 "ให้เทสต์รอจนกว่าปุ่มบันทึกจะขึ้นบนหน้าจอก่อนจึงกด"</a:t>
+            </a:r>
+          </a:p>
+        </p:txBody>
+      </p:sp>
+      <p:sp>
+        <p:nvSpPr>
+          <p:cNvPr id="7" name="TextBox 6"/>
           <p:cNvSpPr txBox="1"/>
           <p:nvPr/>
         </p:nvSpPr>
@@ -18984,7 +19373,7 @@
                 <a:ea typeface="Leelawadee UI"/>
                 <a:cs typeface="Leelawadee UI"/>
               </a:rPr>
-              <a:t>Sprint Review ไม่ใช่การอวดผลงาน</a:t>
+              <a:t>✅ ช่วงนี้คุณต้องได้</a:t>
             </a:r>
           </a:p>
         </p:txBody>
@@ -19021,7 +19410,7 @@
                 <a:ea typeface="Leelawadee UI"/>
                 <a:cs typeface="Leelawadee UI"/>
               </a:rPr>
-              <a:t>• คือการเอาของจริงไปให้คนใช้ดู แล้วรับความจริงกลับมา</a:t>
+              <a:t>• /mcp ที่ขึ้นว่า Playwright เชื่อมต่อแล้ว</a:t>
             </a:r>
           </a:p>
         </p:txBody>
@@ -19058,7 +19447,7 @@
                 <a:ea typeface="Leelawadee UI"/>
                 <a:cs typeface="Leelawadee UI"/>
               </a:rPr>
-              <a:t>• เป้าหมายคือ feedback ไม่ใช่เสียงปรบมือ</a:t>
+              <a:t>• ไฟล์ตั้งค่า Tester ที่เปิดอ่านแล้ว</a:t>
             </a:r>
           </a:p>
         </p:txBody>
@@ -19072,7 +19461,7 @@
         <p:spPr>
           <a:xfrm>
             <a:off x="822960" y="2702560"/>
-            <a:ext cx="10545775" cy="1029208"/>
+            <a:ext cx="10545775" cy="560324"/>
           </a:xfrm>
           <a:prstGeom prst="rect">
             <a:avLst/>
@@ -19095,7 +19484,7 @@
                 <a:ea typeface="Leelawadee UI"/>
                 <a:cs typeface="Leelawadee UI"/>
               </a:rPr>
-              <a:t>• กลุ่มที่ได้ feedback แรง ๆ คือกลุ่มที่ได้ประโยชน์มากที่สุด</a:t>
+              <a:t>• เทสต์เส้นทางหลักที่รันแล้วเห็นผล</a:t>
             </a:r>
           </a:p>
         </p:txBody>
@@ -19108,7 +19497,7 @@
         </p:nvSpPr>
         <p:spPr>
           <a:xfrm>
-            <a:off x="822960" y="3786632"/>
+            <a:off x="822960" y="3317748"/>
             <a:ext cx="10545775" cy="560324"/>
           </a:xfrm>
           <a:prstGeom prst="rect">
@@ -19132,7 +19521,7 @@
                 <a:ea typeface="Leelawadee UI"/>
                 <a:cs typeface="Leelawadee UI"/>
               </a:rPr>
-              <a:t>• (ต่อยอดจาก Agile ที่เรียนไว้ Module 1)</a:t>
+              <a:t>• เทสต์ความปลอดภัยที่ "เข้าไม่ได้ = ผ่าน"</a:t>
             </a:r>
           </a:p>
         </p:txBody>
@@ -19140,6 +19529,43 @@
       <p:sp>
         <p:nvSpPr>
           <p:cNvPr id="7" name="TextBox 6"/>
+          <p:cNvSpPr txBox="1"/>
+          <p:nvPr/>
+        </p:nvSpPr>
+        <p:spPr>
+          <a:xfrm>
+            <a:off x="822960" y="3932936"/>
+            <a:ext cx="10545775" cy="560324"/>
+          </a:xfrm>
+          <a:prstGeom prst="rect">
+            <a:avLst/>
+          </a:prstGeom>
+          <a:noFill/>
+        </p:spPr>
+        <p:txBody>
+          <a:bodyPr wrap="square">
+            <a:spAutoFit/>
+          </a:bodyPr>
+          <a:lstStyle/>
+          <a:p>
+            <a:pPr algn="l"/>
+            <a:r>
+              <a:rPr sz="2600" b="0">
+                <a:solidFill>
+                  <a:srgbClr val="1A1A1A"/>
+                </a:solidFill>
+                <a:latin typeface="Leelawadee UI"/>
+                <a:ea typeface="Leelawadee UI"/>
+                <a:cs typeface="Leelawadee UI"/>
+              </a:rPr>
+              <a:t>• เทสต์ปุ่ม AI ที่ "ไม่ค้าง = ผ่าน"</a:t>
+            </a:r>
+          </a:p>
+        </p:txBody>
+      </p:sp>
+      <p:sp>
+        <p:nvSpPr>
+          <p:cNvPr id="8" name="TextBox 7"/>
           <p:cNvSpPr txBox="1"/>
           <p:nvPr/>
         </p:nvSpPr>
@@ -19193,57 +19619,20 @@
       <p:grpSpPr/>
       <p:sp>
         <p:nvSpPr>
-          <p:cNvPr id="2" name="TextBox 1"/>
-          <p:cNvSpPr txBox="1"/>
-          <p:nvPr/>
-        </p:nvSpPr>
-        <p:spPr>
-          <a:xfrm>
-            <a:off x="822960" y="502920"/>
-            <a:ext cx="10545775" cy="804672"/>
-          </a:xfrm>
-          <a:prstGeom prst="rect">
-            <a:avLst/>
-          </a:prstGeom>
-          <a:noFill/>
-        </p:spPr>
-        <p:txBody>
-          <a:bodyPr wrap="square">
-            <a:spAutoFit/>
-          </a:bodyPr>
-          <a:lstStyle/>
-          <a:p>
-            <a:pPr algn="l"/>
-            <a:r>
-              <a:rPr sz="3600" b="1">
-                <a:solidFill>
-                  <a:srgbClr val="1F5FA8"/>
-                </a:solidFill>
-                <a:latin typeface="Leelawadee UI"/>
-                <a:ea typeface="Leelawadee UI"/>
-                <a:cs typeface="Leelawadee UI"/>
-              </a:rPr>
-              <a:t>บ่ายนี้เกิดอะไรขึ้น</a:t>
-            </a:r>
-          </a:p>
-        </p:txBody>
-      </p:sp>
-      <p:sp>
-        <p:nvSpPr>
-          <p:cNvPr id="3" name="Rectangle 2"/>
+          <p:cNvPr id="2" name="Rectangle 1"/>
           <p:cNvSpPr/>
           <p:nvPr/>
         </p:nvSpPr>
         <p:spPr>
           <a:xfrm>
-            <a:off x="822960" y="1472184"/>
-            <a:ext cx="10545775" cy="2231136"/>
+            <a:off x="0" y="0"/>
+            <a:ext cx="12191695" cy="6858000"/>
           </a:xfrm>
           <a:prstGeom prst="rect">
             <a:avLst/>
           </a:prstGeom>
           <a:solidFill>
-            <a:srgbClr val="F2F4F7"/>
+            <a:srgbClr val="1F5FA8"/>
           </a:solidFill>
           <a:ln>
             <a:noFill/>
@@ -19264,90 +19653,46 @@
           </a:fontRef>
         </p:style>
         <p:txBody>
-          <a:bodyPr rtlCol="0" anchor="ctr" wrap="none" lIns="228600" tIns="137160"/>
-          <a:lstStyle/>
-          <a:p>
-            <a:pPr algn="l"/>
-            <a:r>
-              <a:rPr sz="1800" b="0">
-                <a:solidFill>
-                  <a:srgbClr val="1A1A1A"/>
-                </a:solidFill>
-                <a:latin typeface="Consolas"/>
-                <a:ea typeface="Consolas"/>
-                <a:cs typeface="Consolas"/>
-              </a:rPr>
-              <a:t>13:00 – 14:45  🔧 กลุ่มตั้ง Tester + Playwright</a:t>
-            </a:r>
-          </a:p>
-          <a:p>
-            <a:pPr algn="l"/>
-            <a:r>
-              <a:rPr sz="1800" b="0">
-                <a:solidFill>
-                  <a:srgbClr val="1A1A1A"/>
-                </a:solidFill>
-                <a:latin typeface="Consolas"/>
-                <a:ea typeface="Consolas"/>
-                <a:cs typeface="Consolas"/>
-              </a:rPr>
-              <a:t>                  และเขียนเทสต์ให้ผ่าน</a:t>
-            </a:r>
-          </a:p>
-          <a:p>
-            <a:pPr algn="l"/>
-            <a:r>
-              <a:rPr sz="1800" b="0">
-                <a:solidFill>
-                  <a:srgbClr val="1A1A1A"/>
-                </a:solidFill>
-                <a:latin typeface="Consolas"/>
-                <a:ea typeface="Consolas"/>
-                <a:cs typeface="Consolas"/>
-              </a:rPr>
-              <a:t>14:45 – 15:45  🔀 Sprint 1 Review · 3 ห้องขนานกัน</a:t>
-            </a:r>
-          </a:p>
-          <a:p>
-            <a:pPr algn="l"/>
-            <a:r>
-              <a:rPr sz="1800" b="0">
-                <a:solidFill>
-                  <a:srgbClr val="1A1A1A"/>
-                </a:solidFill>
-                <a:latin typeface="Consolas"/>
-                <a:ea typeface="Consolas"/>
-                <a:cs typeface="Consolas"/>
-              </a:rPr>
-              <a:t>                  ห้องละ 3–4 กลุ่ม · กลุ่มละ 5 นาที</a:t>
-            </a:r>
-          </a:p>
-          <a:p>
-            <a:pPr algn="l"/>
-            <a:r>
-              <a:rPr sz="1800" b="0">
-                <a:solidFill>
-                  <a:srgbClr val="1A1A1A"/>
-                </a:solidFill>
-                <a:latin typeface="Consolas"/>
-                <a:ea typeface="Consolas"/>
-                <a:cs typeface="Consolas"/>
-              </a:rPr>
-              <a:t>                  + ถาม-ตอบ 3 นาที</a:t>
-            </a:r>
-          </a:p>
-          <a:p>
-            <a:pPr algn="l"/>
-            <a:r>
-              <a:rPr sz="1800" b="0">
-                <a:solidFill>
-                  <a:srgbClr val="1A1A1A"/>
-                </a:solidFill>
-                <a:latin typeface="Consolas"/>
-                <a:ea typeface="Consolas"/>
-                <a:cs typeface="Consolas"/>
-              </a:rPr>
-              <a:t>15:45 – 16:00  🏆 รวมห้องใหญ่ · ตัวแทน 3 กลุ่ม · ปิด Module</a:t>
+          <a:bodyPr rtlCol="0" anchor="ctr"/>
+          <a:lstStyle/>
+          <a:p>
+            <a:pPr algn="ctr"/>
+          </a:p>
+        </p:txBody>
+      </p:sp>
+      <p:sp>
+        <p:nvSpPr>
+          <p:cNvPr id="3" name="TextBox 2"/>
+          <p:cNvSpPr txBox="1"/>
+          <p:nvPr/>
+        </p:nvSpPr>
+        <p:spPr>
+          <a:xfrm>
+            <a:off x="822960" y="2743200"/>
+            <a:ext cx="10545775" cy="1463040"/>
+          </a:xfrm>
+          <a:prstGeom prst="rect">
+            <a:avLst/>
+          </a:prstGeom>
+          <a:noFill/>
+        </p:spPr>
+        <p:txBody>
+          <a:bodyPr wrap="square" anchor="ctr">
+            <a:spAutoFit/>
+          </a:bodyPr>
+          <a:lstStyle/>
+          <a:p>
+            <a:pPr algn="ctr"/>
+            <a:r>
+              <a:rPr sz="4000" b="1">
+                <a:solidFill>
+                  <a:srgbClr val="FFFFFF"/>
+                </a:solidFill>
+                <a:latin typeface="Leelawadee UI"/>
+                <a:ea typeface="Leelawadee UI"/>
+                <a:cs typeface="Leelawadee UI"/>
+              </a:rPr>
+              <a:t>🎤 ช่วงที่ 2 — Sprint 1 Review · 40 นาที</a:t>
             </a:r>
           </a:p>
         </p:txBody>
@@ -19438,7 +19783,7 @@
                 <a:ea typeface="Leelawadee UI"/>
                 <a:cs typeface="Leelawadee UI"/>
               </a:rPr>
-              <a:t>นำเสนอด้วยโครงงานของกลุ่มเอง</a:t>
+              <a:t>Sprint Review ไม่ใช่การอวดผลงาน</a:t>
             </a:r>
           </a:p>
         </p:txBody>
@@ -19475,7 +19820,7 @@
                 <a:ea typeface="Leelawadee UI"/>
                 <a:cs typeface="Leelawadee UI"/>
               </a:rPr>
-              <a:t>• ⚠️ ไม่ใช่ FixIt และไม่ใช่ LeaveEasy</a:t>
+              <a:t>• คือการเอาของจริงไปให้คนใช้ดู แล้วรับความจริงกลับมา</a:t>
             </a:r>
           </a:p>
         </p:txBody>
@@ -19512,7 +19857,7 @@
                 <a:ea typeface="Leelawadee UI"/>
                 <a:cs typeface="Leelawadee UI"/>
               </a:rPr>
-              <a:t>• FixIt กับ LeaveEasy เป็นตัวอย่างสำหรับฝึก</a:t>
+              <a:t>• เป้าหมายคือ feedback ไม่ใช่เสียงปรบมือ</a:t>
             </a:r>
           </a:p>
         </p:txBody>
@@ -19526,6 +19871,43 @@
         <p:spPr>
           <a:xfrm>
             <a:off x="822960" y="2702560"/>
+            <a:ext cx="10545775" cy="1029208"/>
+          </a:xfrm>
+          <a:prstGeom prst="rect">
+            <a:avLst/>
+          </a:prstGeom>
+          <a:noFill/>
+        </p:spPr>
+        <p:txBody>
+          <a:bodyPr wrap="square">
+            <a:spAutoFit/>
+          </a:bodyPr>
+          <a:lstStyle/>
+          <a:p>
+            <a:pPr algn="l"/>
+            <a:r>
+              <a:rPr sz="2600" b="0">
+                <a:solidFill>
+                  <a:srgbClr val="1A1A1A"/>
+                </a:solidFill>
+                <a:latin typeface="Leelawadee UI"/>
+                <a:ea typeface="Leelawadee UI"/>
+                <a:cs typeface="Leelawadee UI"/>
+              </a:rPr>
+              <a:t>• กลุ่มที่ได้ feedback แรง ๆ คือกลุ่มที่ได้ประโยชน์มากที่สุด</a:t>
+            </a:r>
+          </a:p>
+        </p:txBody>
+      </p:sp>
+      <p:sp>
+        <p:nvSpPr>
+          <p:cNvPr id="6" name="TextBox 5"/>
+          <p:cNvSpPr txBox="1"/>
+          <p:nvPr/>
+        </p:nvSpPr>
+        <p:spPr>
+          <a:xfrm>
+            <a:off x="822960" y="3786632"/>
             <a:ext cx="10545775" cy="560324"/>
           </a:xfrm>
           <a:prstGeom prst="rect">
@@ -19549,14 +19931,14 @@
                 <a:ea typeface="Leelawadee UI"/>
                 <a:cs typeface="Leelawadee UI"/>
               </a:rPr>
-              <a:t>• สิ่งที่นำเสนอคือโครงงานของกลุ่มคุณ</a:t>
-            </a:r>
-          </a:p>
-        </p:txBody>
-      </p:sp>
-      <p:sp>
-        <p:nvSpPr>
-          <p:cNvPr id="6" name="TextBox 5"/>
+              <a:t>• (ต่อยอดจาก Agile ที่เรียนไว้ Module 1)</a:t>
+            </a:r>
+          </a:p>
+        </p:txBody>
+      </p:sp>
+      <p:sp>
+        <p:nvSpPr>
+          <p:cNvPr id="7" name="TextBox 6"/>
           <p:cNvSpPr txBox="1"/>
           <p:nvPr/>
         </p:nvSpPr>
@@ -19640,44 +20022,131 @@
                 <a:ea typeface="Leelawadee UI"/>
                 <a:cs typeface="Leelawadee UI"/>
               </a:rPr>
-              <a:t>👥 ทุกคนในกลุ่มต้องพูด</a:t>
-            </a:r>
-          </a:p>
-        </p:txBody>
-      </p:sp>
-      <p:sp>
-        <p:nvSpPr>
-          <p:cNvPr id="3" name="TextBox 2"/>
-          <p:cNvSpPr txBox="1"/>
+              <a:t>บ่ายนี้เกิดอะไรขึ้น</a:t>
+            </a:r>
+          </a:p>
+        </p:txBody>
+      </p:sp>
+      <p:sp>
+        <p:nvSpPr>
+          <p:cNvPr id="3" name="Rectangle 2"/>
+          <p:cNvSpPr/>
           <p:nvPr/>
         </p:nvSpPr>
         <p:spPr>
           <a:xfrm>
             <a:off x="822960" y="1472184"/>
-            <a:ext cx="10545775" cy="560324"/>
-          </a:xfrm>
-          <a:prstGeom prst="rect">
-            <a:avLst/>
-          </a:prstGeom>
-          <a:noFill/>
-        </p:spPr>
-        <p:txBody>
-          <a:bodyPr wrap="square">
-            <a:spAutoFit/>
-          </a:bodyPr>
-          <a:lstStyle/>
-          <a:p>
-            <a:pPr algn="l"/>
-            <a:r>
-              <a:rPr sz="2600" b="0">
+            <a:ext cx="10545775" cy="2231136"/>
+          </a:xfrm>
+          <a:prstGeom prst="rect">
+            <a:avLst/>
+          </a:prstGeom>
+          <a:solidFill>
+            <a:srgbClr val="F2F4F7"/>
+          </a:solidFill>
+          <a:ln>
+            <a:noFill/>
+          </a:ln>
+        </p:spPr>
+        <p:style>
+          <a:lnRef idx="1">
+            <a:schemeClr val="accent1"/>
+          </a:lnRef>
+          <a:fillRef idx="3">
+            <a:schemeClr val="accent1"/>
+          </a:fillRef>
+          <a:effectRef idx="2">
+            <a:schemeClr val="accent1"/>
+          </a:effectRef>
+          <a:fontRef idx="minor">
+            <a:schemeClr val="lt1"/>
+          </a:fontRef>
+        </p:style>
+        <p:txBody>
+          <a:bodyPr rtlCol="0" anchor="ctr" wrap="none" lIns="228600" tIns="137160"/>
+          <a:lstStyle/>
+          <a:p>
+            <a:pPr algn="l"/>
+            <a:r>
+              <a:rPr sz="1800" b="0">
                 <a:solidFill>
                   <a:srgbClr val="1A1A1A"/>
                 </a:solidFill>
-                <a:latin typeface="Leelawadee UI"/>
-                <a:ea typeface="Leelawadee UI"/>
-                <a:cs typeface="Leelawadee UI"/>
-              </a:rPr>
-              <a:t>• แบ่งกันเล่าคนละท่อน ไม่ใช่ตัวแทนพูดคนเดียว</a:t>
+                <a:latin typeface="Consolas"/>
+                <a:ea typeface="Consolas"/>
+                <a:cs typeface="Consolas"/>
+              </a:rPr>
+              <a:t>13:00 – 14:45  🔧 กลุ่มตั้ง Tester + Playwright</a:t>
+            </a:r>
+          </a:p>
+          <a:p>
+            <a:pPr algn="l"/>
+            <a:r>
+              <a:rPr sz="1800" b="0">
+                <a:solidFill>
+                  <a:srgbClr val="1A1A1A"/>
+                </a:solidFill>
+                <a:latin typeface="Consolas"/>
+                <a:ea typeface="Consolas"/>
+                <a:cs typeface="Consolas"/>
+              </a:rPr>
+              <a:t>                  และเขียนเทสต์ให้ผ่าน</a:t>
+            </a:r>
+          </a:p>
+          <a:p>
+            <a:pPr algn="l"/>
+            <a:r>
+              <a:rPr sz="1800" b="0">
+                <a:solidFill>
+                  <a:srgbClr val="1A1A1A"/>
+                </a:solidFill>
+                <a:latin typeface="Consolas"/>
+                <a:ea typeface="Consolas"/>
+                <a:cs typeface="Consolas"/>
+              </a:rPr>
+              <a:t>14:45 – 15:45  🔀 Sprint 1 Review · 3 ห้องขนานกัน</a:t>
+            </a:r>
+          </a:p>
+          <a:p>
+            <a:pPr algn="l"/>
+            <a:r>
+              <a:rPr sz="1800" b="0">
+                <a:solidFill>
+                  <a:srgbClr val="1A1A1A"/>
+                </a:solidFill>
+                <a:latin typeface="Consolas"/>
+                <a:ea typeface="Consolas"/>
+                <a:cs typeface="Consolas"/>
+              </a:rPr>
+              <a:t>                  ห้องละ 3–4 กลุ่ม · กลุ่มละ 5 นาที</a:t>
+            </a:r>
+          </a:p>
+          <a:p>
+            <a:pPr algn="l"/>
+            <a:r>
+              <a:rPr sz="1800" b="0">
+                <a:solidFill>
+                  <a:srgbClr val="1A1A1A"/>
+                </a:solidFill>
+                <a:latin typeface="Consolas"/>
+                <a:ea typeface="Consolas"/>
+                <a:cs typeface="Consolas"/>
+              </a:rPr>
+              <a:t>                  + ถาม-ตอบ 3 นาที</a:t>
+            </a:r>
+          </a:p>
+          <a:p>
+            <a:pPr algn="l"/>
+            <a:r>
+              <a:rPr sz="1800" b="0">
+                <a:solidFill>
+                  <a:srgbClr val="1A1A1A"/>
+                </a:solidFill>
+                <a:latin typeface="Consolas"/>
+                <a:ea typeface="Consolas"/>
+                <a:cs typeface="Consolas"/>
+              </a:rPr>
+              <a:t>15:45 – 16:00  🏆 รวมห้องใหญ่ · ตัวแทน 3 กลุ่ม · ปิด Module</a:t>
             </a:r>
           </a:p>
         </p:txBody>
@@ -19685,117 +20154,6 @@
       <p:sp>
         <p:nvSpPr>
           <p:cNvPr id="4" name="TextBox 3"/>
-          <p:cNvSpPr txBox="1"/>
-          <p:nvPr/>
-        </p:nvSpPr>
-        <p:spPr>
-          <a:xfrm>
-            <a:off x="822960" y="2087372"/>
-            <a:ext cx="10545775" cy="560324"/>
-          </a:xfrm>
-          <a:prstGeom prst="rect">
-            <a:avLst/>
-          </a:prstGeom>
-          <a:noFill/>
-        </p:spPr>
-        <p:txBody>
-          <a:bodyPr wrap="square">
-            <a:spAutoFit/>
-          </a:bodyPr>
-          <a:lstStyle/>
-          <a:p>
-            <a:pPr algn="l"/>
-            <a:r>
-              <a:rPr sz="2600" b="0">
-                <a:solidFill>
-                  <a:srgbClr val="1A1A1A"/>
-                </a:solidFill>
-                <a:latin typeface="Leelawadee UI"/>
-                <a:ea typeface="Leelawadee UI"/>
-                <a:cs typeface="Leelawadee UI"/>
-              </a:rPr>
-              <a:t>• ข้อนี้เป็นเกณฑ์ประเมินรายบุคคล</a:t>
-            </a:r>
-          </a:p>
-        </p:txBody>
-      </p:sp>
-      <p:sp>
-        <p:nvSpPr>
-          <p:cNvPr id="5" name="TextBox 4"/>
-          <p:cNvSpPr txBox="1"/>
-          <p:nvPr/>
-        </p:nvSpPr>
-        <p:spPr>
-          <a:xfrm>
-            <a:off x="822960" y="2702560"/>
-            <a:ext cx="10545775" cy="560324"/>
-          </a:xfrm>
-          <a:prstGeom prst="rect">
-            <a:avLst/>
-          </a:prstGeom>
-          <a:noFill/>
-        </p:spPr>
-        <p:txBody>
-          <a:bodyPr wrap="square">
-            <a:spAutoFit/>
-          </a:bodyPr>
-          <a:lstStyle/>
-          <a:p>
-            <a:pPr algn="l"/>
-            <a:r>
-              <a:rPr sz="2600" b="0">
-                <a:solidFill>
-                  <a:srgbClr val="1A1A1A"/>
-                </a:solidFill>
-                <a:latin typeface="Leelawadee UI"/>
-                <a:ea typeface="Leelawadee UI"/>
-                <a:cs typeface="Leelawadee UI"/>
-              </a:rPr>
-              <a:t>• คนที่ไม่ได้พูดและตอบคำถามไม่ได้ = ยังไม่ผ่าน</a:t>
-            </a:r>
-          </a:p>
-        </p:txBody>
-      </p:sp>
-      <p:sp>
-        <p:nvSpPr>
-          <p:cNvPr id="6" name="TextBox 5"/>
-          <p:cNvSpPr txBox="1"/>
-          <p:nvPr/>
-        </p:nvSpPr>
-        <p:spPr>
-          <a:xfrm>
-            <a:off x="822960" y="3317748"/>
-            <a:ext cx="10545775" cy="560324"/>
-          </a:xfrm>
-          <a:prstGeom prst="rect">
-            <a:avLst/>
-          </a:prstGeom>
-          <a:noFill/>
-        </p:spPr>
-        <p:txBody>
-          <a:bodyPr wrap="square">
-            <a:spAutoFit/>
-          </a:bodyPr>
-          <a:lstStyle/>
-          <a:p>
-            <a:pPr algn="l"/>
-            <a:r>
-              <a:rPr sz="2600" b="0">
-                <a:solidFill>
-                  <a:srgbClr val="1A1A1A"/>
-                </a:solidFill>
-                <a:latin typeface="Leelawadee UI"/>
-                <a:ea typeface="Leelawadee UI"/>
-                <a:cs typeface="Leelawadee UI"/>
-              </a:rPr>
-              <a:t>• แม้ระบบของกลุ่มจะทำงานได้ครบก็ตาม</a:t>
-            </a:r>
-          </a:p>
-        </p:txBody>
-      </p:sp>
-      <p:sp>
-        <p:nvSpPr>
-          <p:cNvPr id="7" name="TextBox 6"/>
           <p:cNvSpPr txBox="1"/>
           <p:nvPr/>
         </p:nvSpPr>
@@ -19879,7 +20237,7 @@
                 <a:ea typeface="Leelawadee UI"/>
                 <a:cs typeface="Leelawadee UI"/>
               </a:rPr>
-              <a:t>โครงนำเสนอ 5 นาที — 5 ช่อง</a:t>
+              <a:t>นำเสนอด้วยโครงงานของกลุ่มเอง</a:t>
             </a:r>
           </a:p>
         </p:txBody>
@@ -19916,7 +20274,7 @@
                 <a:ea typeface="Leelawadee UI"/>
                 <a:cs typeface="Leelawadee UI"/>
               </a:rPr>
-              <a:t>• 1️⃣ ปัญหาคืออะไร</a:t>
+              <a:t>• ⚠️ ไม่ใช่ FixIt และไม่ใช่ LeaveEasy</a:t>
             </a:r>
           </a:p>
         </p:txBody>
@@ -19953,7 +20311,7 @@
                 <a:ea typeface="Leelawadee UI"/>
                 <a:cs typeface="Leelawadee UI"/>
               </a:rPr>
-              <a:t>• 2️⃣ ผู้ใช้เป็นใคร</a:t>
+              <a:t>• FixIt กับ LeaveEasy เป็นตัวอย่างสำหรับฝึก</a:t>
             </a:r>
           </a:p>
         </p:txBody>
@@ -19990,7 +20348,7 @@
                 <a:ea typeface="Leelawadee UI"/>
                 <a:cs typeface="Leelawadee UI"/>
               </a:rPr>
-              <a:t>• 3️⃣ สาธิตสดบน URL จริง ← ใช้เวลามากที่สุด</a:t>
+              <a:t>• สิ่งที่นำเสนอคือโครงงานของกลุ่มคุณ</a:t>
             </a:r>
           </a:p>
         </p:txBody>
@@ -19998,80 +20356,6 @@
       <p:sp>
         <p:nvSpPr>
           <p:cNvPr id="6" name="TextBox 5"/>
-          <p:cNvSpPr txBox="1"/>
-          <p:nvPr/>
-        </p:nvSpPr>
-        <p:spPr>
-          <a:xfrm>
-            <a:off x="822960" y="3317748"/>
-            <a:ext cx="10545775" cy="560324"/>
-          </a:xfrm>
-          <a:prstGeom prst="rect">
-            <a:avLst/>
-          </a:prstGeom>
-          <a:noFill/>
-        </p:spPr>
-        <p:txBody>
-          <a:bodyPr wrap="square">
-            <a:spAutoFit/>
-          </a:bodyPr>
-          <a:lstStyle/>
-          <a:p>
-            <a:pPr algn="l"/>
-            <a:r>
-              <a:rPr sz="2600" b="0">
-                <a:solidFill>
-                  <a:srgbClr val="1A1A1A"/>
-                </a:solidFill>
-                <a:latin typeface="Leelawadee UI"/>
-                <a:ea typeface="Leelawadee UI"/>
-                <a:cs typeface="Leelawadee UI"/>
-              </a:rPr>
-              <a:t>• 4️⃣ สิ่งที่เรียนรู้ — อะไรพัง แก้อย่างไร</a:t>
-            </a:r>
-          </a:p>
-        </p:txBody>
-      </p:sp>
-      <p:sp>
-        <p:nvSpPr>
-          <p:cNvPr id="7" name="TextBox 6"/>
-          <p:cNvSpPr txBox="1"/>
-          <p:nvPr/>
-        </p:nvSpPr>
-        <p:spPr>
-          <a:xfrm>
-            <a:off x="822960" y="3932936"/>
-            <a:ext cx="10545775" cy="560324"/>
-          </a:xfrm>
-          <a:prstGeom prst="rect">
-            <a:avLst/>
-          </a:prstGeom>
-          <a:noFill/>
-        </p:spPr>
-        <p:txBody>
-          <a:bodyPr wrap="square">
-            <a:spAutoFit/>
-          </a:bodyPr>
-          <a:lstStyle/>
-          <a:p>
-            <a:pPr algn="l"/>
-            <a:r>
-              <a:rPr sz="2600" b="0">
-                <a:solidFill>
-                  <a:srgbClr val="1A1A1A"/>
-                </a:solidFill>
-                <a:latin typeface="Leelawadee UI"/>
-                <a:ea typeface="Leelawadee UI"/>
-                <a:cs typeface="Leelawadee UI"/>
-              </a:rPr>
-              <a:t>• 5️⃣ จะทำอะไรต่อใน Sprint 2</a:t>
-            </a:r>
-          </a:p>
-        </p:txBody>
-      </p:sp>
-      <p:sp>
-        <p:nvSpPr>
-          <p:cNvPr id="8" name="TextBox 7"/>
           <p:cNvSpPr txBox="1"/>
           <p:nvPr/>
         </p:nvSpPr>
@@ -20505,110 +20789,162 @@
                 <a:ea typeface="Leelawadee UI"/>
                 <a:cs typeface="Leelawadee UI"/>
               </a:rPr>
-              <a:t>5 นาทีนั้นใช้อย่างไร — และใครพูดช่องไหน</a:t>
-            </a:r>
-          </a:p>
-        </p:txBody>
-      </p:sp>
-      <p:sp>
-        <p:nvSpPr>
-          <p:cNvPr id="3" name="Rectangle 2"/>
-          <p:cNvSpPr/>
+              <a:t>👥 ทุกคนในกลุ่มต้องพูด</a:t>
+            </a:r>
+          </a:p>
+        </p:txBody>
+      </p:sp>
+      <p:sp>
+        <p:nvSpPr>
+          <p:cNvPr id="3" name="TextBox 2"/>
+          <p:cNvSpPr txBox="1"/>
           <p:nvPr/>
         </p:nvSpPr>
         <p:spPr>
           <a:xfrm>
             <a:off x="822960" y="1472184"/>
-            <a:ext cx="10545775" cy="1609344"/>
-          </a:xfrm>
-          <a:prstGeom prst="rect">
-            <a:avLst/>
-          </a:prstGeom>
-          <a:solidFill>
-            <a:srgbClr val="F2F4F7"/>
-          </a:solidFill>
-          <a:ln>
-            <a:noFill/>
-          </a:ln>
-        </p:spPr>
-        <p:style>
-          <a:lnRef idx="1">
-            <a:schemeClr val="accent1"/>
-          </a:lnRef>
-          <a:fillRef idx="3">
-            <a:schemeClr val="accent1"/>
-          </a:fillRef>
-          <a:effectRef idx="2">
-            <a:schemeClr val="accent1"/>
-          </a:effectRef>
-          <a:fontRef idx="minor">
-            <a:schemeClr val="lt1"/>
-          </a:fontRef>
-        </p:style>
-        <p:txBody>
-          <a:bodyPr rtlCol="0" anchor="ctr" wrap="none" lIns="228600" tIns="137160"/>
-          <a:lstStyle/>
-          <a:p>
-            <a:pPr algn="l"/>
-            <a:r>
-              <a:rPr sz="1800" b="0">
+            <a:ext cx="10545775" cy="560324"/>
+          </a:xfrm>
+          <a:prstGeom prst="rect">
+            <a:avLst/>
+          </a:prstGeom>
+          <a:noFill/>
+        </p:spPr>
+        <p:txBody>
+          <a:bodyPr wrap="square">
+            <a:spAutoFit/>
+          </a:bodyPr>
+          <a:lstStyle/>
+          <a:p>
+            <a:pPr algn="l"/>
+            <a:r>
+              <a:rPr sz="2600" b="0">
                 <a:solidFill>
                   <a:srgbClr val="1A1A1A"/>
                 </a:solidFill>
-                <a:latin typeface="Consolas"/>
-                <a:ea typeface="Consolas"/>
-                <a:cs typeface="Consolas"/>
-              </a:rPr>
-              <a:t>0:00 – 0:45   ปัญหา + ผู้ใช้เป็นใคร        คนที่ 1</a:t>
-            </a:r>
-          </a:p>
-          <a:p>
-            <a:pPr algn="l"/>
-            <a:r>
-              <a:rPr sz="1800" b="0">
+                <a:latin typeface="Leelawadee UI"/>
+                <a:ea typeface="Leelawadee UI"/>
+                <a:cs typeface="Leelawadee UI"/>
+              </a:rPr>
+              <a:t>• แบ่งกันเล่าคนละท่อน ไม่ใช่ตัวแทนพูดคนเดียว</a:t>
+            </a:r>
+          </a:p>
+        </p:txBody>
+      </p:sp>
+      <p:sp>
+        <p:nvSpPr>
+          <p:cNvPr id="4" name="TextBox 3"/>
+          <p:cNvSpPr txBox="1"/>
+          <p:nvPr/>
+        </p:nvSpPr>
+        <p:spPr>
+          <a:xfrm>
+            <a:off x="822960" y="2087372"/>
+            <a:ext cx="10545775" cy="560324"/>
+          </a:xfrm>
+          <a:prstGeom prst="rect">
+            <a:avLst/>
+          </a:prstGeom>
+          <a:noFill/>
+        </p:spPr>
+        <p:txBody>
+          <a:bodyPr wrap="square">
+            <a:spAutoFit/>
+          </a:bodyPr>
+          <a:lstStyle/>
+          <a:p>
+            <a:pPr algn="l"/>
+            <a:r>
+              <a:rPr sz="2600" b="0">
                 <a:solidFill>
                   <a:srgbClr val="1A1A1A"/>
                 </a:solidFill>
-                <a:latin typeface="Consolas"/>
-                <a:ea typeface="Consolas"/>
-                <a:cs typeface="Consolas"/>
-              </a:rPr>
-              <a:t>0:45 – 3:00   🖥️ สาธิตสดบน URL จริง        คนที่ 2 (คนที่พิมพ์น้อยสุด)</a:t>
-            </a:r>
-          </a:p>
-          <a:p>
-            <a:pPr algn="l"/>
-            <a:r>
-              <a:rPr sz="1800" b="0">
+                <a:latin typeface="Leelawadee UI"/>
+                <a:ea typeface="Leelawadee UI"/>
+                <a:cs typeface="Leelawadee UI"/>
+              </a:rPr>
+              <a:t>• ข้อนี้เป็นเกณฑ์ประเมินรายบุคคล</a:t>
+            </a:r>
+          </a:p>
+        </p:txBody>
+      </p:sp>
+      <p:sp>
+        <p:nvSpPr>
+          <p:cNvPr id="5" name="TextBox 4"/>
+          <p:cNvSpPr txBox="1"/>
+          <p:nvPr/>
+        </p:nvSpPr>
+        <p:spPr>
+          <a:xfrm>
+            <a:off x="822960" y="2702560"/>
+            <a:ext cx="10545775" cy="560324"/>
+          </a:xfrm>
+          <a:prstGeom prst="rect">
+            <a:avLst/>
+          </a:prstGeom>
+          <a:noFill/>
+        </p:spPr>
+        <p:txBody>
+          <a:bodyPr wrap="square">
+            <a:spAutoFit/>
+          </a:bodyPr>
+          <a:lstStyle/>
+          <a:p>
+            <a:pPr algn="l"/>
+            <a:r>
+              <a:rPr sz="2600" b="0">
                 <a:solidFill>
                   <a:srgbClr val="1A1A1A"/>
                 </a:solidFill>
-                <a:latin typeface="Consolas"/>
-                <a:ea typeface="Consolas"/>
-                <a:cs typeface="Consolas"/>
-              </a:rPr>
-              <a:t>3:00 – 4:00   สิ่งที่เรียนรู้ · อะไรพัง      คนที่ 3</a:t>
-            </a:r>
-          </a:p>
-          <a:p>
-            <a:pPr algn="l"/>
-            <a:r>
-              <a:rPr sz="1800" b="0">
+                <a:latin typeface="Leelawadee UI"/>
+                <a:ea typeface="Leelawadee UI"/>
+                <a:cs typeface="Leelawadee UI"/>
+              </a:rPr>
+              <a:t>• คนที่ไม่ได้พูดและตอบคำถามไม่ได้ = ยังไม่ผ่าน</a:t>
+            </a:r>
+          </a:p>
+        </p:txBody>
+      </p:sp>
+      <p:sp>
+        <p:nvSpPr>
+          <p:cNvPr id="6" name="TextBox 5"/>
+          <p:cNvSpPr txBox="1"/>
+          <p:nvPr/>
+        </p:nvSpPr>
+        <p:spPr>
+          <a:xfrm>
+            <a:off x="822960" y="3317748"/>
+            <a:ext cx="10545775" cy="560324"/>
+          </a:xfrm>
+          <a:prstGeom prst="rect">
+            <a:avLst/>
+          </a:prstGeom>
+          <a:noFill/>
+        </p:spPr>
+        <p:txBody>
+          <a:bodyPr wrap="square">
+            <a:spAutoFit/>
+          </a:bodyPr>
+          <a:lstStyle/>
+          <a:p>
+            <a:pPr algn="l"/>
+            <a:r>
+              <a:rPr sz="2600" b="0">
                 <a:solidFill>
                   <a:srgbClr val="1A1A1A"/>
                 </a:solidFill>
-                <a:latin typeface="Consolas"/>
-                <a:ea typeface="Consolas"/>
-                <a:cs typeface="Consolas"/>
-              </a:rPr>
-              <a:t>4:00 – 5:00   Backlog Sprint 2             คนที่ 4 หรือวนกลับคนที่ 1</a:t>
-            </a:r>
-          </a:p>
-        </p:txBody>
-      </p:sp>
-      <p:sp>
-        <p:nvSpPr>
-          <p:cNvPr id="4" name="TextBox 3"/>
+                <a:latin typeface="Leelawadee UI"/>
+                <a:ea typeface="Leelawadee UI"/>
+                <a:cs typeface="Leelawadee UI"/>
+              </a:rPr>
+              <a:t>• แม้ระบบของกลุ่มจะทำงานได้ครบก็ตาม</a:t>
+            </a:r>
+          </a:p>
+        </p:txBody>
+      </p:sp>
+      <p:sp>
+        <p:nvSpPr>
+          <p:cNvPr id="7" name="TextBox 6"/>
           <p:cNvSpPr txBox="1"/>
           <p:nvPr/>
         </p:nvSpPr>
@@ -20692,7 +21028,7 @@
                 <a:ea typeface="Leelawadee UI"/>
                 <a:cs typeface="Leelawadee UI"/>
               </a:rPr>
-              <a:t>ถาม-ตอบ 3 นาที — ใครตอบ</a:t>
+              <a:t>โครงนำเสนอ 5 นาที — 5 ช่อง</a:t>
             </a:r>
           </a:p>
         </p:txBody>
@@ -20729,7 +21065,7 @@
                 <a:ea typeface="Leelawadee UI"/>
                 <a:cs typeface="Leelawadee UI"/>
               </a:rPr>
-              <a:t>• ผู้ฟังถาม กลุ่ม ไม่ได้ถามคนใดคนหนึ่ง</a:t>
+              <a:t>• 1️⃣ ปัญหาคืออะไร</a:t>
             </a:r>
           </a:p>
         </p:txBody>
@@ -20766,7 +21102,7 @@
                 <a:ea typeface="Leelawadee UI"/>
                 <a:cs typeface="Leelawadee UI"/>
               </a:rPr>
-              <a:t>• คนที่ทำส่วนนั้นเป็นคนตอบ</a:t>
+              <a:t>• 2️⃣ ผู้ใช้เป็นใคร</a:t>
             </a:r>
           </a:p>
         </p:txBody>
@@ -20803,7 +21139,7 @@
                 <a:ea typeface="Leelawadee UI"/>
                 <a:cs typeface="Leelawadee UI"/>
               </a:rPr>
-              <a:t>• ตอบไม่ได้ ให้พูดว่า "ยังไม่ทราบ จะไปหาคำตอบมา"</a:t>
+              <a:t>• 3️⃣ สาธิตสดบน URL จริง ← ใช้เวลามากที่สุด</a:t>
             </a:r>
           </a:p>
         </p:txBody>
@@ -20840,7 +21176,7 @@
                 <a:ea typeface="Leelawadee UI"/>
                 <a:cs typeface="Leelawadee UI"/>
               </a:rPr>
-              <a:t>• แล้วจดลง Backlog ทันที ไม่ต้องเดา</a:t>
+              <a:t>• 4️⃣ สิ่งที่เรียนรู้ — อะไรพัง แก้อย่างไร</a:t>
             </a:r>
           </a:p>
         </p:txBody>
@@ -20848,6 +21184,43 @@
       <p:sp>
         <p:nvSpPr>
           <p:cNvPr id="7" name="TextBox 6"/>
+          <p:cNvSpPr txBox="1"/>
+          <p:nvPr/>
+        </p:nvSpPr>
+        <p:spPr>
+          <a:xfrm>
+            <a:off x="822960" y="3932936"/>
+            <a:ext cx="10545775" cy="560324"/>
+          </a:xfrm>
+          <a:prstGeom prst="rect">
+            <a:avLst/>
+          </a:prstGeom>
+          <a:noFill/>
+        </p:spPr>
+        <p:txBody>
+          <a:bodyPr wrap="square">
+            <a:spAutoFit/>
+          </a:bodyPr>
+          <a:lstStyle/>
+          <a:p>
+            <a:pPr algn="l"/>
+            <a:r>
+              <a:rPr sz="2600" b="0">
+                <a:solidFill>
+                  <a:srgbClr val="1A1A1A"/>
+                </a:solidFill>
+                <a:latin typeface="Leelawadee UI"/>
+                <a:ea typeface="Leelawadee UI"/>
+                <a:cs typeface="Leelawadee UI"/>
+              </a:rPr>
+              <a:t>• 5️⃣ จะทำอะไรต่อใน Sprint 2</a:t>
+            </a:r>
+          </a:p>
+        </p:txBody>
+      </p:sp>
+      <p:sp>
+        <p:nvSpPr>
+          <p:cNvPr id="8" name="TextBox 7"/>
           <p:cNvSpPr txBox="1"/>
           <p:nvPr/>
         </p:nvSpPr>
@@ -20931,44 +21304,103 @@
                 <a:ea typeface="Leelawadee UI"/>
                 <a:cs typeface="Leelawadee UI"/>
               </a:rPr>
-              <a:t>เกณฑ์เลือกตัวแทนห้อง</a:t>
-            </a:r>
-          </a:p>
-        </p:txBody>
-      </p:sp>
-      <p:sp>
-        <p:nvSpPr>
-          <p:cNvPr id="3" name="TextBox 2"/>
-          <p:cNvSpPr txBox="1"/>
+              <a:t>5 นาทีนั้นใช้อย่างไร — และใครพูดช่องไหน</a:t>
+            </a:r>
+          </a:p>
+        </p:txBody>
+      </p:sp>
+      <p:sp>
+        <p:nvSpPr>
+          <p:cNvPr id="3" name="Rectangle 2"/>
+          <p:cNvSpPr/>
           <p:nvPr/>
         </p:nvSpPr>
         <p:spPr>
           <a:xfrm>
             <a:off x="822960" y="1472184"/>
-            <a:ext cx="10545775" cy="560324"/>
-          </a:xfrm>
-          <a:prstGeom prst="rect">
-            <a:avLst/>
-          </a:prstGeom>
-          <a:noFill/>
-        </p:spPr>
-        <p:txBody>
-          <a:bodyPr wrap="square">
-            <a:spAutoFit/>
-          </a:bodyPr>
-          <a:lstStyle/>
-          <a:p>
-            <a:pPr algn="l"/>
-            <a:r>
-              <a:rPr sz="2600" b="0">
+            <a:ext cx="10545775" cy="1609344"/>
+          </a:xfrm>
+          <a:prstGeom prst="rect">
+            <a:avLst/>
+          </a:prstGeom>
+          <a:solidFill>
+            <a:srgbClr val="F2F4F7"/>
+          </a:solidFill>
+          <a:ln>
+            <a:noFill/>
+          </a:ln>
+        </p:spPr>
+        <p:style>
+          <a:lnRef idx="1">
+            <a:schemeClr val="accent1"/>
+          </a:lnRef>
+          <a:fillRef idx="3">
+            <a:schemeClr val="accent1"/>
+          </a:fillRef>
+          <a:effectRef idx="2">
+            <a:schemeClr val="accent1"/>
+          </a:effectRef>
+          <a:fontRef idx="minor">
+            <a:schemeClr val="lt1"/>
+          </a:fontRef>
+        </p:style>
+        <p:txBody>
+          <a:bodyPr rtlCol="0" anchor="ctr" wrap="none" lIns="228600" tIns="137160"/>
+          <a:lstStyle/>
+          <a:p>
+            <a:pPr algn="l"/>
+            <a:r>
+              <a:rPr sz="1800" b="0">
                 <a:solidFill>
                   <a:srgbClr val="1A1A1A"/>
                 </a:solidFill>
-                <a:latin typeface="Leelawadee UI"/>
-                <a:ea typeface="Leelawadee UI"/>
-                <a:cs typeface="Leelawadee UI"/>
-              </a:rPr>
-              <a:t>• ❌ ไม่ใช่ระบบที่สวยที่สุด</a:t>
+                <a:latin typeface="Consolas"/>
+                <a:ea typeface="Consolas"/>
+                <a:cs typeface="Consolas"/>
+              </a:rPr>
+              <a:t>0:00 – 0:45   ปัญหา + ผู้ใช้เป็นใคร        คนที่ 1</a:t>
+            </a:r>
+          </a:p>
+          <a:p>
+            <a:pPr algn="l"/>
+            <a:r>
+              <a:rPr sz="1800" b="0">
+                <a:solidFill>
+                  <a:srgbClr val="1A1A1A"/>
+                </a:solidFill>
+                <a:latin typeface="Consolas"/>
+                <a:ea typeface="Consolas"/>
+                <a:cs typeface="Consolas"/>
+              </a:rPr>
+              <a:t>0:45 – 3:00   🖥️ สาธิตสดบน URL จริง        คนที่ 2 (คนที่พิมพ์น้อยสุด)</a:t>
+            </a:r>
+          </a:p>
+          <a:p>
+            <a:pPr algn="l"/>
+            <a:r>
+              <a:rPr sz="1800" b="0">
+                <a:solidFill>
+                  <a:srgbClr val="1A1A1A"/>
+                </a:solidFill>
+                <a:latin typeface="Consolas"/>
+                <a:ea typeface="Consolas"/>
+                <a:cs typeface="Consolas"/>
+              </a:rPr>
+              <a:t>3:00 – 4:00   สิ่งที่เรียนรู้ · อะไรพัง      คนที่ 3</a:t>
+            </a:r>
+          </a:p>
+          <a:p>
+            <a:pPr algn="l"/>
+            <a:r>
+              <a:rPr sz="1800" b="0">
+                <a:solidFill>
+                  <a:srgbClr val="1A1A1A"/>
+                </a:solidFill>
+                <a:latin typeface="Consolas"/>
+                <a:ea typeface="Consolas"/>
+                <a:cs typeface="Consolas"/>
+              </a:rPr>
+              <a:t>4:00 – 5:00   Backlog Sprint 2             คนที่ 4 หรือวนกลับคนที่ 1</a:t>
             </a:r>
           </a:p>
         </p:txBody>
@@ -20976,117 +21408,6 @@
       <p:sp>
         <p:nvSpPr>
           <p:cNvPr id="4" name="TextBox 3"/>
-          <p:cNvSpPr txBox="1"/>
-          <p:nvPr/>
-        </p:nvSpPr>
-        <p:spPr>
-          <a:xfrm>
-            <a:off x="822960" y="2087372"/>
-            <a:ext cx="10545775" cy="560324"/>
-          </a:xfrm>
-          <a:prstGeom prst="rect">
-            <a:avLst/>
-          </a:prstGeom>
-          <a:noFill/>
-        </p:spPr>
-        <p:txBody>
-          <a:bodyPr wrap="square">
-            <a:spAutoFit/>
-          </a:bodyPr>
-          <a:lstStyle/>
-          <a:p>
-            <a:pPr algn="l"/>
-            <a:r>
-              <a:rPr sz="2600" b="0">
-                <a:solidFill>
-                  <a:srgbClr val="1A1A1A"/>
-                </a:solidFill>
-                <a:latin typeface="Leelawadee UI"/>
-                <a:ea typeface="Leelawadee UI"/>
-                <a:cs typeface="Leelawadee UI"/>
-              </a:rPr>
-              <a:t>• ❌ ไม่ใช่กลุ่มที่ทำฟีเจอร์เยอะที่สุด</a:t>
-            </a:r>
-          </a:p>
-        </p:txBody>
-      </p:sp>
-      <p:sp>
-        <p:nvSpPr>
-          <p:cNvPr id="5" name="TextBox 4"/>
-          <p:cNvSpPr txBox="1"/>
-          <p:nvPr/>
-        </p:nvSpPr>
-        <p:spPr>
-          <a:xfrm>
-            <a:off x="822960" y="2702560"/>
-            <a:ext cx="10545775" cy="560324"/>
-          </a:xfrm>
-          <a:prstGeom prst="rect">
-            <a:avLst/>
-          </a:prstGeom>
-          <a:noFill/>
-        </p:spPr>
-        <p:txBody>
-          <a:bodyPr wrap="square">
-            <a:spAutoFit/>
-          </a:bodyPr>
-          <a:lstStyle/>
-          <a:p>
-            <a:pPr algn="l"/>
-            <a:r>
-              <a:rPr sz="2600" b="0">
-                <a:solidFill>
-                  <a:srgbClr val="1A1A1A"/>
-                </a:solidFill>
-                <a:latin typeface="Leelawadee UI"/>
-                <a:ea typeface="Leelawadee UI"/>
-                <a:cs typeface="Leelawadee UI"/>
-              </a:rPr>
-              <a:t>• ✅ กลุ่มที่เล่าเส้นทางแก้ปัญหาได้ดีที่สุด</a:t>
-            </a:r>
-          </a:p>
-        </p:txBody>
-      </p:sp>
-      <p:sp>
-        <p:nvSpPr>
-          <p:cNvPr id="6" name="TextBox 5"/>
-          <p:cNvSpPr txBox="1"/>
-          <p:nvPr/>
-        </p:nvSpPr>
-        <p:spPr>
-          <a:xfrm>
-            <a:off x="822960" y="3317748"/>
-            <a:ext cx="10545775" cy="560324"/>
-          </a:xfrm>
-          <a:prstGeom prst="rect">
-            <a:avLst/>
-          </a:prstGeom>
-          <a:noFill/>
-        </p:spPr>
-        <p:txBody>
-          <a:bodyPr wrap="square">
-            <a:spAutoFit/>
-          </a:bodyPr>
-          <a:lstStyle/>
-          <a:p>
-            <a:pPr algn="l"/>
-            <a:r>
-              <a:rPr sz="2600" b="0">
-                <a:solidFill>
-                  <a:srgbClr val="1A1A1A"/>
-                </a:solidFill>
-                <a:latin typeface="Leelawadee UI"/>
-                <a:ea typeface="Leelawadee UI"/>
-                <a:cs typeface="Leelawadee UI"/>
-              </a:rPr>
-              <a:t>• ✅ และทุกคนในกลุ่มพูดได้จริง</a:t>
-            </a:r>
-          </a:p>
-        </p:txBody>
-      </p:sp>
-      <p:sp>
-        <p:nvSpPr>
-          <p:cNvPr id="7" name="TextBox 6"/>
           <p:cNvSpPr txBox="1"/>
           <p:nvPr/>
         </p:nvSpPr>
@@ -21170,7 +21491,7 @@
                 <a:ea typeface="Leelawadee UI"/>
                 <a:cs typeface="Leelawadee UI"/>
               </a:rPr>
-              <a:t>การสาธิตสดให้ไม่พัง — เตรียม 5 อย่าง</a:t>
+              <a:t>ถาม-ตอบ 3 นาที — ใครตอบ</a:t>
             </a:r>
           </a:p>
         </p:txBody>
@@ -21207,7 +21528,7 @@
                 <a:ea typeface="Leelawadee UI"/>
                 <a:cs typeface="Leelawadee UI"/>
               </a:rPr>
-              <a:t>• 🗂️ ใส่ข้อมูลตัวอย่างในระบบไว้ล่วงหน้า</a:t>
+              <a:t>• ผู้ฟังถาม กลุ่ม ไม่ได้ถามคนใดคนหนึ่ง</a:t>
             </a:r>
           </a:p>
         </p:txBody>
@@ -21244,7 +21565,7 @@
                 <a:ea typeface="Leelawadee UI"/>
                 <a:cs typeface="Leelawadee UI"/>
               </a:rPr>
-              <a:t>• 🔑 ล็อกอินค้างไว้ทั้งสองบัญชีก่อนถึงคิว</a:t>
+              <a:t>• คนที่ทำส่วนนั้นเป็นคนตอบ</a:t>
             </a:r>
           </a:p>
         </p:txBody>
@@ -21281,7 +21602,7 @@
                 <a:ea typeface="Leelawadee UI"/>
                 <a:cs typeface="Leelawadee UI"/>
               </a:rPr>
-              <a:t>• 🧭 เปิดแท็บที่จะใช้ไว้ครบตามลำดับ</a:t>
+              <a:t>• ตอบไม่ได้ ให้พูดว่า "ยังไม่ทราบ จะไปหาคำตอบมา"</a:t>
             </a:r>
           </a:p>
         </p:txBody>
@@ -21318,7 +21639,7 @@
                 <a:ea typeface="Leelawadee UI"/>
                 <a:cs typeface="Leelawadee UI"/>
               </a:rPr>
-              <a:t>• 🎥 อัดวิดีโอสำรอง 1 นาทีเก็บไว้</a:t>
+              <a:t>• แล้วจดลง Backlog ทันที ไม่ต้องเดา</a:t>
             </a:r>
           </a:p>
         </p:txBody>
@@ -21326,43 +21647,6 @@
       <p:sp>
         <p:nvSpPr>
           <p:cNvPr id="7" name="TextBox 6"/>
-          <p:cNvSpPr txBox="1"/>
-          <p:nvPr/>
-        </p:nvSpPr>
-        <p:spPr>
-          <a:xfrm>
-            <a:off x="822960" y="3932936"/>
-            <a:ext cx="10545775" cy="560324"/>
-          </a:xfrm>
-          <a:prstGeom prst="rect">
-            <a:avLst/>
-          </a:prstGeom>
-          <a:noFill/>
-        </p:spPr>
-        <p:txBody>
-          <a:bodyPr wrap="square">
-            <a:spAutoFit/>
-          </a:bodyPr>
-          <a:lstStyle/>
-          <a:p>
-            <a:pPr algn="l"/>
-            <a:r>
-              <a:rPr sz="2600" b="0">
-                <a:solidFill>
-                  <a:srgbClr val="1A1A1A"/>
-                </a:solidFill>
-                <a:latin typeface="Leelawadee UI"/>
-                <a:ea typeface="Leelawadee UI"/>
-                <a:cs typeface="Leelawadee UI"/>
-              </a:rPr>
-              <a:t>• ⏱️ ซ้อมจับเวลาอย่างน้อย 1 รอบ</a:t>
-            </a:r>
-          </a:p>
-        </p:txBody>
-      </p:sp>
-      <p:sp>
-        <p:nvSpPr>
-          <p:cNvPr id="8" name="TextBox 7"/>
           <p:cNvSpPr txBox="1"/>
           <p:nvPr/>
         </p:nvSpPr>
@@ -21446,7 +21730,7 @@
                 <a:ea typeface="Leelawadee UI"/>
                 <a:cs typeface="Leelawadee UI"/>
               </a:rPr>
-              <a:t>🆘 ถ้าสาธิตสดพังตอนนำเสนอ</a:t>
+              <a:t>เกณฑ์เลือกตัวแทนห้อง</a:t>
             </a:r>
           </a:p>
         </p:txBody>
@@ -21483,7 +21767,7 @@
                 <a:ea typeface="Leelawadee UI"/>
                 <a:cs typeface="Leelawadee UI"/>
               </a:rPr>
-              <a:t>• เปิดวิดีโอสำรอง 1 นาทีทันที ไม่ต้องขอโทษยาว</a:t>
+              <a:t>• ❌ ไม่ใช่ระบบที่สวยที่สุด</a:t>
             </a:r>
           </a:p>
         </p:txBody>
@@ -21520,7 +21804,7 @@
                 <a:ea typeface="Leelawadee UI"/>
                 <a:cs typeface="Leelawadee UI"/>
               </a:rPr>
-              <a:t>• เล่าต่อว่าจะเกิดอะไรขึ้นถ้ามันทำงาน</a:t>
+              <a:t>• ❌ ไม่ใช่กลุ่มที่ทำฟีเจอร์เยอะที่สุด</a:t>
             </a:r>
           </a:p>
         </p:txBody>
@@ -21557,7 +21841,7 @@
                 <a:ea typeface="Leelawadee UI"/>
                 <a:cs typeface="Leelawadee UI"/>
               </a:rPr>
-              <a:t>• ถ้ามีเวลาเหลือ ค่อยกลับมาลองสด</a:t>
+              <a:t>• ✅ กลุ่มที่เล่าเส้นทางแก้ปัญหาได้ดีที่สุด</a:t>
             </a:r>
           </a:p>
         </p:txBody>
@@ -21565,6 +21849,43 @@
       <p:sp>
         <p:nvSpPr>
           <p:cNvPr id="6" name="TextBox 5"/>
+          <p:cNvSpPr txBox="1"/>
+          <p:nvPr/>
+        </p:nvSpPr>
+        <p:spPr>
+          <a:xfrm>
+            <a:off x="822960" y="3317748"/>
+            <a:ext cx="10545775" cy="560324"/>
+          </a:xfrm>
+          <a:prstGeom prst="rect">
+            <a:avLst/>
+          </a:prstGeom>
+          <a:noFill/>
+        </p:spPr>
+        <p:txBody>
+          <a:bodyPr wrap="square">
+            <a:spAutoFit/>
+          </a:bodyPr>
+          <a:lstStyle/>
+          <a:p>
+            <a:pPr algn="l"/>
+            <a:r>
+              <a:rPr sz="2600" b="0">
+                <a:solidFill>
+                  <a:srgbClr val="1A1A1A"/>
+                </a:solidFill>
+                <a:latin typeface="Leelawadee UI"/>
+                <a:ea typeface="Leelawadee UI"/>
+                <a:cs typeface="Leelawadee UI"/>
+              </a:rPr>
+              <a:t>• ✅ และทุกคนในกลุ่มพูดได้จริง</a:t>
+            </a:r>
+          </a:p>
+        </p:txBody>
+      </p:sp>
+      <p:sp>
+        <p:nvSpPr>
+          <p:cNvPr id="7" name="TextBox 6"/>
           <p:cNvSpPr txBox="1"/>
           <p:nvPr/>
         </p:nvSpPr>
@@ -21648,7 +21969,7 @@
                 <a:ea typeface="Leelawadee UI"/>
                 <a:cs typeface="Leelawadee UI"/>
               </a:rPr>
-              <a:t>feedback → Backlog Sprint 2</a:t>
+              <a:t>การสาธิตสดให้ไม่พัง — เตรียม 5 อย่าง</a:t>
             </a:r>
           </a:p>
         </p:txBody>
@@ -21685,7 +22006,7 @@
                 <a:ea typeface="Leelawadee UI"/>
                 <a:cs typeface="Leelawadee UI"/>
               </a:rPr>
-              <a:t>• Backlog = รายการงานที่รอทำรอบหน้า</a:t>
+              <a:t>• 🗂️ ใส่ข้อมูลตัวอย่างในระบบไว้ล่วงหน้า</a:t>
             </a:r>
           </a:p>
         </p:txBody>
@@ -21722,7 +22043,7 @@
                 <a:ea typeface="Leelawadee UI"/>
                 <a:cs typeface="Leelawadee UI"/>
               </a:rPr>
-              <a:t>• ทุก feedback ที่ได้ ต้องจดลง Backlog ทันที</a:t>
+              <a:t>• 🔑 ล็อกอินค้างไว้ทั้งสองบัญชีก่อนถึงคิว</a:t>
             </a:r>
           </a:p>
         </p:txBody>
@@ -21759,7 +22080,7 @@
                 <a:ea typeface="Leelawadee UI"/>
                 <a:cs typeface="Leelawadee UI"/>
               </a:rPr>
-              <a:t>• จดเป็นประโยคที่ทำได้ ไม่ใช่ความรู้สึก</a:t>
+              <a:t>• 🧭 เปิดแท็บที่จะใช้ไว้ครบตามลำดับ</a:t>
             </a:r>
           </a:p>
         </p:txBody>
@@ -21796,7 +22117,7 @@
                 <a:ea typeface="Leelawadee UI"/>
                 <a:cs typeface="Leelawadee UI"/>
               </a:rPr>
-              <a:t>• Backlog นี้คือของส่งมอบให้ Module 3</a:t>
+              <a:t>• 🎥 อัดวิดีโอสำรอง 1 นาทีเก็บไว้</a:t>
             </a:r>
           </a:p>
         </p:txBody>
@@ -21804,6 +22125,43 @@
       <p:sp>
         <p:nvSpPr>
           <p:cNvPr id="7" name="TextBox 6"/>
+          <p:cNvSpPr txBox="1"/>
+          <p:nvPr/>
+        </p:nvSpPr>
+        <p:spPr>
+          <a:xfrm>
+            <a:off x="822960" y="3932936"/>
+            <a:ext cx="10545775" cy="560324"/>
+          </a:xfrm>
+          <a:prstGeom prst="rect">
+            <a:avLst/>
+          </a:prstGeom>
+          <a:noFill/>
+        </p:spPr>
+        <p:txBody>
+          <a:bodyPr wrap="square">
+            <a:spAutoFit/>
+          </a:bodyPr>
+          <a:lstStyle/>
+          <a:p>
+            <a:pPr algn="l"/>
+            <a:r>
+              <a:rPr sz="2600" b="0">
+                <a:solidFill>
+                  <a:srgbClr val="1A1A1A"/>
+                </a:solidFill>
+                <a:latin typeface="Leelawadee UI"/>
+                <a:ea typeface="Leelawadee UI"/>
+                <a:cs typeface="Leelawadee UI"/>
+              </a:rPr>
+              <a:t>• ⏱️ ซ้อมจับเวลาอย่างน้อย 1 รอบ</a:t>
+            </a:r>
+          </a:p>
+        </p:txBody>
+      </p:sp>
+      <p:sp>
+        <p:nvSpPr>
+          <p:cNvPr id="8" name="TextBox 7"/>
           <p:cNvSpPr txBox="1"/>
           <p:nvPr/>
         </p:nvSpPr>
@@ -21887,124 +22245,125 @@
                 <a:ea typeface="Leelawadee UI"/>
                 <a:cs typeface="Leelawadee UI"/>
               </a:rPr>
-              <a:t>แบบฟอร์ม feedback 3 ช่อง</a:t>
-            </a:r>
-          </a:p>
-        </p:txBody>
-      </p:sp>
-      <p:sp>
-        <p:nvSpPr>
-          <p:cNvPr id="3" name="Rectangle 2"/>
-          <p:cNvSpPr/>
+              <a:t>🆘 ถ้าสาธิตสดพังตอนนำเสนอ</a:t>
+            </a:r>
+          </a:p>
+        </p:txBody>
+      </p:sp>
+      <p:sp>
+        <p:nvSpPr>
+          <p:cNvPr id="3" name="TextBox 2"/>
+          <p:cNvSpPr txBox="1"/>
           <p:nvPr/>
         </p:nvSpPr>
         <p:spPr>
           <a:xfrm>
             <a:off x="822960" y="1472184"/>
-            <a:ext cx="10545775" cy="1920240"/>
-          </a:xfrm>
-          <a:prstGeom prst="rect">
-            <a:avLst/>
-          </a:prstGeom>
-          <a:solidFill>
-            <a:srgbClr val="F2F4F7"/>
-          </a:solidFill>
-          <a:ln>
-            <a:noFill/>
-          </a:ln>
-        </p:spPr>
-        <p:style>
-          <a:lnRef idx="1">
-            <a:schemeClr val="accent1"/>
-          </a:lnRef>
-          <a:fillRef idx="3">
-            <a:schemeClr val="accent1"/>
-          </a:fillRef>
-          <a:effectRef idx="2">
-            <a:schemeClr val="accent1"/>
-          </a:effectRef>
-          <a:fontRef idx="minor">
-            <a:schemeClr val="lt1"/>
-          </a:fontRef>
-        </p:style>
-        <p:txBody>
-          <a:bodyPr rtlCol="0" anchor="ctr" wrap="none" lIns="228600" tIns="137160"/>
-          <a:lstStyle/>
-          <a:p>
-            <a:pPr algn="l"/>
-            <a:r>
-              <a:rPr sz="1800" b="0">
+            <a:ext cx="10545775" cy="560324"/>
+          </a:xfrm>
+          <a:prstGeom prst="rect">
+            <a:avLst/>
+          </a:prstGeom>
+          <a:noFill/>
+        </p:spPr>
+        <p:txBody>
+          <a:bodyPr wrap="square">
+            <a:spAutoFit/>
+          </a:bodyPr>
+          <a:lstStyle/>
+          <a:p>
+            <a:pPr algn="l"/>
+            <a:r>
+              <a:rPr sz="2600" b="0">
                 <a:solidFill>
                   <a:srgbClr val="1A1A1A"/>
                 </a:solidFill>
-                <a:latin typeface="Consolas"/>
-                <a:ea typeface="Consolas"/>
-                <a:cs typeface="Consolas"/>
-              </a:rPr>
-              <a:t>กลุ่มที่นำเสนอ: ______________</a:t>
-            </a:r>
-          </a:p>
-          <a:p>
-            <a:pPr algn="l"/>
-            <a:r>
-              <a:rPr sz="1800" b="0">
+                <a:latin typeface="Leelawadee UI"/>
+                <a:ea typeface="Leelawadee UI"/>
+                <a:cs typeface="Leelawadee UI"/>
+              </a:rPr>
+              <a:t>• เปิดวิดีโอสำรอง 1 นาทีทันที ไม่ต้องขอโทษยาว</a:t>
+            </a:r>
+          </a:p>
+        </p:txBody>
+      </p:sp>
+      <p:sp>
+        <p:nvSpPr>
+          <p:cNvPr id="4" name="TextBox 3"/>
+          <p:cNvSpPr txBox="1"/>
+          <p:nvPr/>
+        </p:nvSpPr>
+        <p:spPr>
+          <a:xfrm>
+            <a:off x="822960" y="2087372"/>
+            <a:ext cx="10545775" cy="560324"/>
+          </a:xfrm>
+          <a:prstGeom prst="rect">
+            <a:avLst/>
+          </a:prstGeom>
+          <a:noFill/>
+        </p:spPr>
+        <p:txBody>
+          <a:bodyPr wrap="square">
+            <a:spAutoFit/>
+          </a:bodyPr>
+          <a:lstStyle/>
+          <a:p>
+            <a:pPr algn="l"/>
+            <a:r>
+              <a:rPr sz="2600" b="0">
                 <a:solidFill>
                   <a:srgbClr val="1A1A1A"/>
                 </a:solidFill>
-                <a:latin typeface="Consolas"/>
-                <a:ea typeface="Consolas"/>
-                <a:cs typeface="Consolas"/>
-              </a:rPr>
-              <a:t/>
-            </a:r>
-          </a:p>
-          <a:p>
-            <a:pPr algn="l"/>
-            <a:r>
-              <a:rPr sz="1800" b="0">
+                <a:latin typeface="Leelawadee UI"/>
+                <a:ea typeface="Leelawadee UI"/>
+                <a:cs typeface="Leelawadee UI"/>
+              </a:rPr>
+              <a:t>• เล่าต่อว่าจะเกิดอะไรขึ้นถ้ามันทำงาน</a:t>
+            </a:r>
+          </a:p>
+        </p:txBody>
+      </p:sp>
+      <p:sp>
+        <p:nvSpPr>
+          <p:cNvPr id="5" name="TextBox 4"/>
+          <p:cNvSpPr txBox="1"/>
+          <p:nvPr/>
+        </p:nvSpPr>
+        <p:spPr>
+          <a:xfrm>
+            <a:off x="822960" y="2702560"/>
+            <a:ext cx="10545775" cy="560324"/>
+          </a:xfrm>
+          <a:prstGeom prst="rect">
+            <a:avLst/>
+          </a:prstGeom>
+          <a:noFill/>
+        </p:spPr>
+        <p:txBody>
+          <a:bodyPr wrap="square">
+            <a:spAutoFit/>
+          </a:bodyPr>
+          <a:lstStyle/>
+          <a:p>
+            <a:pPr algn="l"/>
+            <a:r>
+              <a:rPr sz="2600" b="0">
                 <a:solidFill>
                   <a:srgbClr val="1A1A1A"/>
                 </a:solidFill>
-                <a:latin typeface="Consolas"/>
-                <a:ea typeface="Consolas"/>
-                <a:cs typeface="Consolas"/>
-              </a:rPr>
-              <a:t>1. ชอบอะไร      → ................................</a:t>
-            </a:r>
-          </a:p>
-          <a:p>
-            <a:pPr algn="l"/>
-            <a:r>
-              <a:rPr sz="1800" b="0">
-                <a:solidFill>
-                  <a:srgbClr val="1A1A1A"/>
-                </a:solidFill>
-                <a:latin typeface="Consolas"/>
-                <a:ea typeface="Consolas"/>
-                <a:cs typeface="Consolas"/>
-              </a:rPr>
-              <a:t>2. สงสัยอะไร    → ................................</a:t>
-            </a:r>
-          </a:p>
-          <a:p>
-            <a:pPr algn="l"/>
-            <a:r>
-              <a:rPr sz="1800" b="0">
-                <a:solidFill>
-                  <a:srgbClr val="1A1A1A"/>
-                </a:solidFill>
-                <a:latin typeface="Consolas"/>
-                <a:ea typeface="Consolas"/>
-                <a:cs typeface="Consolas"/>
-              </a:rPr>
-              <a:t>3. เสนออะไร     → ................................</a:t>
-            </a:r>
-          </a:p>
-        </p:txBody>
-      </p:sp>
-      <p:sp>
-        <p:nvSpPr>
-          <p:cNvPr id="4" name="TextBox 3"/>
+                <a:latin typeface="Leelawadee UI"/>
+                <a:ea typeface="Leelawadee UI"/>
+                <a:cs typeface="Leelawadee UI"/>
+              </a:rPr>
+              <a:t>• ถ้ามีเวลาเหลือ ค่อยกลับมาลองสด</a:t>
+            </a:r>
+          </a:p>
+        </p:txBody>
+      </p:sp>
+      <p:sp>
+        <p:nvSpPr>
+          <p:cNvPr id="6" name="TextBox 5"/>
           <p:cNvSpPr txBox="1"/>
           <p:nvPr/>
         </p:nvSpPr>
@@ -22088,124 +22447,162 @@
                 <a:ea typeface="Leelawadee UI"/>
                 <a:cs typeface="Leelawadee UI"/>
               </a:rPr>
-              <a:t>ตัวอย่าง: feedback ของ FixIt → Backlog</a:t>
-            </a:r>
-          </a:p>
-        </p:txBody>
-      </p:sp>
-      <p:sp>
-        <p:nvSpPr>
-          <p:cNvPr id="3" name="Rectangle 2"/>
-          <p:cNvSpPr/>
+              <a:t>feedback → Backlog Sprint 2</a:t>
+            </a:r>
+          </a:p>
+        </p:txBody>
+      </p:sp>
+      <p:sp>
+        <p:nvSpPr>
+          <p:cNvPr id="3" name="TextBox 2"/>
+          <p:cNvSpPr txBox="1"/>
           <p:nvPr/>
         </p:nvSpPr>
         <p:spPr>
           <a:xfrm>
             <a:off x="822960" y="1472184"/>
-            <a:ext cx="10545775" cy="1920240"/>
-          </a:xfrm>
-          <a:prstGeom prst="rect">
-            <a:avLst/>
-          </a:prstGeom>
-          <a:solidFill>
-            <a:srgbClr val="F2F4F7"/>
-          </a:solidFill>
-          <a:ln>
-            <a:noFill/>
-          </a:ln>
-        </p:spPr>
-        <p:style>
-          <a:lnRef idx="1">
-            <a:schemeClr val="accent1"/>
-          </a:lnRef>
-          <a:fillRef idx="3">
-            <a:schemeClr val="accent1"/>
-          </a:fillRef>
-          <a:effectRef idx="2">
-            <a:schemeClr val="accent1"/>
-          </a:effectRef>
-          <a:fontRef idx="minor">
-            <a:schemeClr val="lt1"/>
-          </a:fontRef>
-        </p:style>
-        <p:txBody>
-          <a:bodyPr rtlCol="0" anchor="ctr" wrap="none" lIns="228600" tIns="137160"/>
-          <a:lstStyle/>
-          <a:p>
-            <a:pPr algn="l"/>
-            <a:r>
-              <a:rPr sz="1800" b="0">
+            <a:ext cx="10545775" cy="560324"/>
+          </a:xfrm>
+          <a:prstGeom prst="rect">
+            <a:avLst/>
+          </a:prstGeom>
+          <a:noFill/>
+        </p:spPr>
+        <p:txBody>
+          <a:bodyPr wrap="square">
+            <a:spAutoFit/>
+          </a:bodyPr>
+          <a:lstStyle/>
+          <a:p>
+            <a:pPr algn="l"/>
+            <a:r>
+              <a:rPr sz="2600" b="0">
                 <a:solidFill>
                   <a:srgbClr val="1A1A1A"/>
                 </a:solidFill>
-                <a:latin typeface="Consolas"/>
-                <a:ea typeface="Consolas"/>
-                <a:cs typeface="Consolas"/>
-              </a:rPr>
-              <a:t>feedback ที่ได้                      →  ข้อใน Backlog Sprint 2</a:t>
-            </a:r>
-          </a:p>
-          <a:p>
-            <a:pPr algn="l"/>
-            <a:r>
-              <a:rPr sz="1800" b="0">
+                <a:latin typeface="Leelawadee UI"/>
+                <a:ea typeface="Leelawadee UI"/>
+                <a:cs typeface="Leelawadee UI"/>
+              </a:rPr>
+              <a:t>• Backlog = รายการงานที่รอทำรอบหน้า</a:t>
+            </a:r>
+          </a:p>
+        </p:txBody>
+      </p:sp>
+      <p:sp>
+        <p:nvSpPr>
+          <p:cNvPr id="4" name="TextBox 3"/>
+          <p:cNvSpPr txBox="1"/>
+          <p:nvPr/>
+        </p:nvSpPr>
+        <p:spPr>
+          <a:xfrm>
+            <a:off x="822960" y="2087372"/>
+            <a:ext cx="10545775" cy="560324"/>
+          </a:xfrm>
+          <a:prstGeom prst="rect">
+            <a:avLst/>
+          </a:prstGeom>
+          <a:noFill/>
+        </p:spPr>
+        <p:txBody>
+          <a:bodyPr wrap="square">
+            <a:spAutoFit/>
+          </a:bodyPr>
+          <a:lstStyle/>
+          <a:p>
+            <a:pPr algn="l"/>
+            <a:r>
+              <a:rPr sz="2600" b="0">
                 <a:solidFill>
                   <a:srgbClr val="1A1A1A"/>
                 </a:solidFill>
-                <a:latin typeface="Consolas"/>
-                <a:ea typeface="Consolas"/>
-                <a:cs typeface="Consolas"/>
-              </a:rPr>
-              <a:t>──────────────────────────────────  ────────────────────────────</a:t>
-            </a:r>
-          </a:p>
-          <a:p>
-            <a:pPr algn="l"/>
-            <a:r>
-              <a:rPr sz="1800" b="0">
+                <a:latin typeface="Leelawadee UI"/>
+                <a:ea typeface="Leelawadee UI"/>
+                <a:cs typeface="Leelawadee UI"/>
+              </a:rPr>
+              <a:t>• ทุก feedback ที่ได้ ต้องจดลง Backlog ทันที</a:t>
+            </a:r>
+          </a:p>
+        </p:txBody>
+      </p:sp>
+      <p:sp>
+        <p:nvSpPr>
+          <p:cNvPr id="5" name="TextBox 4"/>
+          <p:cNvSpPr txBox="1"/>
+          <p:nvPr/>
+        </p:nvSpPr>
+        <p:spPr>
+          <a:xfrm>
+            <a:off x="822960" y="2702560"/>
+            <a:ext cx="10545775" cy="560324"/>
+          </a:xfrm>
+          <a:prstGeom prst="rect">
+            <a:avLst/>
+          </a:prstGeom>
+          <a:noFill/>
+        </p:spPr>
+        <p:txBody>
+          <a:bodyPr wrap="square">
+            <a:spAutoFit/>
+          </a:bodyPr>
+          <a:lstStyle/>
+          <a:p>
+            <a:pPr algn="l"/>
+            <a:r>
+              <a:rPr sz="2600" b="0">
                 <a:solidFill>
                   <a:srgbClr val="1A1A1A"/>
                 </a:solidFill>
-                <a:latin typeface="Consolas"/>
-                <a:ea typeface="Consolas"/>
-                <a:cs typeface="Consolas"/>
-              </a:rPr>
-              <a:t>"หาใบแจ้งเก่าไม่เจอเลย"              →  เพิ่มตัวกรองตามช่วงวันที่</a:t>
-            </a:r>
-          </a:p>
-          <a:p>
-            <a:pPr algn="l"/>
-            <a:r>
-              <a:rPr sz="1800" b="0">
+                <a:latin typeface="Leelawadee UI"/>
+                <a:ea typeface="Leelawadee UI"/>
+                <a:cs typeface="Leelawadee UI"/>
+              </a:rPr>
+              <a:t>• จดเป็นประโยคที่ทำได้ ไม่ใช่ความรู้สึก</a:t>
+            </a:r>
+          </a:p>
+        </p:txBody>
+      </p:sp>
+      <p:sp>
+        <p:nvSpPr>
+          <p:cNvPr id="6" name="TextBox 5"/>
+          <p:cNvSpPr txBox="1"/>
+          <p:nvPr/>
+        </p:nvSpPr>
+        <p:spPr>
+          <a:xfrm>
+            <a:off x="822960" y="3317748"/>
+            <a:ext cx="10545775" cy="560324"/>
+          </a:xfrm>
+          <a:prstGeom prst="rect">
+            <a:avLst/>
+          </a:prstGeom>
+          <a:noFill/>
+        </p:spPr>
+        <p:txBody>
+          <a:bodyPr wrap="square">
+            <a:spAutoFit/>
+          </a:bodyPr>
+          <a:lstStyle/>
+          <a:p>
+            <a:pPr algn="l"/>
+            <a:r>
+              <a:rPr sz="2600" b="0">
                 <a:solidFill>
                   <a:srgbClr val="1A1A1A"/>
                 </a:solidFill>
-                <a:latin typeface="Consolas"/>
-                <a:ea typeface="Consolas"/>
-                <a:cs typeface="Consolas"/>
-              </a:rPr>
-              <a:t>"ไม่รู้ว่าช่างรับงานหรือยัง"          →  แจ้งเตือนผู้แจ้งเมื่อมอบหมายช่าง</a:t>
-            </a:r>
-          </a:p>
-          <a:p>
-            <a:pPr algn="l"/>
-            <a:r>
-              <a:rPr sz="1800" b="0">
-                <a:solidFill>
-                  <a:srgbClr val="1A1A1A"/>
-                </a:solidFill>
-                <a:latin typeface="Consolas"/>
-                <a:ea typeface="Consolas"/>
-                <a:cs typeface="Consolas"/>
-              </a:rPr>
-              <a:t>"อยากเห็นสรุปว่าเดือนนี้ซ่อมกี่งาน"   →  ทำหน้าสรุป (ยกไป Module 3)</a:t>
-            </a:r>
-          </a:p>
-        </p:txBody>
-      </p:sp>
-      <p:sp>
-        <p:nvSpPr>
-          <p:cNvPr id="4" name="TextBox 3"/>
+                <a:latin typeface="Leelawadee UI"/>
+                <a:ea typeface="Leelawadee UI"/>
+                <a:cs typeface="Leelawadee UI"/>
+              </a:rPr>
+              <a:t>• Backlog นี้คือของส่งมอบให้ Module 3</a:t>
+            </a:r>
+          </a:p>
+        </p:txBody>
+      </p:sp>
+      <p:sp>
+        <p:nvSpPr>
+          <p:cNvPr id="7" name="TextBox 6"/>
           <p:cNvSpPr txBox="1"/>
           <p:nvPr/>
         </p:nvSpPr>
@@ -22289,44 +22686,117 @@
                 <a:ea typeface="Leelawadee UI"/>
                 <a:cs typeface="Leelawadee UI"/>
               </a:rPr>
-              <a:t>✅ ช่วงนี้คุณต้องได้</a:t>
-            </a:r>
-          </a:p>
-        </p:txBody>
-      </p:sp>
-      <p:sp>
-        <p:nvSpPr>
-          <p:cNvPr id="3" name="TextBox 2"/>
-          <p:cNvSpPr txBox="1"/>
+              <a:t>แบบฟอร์ม feedback 3 ช่อง</a:t>
+            </a:r>
+          </a:p>
+        </p:txBody>
+      </p:sp>
+      <p:sp>
+        <p:nvSpPr>
+          <p:cNvPr id="3" name="Rectangle 2"/>
+          <p:cNvSpPr/>
           <p:nvPr/>
         </p:nvSpPr>
         <p:spPr>
           <a:xfrm>
             <a:off x="822960" y="1472184"/>
-            <a:ext cx="10545775" cy="560324"/>
-          </a:xfrm>
-          <a:prstGeom prst="rect">
-            <a:avLst/>
-          </a:prstGeom>
-          <a:noFill/>
-        </p:spPr>
-        <p:txBody>
-          <a:bodyPr wrap="square">
-            <a:spAutoFit/>
-          </a:bodyPr>
-          <a:lstStyle/>
-          <a:p>
-            <a:pPr algn="l"/>
-            <a:r>
-              <a:rPr sz="2600" b="0">
+            <a:ext cx="10545775" cy="1920240"/>
+          </a:xfrm>
+          <a:prstGeom prst="rect">
+            <a:avLst/>
+          </a:prstGeom>
+          <a:solidFill>
+            <a:srgbClr val="F2F4F7"/>
+          </a:solidFill>
+          <a:ln>
+            <a:noFill/>
+          </a:ln>
+        </p:spPr>
+        <p:style>
+          <a:lnRef idx="1">
+            <a:schemeClr val="accent1"/>
+          </a:lnRef>
+          <a:fillRef idx="3">
+            <a:schemeClr val="accent1"/>
+          </a:fillRef>
+          <a:effectRef idx="2">
+            <a:schemeClr val="accent1"/>
+          </a:effectRef>
+          <a:fontRef idx="minor">
+            <a:schemeClr val="lt1"/>
+          </a:fontRef>
+        </p:style>
+        <p:txBody>
+          <a:bodyPr rtlCol="0" anchor="ctr" wrap="none" lIns="228600" tIns="137160"/>
+          <a:lstStyle/>
+          <a:p>
+            <a:pPr algn="l"/>
+            <a:r>
+              <a:rPr sz="1800" b="0">
                 <a:solidFill>
                   <a:srgbClr val="1A1A1A"/>
                 </a:solidFill>
-                <a:latin typeface="Leelawadee UI"/>
-                <a:ea typeface="Leelawadee UI"/>
-                <a:cs typeface="Leelawadee UI"/>
-              </a:rPr>
-              <a:t>• โครงนำเสนอ 5 นาทีที่แบ่งท่อนกันครบทุกคน</a:t>
+                <a:latin typeface="Consolas"/>
+                <a:ea typeface="Consolas"/>
+                <a:cs typeface="Consolas"/>
+              </a:rPr>
+              <a:t>กลุ่มที่นำเสนอ: ______________</a:t>
+            </a:r>
+          </a:p>
+          <a:p>
+            <a:pPr algn="l"/>
+            <a:r>
+              <a:rPr sz="1800" b="0">
+                <a:solidFill>
+                  <a:srgbClr val="1A1A1A"/>
+                </a:solidFill>
+                <a:latin typeface="Consolas"/>
+                <a:ea typeface="Consolas"/>
+                <a:cs typeface="Consolas"/>
+              </a:rPr>
+              <a:t/>
+            </a:r>
+          </a:p>
+          <a:p>
+            <a:pPr algn="l"/>
+            <a:r>
+              <a:rPr sz="1800" b="0">
+                <a:solidFill>
+                  <a:srgbClr val="1A1A1A"/>
+                </a:solidFill>
+                <a:latin typeface="Consolas"/>
+                <a:ea typeface="Consolas"/>
+                <a:cs typeface="Consolas"/>
+              </a:rPr>
+              <a:t>1. ชอบอะไร      → ................................</a:t>
+            </a:r>
+          </a:p>
+          <a:p>
+            <a:pPr algn="l"/>
+            <a:r>
+              <a:rPr sz="1800" b="0">
+                <a:solidFill>
+                  <a:srgbClr val="1A1A1A"/>
+                </a:solidFill>
+                <a:latin typeface="Consolas"/>
+                <a:ea typeface="Consolas"/>
+                <a:cs typeface="Consolas"/>
+              </a:rPr>
+              <a:t>2. สงสัยอะไร    → ................................</a:t>
+            </a:r>
+          </a:p>
+          <a:p>
+            <a:pPr algn="l"/>
+            <a:r>
+              <a:rPr sz="1800" b="0">
+                <a:solidFill>
+                  <a:srgbClr val="1A1A1A"/>
+                </a:solidFill>
+                <a:latin typeface="Consolas"/>
+                <a:ea typeface="Consolas"/>
+                <a:cs typeface="Consolas"/>
+              </a:rPr>
+              <a:t>3. เสนออะไร     → ................................</a:t>
             </a:r>
           </a:p>
         </p:txBody>
@@ -22334,80 +22804,6 @@
       <p:sp>
         <p:nvSpPr>
           <p:cNvPr id="4" name="TextBox 3"/>
-          <p:cNvSpPr txBox="1"/>
-          <p:nvPr/>
-        </p:nvSpPr>
-        <p:spPr>
-          <a:xfrm>
-            <a:off x="822960" y="2087372"/>
-            <a:ext cx="10545775" cy="560324"/>
-          </a:xfrm>
-          <a:prstGeom prst="rect">
-            <a:avLst/>
-          </a:prstGeom>
-          <a:noFill/>
-        </p:spPr>
-        <p:txBody>
-          <a:bodyPr wrap="square">
-            <a:spAutoFit/>
-          </a:bodyPr>
-          <a:lstStyle/>
-          <a:p>
-            <a:pPr algn="l"/>
-            <a:r>
-              <a:rPr sz="2600" b="0">
-                <a:solidFill>
-                  <a:srgbClr val="1A1A1A"/>
-                </a:solidFill>
-                <a:latin typeface="Leelawadee UI"/>
-                <a:ea typeface="Leelawadee UI"/>
-                <a:cs typeface="Leelawadee UI"/>
-              </a:rPr>
-              <a:t>• แผนสำรองถ้าสาธิตสดพัง</a:t>
-            </a:r>
-          </a:p>
-        </p:txBody>
-      </p:sp>
-      <p:sp>
-        <p:nvSpPr>
-          <p:cNvPr id="5" name="TextBox 4"/>
-          <p:cNvSpPr txBox="1"/>
-          <p:nvPr/>
-        </p:nvSpPr>
-        <p:spPr>
-          <a:xfrm>
-            <a:off x="822960" y="2702560"/>
-            <a:ext cx="10545775" cy="560324"/>
-          </a:xfrm>
-          <a:prstGeom prst="rect">
-            <a:avLst/>
-          </a:prstGeom>
-          <a:noFill/>
-        </p:spPr>
-        <p:txBody>
-          <a:bodyPr wrap="square">
-            <a:spAutoFit/>
-          </a:bodyPr>
-          <a:lstStyle/>
-          <a:p>
-            <a:pPr algn="l"/>
-            <a:r>
-              <a:rPr sz="2600" b="0">
-                <a:solidFill>
-                  <a:srgbClr val="1A1A1A"/>
-                </a:solidFill>
-                <a:latin typeface="Leelawadee UI"/>
-                <a:ea typeface="Leelawadee UI"/>
-                <a:cs typeface="Leelawadee UI"/>
-              </a:rPr>
-              <a:t>• ไฟล์ Backlog Sprint 2 ที่เปิดรอจดไว้แล้ว</a:t>
-            </a:r>
-          </a:p>
-        </p:txBody>
-      </p:sp>
-      <p:sp>
-        <p:nvSpPr>
-          <p:cNvPr id="6" name="TextBox 5"/>
           <p:cNvSpPr txBox="1"/>
           <p:nvPr/>
         </p:nvSpPr>
@@ -22461,20 +22857,57 @@
       <p:grpSpPr/>
       <p:sp>
         <p:nvSpPr>
-          <p:cNvPr id="2" name="Rectangle 1"/>
+          <p:cNvPr id="2" name="TextBox 1"/>
+          <p:cNvSpPr txBox="1"/>
+          <p:nvPr/>
+        </p:nvSpPr>
+        <p:spPr>
+          <a:xfrm>
+            <a:off x="822960" y="502920"/>
+            <a:ext cx="10545775" cy="804672"/>
+          </a:xfrm>
+          <a:prstGeom prst="rect">
+            <a:avLst/>
+          </a:prstGeom>
+          <a:noFill/>
+        </p:spPr>
+        <p:txBody>
+          <a:bodyPr wrap="square">
+            <a:spAutoFit/>
+          </a:bodyPr>
+          <a:lstStyle/>
+          <a:p>
+            <a:pPr algn="l"/>
+            <a:r>
+              <a:rPr sz="3600" b="1">
+                <a:solidFill>
+                  <a:srgbClr val="1F5FA8"/>
+                </a:solidFill>
+                <a:latin typeface="Leelawadee UI"/>
+                <a:ea typeface="Leelawadee UI"/>
+                <a:cs typeface="Leelawadee UI"/>
+              </a:rPr>
+              <a:t>ตัวอย่าง: feedback ของ FixIt → Backlog</a:t>
+            </a:r>
+          </a:p>
+        </p:txBody>
+      </p:sp>
+      <p:sp>
+        <p:nvSpPr>
+          <p:cNvPr id="3" name="Rectangle 2"/>
           <p:cNvSpPr/>
           <p:nvPr/>
         </p:nvSpPr>
         <p:spPr>
           <a:xfrm>
-            <a:off x="0" y="0"/>
-            <a:ext cx="12191695" cy="6858000"/>
+            <a:off x="822960" y="1472184"/>
+            <a:ext cx="10545775" cy="1920240"/>
           </a:xfrm>
           <a:prstGeom prst="rect">
             <a:avLst/>
           </a:prstGeom>
           <a:solidFill>
-            <a:srgbClr val="1F5FA8"/>
+            <a:srgbClr val="F2F4F7"/>
           </a:solidFill>
           <a:ln>
             <a:noFill/>
@@ -22495,46 +22928,76 @@
           </a:fontRef>
         </p:style>
         <p:txBody>
-          <a:bodyPr rtlCol="0" anchor="ctr"/>
-          <a:lstStyle/>
-          <a:p>
-            <a:pPr algn="ctr"/>
-          </a:p>
-        </p:txBody>
-      </p:sp>
-      <p:sp>
-        <p:nvSpPr>
-          <p:cNvPr id="3" name="TextBox 2"/>
-          <p:cNvSpPr txBox="1"/>
-          <p:nvPr/>
-        </p:nvSpPr>
-        <p:spPr>
-          <a:xfrm>
-            <a:off x="822960" y="2743200"/>
-            <a:ext cx="10545775" cy="1463040"/>
-          </a:xfrm>
-          <a:prstGeom prst="rect">
-            <a:avLst/>
-          </a:prstGeom>
-          <a:noFill/>
-        </p:spPr>
-        <p:txBody>
-          <a:bodyPr wrap="square" anchor="ctr">
-            <a:spAutoFit/>
-          </a:bodyPr>
-          <a:lstStyle/>
-          <a:p>
-            <a:pPr algn="ctr"/>
-            <a:r>
-              <a:rPr sz="4000" b="1">
-                <a:solidFill>
-                  <a:srgbClr val="FFFFFF"/>
-                </a:solidFill>
-                <a:latin typeface="Leelawadee UI"/>
-                <a:ea typeface="Leelawadee UI"/>
-                <a:cs typeface="Leelawadee UI"/>
-              </a:rPr>
-              <a:t>📦 ช่วงที่ 3 — เตรียมส่งมอบให้ Module 3 · 45 นาที</a:t>
+          <a:bodyPr rtlCol="0" anchor="ctr" wrap="none" lIns="228600" tIns="137160"/>
+          <a:lstStyle/>
+          <a:p>
+            <a:pPr algn="l"/>
+            <a:r>
+              <a:rPr sz="1800" b="0">
+                <a:solidFill>
+                  <a:srgbClr val="1A1A1A"/>
+                </a:solidFill>
+                <a:latin typeface="Consolas"/>
+                <a:ea typeface="Consolas"/>
+                <a:cs typeface="Consolas"/>
+              </a:rPr>
+              <a:t>feedback ที่ได้                      →  ข้อใน Backlog Sprint 2</a:t>
+            </a:r>
+          </a:p>
+          <a:p>
+            <a:pPr algn="l"/>
+            <a:r>
+              <a:rPr sz="1800" b="0">
+                <a:solidFill>
+                  <a:srgbClr val="1A1A1A"/>
+                </a:solidFill>
+                <a:latin typeface="Consolas"/>
+                <a:ea typeface="Consolas"/>
+                <a:cs typeface="Consolas"/>
+              </a:rPr>
+              <a:t>──────────────────────────────────  ────────────────────────────</a:t>
+            </a:r>
+          </a:p>
+          <a:p>
+            <a:pPr algn="l"/>
+            <a:r>
+              <a:rPr sz="1800" b="0">
+                <a:solidFill>
+                  <a:srgbClr val="1A1A1A"/>
+                </a:solidFill>
+                <a:latin typeface="Consolas"/>
+                <a:ea typeface="Consolas"/>
+                <a:cs typeface="Consolas"/>
+              </a:rPr>
+              <a:t>"ไม่รู้ว่าช่างรับงานหรือยัง"          →  แจ้งเตือนผู้แจ้งเมื่อมอบหมายช่าง</a:t>
+            </a:r>
+          </a:p>
+          <a:p>
+            <a:pPr algn="l"/>
+            <a:r>
+              <a:rPr sz="1800" b="0">
+                <a:solidFill>
+                  <a:srgbClr val="1A1A1A"/>
+                </a:solidFill>
+                <a:latin typeface="Consolas"/>
+                <a:ea typeface="Consolas"/>
+                <a:cs typeface="Consolas"/>
+              </a:rPr>
+              <a:t>"อยากเห็นสรุปว่าเดือนนี้ซ่อมกี่งาน"   →  ทำหน้าสรุป (ยกไป Module 3)</a:t>
+            </a:r>
+          </a:p>
+          <a:p>
+            <a:pPr algn="l"/>
+            <a:r>
+              <a:rPr sz="1800" b="0">
+                <a:solidFill>
+                  <a:srgbClr val="1A1A1A"/>
+                </a:solidFill>
+                <a:latin typeface="Consolas"/>
+                <a:ea typeface="Consolas"/>
+                <a:cs typeface="Consolas"/>
+              </a:rPr>
+              <a:t>คีย์ AI ยังอยู่ในหน้าเว็บ (ค้างจาก ส.8) →  เปลี่ยนไปใช้ตัวกลางเก็บคีย์</a:t>
             </a:r>
           </a:p>
         </p:txBody>
@@ -23131,7 +23594,7 @@
                 <a:ea typeface="Leelawadee UI"/>
                 <a:cs typeface="Leelawadee UI"/>
               </a:rPr>
-              <a:t>📦 ของส่งมอบ 5 รายการ</a:t>
+              <a:t>✅ ช่วงนี้คุณต้องได้</a:t>
             </a:r>
           </a:p>
         </p:txBody>
@@ -23168,7 +23631,7 @@
                 <a:ea typeface="Leelawadee UI"/>
                 <a:cs typeface="Leelawadee UI"/>
               </a:rPr>
-              <a:t>• 1️⃣ URL ระบบที่ deploy ออนไลน์ใช้งานได้จริง</a:t>
+              <a:t>• โครงนำเสนอ 5 นาทีที่แบ่งท่อนกันครบทุกคน</a:t>
             </a:r>
           </a:p>
         </p:txBody>
@@ -23205,7 +23668,7 @@
                 <a:ea typeface="Leelawadee UI"/>
                 <a:cs typeface="Leelawadee UI"/>
               </a:rPr>
-              <a:t>• 2️⃣ GitHub repo + CLAUDE.md + commit ของทุกคน</a:t>
+              <a:t>• แผนสำรองถ้าสาธิตสดพัง</a:t>
             </a:r>
           </a:p>
         </p:txBody>
@@ -23242,7 +23705,7 @@
                 <a:ea typeface="Leelawadee UI"/>
                 <a:cs typeface="Leelawadee UI"/>
               </a:rPr>
-              <a:t>• 3️⃣ ชุดทดสอบ Playwright ที่ผ่าน</a:t>
+              <a:t>• ไฟล์ Backlog Sprint 2 ที่เปิดรอจดไว้แล้ว</a:t>
             </a:r>
           </a:p>
         </p:txBody>
@@ -23250,80 +23713,6 @@
       <p:sp>
         <p:nvSpPr>
           <p:cNvPr id="6" name="TextBox 5"/>
-          <p:cNvSpPr txBox="1"/>
-          <p:nvPr/>
-        </p:nvSpPr>
-        <p:spPr>
-          <a:xfrm>
-            <a:off x="822960" y="3317748"/>
-            <a:ext cx="10545775" cy="560324"/>
-          </a:xfrm>
-          <a:prstGeom prst="rect">
-            <a:avLst/>
-          </a:prstGeom>
-          <a:noFill/>
-        </p:spPr>
-        <p:txBody>
-          <a:bodyPr wrap="square">
-            <a:spAutoFit/>
-          </a:bodyPr>
-          <a:lstStyle/>
-          <a:p>
-            <a:pPr algn="l"/>
-            <a:r>
-              <a:rPr sz="2600" b="0">
-                <a:solidFill>
-                  <a:srgbClr val="1A1A1A"/>
-                </a:solidFill>
-                <a:latin typeface="Leelawadee UI"/>
-                <a:ea typeface="Leelawadee UI"/>
-                <a:cs typeface="Leelawadee UI"/>
-              </a:rPr>
-              <a:t>• 4️⃣ Backlog Sprint 2</a:t>
-            </a:r>
-          </a:p>
-        </p:txBody>
-      </p:sp>
-      <p:sp>
-        <p:nvSpPr>
-          <p:cNvPr id="7" name="TextBox 6"/>
-          <p:cNvSpPr txBox="1"/>
-          <p:nvPr/>
-        </p:nvSpPr>
-        <p:spPr>
-          <a:xfrm>
-            <a:off x="822960" y="3932936"/>
-            <a:ext cx="10545775" cy="560324"/>
-          </a:xfrm>
-          <a:prstGeom prst="rect">
-            <a:avLst/>
-          </a:prstGeom>
-          <a:noFill/>
-        </p:spPr>
-        <p:txBody>
-          <a:bodyPr wrap="square">
-            <a:spAutoFit/>
-          </a:bodyPr>
-          <a:lstStyle/>
-          <a:p>
-            <a:pPr algn="l"/>
-            <a:r>
-              <a:rPr sz="2600" b="0">
-                <a:solidFill>
-                  <a:srgbClr val="1A1A1A"/>
-                </a:solidFill>
-                <a:latin typeface="Leelawadee UI"/>
-                <a:ea typeface="Leelawadee UI"/>
-                <a:cs typeface="Leelawadee UI"/>
-              </a:rPr>
-              <a:t>• 5️⃣ บันทึกสิ่งที่ยังไม่เสร็จ</a:t>
-            </a:r>
-          </a:p>
-        </p:txBody>
-      </p:sp>
-      <p:sp>
-        <p:nvSpPr>
-          <p:cNvPr id="8" name="TextBox 7"/>
           <p:cNvSpPr txBox="1"/>
           <p:nvPr/>
         </p:nvSpPr>
@@ -23377,38 +23766,44 @@
       <p:grpSpPr/>
       <p:sp>
         <p:nvSpPr>
-          <p:cNvPr id="2" name="TextBox 1"/>
-          <p:cNvSpPr txBox="1"/>
-          <p:nvPr/>
-        </p:nvSpPr>
-        <p:spPr>
-          <a:xfrm>
-            <a:off x="822960" y="502920"/>
-            <a:ext cx="10545775" cy="804672"/>
-          </a:xfrm>
-          <a:prstGeom prst="rect">
-            <a:avLst/>
-          </a:prstGeom>
-          <a:noFill/>
-        </p:spPr>
-        <p:txBody>
-          <a:bodyPr wrap="square">
-            <a:spAutoFit/>
-          </a:bodyPr>
-          <a:lstStyle/>
-          <a:p>
-            <a:pPr algn="l"/>
-            <a:r>
-              <a:rPr sz="3600" b="1">
-                <a:solidFill>
-                  <a:srgbClr val="1F5FA8"/>
-                </a:solidFill>
-                <a:latin typeface="Leelawadee UI"/>
-                <a:ea typeface="Leelawadee UI"/>
-                <a:cs typeface="Leelawadee UI"/>
-              </a:rPr>
-              <a:t>1️⃣ URL — ต้องเปิดจากเครื่องคนอื่นได้</a:t>
-            </a:r>
+          <p:cNvPr id="2" name="Rectangle 1"/>
+          <p:cNvSpPr/>
+          <p:nvPr/>
+        </p:nvSpPr>
+        <p:spPr>
+          <a:xfrm>
+            <a:off x="0" y="0"/>
+            <a:ext cx="12191695" cy="6858000"/>
+          </a:xfrm>
+          <a:prstGeom prst="rect">
+            <a:avLst/>
+          </a:prstGeom>
+          <a:solidFill>
+            <a:srgbClr val="1F5FA8"/>
+          </a:solidFill>
+          <a:ln>
+            <a:noFill/>
+          </a:ln>
+        </p:spPr>
+        <p:style>
+          <a:lnRef idx="1">
+            <a:schemeClr val="accent1"/>
+          </a:lnRef>
+          <a:fillRef idx="3">
+            <a:schemeClr val="accent1"/>
+          </a:fillRef>
+          <a:effectRef idx="2">
+            <a:schemeClr val="accent1"/>
+          </a:effectRef>
+          <a:fontRef idx="minor">
+            <a:schemeClr val="lt1"/>
+          </a:fontRef>
+        </p:style>
+        <p:txBody>
+          <a:bodyPr rtlCol="0" anchor="ctr"/>
+          <a:lstStyle/>
+          <a:p>
+            <a:pPr algn="ctr"/>
           </a:p>
         </p:txBody>
       </p:sp>
@@ -23420,31 +23815,31 @@
         </p:nvSpPr>
         <p:spPr>
           <a:xfrm>
-            <a:off x="822960" y="1472184"/>
-            <a:ext cx="10545775" cy="560324"/>
-          </a:xfrm>
-          <a:prstGeom prst="rect">
-            <a:avLst/>
-          </a:prstGeom>
-          <a:noFill/>
-        </p:spPr>
-        <p:txBody>
-          <a:bodyPr wrap="square">
-            <a:spAutoFit/>
-          </a:bodyPr>
-          <a:lstStyle/>
-          <a:p>
-            <a:pPr algn="l"/>
-            <a:r>
-              <a:rPr sz="2600" b="0">
-                <a:solidFill>
-                  <a:srgbClr val="1A1A1A"/>
-                </a:solidFill>
-                <a:latin typeface="Leelawadee UI"/>
-                <a:ea typeface="Leelawadee UI"/>
-                <a:cs typeface="Leelawadee UI"/>
-              </a:rPr>
-              <a:t>• เปิดจากมือถือที่ไม่ได้ต่อ Wi-Fi เดียวกัน</a:t>
+            <a:off x="822960" y="2743200"/>
+            <a:ext cx="10545775" cy="1463040"/>
+          </a:xfrm>
+          <a:prstGeom prst="rect">
+            <a:avLst/>
+          </a:prstGeom>
+          <a:noFill/>
+        </p:spPr>
+        <p:txBody>
+          <a:bodyPr wrap="square" anchor="ctr">
+            <a:spAutoFit/>
+          </a:bodyPr>
+          <a:lstStyle/>
+          <a:p>
+            <a:pPr algn="ctr"/>
+            <a:r>
+              <a:rPr sz="4000" b="1">
+                <a:solidFill>
+                  <a:srgbClr val="FFFFFF"/>
+                </a:solidFill>
+                <a:latin typeface="Leelawadee UI"/>
+                <a:ea typeface="Leelawadee UI"/>
+                <a:cs typeface="Leelawadee UI"/>
+              </a:rPr>
+              <a:t>📦 ช่วงที่ 3 — เตรียมส่งมอบให้ Module 3 · 35 นาที</a:t>
             </a:r>
           </a:p>
         </p:txBody>
@@ -23452,117 +23847,6 @@
       <p:sp>
         <p:nvSpPr>
           <p:cNvPr id="4" name="TextBox 3"/>
-          <p:cNvSpPr txBox="1"/>
-          <p:nvPr/>
-        </p:nvSpPr>
-        <p:spPr>
-          <a:xfrm>
-            <a:off x="822960" y="2087372"/>
-            <a:ext cx="10545775" cy="560324"/>
-          </a:xfrm>
-          <a:prstGeom prst="rect">
-            <a:avLst/>
-          </a:prstGeom>
-          <a:noFill/>
-        </p:spPr>
-        <p:txBody>
-          <a:bodyPr wrap="square">
-            <a:spAutoFit/>
-          </a:bodyPr>
-          <a:lstStyle/>
-          <a:p>
-            <a:pPr algn="l"/>
-            <a:r>
-              <a:rPr sz="2600" b="0">
-                <a:solidFill>
-                  <a:srgbClr val="1A1A1A"/>
-                </a:solidFill>
-                <a:latin typeface="Leelawadee UI"/>
-                <a:ea typeface="Leelawadee UI"/>
-                <a:cs typeface="Leelawadee UI"/>
-              </a:rPr>
-              <a:t>• ให้เพื่อนอีกกลุ่มลองเปิด แล้วบอกว่าเห็นอะไร</a:t>
-            </a:r>
-          </a:p>
-        </p:txBody>
-      </p:sp>
-      <p:sp>
-        <p:nvSpPr>
-          <p:cNvPr id="5" name="TextBox 4"/>
-          <p:cNvSpPr txBox="1"/>
-          <p:nvPr/>
-        </p:nvSpPr>
-        <p:spPr>
-          <a:xfrm>
-            <a:off x="822960" y="2702560"/>
-            <a:ext cx="10545775" cy="560324"/>
-          </a:xfrm>
-          <a:prstGeom prst="rect">
-            <a:avLst/>
-          </a:prstGeom>
-          <a:noFill/>
-        </p:spPr>
-        <p:txBody>
-          <a:bodyPr wrap="square">
-            <a:spAutoFit/>
-          </a:bodyPr>
-          <a:lstStyle/>
-          <a:p>
-            <a:pPr algn="l"/>
-            <a:r>
-              <a:rPr sz="2600" b="0">
-                <a:solidFill>
-                  <a:srgbClr val="1A1A1A"/>
-                </a:solidFill>
-                <a:latin typeface="Leelawadee UI"/>
-                <a:ea typeface="Leelawadee UI"/>
-                <a:cs typeface="Leelawadee UI"/>
-              </a:rPr>
-              <a:t>• ต้องเก็บข้อมูลลง Firestore ได้จริง ไม่ใช่ข้อมูลปลอม</a:t>
-            </a:r>
-          </a:p>
-        </p:txBody>
-      </p:sp>
-      <p:sp>
-        <p:nvSpPr>
-          <p:cNvPr id="6" name="TextBox 5"/>
-          <p:cNvSpPr txBox="1"/>
-          <p:nvPr/>
-        </p:nvSpPr>
-        <p:spPr>
-          <a:xfrm>
-            <a:off x="822960" y="3317748"/>
-            <a:ext cx="10545775" cy="560324"/>
-          </a:xfrm>
-          <a:prstGeom prst="rect">
-            <a:avLst/>
-          </a:prstGeom>
-          <a:noFill/>
-        </p:spPr>
-        <p:txBody>
-          <a:bodyPr wrap="square">
-            <a:spAutoFit/>
-          </a:bodyPr>
-          <a:lstStyle/>
-          <a:p>
-            <a:pPr algn="l"/>
-            <a:r>
-              <a:rPr sz="2600" b="0">
-                <a:solidFill>
-                  <a:srgbClr val="1A1A1A"/>
-                </a:solidFill>
-                <a:latin typeface="Leelawadee UI"/>
-                <a:ea typeface="Leelawadee UI"/>
-                <a:cs typeface="Leelawadee UI"/>
-              </a:rPr>
-              <a:t>• 🆘 เปิดไม่ได้ → กลับไปที่ขั้นตอน deploy สัปดาห์ที่ 8</a:t>
-            </a:r>
-          </a:p>
-        </p:txBody>
-      </p:sp>
-      <p:sp>
-        <p:nvSpPr>
-          <p:cNvPr id="7" name="TextBox 6"/>
           <p:cNvSpPr txBox="1"/>
           <p:nvPr/>
         </p:nvSpPr>
@@ -23646,7 +23930,7 @@
                 <a:ea typeface="Leelawadee UI"/>
                 <a:cs typeface="Leelawadee UI"/>
               </a:rPr>
-              <a:t>2️⃣ repo — และ 👤 commit ของทุกคน</a:t>
+              <a:t>📦 ของส่งมอบ 5 รายการ</a:t>
             </a:r>
           </a:p>
         </p:txBody>
@@ -23683,7 +23967,7 @@
                 <a:ea typeface="Leelawadee UI"/>
                 <a:cs typeface="Leelawadee UI"/>
               </a:rPr>
-              <a:t>• ใน repo ต้องมี CLAUDE.md ที่ตรงกับระบบจริง</a:t>
+              <a:t>• 1️⃣ URL ระบบที่ deploy ออนไลน์ใช้งานได้จริง</a:t>
             </a:r>
           </a:p>
         </p:txBody>
@@ -23720,7 +24004,7 @@
                 <a:ea typeface="Leelawadee UI"/>
                 <a:cs typeface="Leelawadee UI"/>
               </a:rPr>
-              <a:t>• ทุกคนในกลุ่มต้องมี commit ในชื่อตัวเอง</a:t>
+              <a:t>• 2️⃣ GitHub repo + CLAUDE.md + commit ของทุกคน</a:t>
             </a:r>
           </a:p>
         </p:txBody>
@@ -23757,7 +24041,7 @@
                 <a:ea typeface="Leelawadee UI"/>
                 <a:cs typeface="Leelawadee UI"/>
               </a:rPr>
-              <a:t>• คนที่ไม่มี commit เลย ถือว่ายังไม่ผ่าน Module</a:t>
+              <a:t>• 3️⃣ ชุดทดสอบ Playwright ที่ผ่าน</a:t>
             </a:r>
           </a:p>
         </p:txBody>
@@ -23794,7 +24078,7 @@
                 <a:ea typeface="Leelawadee UI"/>
                 <a:cs typeface="Leelawadee UI"/>
               </a:rPr>
-              <a:t>• ตรวจได้จากหน้าประวัติของ repo บน GitHub</a:t>
+              <a:t>• 4️⃣ Backlog Sprint 2</a:t>
             </a:r>
           </a:p>
         </p:txBody>
@@ -23802,6 +24086,43 @@
       <p:sp>
         <p:nvSpPr>
           <p:cNvPr id="7" name="TextBox 6"/>
+          <p:cNvSpPr txBox="1"/>
+          <p:nvPr/>
+        </p:nvSpPr>
+        <p:spPr>
+          <a:xfrm>
+            <a:off x="822960" y="3932936"/>
+            <a:ext cx="10545775" cy="560324"/>
+          </a:xfrm>
+          <a:prstGeom prst="rect">
+            <a:avLst/>
+          </a:prstGeom>
+          <a:noFill/>
+        </p:spPr>
+        <p:txBody>
+          <a:bodyPr wrap="square">
+            <a:spAutoFit/>
+          </a:bodyPr>
+          <a:lstStyle/>
+          <a:p>
+            <a:pPr algn="l"/>
+            <a:r>
+              <a:rPr sz="2600" b="0">
+                <a:solidFill>
+                  <a:srgbClr val="1A1A1A"/>
+                </a:solidFill>
+                <a:latin typeface="Leelawadee UI"/>
+                <a:ea typeface="Leelawadee UI"/>
+                <a:cs typeface="Leelawadee UI"/>
+              </a:rPr>
+              <a:t>• 5️⃣ บันทึกสิ่งที่ยังไม่เสร็จ</a:t>
+            </a:r>
+          </a:p>
+        </p:txBody>
+      </p:sp>
+      <p:sp>
+        <p:nvSpPr>
+          <p:cNvPr id="8" name="TextBox 7"/>
           <p:cNvSpPr txBox="1"/>
           <p:nvPr/>
         </p:nvSpPr>
@@ -23885,7 +24206,7 @@
                 <a:ea typeface="Leelawadee UI"/>
                 <a:cs typeface="Leelawadee UI"/>
               </a:rPr>
-              <a:t>👤 ยังมีคนไม่มี commit ทำอย่างไร</a:t>
+              <a:t>1️⃣ URL — ต้องเปิดจากเครื่องคนอื่นได้</a:t>
             </a:r>
           </a:p>
         </p:txBody>
@@ -23922,7 +24243,7 @@
                 <a:ea typeface="Leelawadee UI"/>
                 <a:cs typeface="Leelawadee UI"/>
               </a:rPr>
-              <a:t>• ให้คนนั้นเป็นคนคุมคีย์บอร์ดในช่วงถัดไปทันที</a:t>
+              <a:t>• เปิดจากมือถือที่ไม่ได้ต่อ Wi-Fi เดียวกัน</a:t>
             </a:r>
           </a:p>
         </p:txBody>
@@ -23959,7 +24280,7 @@
                 <a:ea typeface="Leelawadee UI"/>
                 <a:cs typeface="Leelawadee UI"/>
               </a:rPr>
-              <a:t>• ทำงานจริง 1 ก้อน แล้ว commit ในชื่อตัวเอง</a:t>
+              <a:t>• ให้เพื่อนอีกกลุ่มลองเปิด แล้วบอกว่าเห็นอะไร</a:t>
             </a:r>
           </a:p>
         </p:txBody>
@@ -23996,7 +24317,7 @@
                 <a:ea typeface="Leelawadee UI"/>
                 <a:cs typeface="Leelawadee UI"/>
               </a:rPr>
-              <a:t>• ❌ ห้ามให้คนอื่น commit แทนแล้วใส่ชื่อให้</a:t>
+              <a:t>• ต้องเก็บข้อมูลลง Firestore ได้จริง ไม่ใช่ข้อมูลปลอม</a:t>
             </a:r>
           </a:p>
         </p:txBody>
@@ -24033,7 +24354,7 @@
                 <a:ea typeface="Leelawadee UI"/>
                 <a:cs typeface="Leelawadee UI"/>
               </a:rPr>
-              <a:t>• ปัญหานี้แก้บ่ายนี้ได้ แต่แก้วันศุกร์ไม่ทัน</a:t>
+              <a:t>• 🆘 เปิดไม่ได้ → กลับไปที่ขั้นตอน deploy สัปดาห์ที่ 8</a:t>
             </a:r>
           </a:p>
         </p:txBody>
@@ -24124,7 +24445,7 @@
                 <a:ea typeface="Leelawadee UI"/>
                 <a:cs typeface="Leelawadee UI"/>
               </a:rPr>
-              <a:t>3️⃣ ชุดทดสอบ Playwright ที่ผ่าน</a:t>
+              <a:t>2️⃣ repo — และ 👤 commit ของทุกคน</a:t>
             </a:r>
           </a:p>
         </p:txBody>
@@ -24161,7 +24482,7 @@
                 <a:ea typeface="Leelawadee UI"/>
                 <a:cs typeface="Leelawadee UI"/>
               </a:rPr>
-              <a:t>• เทสต์อยู่ใน repo ไม่ใช่อยู่แค่ในหน้าจอ</a:t>
+              <a:t>• ใน repo ต้องมี CLAUDE.md ที่ตรงกับระบบจริง</a:t>
             </a:r>
           </a:p>
         </p:txBody>
@@ -24198,7 +24519,7 @@
                 <a:ea typeface="Leelawadee UI"/>
                 <a:cs typeface="Leelawadee UI"/>
               </a:rPr>
-              <a:t>• ต้องรันแล้วผ่าน ณ วันที่ส่ง</a:t>
+              <a:t>• ทุกคนในกลุ่มต้องมี commit ในชื่อตัวเอง</a:t>
             </a:r>
           </a:p>
         </p:txBody>
@@ -24235,7 +24556,7 @@
                 <a:ea typeface="Leelawadee UI"/>
                 <a:cs typeface="Leelawadee UI"/>
               </a:rPr>
-              <a:t>• เทสต์ที่ยัง fail → เขียนลงข้อ 5 อย่าลบทิ้ง</a:t>
+              <a:t>• คนที่ไม่มี commit เลย ถือว่ายังไม่ผ่าน Module</a:t>
             </a:r>
           </a:p>
         </p:txBody>
@@ -24272,7 +24593,7 @@
                 <a:ea typeface="Leelawadee UI"/>
                 <a:cs typeface="Leelawadee UI"/>
               </a:rPr>
-              <a:t>• ⚠️ ห้ามแก้โค้ดระบบเพื่อให้เทสต์ผ่าน</a:t>
+              <a:t>• ตรวจได้จากหน้าประวัติของ repo บน GitHub</a:t>
             </a:r>
           </a:p>
         </p:txBody>
@@ -24363,7 +24684,7 @@
                 <a:ea typeface="Leelawadee UI"/>
                 <a:cs typeface="Leelawadee UI"/>
               </a:rPr>
-              <a:t>4️⃣ Backlog Sprint 2</a:t>
+              <a:t>👤 ยังมีคนไม่มี commit ทำอย่างไร</a:t>
             </a:r>
           </a:p>
         </p:txBody>
@@ -24400,7 +24721,7 @@
                 <a:ea typeface="Leelawadee UI"/>
                 <a:cs typeface="Leelawadee UI"/>
               </a:rPr>
-              <a:t>• มาจาก feedback จริงในบ่ายนี้ ไม่ใช่คิดเอง</a:t>
+              <a:t>• ให้คนนั้นเป็นคนคุมคีย์บอร์ดในช่วงถัดไปทันที</a:t>
             </a:r>
           </a:p>
         </p:txBody>
@@ -24437,7 +24758,7 @@
                 <a:ea typeface="Leelawadee UI"/>
                 <a:cs typeface="Leelawadee UI"/>
               </a:rPr>
-              <a:t>• เขียนเป็นประโยคที่ทำได้ ไม่ใช่ความรู้สึก</a:t>
+              <a:t>• ทำงานจริง 1 ก้อน แล้ว commit ในชื่อตัวเอง</a:t>
             </a:r>
           </a:p>
         </p:txBody>
@@ -24474,7 +24795,7 @@
                 <a:ea typeface="Leelawadee UI"/>
                 <a:cs typeface="Leelawadee UI"/>
               </a:rPr>
-              <a:t>• เรียงลำดับว่าอันไหนควรทำก่อน</a:t>
+              <a:t>• ❌ ห้ามให้คนอื่น commit แทนแล้วใส่ชื่อให้</a:t>
             </a:r>
           </a:p>
         </p:txBody>
@@ -24511,7 +24832,7 @@
                 <a:ea typeface="Leelawadee UI"/>
                 <a:cs typeface="Leelawadee UI"/>
               </a:rPr>
-              <a:t>• นี่คือจุดเริ่มของ Module 3 ในวันแรก</a:t>
+              <a:t>• ปัญหานี้แก้บ่ายนี้ได้ แต่แก้วันศุกร์ไม่ทัน</a:t>
             </a:r>
           </a:p>
         </p:txBody>
@@ -24602,7 +24923,7 @@
                 <a:ea typeface="Leelawadee UI"/>
                 <a:cs typeface="Leelawadee UI"/>
               </a:rPr>
-              <a:t>📌 Module 3 คืออะไร</a:t>
+              <a:t>3️⃣ ชุดทดสอบ Playwright ที่ผ่าน</a:t>
             </a:r>
           </a:p>
         </p:txBody>
@@ -24616,6 +24937,43 @@
         <p:spPr>
           <a:xfrm>
             <a:off x="822960" y="1472184"/>
+            <a:ext cx="10545775" cy="1029208"/>
+          </a:xfrm>
+          <a:prstGeom prst="rect">
+            <a:avLst/>
+          </a:prstGeom>
+          <a:noFill/>
+        </p:spPr>
+        <p:txBody>
+          <a:bodyPr wrap="square">
+            <a:spAutoFit/>
+          </a:bodyPr>
+          <a:lstStyle/>
+          <a:p>
+            <a:pPr algn="l"/>
+            <a:r>
+              <a:rPr sz="2600" b="0">
+                <a:solidFill>
+                  <a:srgbClr val="1A1A1A"/>
+                </a:solidFill>
+                <a:latin typeface="Leelawadee UI"/>
+                <a:ea typeface="Leelawadee UI"/>
+                <a:cs typeface="Leelawadee UI"/>
+              </a:rPr>
+              <a:t>• เทสต์อยู่ใน repo ไม่ใช่อยู่ในหน้าจอที่เพิ่งรันอย่างเดียว</a:t>
+            </a:r>
+          </a:p>
+        </p:txBody>
+      </p:sp>
+      <p:sp>
+        <p:nvSpPr>
+          <p:cNvPr id="4" name="TextBox 3"/>
+          <p:cNvSpPr txBox="1"/>
+          <p:nvPr/>
+        </p:nvSpPr>
+        <p:spPr>
+          <a:xfrm>
+            <a:off x="822960" y="2556256"/>
             <a:ext cx="10545775" cy="560324"/>
           </a:xfrm>
           <a:prstGeom prst="rect">
@@ -24639,20 +24997,20 @@
                 <a:ea typeface="Leelawadee UI"/>
                 <a:cs typeface="Leelawadee UI"/>
               </a:rPr>
-              <a:t>• Module 3 = AI-Integrated</a:t>
-            </a:r>
-          </a:p>
-        </p:txBody>
-      </p:sp>
-      <p:sp>
-        <p:nvSpPr>
-          <p:cNvPr id="4" name="TextBox 3"/>
-          <p:cNvSpPr txBox="1"/>
-          <p:nvPr/>
-        </p:nvSpPr>
-        <p:spPr>
-          <a:xfrm>
-            <a:off x="822960" y="2087372"/>
+              <a:t>• ต้องรันแล้วผ่าน ณ วันที่ส่ง</a:t>
+            </a:r>
+          </a:p>
+        </p:txBody>
+      </p:sp>
+      <p:sp>
+        <p:nvSpPr>
+          <p:cNvPr id="5" name="TextBox 4"/>
+          <p:cNvSpPr txBox="1"/>
+          <p:nvPr/>
+        </p:nvSpPr>
+        <p:spPr>
+          <a:xfrm>
+            <a:off x="822960" y="3171444"/>
             <a:ext cx="10545775" cy="560324"/>
           </a:xfrm>
           <a:prstGeom prst="rect">
@@ -24676,20 +25034,20 @@
                 <a:ea typeface="Leelawadee UI"/>
                 <a:cs typeface="Leelawadee UI"/>
               </a:rPr>
-              <a:t>• Data Analytics · Dashboard · AI/LLM</a:t>
-            </a:r>
-          </a:p>
-        </p:txBody>
-      </p:sp>
-      <p:sp>
-        <p:nvSpPr>
-          <p:cNvPr id="5" name="TextBox 4"/>
-          <p:cNvSpPr txBox="1"/>
-          <p:nvPr/>
-        </p:nvSpPr>
-        <p:spPr>
-          <a:xfrm>
-            <a:off x="822960" y="2702560"/>
+              <a:t>• เทสต์ที่ยัง fail → เขียนลงข้อ 5 อย่าลบทิ้ง</a:t>
+            </a:r>
+          </a:p>
+        </p:txBody>
+      </p:sp>
+      <p:sp>
+        <p:nvSpPr>
+          <p:cNvPr id="6" name="TextBox 5"/>
+          <p:cNvSpPr txBox="1"/>
+          <p:nvPr/>
+        </p:nvSpPr>
+        <p:spPr>
+          <a:xfrm>
+            <a:off x="822960" y="3786632"/>
             <a:ext cx="10545775" cy="560324"/>
           </a:xfrm>
           <a:prstGeom prst="rect">
@@ -24713,44 +25071,7 @@
                 <a:ea typeface="Leelawadee UI"/>
                 <a:cs typeface="Leelawadee UI"/>
               </a:rPr>
-              <a:t>• อยากทำหน้าสรุป หรือฟีเจอร์ AI → ใส่ Backlog Sprint 2</a:t>
-            </a:r>
-          </a:p>
-        </p:txBody>
-      </p:sp>
-      <p:sp>
-        <p:nvSpPr>
-          <p:cNvPr id="6" name="TextBox 5"/>
-          <p:cNvSpPr txBox="1"/>
-          <p:nvPr/>
-        </p:nvSpPr>
-        <p:spPr>
-          <a:xfrm>
-            <a:off x="822960" y="3317748"/>
-            <a:ext cx="10545775" cy="560324"/>
-          </a:xfrm>
-          <a:prstGeom prst="rect">
-            <a:avLst/>
-          </a:prstGeom>
-          <a:noFill/>
-        </p:spPr>
-        <p:txBody>
-          <a:bodyPr wrap="square">
-            <a:spAutoFit/>
-          </a:bodyPr>
-          <a:lstStyle/>
-          <a:p>
-            <a:pPr algn="l"/>
-            <a:r>
-              <a:rPr sz="2600" b="0">
-                <a:solidFill>
-                  <a:srgbClr val="1A1A1A"/>
-                </a:solidFill>
-                <a:latin typeface="Leelawadee UI"/>
-                <a:ea typeface="Leelawadee UI"/>
-                <a:cs typeface="Leelawadee UI"/>
-              </a:rPr>
-              <a:t>• ไม่ใช่ทำในสัปดาห์นี้</a:t>
+              <a:t>• ⚠️ ห้ามแก้โค้ดระบบเพื่อให้เทสต์ผ่าน</a:t>
             </a:r>
           </a:p>
         </p:txBody>
@@ -24841,222 +25162,199 @@
                 <a:ea typeface="Leelawadee UI"/>
                 <a:cs typeface="Leelawadee UI"/>
               </a:rPr>
-              <a:t>5️⃣ บันทึกสิ่งที่ยังไม่เสร็จ</a:t>
-            </a:r>
-          </a:p>
-        </p:txBody>
-      </p:sp>
-      <p:sp>
-        <p:nvSpPr>
-          <p:cNvPr id="3" name="Rectangle 2"/>
-          <p:cNvSpPr/>
+              <a:t>4️⃣ Backlog Sprint 2</a:t>
+            </a:r>
+          </a:p>
+        </p:txBody>
+      </p:sp>
+      <p:sp>
+        <p:nvSpPr>
+          <p:cNvPr id="3" name="TextBox 2"/>
+          <p:cNvSpPr txBox="1"/>
           <p:nvPr/>
         </p:nvSpPr>
         <p:spPr>
           <a:xfrm>
             <a:off x="822960" y="1472184"/>
-            <a:ext cx="10545775" cy="4096512"/>
-          </a:xfrm>
-          <a:prstGeom prst="rect">
-            <a:avLst/>
-          </a:prstGeom>
-          <a:solidFill>
-            <a:srgbClr val="F2F4F7"/>
-          </a:solidFill>
-          <a:ln>
-            <a:noFill/>
-          </a:ln>
-        </p:spPr>
-        <p:style>
-          <a:lnRef idx="1">
-            <a:schemeClr val="accent1"/>
-          </a:lnRef>
-          <a:fillRef idx="3">
-            <a:schemeClr val="accent1"/>
-          </a:fillRef>
-          <a:effectRef idx="2">
-            <a:schemeClr val="accent1"/>
-          </a:effectRef>
-          <a:fontRef idx="minor">
-            <a:schemeClr val="lt1"/>
-          </a:fontRef>
-        </p:style>
-        <p:txBody>
-          <a:bodyPr rtlCol="0" anchor="ctr" wrap="none" lIns="228600" tIns="137160"/>
-          <a:lstStyle/>
-          <a:p>
-            <a:pPr algn="l"/>
-            <a:r>
-              <a:rPr sz="1800" b="0">
+            <a:ext cx="10545775" cy="560324"/>
+          </a:xfrm>
+          <a:prstGeom prst="rect">
+            <a:avLst/>
+          </a:prstGeom>
+          <a:noFill/>
+        </p:spPr>
+        <p:txBody>
+          <a:bodyPr wrap="square">
+            <a:spAutoFit/>
+          </a:bodyPr>
+          <a:lstStyle/>
+          <a:p>
+            <a:pPr algn="l"/>
+            <a:r>
+              <a:rPr sz="2600" b="0">
                 <a:solidFill>
                   <a:srgbClr val="1A1A1A"/>
                 </a:solidFill>
-                <a:latin typeface="Consolas"/>
-                <a:ea typeface="Consolas"/>
-                <a:cs typeface="Consolas"/>
-              </a:rPr>
-              <a:t>บันทึกส่งต่อ Module 3 — &lt;ชื่อโครงงานของกลุ่ม&gt;</a:t>
-            </a:r>
-          </a:p>
-          <a:p>
-            <a:pPr algn="l"/>
-            <a:r>
-              <a:rPr sz="1800" b="0">
+                <a:latin typeface="Leelawadee UI"/>
+                <a:ea typeface="Leelawadee UI"/>
+                <a:cs typeface="Leelawadee UI"/>
+              </a:rPr>
+              <a:t>• มาจาก feedback จริงในบ่ายนี้ ไม่ใช่คิดเอง</a:t>
+            </a:r>
+          </a:p>
+        </p:txBody>
+      </p:sp>
+      <p:sp>
+        <p:nvSpPr>
+          <p:cNvPr id="4" name="TextBox 3"/>
+          <p:cNvSpPr txBox="1"/>
+          <p:nvPr/>
+        </p:nvSpPr>
+        <p:spPr>
+          <a:xfrm>
+            <a:off x="822960" y="2087372"/>
+            <a:ext cx="10545775" cy="560324"/>
+          </a:xfrm>
+          <a:prstGeom prst="rect">
+            <a:avLst/>
+          </a:prstGeom>
+          <a:noFill/>
+        </p:spPr>
+        <p:txBody>
+          <a:bodyPr wrap="square">
+            <a:spAutoFit/>
+          </a:bodyPr>
+          <a:lstStyle/>
+          <a:p>
+            <a:pPr algn="l"/>
+            <a:r>
+              <a:rPr sz="2600" b="0">
                 <a:solidFill>
                   <a:srgbClr val="1A1A1A"/>
                 </a:solidFill>
-                <a:latin typeface="Consolas"/>
-                <a:ea typeface="Consolas"/>
-                <a:cs typeface="Consolas"/>
-              </a:rPr>
-              <a:t/>
-            </a:r>
-          </a:p>
-          <a:p>
-            <a:pPr algn="l"/>
-            <a:r>
-              <a:rPr sz="1800" b="0">
+                <a:latin typeface="Leelawadee UI"/>
+                <a:ea typeface="Leelawadee UI"/>
+                <a:cs typeface="Leelawadee UI"/>
+              </a:rPr>
+              <a:t>• เขียนเป็นประโยคที่ทำได้ ไม่ใช่ความรู้สึก</a:t>
+            </a:r>
+          </a:p>
+        </p:txBody>
+      </p:sp>
+      <p:sp>
+        <p:nvSpPr>
+          <p:cNvPr id="5" name="TextBox 4"/>
+          <p:cNvSpPr txBox="1"/>
+          <p:nvPr/>
+        </p:nvSpPr>
+        <p:spPr>
+          <a:xfrm>
+            <a:off x="822960" y="2702560"/>
+            <a:ext cx="10545775" cy="560324"/>
+          </a:xfrm>
+          <a:prstGeom prst="rect">
+            <a:avLst/>
+          </a:prstGeom>
+          <a:noFill/>
+        </p:spPr>
+        <p:txBody>
+          <a:bodyPr wrap="square">
+            <a:spAutoFit/>
+          </a:bodyPr>
+          <a:lstStyle/>
+          <a:p>
+            <a:pPr algn="l"/>
+            <a:r>
+              <a:rPr sz="2600" b="0">
                 <a:solidFill>
                   <a:srgbClr val="1A1A1A"/>
                 </a:solidFill>
-                <a:latin typeface="Consolas"/>
-                <a:ea typeface="Consolas"/>
-                <a:cs typeface="Consolas"/>
-              </a:rPr>
-              <a:t>▸ เสร็จแล้ว</a:t>
-            </a:r>
-          </a:p>
-          <a:p>
-            <a:pPr algn="l"/>
-            <a:r>
-              <a:rPr sz="1800" b="0">
+                <a:latin typeface="Leelawadee UI"/>
+                <a:ea typeface="Leelawadee UI"/>
+                <a:cs typeface="Leelawadee UI"/>
+              </a:rPr>
+              <a:t>• เรียงลำดับว่าอันไหนควรทำก่อน</a:t>
+            </a:r>
+          </a:p>
+        </p:txBody>
+      </p:sp>
+      <p:sp>
+        <p:nvSpPr>
+          <p:cNvPr id="6" name="TextBox 5"/>
+          <p:cNvSpPr txBox="1"/>
+          <p:nvPr/>
+        </p:nvSpPr>
+        <p:spPr>
+          <a:xfrm>
+            <a:off x="822960" y="3317748"/>
+            <a:ext cx="10545775" cy="560324"/>
+          </a:xfrm>
+          <a:prstGeom prst="rect">
+            <a:avLst/>
+          </a:prstGeom>
+          <a:noFill/>
+        </p:spPr>
+        <p:txBody>
+          <a:bodyPr wrap="square">
+            <a:spAutoFit/>
+          </a:bodyPr>
+          <a:lstStyle/>
+          <a:p>
+            <a:pPr algn="l"/>
+            <a:r>
+              <a:rPr sz="2600" b="0">
                 <a:solidFill>
                   <a:srgbClr val="1A1A1A"/>
                 </a:solidFill>
-                <a:latin typeface="Consolas"/>
-                <a:ea typeface="Consolas"/>
-                <a:cs typeface="Consolas"/>
-              </a:rPr>
-              <a:t>- แจ้งเรื่อง / มอบหมาย / อัปเดตสถานะ / ปิดงาน</a:t>
-            </a:r>
-          </a:p>
-          <a:p>
-            <a:pPr algn="l"/>
-            <a:r>
-              <a:rPr sz="1800" b="0">
+                <a:latin typeface="Leelawadee UI"/>
+                <a:ea typeface="Leelawadee UI"/>
+                <a:cs typeface="Leelawadee UI"/>
+              </a:rPr>
+              <a:t>• ⭐ ต้องมีข้อค้างจาก ส.8: เปลี่ยนคีย์ AI ไปใช้ตัวกลาง</a:t>
+            </a:r>
+          </a:p>
+        </p:txBody>
+      </p:sp>
+      <p:sp>
+        <p:nvSpPr>
+          <p:cNvPr id="7" name="TextBox 6"/>
+          <p:cNvSpPr txBox="1"/>
+          <p:nvPr/>
+        </p:nvSpPr>
+        <p:spPr>
+          <a:xfrm>
+            <a:off x="822960" y="3932936"/>
+            <a:ext cx="10545775" cy="560324"/>
+          </a:xfrm>
+          <a:prstGeom prst="rect">
+            <a:avLst/>
+          </a:prstGeom>
+          <a:noFill/>
+        </p:spPr>
+        <p:txBody>
+          <a:bodyPr wrap="square">
+            <a:spAutoFit/>
+          </a:bodyPr>
+          <a:lstStyle/>
+          <a:p>
+            <a:pPr algn="l"/>
+            <a:r>
+              <a:rPr sz="2600" b="0">
                 <a:solidFill>
                   <a:srgbClr val="1A1A1A"/>
                 </a:solidFill>
-                <a:latin typeface="Consolas"/>
-                <a:ea typeface="Consolas"/>
-                <a:cs typeface="Consolas"/>
-              </a:rPr>
-              <a:t>- ล็อกอิน · กฎเฝ้าข้อมูล · เทสต์เส้นทางหลัก</a:t>
-            </a:r>
-          </a:p>
-          <a:p>
-            <a:pPr algn="l"/>
-            <a:r>
-              <a:rPr sz="1800" b="0">
-                <a:solidFill>
-                  <a:srgbClr val="1A1A1A"/>
-                </a:solidFill>
-                <a:latin typeface="Consolas"/>
-                <a:ea typeface="Consolas"/>
-                <a:cs typeface="Consolas"/>
-              </a:rPr>
-              <a:t/>
-            </a:r>
-          </a:p>
-          <a:p>
-            <a:pPr algn="l"/>
-            <a:r>
-              <a:rPr sz="1800" b="0">
-                <a:solidFill>
-                  <a:srgbClr val="1A1A1A"/>
-                </a:solidFill>
-                <a:latin typeface="Consolas"/>
-                <a:ea typeface="Consolas"/>
-                <a:cs typeface="Consolas"/>
-              </a:rPr>
-              <a:t>▸ ยังไม่เสร็จ</a:t>
-            </a:r>
-          </a:p>
-          <a:p>
-            <a:pPr algn="l"/>
-            <a:r>
-              <a:rPr sz="1800" b="0">
-                <a:solidFill>
-                  <a:srgbClr val="1A1A1A"/>
-                </a:solidFill>
-                <a:latin typeface="Consolas"/>
-                <a:ea typeface="Consolas"/>
-                <a:cs typeface="Consolas"/>
-              </a:rPr>
-              <a:t>- แจ้งเตือนทางอีเมลเมื่อมอบหมายผู้รับผิดชอบ</a:t>
-            </a:r>
-          </a:p>
-          <a:p>
-            <a:pPr algn="l"/>
-            <a:r>
-              <a:rPr sz="1800" b="0">
-                <a:solidFill>
-                  <a:srgbClr val="1A1A1A"/>
-                </a:solidFill>
-                <a:latin typeface="Consolas"/>
-                <a:ea typeface="Consolas"/>
-                <a:cs typeface="Consolas"/>
-              </a:rPr>
-              <a:t/>
-            </a:r>
-          </a:p>
-          <a:p>
-            <a:pPr algn="l"/>
-            <a:r>
-              <a:rPr sz="1800" b="0">
-                <a:solidFill>
-                  <a:srgbClr val="1A1A1A"/>
-                </a:solidFill>
-                <a:latin typeface="Consolas"/>
-                <a:ea typeface="Consolas"/>
-                <a:cs typeface="Consolas"/>
-              </a:rPr>
-              <a:t>▸ รู้ตัวว่าทำลวกไว้</a:t>
-            </a:r>
-          </a:p>
-          <a:p>
-            <a:pPr algn="l"/>
-            <a:r>
-              <a:rPr sz="1800" b="0">
-                <a:solidFill>
-                  <a:srgbClr val="1A1A1A"/>
-                </a:solidFill>
-                <a:latin typeface="Consolas"/>
-                <a:ea typeface="Consolas"/>
-                <a:cs typeface="Consolas"/>
-              </a:rPr>
-              <a:t>- หน้ารายการยังโหลดข้อมูลทั้งหมดทีเดียว ถ้าข้อมูลเยอะจะช้า</a:t>
-            </a:r>
-          </a:p>
-          <a:p>
-            <a:pPr algn="l"/>
-            <a:r>
-              <a:rPr sz="1800" b="0">
-                <a:solidFill>
-                  <a:srgbClr val="1A1A1A"/>
-                </a:solidFill>
-                <a:latin typeface="Consolas"/>
-                <a:ea typeface="Consolas"/>
-                <a:cs typeface="Consolas"/>
-              </a:rPr>
-              <a:t>- ยังไม่มีเทสต์ของหน้าจัดการประเภท</a:t>
-            </a:r>
-          </a:p>
-        </p:txBody>
-      </p:sp>
-      <p:sp>
-        <p:nvSpPr>
-          <p:cNvPr id="4" name="TextBox 3"/>
+                <a:latin typeface="Leelawadee UI"/>
+                <a:ea typeface="Leelawadee UI"/>
+                <a:cs typeface="Leelawadee UI"/>
+              </a:rPr>
+              <a:t>• นี่คือจุดเริ่มของ Module 3 ในวันแรก</a:t>
+            </a:r>
+          </a:p>
+        </p:txBody>
+      </p:sp>
+      <p:sp>
+        <p:nvSpPr>
+          <p:cNvPr id="8" name="TextBox 7"/>
           <p:cNvSpPr txBox="1"/>
           <p:nvPr/>
         </p:nvSpPr>
@@ -25140,7 +25438,7 @@
                 <a:ea typeface="Leelawadee UI"/>
                 <a:cs typeface="Leelawadee UI"/>
               </a:rPr>
-              <a:t>⚠️ ไล่ Feature List ครั้งสุดท้าย</a:t>
+              <a:t>📌 Module 3 คืออะไร</a:t>
             </a:r>
           </a:p>
         </p:txBody>
@@ -25177,7 +25475,7 @@
                 <a:ea typeface="Leelawadee UI"/>
                 <a:cs typeface="Leelawadee UI"/>
               </a:rPr>
-              <a:t>• เปิด Feature List จาก Module 1 ขึ้นมาอีกครั้ง</a:t>
+              <a:t>• Module 3 = AI-Integrated</a:t>
             </a:r>
           </a:p>
         </p:txBody>
@@ -25214,7 +25512,7 @@
                 <a:ea typeface="Leelawadee UI"/>
                 <a:cs typeface="Leelawadee UI"/>
               </a:rPr>
-              <a:t>• ✅ มีแล้ว / ❌ ยังไม่มี / ⚠️ มีแต่ยังไม่ครบ</a:t>
+              <a:t>• Data Analytics · หน้าสรุป · กราฟ · AI ขั้นลึกกว่านี้</a:t>
             </a:r>
           </a:p>
         </p:txBody>
@@ -25228,6 +25526,43 @@
         <p:spPr>
           <a:xfrm>
             <a:off x="822960" y="2702560"/>
+            <a:ext cx="10545775" cy="1029208"/>
+          </a:xfrm>
+          <a:prstGeom prst="rect">
+            <a:avLst/>
+          </a:prstGeom>
+          <a:noFill/>
+        </p:spPr>
+        <p:txBody>
+          <a:bodyPr wrap="square">
+            <a:spAutoFit/>
+          </a:bodyPr>
+          <a:lstStyle/>
+          <a:p>
+            <a:pPr algn="l"/>
+            <a:r>
+              <a:rPr sz="2600" b="0">
+                <a:solidFill>
+                  <a:srgbClr val="1A1A1A"/>
+                </a:solidFill>
+                <a:latin typeface="Leelawadee UI"/>
+                <a:ea typeface="Leelawadee UI"/>
+                <a:cs typeface="Leelawadee UI"/>
+              </a:rPr>
+              <a:t>• อยากทำหน้าสรุป หรือต่อยอดผู้ช่วย AI → ใส่ Backlog Sprint 2</a:t>
+            </a:r>
+          </a:p>
+        </p:txBody>
+      </p:sp>
+      <p:sp>
+        <p:nvSpPr>
+          <p:cNvPr id="6" name="TextBox 5"/>
+          <p:cNvSpPr txBox="1"/>
+          <p:nvPr/>
+        </p:nvSpPr>
+        <p:spPr>
+          <a:xfrm>
+            <a:off x="822960" y="3786632"/>
             <a:ext cx="10545775" cy="560324"/>
           </a:xfrm>
           <a:prstGeom prst="rect">
@@ -25251,44 +25586,7 @@
                 <a:ea typeface="Leelawadee UI"/>
                 <a:cs typeface="Leelawadee UI"/>
               </a:rPr>
-              <a:t>• ❌ กับ ⚠️ ทุกข้อ → ลง Backlog Sprint 2 หรือข้อ 5</a:t>
-            </a:r>
-          </a:p>
-        </p:txBody>
-      </p:sp>
-      <p:sp>
-        <p:nvSpPr>
-          <p:cNvPr id="6" name="TextBox 5"/>
-          <p:cNvSpPr txBox="1"/>
-          <p:nvPr/>
-        </p:nvSpPr>
-        <p:spPr>
-          <a:xfrm>
-            <a:off x="822960" y="3317748"/>
-            <a:ext cx="10545775" cy="560324"/>
-          </a:xfrm>
-          <a:prstGeom prst="rect">
-            <a:avLst/>
-          </a:prstGeom>
-          <a:noFill/>
-        </p:spPr>
-        <p:txBody>
-          <a:bodyPr wrap="square">
-            <a:spAutoFit/>
-          </a:bodyPr>
-          <a:lstStyle/>
-          <a:p>
-            <a:pPr algn="l"/>
-            <a:r>
-              <a:rPr sz="2600" b="0">
-                <a:solidFill>
-                  <a:srgbClr val="1A1A1A"/>
-                </a:solidFill>
-                <a:latin typeface="Leelawadee UI"/>
-                <a:ea typeface="Leelawadee UI"/>
-                <a:cs typeface="Leelawadee UI"/>
-              </a:rPr>
-              <a:t>• ทำเป็นตารางลงไฟล์ ไม่ใช่จำในหัว</a:t>
+              <a:t>• ไม่ใช่ทำในสัปดาห์นี้</a:t>
             </a:r>
           </a:p>
         </p:txBody>
@@ -25379,7 +25677,7 @@
                 <a:ea typeface="Leelawadee UI"/>
                 <a:cs typeface="Leelawadee UI"/>
               </a:rPr>
-              <a:t>ตารางไล่ MVP ของ FixIt</a:t>
+              <a:t>5️⃣ บันทึกสิ่งที่ยังไม่เสร็จ</a:t>
             </a:r>
           </a:p>
         </p:txBody>
@@ -25393,7 +25691,7 @@
         <p:spPr>
           <a:xfrm>
             <a:off x="822960" y="1472184"/>
-            <a:ext cx="10545775" cy="2542032"/>
+            <a:ext cx="10545775" cy="4096512"/>
           </a:xfrm>
           <a:prstGeom prst="rect">
             <a:avLst/>
@@ -25433,7 +25731,7 @@
                 <a:ea typeface="Consolas"/>
                 <a:cs typeface="Consolas"/>
               </a:rPr>
-              <a:t>ฟีเจอร์ MVP (จาก Feature List Module 1)   สถานะ</a:t>
+              <a:t>บันทึกส่งต่อ Module 3 — &lt;ชื่อโครงงานของกลุ่ม&gt;</a:t>
             </a:r>
           </a:p>
           <a:p>
@@ -25447,7 +25745,7 @@
                 <a:ea typeface="Consolas"/>
                 <a:cs typeface="Consolas"/>
               </a:rPr>
-              <a:t>────────────────────────────────────────  ──────</a:t>
+              <a:t/>
             </a:r>
           </a:p>
           <a:p>
@@ -25461,7 +25759,7 @@
                 <a:ea typeface="Consolas"/>
                 <a:cs typeface="Consolas"/>
               </a:rPr>
-              <a:t>แจ้งซ่อมใหม่                              ✅</a:t>
+              <a:t>▸ เสร็จแล้ว</a:t>
             </a:r>
           </a:p>
           <a:p>
@@ -25475,7 +25773,7 @@
                 <a:ea typeface="Consolas"/>
                 <a:cs typeface="Consolas"/>
               </a:rPr>
-              <a:t>ดูรายการใบแจ้งซ่อม                        ✅</a:t>
+              <a:t>- แจ้งเรื่อง / มอบหมาย / อัปเดตสถานะ / ปิดงาน</a:t>
             </a:r>
           </a:p>
           <a:p>
@@ -25489,7 +25787,7 @@
                 <a:ea typeface="Consolas"/>
                 <a:cs typeface="Consolas"/>
               </a:rPr>
-              <a:t>มอบหมายช่าง                               ⚠️ มอบได้แต่ไม่แจ้งใคร</a:t>
+              <a:t>- ล็อกอิน · กฎเฝ้าข้อมูล · เทสต์เส้นทางหลัก</a:t>
             </a:r>
           </a:p>
           <a:p>
@@ -25503,7 +25801,7 @@
                 <a:ea typeface="Consolas"/>
                 <a:cs typeface="Consolas"/>
               </a:rPr>
-              <a:t>อัปเดตสถานะ / ปิดงาน                      ✅</a:t>
+              <a:t/>
             </a:r>
           </a:p>
           <a:p>
@@ -25517,7 +25815,77 @@
                 <a:ea typeface="Consolas"/>
                 <a:cs typeface="Consolas"/>
               </a:rPr>
-              <a:t>ค้นหาใบแจ้งเก่า                           ❌ ยังไม่มี</a:t>
+              <a:t>▸ ยังไม่เสร็จ</a:t>
+            </a:r>
+          </a:p>
+          <a:p>
+            <a:pPr algn="l"/>
+            <a:r>
+              <a:rPr sz="1800" b="0">
+                <a:solidFill>
+                  <a:srgbClr val="1A1A1A"/>
+                </a:solidFill>
+                <a:latin typeface="Consolas"/>
+                <a:ea typeface="Consolas"/>
+                <a:cs typeface="Consolas"/>
+              </a:rPr>
+              <a:t>- แจ้งเตือนทางอีเมลเมื่อมอบหมายผู้รับผิดชอบ</a:t>
+            </a:r>
+          </a:p>
+          <a:p>
+            <a:pPr algn="l"/>
+            <a:r>
+              <a:rPr sz="1800" b="0">
+                <a:solidFill>
+                  <a:srgbClr val="1A1A1A"/>
+                </a:solidFill>
+                <a:latin typeface="Consolas"/>
+                <a:ea typeface="Consolas"/>
+                <a:cs typeface="Consolas"/>
+              </a:rPr>
+              <a:t/>
+            </a:r>
+          </a:p>
+          <a:p>
+            <a:pPr algn="l"/>
+            <a:r>
+              <a:rPr sz="1800" b="0">
+                <a:solidFill>
+                  <a:srgbClr val="1A1A1A"/>
+                </a:solidFill>
+                <a:latin typeface="Consolas"/>
+                <a:ea typeface="Consolas"/>
+                <a:cs typeface="Consolas"/>
+              </a:rPr>
+              <a:t>▸ รู้ตัวว่าทำลวกไว้</a:t>
+            </a:r>
+          </a:p>
+          <a:p>
+            <a:pPr algn="l"/>
+            <a:r>
+              <a:rPr sz="1800" b="0">
+                <a:solidFill>
+                  <a:srgbClr val="1A1A1A"/>
+                </a:solidFill>
+                <a:latin typeface="Consolas"/>
+                <a:ea typeface="Consolas"/>
+                <a:cs typeface="Consolas"/>
+              </a:rPr>
+              <a:t>- หน้ารายการยังโหลดข้อมูลทั้งหมดทีเดียว ถ้าข้อมูลเยอะจะช้า</a:t>
+            </a:r>
+          </a:p>
+          <a:p>
+            <a:pPr algn="l"/>
+            <a:r>
+              <a:rPr sz="1800" b="0">
+                <a:solidFill>
+                  <a:srgbClr val="1A1A1A"/>
+                </a:solidFill>
+                <a:latin typeface="Consolas"/>
+                <a:ea typeface="Consolas"/>
+                <a:cs typeface="Consolas"/>
+              </a:rPr>
+              <a:t>- ยังไม่มีเทสต์ของหน้าจัดการประเภท</a:t>
             </a:r>
           </a:p>
         </p:txBody>
@@ -25645,7 +26013,7 @@
                 <a:ea typeface="Leelawadee UI"/>
                 <a:cs typeface="Leelawadee UI"/>
               </a:rPr>
-              <a:t>• สัปดาห์ที่ 6 — หน้าจอครบ ข้อมูลยังปลอม</a:t>
+              <a:t>• สัปดาห์ที่ 6 — ระบบมีความจำ อ่านข้อมูลจากฐานจริง</a:t>
             </a:r>
           </a:p>
         </p:txBody>
@@ -25682,7 +26050,7 @@
                 <a:ea typeface="Leelawadee UI"/>
                 <a:cs typeface="Leelawadee UI"/>
               </a:rPr>
-              <a:t>• สัปดาห์ที่ 7 — ข้อมูลบันทึกลง Firestore ได้จริง</a:t>
+              <a:t>• สัปดาห์ที่ 7 — CRUD ครบ ล็อกอินได้ ขึ้นออนไลน์</a:t>
             </a:r>
           </a:p>
         </p:txBody>
@@ -25696,7 +26064,7 @@
         <p:spPr>
           <a:xfrm>
             <a:off x="822960" y="2702560"/>
-            <a:ext cx="10545775" cy="560324"/>
+            <a:ext cx="10545775" cy="1029208"/>
           </a:xfrm>
           <a:prstGeom prst="rect">
             <a:avLst/>
@@ -25719,7 +26087,7 @@
                 <a:ea typeface="Leelawadee UI"/>
                 <a:cs typeface="Leelawadee UI"/>
               </a:rPr>
-              <a:t>• สัปดาห์ที่ 8 — ระบบขึ้นออนไลน์ มีล็อกอิน มี Reviewer</a:t>
+              <a:t>• สัปดาห์ที่ 8 — ปิดข้อมูลรายห้อง มีผู้ช่วย AI มี Reviewer</a:t>
             </a:r>
           </a:p>
         </p:txBody>
@@ -25732,7 +26100,7 @@
         </p:nvSpPr>
         <p:spPr>
           <a:xfrm>
-            <a:off x="822960" y="3317748"/>
+            <a:off x="822960" y="3786632"/>
             <a:ext cx="10545775" cy="560324"/>
           </a:xfrm>
           <a:prstGeom prst="rect">
@@ -25847,7 +26215,7 @@
                 <a:ea typeface="Leelawadee UI"/>
                 <a:cs typeface="Leelawadee UI"/>
               </a:rPr>
-              <a:t>✅ ช่วงนี้คุณต้องได้</a:t>
+              <a:t>⚠️ ไล่ Feature List ครั้งสุดท้าย</a:t>
             </a:r>
           </a:p>
         </p:txBody>
@@ -25884,7 +26252,7 @@
                 <a:ea typeface="Leelawadee UI"/>
                 <a:cs typeface="Leelawadee UI"/>
               </a:rPr>
-              <a:t>• ของส่งมอบ 5 รายการ ที่รู้ว่าขาดข้อไหน</a:t>
+              <a:t>• เปิด Feature List จาก Module 1 ขึ้นมาอีกครั้ง</a:t>
             </a:r>
           </a:p>
         </p:txBody>
@@ -25921,7 +26289,7 @@
                 <a:ea typeface="Leelawadee UI"/>
                 <a:cs typeface="Leelawadee UI"/>
               </a:rPr>
-              <a:t>• ประวัติ commit ที่เห็นชื่อครบทุกคนในกลุ่ม</a:t>
+              <a:t>• ✅ มีแล้ว / ❌ ยังไม่มี / ⚠️ มีแต่ยังไม่ครบ</a:t>
             </a:r>
           </a:p>
         </p:txBody>
@@ -25958,7 +26326,7 @@
                 <a:ea typeface="Leelawadee UI"/>
                 <a:cs typeface="Leelawadee UI"/>
               </a:rPr>
-              <a:t>• ไฟล์บันทึกสิ่งที่ยังไม่เสร็จ</a:t>
+              <a:t>• ❌ กับ ⚠️ ทุกข้อ → ลง Backlog Sprint 2 หรือข้อ 5</a:t>
             </a:r>
           </a:p>
         </p:txBody>
@@ -25995,7 +26363,7 @@
                 <a:ea typeface="Leelawadee UI"/>
                 <a:cs typeface="Leelawadee UI"/>
               </a:rPr>
-              <a:t>• ตารางไล่ Feature List ของโครงงานกลุ่มคุณ</a:t>
+              <a:t>• ทำเป็นตารางลงไฟล์ ไม่ใช่จำในหัว</a:t>
             </a:r>
           </a:p>
         </p:txBody>
@@ -26056,20 +26424,57 @@
       <p:grpSpPr/>
       <p:sp>
         <p:nvSpPr>
-          <p:cNvPr id="2" name="Rectangle 1"/>
+          <p:cNvPr id="2" name="TextBox 1"/>
+          <p:cNvSpPr txBox="1"/>
+          <p:nvPr/>
+        </p:nvSpPr>
+        <p:spPr>
+          <a:xfrm>
+            <a:off x="822960" y="502920"/>
+            <a:ext cx="10545775" cy="804672"/>
+          </a:xfrm>
+          <a:prstGeom prst="rect">
+            <a:avLst/>
+          </a:prstGeom>
+          <a:noFill/>
+        </p:spPr>
+        <p:txBody>
+          <a:bodyPr wrap="square">
+            <a:spAutoFit/>
+          </a:bodyPr>
+          <a:lstStyle/>
+          <a:p>
+            <a:pPr algn="l"/>
+            <a:r>
+              <a:rPr sz="3600" b="1">
+                <a:solidFill>
+                  <a:srgbClr val="1F5FA8"/>
+                </a:solidFill>
+                <a:latin typeface="Leelawadee UI"/>
+                <a:ea typeface="Leelawadee UI"/>
+                <a:cs typeface="Leelawadee UI"/>
+              </a:rPr>
+              <a:t>ตารางไล่ MVP ของ FixIt</a:t>
+            </a:r>
+          </a:p>
+        </p:txBody>
+      </p:sp>
+      <p:sp>
+        <p:nvSpPr>
+          <p:cNvPr id="3" name="Rectangle 2"/>
           <p:cNvSpPr/>
           <p:nvPr/>
         </p:nvSpPr>
         <p:spPr>
           <a:xfrm>
-            <a:off x="0" y="0"/>
-            <a:ext cx="12191695" cy="6858000"/>
+            <a:off x="822960" y="1472184"/>
+            <a:ext cx="10545775" cy="2542032"/>
           </a:xfrm>
           <a:prstGeom prst="rect">
             <a:avLst/>
           </a:prstGeom>
           <a:solidFill>
-            <a:srgbClr val="1F5FA8"/>
+            <a:srgbClr val="F2F4F7"/>
           </a:solidFill>
           <a:ln>
             <a:noFill/>
@@ -26090,46 +26495,104 @@
           </a:fontRef>
         </p:style>
         <p:txBody>
-          <a:bodyPr rtlCol="0" anchor="ctr"/>
-          <a:lstStyle/>
-          <a:p>
-            <a:pPr algn="ctr"/>
-          </a:p>
-        </p:txBody>
-      </p:sp>
-      <p:sp>
-        <p:nvSpPr>
-          <p:cNvPr id="3" name="TextBox 2"/>
-          <p:cNvSpPr txBox="1"/>
-          <p:nvPr/>
-        </p:nvSpPr>
-        <p:spPr>
-          <a:xfrm>
-            <a:off x="822960" y="2743200"/>
-            <a:ext cx="10545775" cy="1463040"/>
-          </a:xfrm>
-          <a:prstGeom prst="rect">
-            <a:avLst/>
-          </a:prstGeom>
-          <a:noFill/>
-        </p:spPr>
-        <p:txBody>
-          <a:bodyPr wrap="square" anchor="ctr">
-            <a:spAutoFit/>
-          </a:bodyPr>
-          <a:lstStyle/>
-          <a:p>
-            <a:pPr algn="ctr"/>
-            <a:r>
-              <a:rPr sz="4000" b="1">
-                <a:solidFill>
-                  <a:srgbClr val="FFFFFF"/>
-                </a:solidFill>
-                <a:latin typeface="Leelawadee UI"/>
-                <a:ea typeface="Leelawadee UI"/>
-                <a:cs typeface="Leelawadee UI"/>
-              </a:rPr>
-              <a:t>🔗 ก่อนแยกย้ายไปพักเที่ยง</a:t>
+          <a:bodyPr rtlCol="0" anchor="ctr" wrap="none" lIns="228600" tIns="137160"/>
+          <a:lstStyle/>
+          <a:p>
+            <a:pPr algn="l"/>
+            <a:r>
+              <a:rPr sz="1800" b="0">
+                <a:solidFill>
+                  <a:srgbClr val="1A1A1A"/>
+                </a:solidFill>
+                <a:latin typeface="Consolas"/>
+                <a:ea typeface="Consolas"/>
+                <a:cs typeface="Consolas"/>
+              </a:rPr>
+              <a:t>ฟีเจอร์ MVP (จาก Feature List Module 1)   สถานะ</a:t>
+            </a:r>
+          </a:p>
+          <a:p>
+            <a:pPr algn="l"/>
+            <a:r>
+              <a:rPr sz="1800" b="0">
+                <a:solidFill>
+                  <a:srgbClr val="1A1A1A"/>
+                </a:solidFill>
+                <a:latin typeface="Consolas"/>
+                <a:ea typeface="Consolas"/>
+                <a:cs typeface="Consolas"/>
+              </a:rPr>
+              <a:t>────────────────────────────────────────  ──────</a:t>
+            </a:r>
+          </a:p>
+          <a:p>
+            <a:pPr algn="l"/>
+            <a:r>
+              <a:rPr sz="1800" b="0">
+                <a:solidFill>
+                  <a:srgbClr val="1A1A1A"/>
+                </a:solidFill>
+                <a:latin typeface="Consolas"/>
+                <a:ea typeface="Consolas"/>
+                <a:cs typeface="Consolas"/>
+              </a:rPr>
+              <a:t>แจ้งซ่อมใหม่                              ✅</a:t>
+            </a:r>
+          </a:p>
+          <a:p>
+            <a:pPr algn="l"/>
+            <a:r>
+              <a:rPr sz="1800" b="0">
+                <a:solidFill>
+                  <a:srgbClr val="1A1A1A"/>
+                </a:solidFill>
+                <a:latin typeface="Consolas"/>
+                <a:ea typeface="Consolas"/>
+                <a:cs typeface="Consolas"/>
+              </a:rPr>
+              <a:t>ดูรายการใบแจ้งซ่อม                        ✅</a:t>
+            </a:r>
+          </a:p>
+          <a:p>
+            <a:pPr algn="l"/>
+            <a:r>
+              <a:rPr sz="1800" b="0">
+                <a:solidFill>
+                  <a:srgbClr val="1A1A1A"/>
+                </a:solidFill>
+                <a:latin typeface="Consolas"/>
+                <a:ea typeface="Consolas"/>
+                <a:cs typeface="Consolas"/>
+              </a:rPr>
+              <a:t>มอบหมายช่าง                               ⚠️ มอบได้แต่ไม่แจ้งใคร</a:t>
+            </a:r>
+          </a:p>
+          <a:p>
+            <a:pPr algn="l"/>
+            <a:r>
+              <a:rPr sz="1800" b="0">
+                <a:solidFill>
+                  <a:srgbClr val="1A1A1A"/>
+                </a:solidFill>
+                <a:latin typeface="Consolas"/>
+                <a:ea typeface="Consolas"/>
+                <a:cs typeface="Consolas"/>
+              </a:rPr>
+              <a:t>อัปเดตสถานะ / ปิดงาน                      ✅</a:t>
+            </a:r>
+          </a:p>
+          <a:p>
+            <a:pPr algn="l"/>
+            <a:r>
+              <a:rPr sz="1800" b="0">
+                <a:solidFill>
+                  <a:srgbClr val="1A1A1A"/>
+                </a:solidFill>
+                <a:latin typeface="Consolas"/>
+                <a:ea typeface="Consolas"/>
+                <a:cs typeface="Consolas"/>
+              </a:rPr>
+              <a:t>ยกเลิกใบแจ้งที่แจ้งผิด                    ❌ ยังไม่มี</a:t>
             </a:r>
           </a:p>
         </p:txBody>
@@ -26179,6 +26642,379 @@
 </file>
 
 <file path=ppt/slides/slide72.xml><?xml version="1.0" encoding="utf-8"?>
+<p:sld xmlns:a="http://schemas.openxmlformats.org/drawingml/2006/main" xmlns:p="http://schemas.openxmlformats.org/presentationml/2006/main" xmlns:r="http://schemas.openxmlformats.org/officeDocument/2006/relationships">
+  <p:cSld>
+    <p:spTree>
+      <p:nvGrpSpPr>
+        <p:cNvPr id="1" name=""/>
+        <p:cNvGrpSpPr/>
+        <p:nvPr/>
+      </p:nvGrpSpPr>
+      <p:grpSpPr/>
+      <p:sp>
+        <p:nvSpPr>
+          <p:cNvPr id="2" name="TextBox 1"/>
+          <p:cNvSpPr txBox="1"/>
+          <p:nvPr/>
+        </p:nvSpPr>
+        <p:spPr>
+          <a:xfrm>
+            <a:off x="822960" y="502920"/>
+            <a:ext cx="10545775" cy="804672"/>
+          </a:xfrm>
+          <a:prstGeom prst="rect">
+            <a:avLst/>
+          </a:prstGeom>
+          <a:noFill/>
+        </p:spPr>
+        <p:txBody>
+          <a:bodyPr wrap="square">
+            <a:spAutoFit/>
+          </a:bodyPr>
+          <a:lstStyle/>
+          <a:p>
+            <a:pPr algn="l"/>
+            <a:r>
+              <a:rPr sz="3600" b="1">
+                <a:solidFill>
+                  <a:srgbClr val="1F5FA8"/>
+                </a:solidFill>
+                <a:latin typeface="Leelawadee UI"/>
+                <a:ea typeface="Leelawadee UI"/>
+                <a:cs typeface="Leelawadee UI"/>
+              </a:rPr>
+              <a:t>✅ ช่วงนี้คุณต้องได้</a:t>
+            </a:r>
+          </a:p>
+        </p:txBody>
+      </p:sp>
+      <p:sp>
+        <p:nvSpPr>
+          <p:cNvPr id="3" name="TextBox 2"/>
+          <p:cNvSpPr txBox="1"/>
+          <p:nvPr/>
+        </p:nvSpPr>
+        <p:spPr>
+          <a:xfrm>
+            <a:off x="822960" y="1472184"/>
+            <a:ext cx="10545775" cy="560324"/>
+          </a:xfrm>
+          <a:prstGeom prst="rect">
+            <a:avLst/>
+          </a:prstGeom>
+          <a:noFill/>
+        </p:spPr>
+        <p:txBody>
+          <a:bodyPr wrap="square">
+            <a:spAutoFit/>
+          </a:bodyPr>
+          <a:lstStyle/>
+          <a:p>
+            <a:pPr algn="l"/>
+            <a:r>
+              <a:rPr sz="2600" b="0">
+                <a:solidFill>
+                  <a:srgbClr val="1A1A1A"/>
+                </a:solidFill>
+                <a:latin typeface="Leelawadee UI"/>
+                <a:ea typeface="Leelawadee UI"/>
+                <a:cs typeface="Leelawadee UI"/>
+              </a:rPr>
+              <a:t>• ของส่งมอบ 5 รายการ ที่รู้ว่าขาดข้อไหน</a:t>
+            </a:r>
+          </a:p>
+        </p:txBody>
+      </p:sp>
+      <p:sp>
+        <p:nvSpPr>
+          <p:cNvPr id="4" name="TextBox 3"/>
+          <p:cNvSpPr txBox="1"/>
+          <p:nvPr/>
+        </p:nvSpPr>
+        <p:spPr>
+          <a:xfrm>
+            <a:off x="822960" y="2087372"/>
+            <a:ext cx="10545775" cy="560324"/>
+          </a:xfrm>
+          <a:prstGeom prst="rect">
+            <a:avLst/>
+          </a:prstGeom>
+          <a:noFill/>
+        </p:spPr>
+        <p:txBody>
+          <a:bodyPr wrap="square">
+            <a:spAutoFit/>
+          </a:bodyPr>
+          <a:lstStyle/>
+          <a:p>
+            <a:pPr algn="l"/>
+            <a:r>
+              <a:rPr sz="2600" b="0">
+                <a:solidFill>
+                  <a:srgbClr val="1A1A1A"/>
+                </a:solidFill>
+                <a:latin typeface="Leelawadee UI"/>
+                <a:ea typeface="Leelawadee UI"/>
+                <a:cs typeface="Leelawadee UI"/>
+              </a:rPr>
+              <a:t>• ประวัติ commit ที่เห็นชื่อครบทุกคนในกลุ่ม</a:t>
+            </a:r>
+          </a:p>
+        </p:txBody>
+      </p:sp>
+      <p:sp>
+        <p:nvSpPr>
+          <p:cNvPr id="5" name="TextBox 4"/>
+          <p:cNvSpPr txBox="1"/>
+          <p:nvPr/>
+        </p:nvSpPr>
+        <p:spPr>
+          <a:xfrm>
+            <a:off x="822960" y="2702560"/>
+            <a:ext cx="10545775" cy="560324"/>
+          </a:xfrm>
+          <a:prstGeom prst="rect">
+            <a:avLst/>
+          </a:prstGeom>
+          <a:noFill/>
+        </p:spPr>
+        <p:txBody>
+          <a:bodyPr wrap="square">
+            <a:spAutoFit/>
+          </a:bodyPr>
+          <a:lstStyle/>
+          <a:p>
+            <a:pPr algn="l"/>
+            <a:r>
+              <a:rPr sz="2600" b="0">
+                <a:solidFill>
+                  <a:srgbClr val="1A1A1A"/>
+                </a:solidFill>
+                <a:latin typeface="Leelawadee UI"/>
+                <a:ea typeface="Leelawadee UI"/>
+                <a:cs typeface="Leelawadee UI"/>
+              </a:rPr>
+              <a:t>• ไฟล์บันทึกสิ่งที่ยังไม่เสร็จ</a:t>
+            </a:r>
+          </a:p>
+        </p:txBody>
+      </p:sp>
+      <p:sp>
+        <p:nvSpPr>
+          <p:cNvPr id="6" name="TextBox 5"/>
+          <p:cNvSpPr txBox="1"/>
+          <p:nvPr/>
+        </p:nvSpPr>
+        <p:spPr>
+          <a:xfrm>
+            <a:off x="822960" y="3317748"/>
+            <a:ext cx="10545775" cy="560324"/>
+          </a:xfrm>
+          <a:prstGeom prst="rect">
+            <a:avLst/>
+          </a:prstGeom>
+          <a:noFill/>
+        </p:spPr>
+        <p:txBody>
+          <a:bodyPr wrap="square">
+            <a:spAutoFit/>
+          </a:bodyPr>
+          <a:lstStyle/>
+          <a:p>
+            <a:pPr algn="l"/>
+            <a:r>
+              <a:rPr sz="2600" b="0">
+                <a:solidFill>
+                  <a:srgbClr val="1A1A1A"/>
+                </a:solidFill>
+                <a:latin typeface="Leelawadee UI"/>
+                <a:ea typeface="Leelawadee UI"/>
+                <a:cs typeface="Leelawadee UI"/>
+              </a:rPr>
+              <a:t>• ตารางไล่ Feature List ของโครงงานกลุ่มคุณ</a:t>
+            </a:r>
+          </a:p>
+        </p:txBody>
+      </p:sp>
+      <p:sp>
+        <p:nvSpPr>
+          <p:cNvPr id="7" name="TextBox 6"/>
+          <p:cNvSpPr txBox="1"/>
+          <p:nvPr/>
+        </p:nvSpPr>
+        <p:spPr>
+          <a:xfrm>
+            <a:off x="822960" y="6355080"/>
+            <a:ext cx="10545775" cy="320040"/>
+          </a:xfrm>
+          <a:prstGeom prst="rect">
+            <a:avLst/>
+          </a:prstGeom>
+          <a:noFill/>
+        </p:spPr>
+        <p:txBody>
+          <a:bodyPr wrap="square">
+            <a:spAutoFit/>
+          </a:bodyPr>
+          <a:lstStyle/>
+          <a:p>
+            <a:r>
+              <a:rPr sz="1200" b="0">
+                <a:solidFill>
+                  <a:srgbClr val="6B6B6B"/>
+                </a:solidFill>
+                <a:latin typeface="Leelawadee UI"/>
+                <a:ea typeface="Leelawadee UI"/>
+                <a:cs typeface="Leelawadee UI"/>
+              </a:rPr>
+              <a:t>RAISE 2 · เดือนที่ 2 · สัปดาห์ที่ 9          72</a:t>
+            </a:r>
+          </a:p>
+        </p:txBody>
+      </p:sp>
+    </p:spTree>
+  </p:cSld>
+  <p:clrMapOvr>
+    <a:masterClrMapping/>
+  </p:clrMapOvr>
+</p:sld>
+</file>
+
+<file path=ppt/slides/slide73.xml><?xml version="1.0" encoding="utf-8"?>
+<p:sld xmlns:a="http://schemas.openxmlformats.org/drawingml/2006/main" xmlns:p="http://schemas.openxmlformats.org/presentationml/2006/main" xmlns:r="http://schemas.openxmlformats.org/officeDocument/2006/relationships">
+  <p:cSld>
+    <p:spTree>
+      <p:nvGrpSpPr>
+        <p:cNvPr id="1" name=""/>
+        <p:cNvGrpSpPr/>
+        <p:nvPr/>
+      </p:nvGrpSpPr>
+      <p:grpSpPr/>
+      <p:sp>
+        <p:nvSpPr>
+          <p:cNvPr id="2" name="Rectangle 1"/>
+          <p:cNvSpPr/>
+          <p:nvPr/>
+        </p:nvSpPr>
+        <p:spPr>
+          <a:xfrm>
+            <a:off x="0" y="0"/>
+            <a:ext cx="12191695" cy="6858000"/>
+          </a:xfrm>
+          <a:prstGeom prst="rect">
+            <a:avLst/>
+          </a:prstGeom>
+          <a:solidFill>
+            <a:srgbClr val="1F5FA8"/>
+          </a:solidFill>
+          <a:ln>
+            <a:noFill/>
+          </a:ln>
+        </p:spPr>
+        <p:style>
+          <a:lnRef idx="1">
+            <a:schemeClr val="accent1"/>
+          </a:lnRef>
+          <a:fillRef idx="3">
+            <a:schemeClr val="accent1"/>
+          </a:fillRef>
+          <a:effectRef idx="2">
+            <a:schemeClr val="accent1"/>
+          </a:effectRef>
+          <a:fontRef idx="minor">
+            <a:schemeClr val="lt1"/>
+          </a:fontRef>
+        </p:style>
+        <p:txBody>
+          <a:bodyPr rtlCol="0" anchor="ctr"/>
+          <a:lstStyle/>
+          <a:p>
+            <a:pPr algn="ctr"/>
+          </a:p>
+        </p:txBody>
+      </p:sp>
+      <p:sp>
+        <p:nvSpPr>
+          <p:cNvPr id="3" name="TextBox 2"/>
+          <p:cNvSpPr txBox="1"/>
+          <p:nvPr/>
+        </p:nvSpPr>
+        <p:spPr>
+          <a:xfrm>
+            <a:off x="822960" y="2743200"/>
+            <a:ext cx="10545775" cy="1463040"/>
+          </a:xfrm>
+          <a:prstGeom prst="rect">
+            <a:avLst/>
+          </a:prstGeom>
+          <a:noFill/>
+        </p:spPr>
+        <p:txBody>
+          <a:bodyPr wrap="square" anchor="ctr">
+            <a:spAutoFit/>
+          </a:bodyPr>
+          <a:lstStyle/>
+          <a:p>
+            <a:pPr algn="ctr"/>
+            <a:r>
+              <a:rPr sz="4000" b="1">
+                <a:solidFill>
+                  <a:srgbClr val="FFFFFF"/>
+                </a:solidFill>
+                <a:latin typeface="Leelawadee UI"/>
+                <a:ea typeface="Leelawadee UI"/>
+                <a:cs typeface="Leelawadee UI"/>
+              </a:rPr>
+              <a:t>🔗 ก่อนแยกย้ายไปพักเที่ยง</a:t>
+            </a:r>
+          </a:p>
+        </p:txBody>
+      </p:sp>
+      <p:sp>
+        <p:nvSpPr>
+          <p:cNvPr id="4" name="TextBox 3"/>
+          <p:cNvSpPr txBox="1"/>
+          <p:nvPr/>
+        </p:nvSpPr>
+        <p:spPr>
+          <a:xfrm>
+            <a:off x="822960" y="6355080"/>
+            <a:ext cx="10545775" cy="320040"/>
+          </a:xfrm>
+          <a:prstGeom prst="rect">
+            <a:avLst/>
+          </a:prstGeom>
+          <a:noFill/>
+        </p:spPr>
+        <p:txBody>
+          <a:bodyPr wrap="square">
+            <a:spAutoFit/>
+          </a:bodyPr>
+          <a:lstStyle/>
+          <a:p>
+            <a:r>
+              <a:rPr sz="1200" b="0">
+                <a:solidFill>
+                  <a:srgbClr val="6B6B6B"/>
+                </a:solidFill>
+                <a:latin typeface="Leelawadee UI"/>
+                <a:ea typeface="Leelawadee UI"/>
+                <a:cs typeface="Leelawadee UI"/>
+              </a:rPr>
+              <a:t>RAISE 2 · เดือนที่ 2 · สัปดาห์ที่ 9          73</a:t>
+            </a:r>
+          </a:p>
+        </p:txBody>
+      </p:sp>
+    </p:spTree>
+  </p:cSld>
+  <p:clrMapOvr>
+    <a:masterClrMapping/>
+  </p:clrMapOvr>
+</p:sld>
+</file>
+
+<file path=ppt/slides/slide74.xml><?xml version="1.0" encoding="utf-8"?>
 <p:sld xmlns:a="http://schemas.openxmlformats.org/drawingml/2006/main" xmlns:p="http://schemas.openxmlformats.org/presentationml/2006/main" xmlns:r="http://schemas.openxmlformats.org/officeDocument/2006/relationships">
   <p:cSld>
     <p:spTree>
@@ -26591,446 +27427,6 @@
                 <a:ea typeface="Leelawadee UI"/>
                 <a:cs typeface="Leelawadee UI"/>
               </a:rPr>
-              <a:t>RAISE 2 · เดือนที่ 2 · สัปดาห์ที่ 9          72</a:t>
-            </a:r>
-          </a:p>
-        </p:txBody>
-      </p:sp>
-    </p:spTree>
-  </p:cSld>
-  <p:clrMapOvr>
-    <a:masterClrMapping/>
-  </p:clrMapOvr>
-</p:sld>
-</file>
-
-<file path=ppt/slides/slide73.xml><?xml version="1.0" encoding="utf-8"?>
-<p:sld xmlns:a="http://schemas.openxmlformats.org/drawingml/2006/main" xmlns:p="http://schemas.openxmlformats.org/presentationml/2006/main" xmlns:r="http://schemas.openxmlformats.org/officeDocument/2006/relationships">
-  <p:cSld>
-    <p:spTree>
-      <p:nvGrpSpPr>
-        <p:cNvPr id="1" name=""/>
-        <p:cNvGrpSpPr/>
-        <p:nvPr/>
-      </p:nvGrpSpPr>
-      <p:grpSpPr/>
-      <p:sp>
-        <p:nvSpPr>
-          <p:cNvPr id="2" name="TextBox 1"/>
-          <p:cNvSpPr txBox="1"/>
-          <p:nvPr/>
-        </p:nvSpPr>
-        <p:spPr>
-          <a:xfrm>
-            <a:off x="822960" y="502920"/>
-            <a:ext cx="10545775" cy="804672"/>
-          </a:xfrm>
-          <a:prstGeom prst="rect">
-            <a:avLst/>
-          </a:prstGeom>
-          <a:noFill/>
-        </p:spPr>
-        <p:txBody>
-          <a:bodyPr wrap="square">
-            <a:spAutoFit/>
-          </a:bodyPr>
-          <a:lstStyle/>
-          <a:p>
-            <a:pPr algn="l"/>
-            <a:r>
-              <a:rPr sz="3600" b="1">
-                <a:solidFill>
-                  <a:srgbClr val="1F5FA8"/>
-                </a:solidFill>
-                <a:latin typeface="Leelawadee UI"/>
-                <a:ea typeface="Leelawadee UI"/>
-                <a:cs typeface="Leelawadee UI"/>
-              </a:rPr>
-              <a:t>เส้นทางเทสต์ เช้า ↔ ตัวอย่าง</a:t>
-            </a:r>
-          </a:p>
-        </p:txBody>
-      </p:sp>
-      <p:sp>
-        <p:nvSpPr>
-          <p:cNvPr id="3" name="Rectangle 2"/>
-          <p:cNvSpPr/>
-          <p:nvPr/>
-        </p:nvSpPr>
-        <p:spPr>
-          <a:xfrm>
-            <a:off x="822960" y="1472184"/>
-            <a:ext cx="10545775" cy="1920240"/>
-          </a:xfrm>
-          <a:prstGeom prst="rect">
-            <a:avLst/>
-          </a:prstGeom>
-          <a:solidFill>
-            <a:srgbClr val="F2F4F7"/>
-          </a:solidFill>
-          <a:ln>
-            <a:noFill/>
-          </a:ln>
-        </p:spPr>
-        <p:style>
-          <a:lnRef idx="1">
-            <a:schemeClr val="accent1"/>
-          </a:lnRef>
-          <a:fillRef idx="3">
-            <a:schemeClr val="accent1"/>
-          </a:fillRef>
-          <a:effectRef idx="2">
-            <a:schemeClr val="accent1"/>
-          </a:effectRef>
-          <a:fontRef idx="minor">
-            <a:schemeClr val="lt1"/>
-          </a:fontRef>
-        </p:style>
-        <p:txBody>
-          <a:bodyPr rtlCol="0" anchor="ctr" wrap="none" lIns="228600" tIns="137160"/>
-          <a:lstStyle/>
-          <a:p>
-            <a:pPr algn="l"/>
-            <a:r>
-              <a:rPr sz="1800" b="0">
-                <a:solidFill>
-                  <a:srgbClr val="1A1A1A"/>
-                </a:solidFill>
-                <a:latin typeface="Consolas"/>
-                <a:ea typeface="Consolas"/>
-                <a:cs typeface="Consolas"/>
-              </a:rPr>
-              <a:t>🎬 FixIt (สาธิตเมื่อเช้า)</a:t>
-            </a:r>
-          </a:p>
-          <a:p>
-            <a:pPr algn="l"/>
-            <a:r>
-              <a:rPr sz="1800" b="0">
-                <a:solidFill>
-                  <a:srgbClr val="1A1A1A"/>
-                </a:solidFill>
-                <a:latin typeface="Consolas"/>
-                <a:ea typeface="Consolas"/>
-                <a:cs typeface="Consolas"/>
-              </a:rPr>
-              <a:t>   แจ้งซ่อม → มอบหมายช่าง → อัปเดตสถานะ → ปิดงาน</a:t>
-            </a:r>
-          </a:p>
-          <a:p>
-            <a:pPr algn="l"/>
-            <a:r>
-              <a:rPr sz="1800" b="0">
-                <a:solidFill>
-                  <a:srgbClr val="1A1A1A"/>
-                </a:solidFill>
-                <a:latin typeface="Consolas"/>
-                <a:ea typeface="Consolas"/>
-                <a:cs typeface="Consolas"/>
-              </a:rPr>
-              <a:t/>
-            </a:r>
-          </a:p>
-          <a:p>
-            <a:pPr algn="l"/>
-            <a:r>
-              <a:rPr sz="1800" b="0">
-                <a:solidFill>
-                  <a:srgbClr val="1A1A1A"/>
-                </a:solidFill>
-                <a:latin typeface="Consolas"/>
-                <a:ea typeface="Consolas"/>
-                <a:cs typeface="Consolas"/>
-              </a:rPr>
-              <a:t>🔧 LeaveEasy (ตัวอย่างในใบงาน)</a:t>
-            </a:r>
-          </a:p>
-          <a:p>
-            <a:pPr algn="l"/>
-            <a:r>
-              <a:rPr sz="1800" b="0">
-                <a:solidFill>
-                  <a:srgbClr val="1A1A1A"/>
-                </a:solidFill>
-                <a:latin typeface="Consolas"/>
-                <a:ea typeface="Consolas"/>
-                <a:cs typeface="Consolas"/>
-              </a:rPr>
-              <a:t>   ยื่นใบลา → หัวหน้าอนุมัติ → บันทึกผล</a:t>
-            </a:r>
-          </a:p>
-        </p:txBody>
-      </p:sp>
-      <p:sp>
-        <p:nvSpPr>
-          <p:cNvPr id="4" name="TextBox 3"/>
-          <p:cNvSpPr txBox="1"/>
-          <p:nvPr/>
-        </p:nvSpPr>
-        <p:spPr>
-          <a:xfrm>
-            <a:off x="822960" y="6355080"/>
-            <a:ext cx="10545775" cy="320040"/>
-          </a:xfrm>
-          <a:prstGeom prst="rect">
-            <a:avLst/>
-          </a:prstGeom>
-          <a:noFill/>
-        </p:spPr>
-        <p:txBody>
-          <a:bodyPr wrap="square">
-            <a:spAutoFit/>
-          </a:bodyPr>
-          <a:lstStyle/>
-          <a:p>
-            <a:r>
-              <a:rPr sz="1200" b="0">
-                <a:solidFill>
-                  <a:srgbClr val="6B6B6B"/>
-                </a:solidFill>
-                <a:latin typeface="Leelawadee UI"/>
-                <a:ea typeface="Leelawadee UI"/>
-                <a:cs typeface="Leelawadee UI"/>
-              </a:rPr>
-              <a:t>RAISE 2 · เดือนที่ 2 · สัปดาห์ที่ 9          73</a:t>
-            </a:r>
-          </a:p>
-        </p:txBody>
-      </p:sp>
-    </p:spTree>
-  </p:cSld>
-  <p:clrMapOvr>
-    <a:masterClrMapping/>
-  </p:clrMapOvr>
-</p:sld>
-</file>
-
-<file path=ppt/slides/slide74.xml><?xml version="1.0" encoding="utf-8"?>
-<p:sld xmlns:a="http://schemas.openxmlformats.org/drawingml/2006/main" xmlns:p="http://schemas.openxmlformats.org/presentationml/2006/main" xmlns:r="http://schemas.openxmlformats.org/officeDocument/2006/relationships">
-  <p:cSld>
-    <p:spTree>
-      <p:nvGrpSpPr>
-        <p:cNvPr id="1" name=""/>
-        <p:cNvGrpSpPr/>
-        <p:nvPr/>
-      </p:nvGrpSpPr>
-      <p:grpSpPr/>
-      <p:sp>
-        <p:nvSpPr>
-          <p:cNvPr id="2" name="TextBox 1"/>
-          <p:cNvSpPr txBox="1"/>
-          <p:nvPr/>
-        </p:nvSpPr>
-        <p:spPr>
-          <a:xfrm>
-            <a:off x="822960" y="502920"/>
-            <a:ext cx="10545775" cy="804672"/>
-          </a:xfrm>
-          <a:prstGeom prst="rect">
-            <a:avLst/>
-          </a:prstGeom>
-          <a:noFill/>
-        </p:spPr>
-        <p:txBody>
-          <a:bodyPr wrap="square">
-            <a:spAutoFit/>
-          </a:bodyPr>
-          <a:lstStyle/>
-          <a:p>
-            <a:pPr algn="l"/>
-            <a:r>
-              <a:rPr sz="3600" b="1">
-                <a:solidFill>
-                  <a:srgbClr val="1F5FA8"/>
-                </a:solidFill>
-                <a:latin typeface="Leelawadee UI"/>
-                <a:ea typeface="Leelawadee UI"/>
-                <a:cs typeface="Leelawadee UI"/>
-              </a:rPr>
-              <a:t>บ่ายนี้ใน Workshop คุณจะทำอะไร</a:t>
-            </a:r>
-          </a:p>
-        </p:txBody>
-      </p:sp>
-      <p:sp>
-        <p:nvSpPr>
-          <p:cNvPr id="3" name="TextBox 2"/>
-          <p:cNvSpPr txBox="1"/>
-          <p:nvPr/>
-        </p:nvSpPr>
-        <p:spPr>
-          <a:xfrm>
-            <a:off x="822960" y="1472184"/>
-            <a:ext cx="10545775" cy="560324"/>
-          </a:xfrm>
-          <a:prstGeom prst="rect">
-            <a:avLst/>
-          </a:prstGeom>
-          <a:noFill/>
-        </p:spPr>
-        <p:txBody>
-          <a:bodyPr wrap="square">
-            <a:spAutoFit/>
-          </a:bodyPr>
-          <a:lstStyle/>
-          <a:p>
-            <a:pPr algn="l"/>
-            <a:r>
-              <a:rPr sz="2600" b="0">
-                <a:solidFill>
-                  <a:srgbClr val="1A1A1A"/>
-                </a:solidFill>
-                <a:latin typeface="Leelawadee UI"/>
-                <a:ea typeface="Leelawadee UI"/>
-                <a:cs typeface="Leelawadee UI"/>
-              </a:rPr>
-              <a:t>• ส่วน A ⏱ ~45 นาที — เชื่อม Playwright + ตั้ง Tester</a:t>
-            </a:r>
-          </a:p>
-        </p:txBody>
-      </p:sp>
-      <p:sp>
-        <p:nvSpPr>
-          <p:cNvPr id="4" name="TextBox 3"/>
-          <p:cNvSpPr txBox="1"/>
-          <p:nvPr/>
-        </p:nvSpPr>
-        <p:spPr>
-          <a:xfrm>
-            <a:off x="822960" y="2087372"/>
-            <a:ext cx="10545775" cy="560324"/>
-          </a:xfrm>
-          <a:prstGeom prst="rect">
-            <a:avLst/>
-          </a:prstGeom>
-          <a:noFill/>
-        </p:spPr>
-        <p:txBody>
-          <a:bodyPr wrap="square">
-            <a:spAutoFit/>
-          </a:bodyPr>
-          <a:lstStyle/>
-          <a:p>
-            <a:pPr algn="l"/>
-            <a:r>
-              <a:rPr sz="2600" b="0">
-                <a:solidFill>
-                  <a:srgbClr val="1A1A1A"/>
-                </a:solidFill>
-                <a:latin typeface="Leelawadee UI"/>
-                <a:ea typeface="Leelawadee UI"/>
-                <a:cs typeface="Leelawadee UI"/>
-              </a:rPr>
-              <a:t>• ส่วน B ⏱ ~55 นาที — เขียนเทสต์ 3 ตัว และไล่ผล</a:t>
-            </a:r>
-          </a:p>
-        </p:txBody>
-      </p:sp>
-      <p:sp>
-        <p:nvSpPr>
-          <p:cNvPr id="5" name="TextBox 4"/>
-          <p:cNvSpPr txBox="1"/>
-          <p:nvPr/>
-        </p:nvSpPr>
-        <p:spPr>
-          <a:xfrm>
-            <a:off x="822960" y="2702560"/>
-            <a:ext cx="10545775" cy="560324"/>
-          </a:xfrm>
-          <a:prstGeom prst="rect">
-            <a:avLst/>
-          </a:prstGeom>
-          <a:noFill/>
-        </p:spPr>
-        <p:txBody>
-          <a:bodyPr wrap="square">
-            <a:spAutoFit/>
-          </a:bodyPr>
-          <a:lstStyle/>
-          <a:p>
-            <a:pPr algn="l"/>
-            <a:r>
-              <a:rPr sz="2600" b="0">
-                <a:solidFill>
-                  <a:srgbClr val="1A1A1A"/>
-                </a:solidFill>
-                <a:latin typeface="Leelawadee UI"/>
-                <a:ea typeface="Leelawadee UI"/>
-                <a:cs typeface="Leelawadee UI"/>
-              </a:rPr>
-              <a:t>• ส่วน C ⏱ ~5 นาที — เก็บของส่งมอบและซ้อมนำเสนอ</a:t>
-            </a:r>
-          </a:p>
-        </p:txBody>
-      </p:sp>
-      <p:sp>
-        <p:nvSpPr>
-          <p:cNvPr id="6" name="TextBox 5"/>
-          <p:cNvSpPr txBox="1"/>
-          <p:nvPr/>
-        </p:nvSpPr>
-        <p:spPr>
-          <a:xfrm>
-            <a:off x="822960" y="3317748"/>
-            <a:ext cx="10545775" cy="560324"/>
-          </a:xfrm>
-          <a:prstGeom prst="rect">
-            <a:avLst/>
-          </a:prstGeom>
-          <a:noFill/>
-        </p:spPr>
-        <p:txBody>
-          <a:bodyPr wrap="square">
-            <a:spAutoFit/>
-          </a:bodyPr>
-          <a:lstStyle/>
-          <a:p>
-            <a:pPr algn="l"/>
-            <a:r>
-              <a:rPr sz="2600" b="0">
-                <a:solidFill>
-                  <a:srgbClr val="1A1A1A"/>
-                </a:solidFill>
-                <a:latin typeface="Leelawadee UI"/>
-                <a:ea typeface="Leelawadee UI"/>
-                <a:cs typeface="Leelawadee UI"/>
-              </a:rPr>
-              <a:t>• 14:45 เป็นต้นไป — 🎤 Sprint 1 Review 3 ห้องขนานกัน</a:t>
-            </a:r>
-          </a:p>
-        </p:txBody>
-      </p:sp>
-      <p:sp>
-        <p:nvSpPr>
-          <p:cNvPr id="7" name="TextBox 6"/>
-          <p:cNvSpPr txBox="1"/>
-          <p:nvPr/>
-        </p:nvSpPr>
-        <p:spPr>
-          <a:xfrm>
-            <a:off x="822960" y="6355080"/>
-            <a:ext cx="10545775" cy="320040"/>
-          </a:xfrm>
-          <a:prstGeom prst="rect">
-            <a:avLst/>
-          </a:prstGeom>
-          <a:noFill/>
-        </p:spPr>
-        <p:txBody>
-          <a:bodyPr wrap="square">
-            <a:spAutoFit/>
-          </a:bodyPr>
-          <a:lstStyle/>
-          <a:p>
-            <a:r>
-              <a:rPr sz="1200" b="0">
-                <a:solidFill>
-                  <a:srgbClr val="6B6B6B"/>
-                </a:solidFill>
-                <a:latin typeface="Leelawadee UI"/>
-                <a:ea typeface="Leelawadee UI"/>
-                <a:cs typeface="Leelawadee UI"/>
-              </a:rPr>
               <a:t>RAISE 2 · เดือนที่ 2 · สัปดาห์ที่ 9          74</a:t>
             </a:r>
           </a:p>
@@ -27062,6 +27458,446 @@
         </p:nvSpPr>
         <p:spPr>
           <a:xfrm>
+            <a:off x="822960" y="502920"/>
+            <a:ext cx="10545775" cy="804672"/>
+          </a:xfrm>
+          <a:prstGeom prst="rect">
+            <a:avLst/>
+          </a:prstGeom>
+          <a:noFill/>
+        </p:spPr>
+        <p:txBody>
+          <a:bodyPr wrap="square">
+            <a:spAutoFit/>
+          </a:bodyPr>
+          <a:lstStyle/>
+          <a:p>
+            <a:pPr algn="l"/>
+            <a:r>
+              <a:rPr sz="3600" b="1">
+                <a:solidFill>
+                  <a:srgbClr val="1F5FA8"/>
+                </a:solidFill>
+                <a:latin typeface="Leelawadee UI"/>
+                <a:ea typeface="Leelawadee UI"/>
+                <a:cs typeface="Leelawadee UI"/>
+              </a:rPr>
+              <a:t>เส้นทางเทสต์ เช้า ↔ ตัวอย่าง</a:t>
+            </a:r>
+          </a:p>
+        </p:txBody>
+      </p:sp>
+      <p:sp>
+        <p:nvSpPr>
+          <p:cNvPr id="3" name="Rectangle 2"/>
+          <p:cNvSpPr/>
+          <p:nvPr/>
+        </p:nvSpPr>
+        <p:spPr>
+          <a:xfrm>
+            <a:off x="822960" y="1472184"/>
+            <a:ext cx="10545775" cy="1920240"/>
+          </a:xfrm>
+          <a:prstGeom prst="rect">
+            <a:avLst/>
+          </a:prstGeom>
+          <a:solidFill>
+            <a:srgbClr val="F2F4F7"/>
+          </a:solidFill>
+          <a:ln>
+            <a:noFill/>
+          </a:ln>
+        </p:spPr>
+        <p:style>
+          <a:lnRef idx="1">
+            <a:schemeClr val="accent1"/>
+          </a:lnRef>
+          <a:fillRef idx="3">
+            <a:schemeClr val="accent1"/>
+          </a:fillRef>
+          <a:effectRef idx="2">
+            <a:schemeClr val="accent1"/>
+          </a:effectRef>
+          <a:fontRef idx="minor">
+            <a:schemeClr val="lt1"/>
+          </a:fontRef>
+        </p:style>
+        <p:txBody>
+          <a:bodyPr rtlCol="0" anchor="ctr" wrap="none" lIns="228600" tIns="137160"/>
+          <a:lstStyle/>
+          <a:p>
+            <a:pPr algn="l"/>
+            <a:r>
+              <a:rPr sz="1800" b="0">
+                <a:solidFill>
+                  <a:srgbClr val="1A1A1A"/>
+                </a:solidFill>
+                <a:latin typeface="Consolas"/>
+                <a:ea typeface="Consolas"/>
+                <a:cs typeface="Consolas"/>
+              </a:rPr>
+              <a:t>🎬 FixIt (สาธิตเมื่อเช้า)</a:t>
+            </a:r>
+          </a:p>
+          <a:p>
+            <a:pPr algn="l"/>
+            <a:r>
+              <a:rPr sz="1800" b="0">
+                <a:solidFill>
+                  <a:srgbClr val="1A1A1A"/>
+                </a:solidFill>
+                <a:latin typeface="Consolas"/>
+                <a:ea typeface="Consolas"/>
+                <a:cs typeface="Consolas"/>
+              </a:rPr>
+              <a:t>   แจ้งซ่อม → มอบหมายช่าง → อัปเดตสถานะ → ปิดงาน</a:t>
+            </a:r>
+          </a:p>
+          <a:p>
+            <a:pPr algn="l"/>
+            <a:r>
+              <a:rPr sz="1800" b="0">
+                <a:solidFill>
+                  <a:srgbClr val="1A1A1A"/>
+                </a:solidFill>
+                <a:latin typeface="Consolas"/>
+                <a:ea typeface="Consolas"/>
+                <a:cs typeface="Consolas"/>
+              </a:rPr>
+              <a:t/>
+            </a:r>
+          </a:p>
+          <a:p>
+            <a:pPr algn="l"/>
+            <a:r>
+              <a:rPr sz="1800" b="0">
+                <a:solidFill>
+                  <a:srgbClr val="1A1A1A"/>
+                </a:solidFill>
+                <a:latin typeface="Consolas"/>
+                <a:ea typeface="Consolas"/>
+                <a:cs typeface="Consolas"/>
+              </a:rPr>
+              <a:t>🔧 LeaveEasy (ตัวอย่างในใบงาน)</a:t>
+            </a:r>
+          </a:p>
+          <a:p>
+            <a:pPr algn="l"/>
+            <a:r>
+              <a:rPr sz="1800" b="0">
+                <a:solidFill>
+                  <a:srgbClr val="1A1A1A"/>
+                </a:solidFill>
+                <a:latin typeface="Consolas"/>
+                <a:ea typeface="Consolas"/>
+                <a:cs typeface="Consolas"/>
+              </a:rPr>
+              <a:t>   ยื่นใบลา → หัวหน้าอนุมัติ → บันทึกผล</a:t>
+            </a:r>
+          </a:p>
+        </p:txBody>
+      </p:sp>
+      <p:sp>
+        <p:nvSpPr>
+          <p:cNvPr id="4" name="TextBox 3"/>
+          <p:cNvSpPr txBox="1"/>
+          <p:nvPr/>
+        </p:nvSpPr>
+        <p:spPr>
+          <a:xfrm>
+            <a:off x="822960" y="6355080"/>
+            <a:ext cx="10545775" cy="320040"/>
+          </a:xfrm>
+          <a:prstGeom prst="rect">
+            <a:avLst/>
+          </a:prstGeom>
+          <a:noFill/>
+        </p:spPr>
+        <p:txBody>
+          <a:bodyPr wrap="square">
+            <a:spAutoFit/>
+          </a:bodyPr>
+          <a:lstStyle/>
+          <a:p>
+            <a:r>
+              <a:rPr sz="1200" b="0">
+                <a:solidFill>
+                  <a:srgbClr val="6B6B6B"/>
+                </a:solidFill>
+                <a:latin typeface="Leelawadee UI"/>
+                <a:ea typeface="Leelawadee UI"/>
+                <a:cs typeface="Leelawadee UI"/>
+              </a:rPr>
+              <a:t>RAISE 2 · เดือนที่ 2 · สัปดาห์ที่ 9          75</a:t>
+            </a:r>
+          </a:p>
+        </p:txBody>
+      </p:sp>
+    </p:spTree>
+  </p:cSld>
+  <p:clrMapOvr>
+    <a:masterClrMapping/>
+  </p:clrMapOvr>
+</p:sld>
+</file>
+
+<file path=ppt/slides/slide76.xml><?xml version="1.0" encoding="utf-8"?>
+<p:sld xmlns:a="http://schemas.openxmlformats.org/drawingml/2006/main" xmlns:p="http://schemas.openxmlformats.org/presentationml/2006/main" xmlns:r="http://schemas.openxmlformats.org/officeDocument/2006/relationships">
+  <p:cSld>
+    <p:spTree>
+      <p:nvGrpSpPr>
+        <p:cNvPr id="1" name=""/>
+        <p:cNvGrpSpPr/>
+        <p:nvPr/>
+      </p:nvGrpSpPr>
+      <p:grpSpPr/>
+      <p:sp>
+        <p:nvSpPr>
+          <p:cNvPr id="2" name="TextBox 1"/>
+          <p:cNvSpPr txBox="1"/>
+          <p:nvPr/>
+        </p:nvSpPr>
+        <p:spPr>
+          <a:xfrm>
+            <a:off x="822960" y="502920"/>
+            <a:ext cx="10545775" cy="804672"/>
+          </a:xfrm>
+          <a:prstGeom prst="rect">
+            <a:avLst/>
+          </a:prstGeom>
+          <a:noFill/>
+        </p:spPr>
+        <p:txBody>
+          <a:bodyPr wrap="square">
+            <a:spAutoFit/>
+          </a:bodyPr>
+          <a:lstStyle/>
+          <a:p>
+            <a:pPr algn="l"/>
+            <a:r>
+              <a:rPr sz="3600" b="1">
+                <a:solidFill>
+                  <a:srgbClr val="1F5FA8"/>
+                </a:solidFill>
+                <a:latin typeface="Leelawadee UI"/>
+                <a:ea typeface="Leelawadee UI"/>
+                <a:cs typeface="Leelawadee UI"/>
+              </a:rPr>
+              <a:t>บ่ายนี้ใน Workshop กลุ่มคุณจะทำอะไร</a:t>
+            </a:r>
+          </a:p>
+        </p:txBody>
+      </p:sp>
+      <p:sp>
+        <p:nvSpPr>
+          <p:cNvPr id="3" name="TextBox 2"/>
+          <p:cNvSpPr txBox="1"/>
+          <p:nvPr/>
+        </p:nvSpPr>
+        <p:spPr>
+          <a:xfrm>
+            <a:off x="822960" y="1472184"/>
+            <a:ext cx="10545775" cy="560324"/>
+          </a:xfrm>
+          <a:prstGeom prst="rect">
+            <a:avLst/>
+          </a:prstGeom>
+          <a:noFill/>
+        </p:spPr>
+        <p:txBody>
+          <a:bodyPr wrap="square">
+            <a:spAutoFit/>
+          </a:bodyPr>
+          <a:lstStyle/>
+          <a:p>
+            <a:pPr algn="l"/>
+            <a:r>
+              <a:rPr sz="2600" b="0">
+                <a:solidFill>
+                  <a:srgbClr val="1A1A1A"/>
+                </a:solidFill>
+                <a:latin typeface="Leelawadee UI"/>
+                <a:ea typeface="Leelawadee UI"/>
+                <a:cs typeface="Leelawadee UI"/>
+              </a:rPr>
+              <a:t>• ส่วน A ⏱ ~30 นาที — เชื่อม Playwright + ตั้ง Tester</a:t>
+            </a:r>
+          </a:p>
+        </p:txBody>
+      </p:sp>
+      <p:sp>
+        <p:nvSpPr>
+          <p:cNvPr id="4" name="TextBox 3"/>
+          <p:cNvSpPr txBox="1"/>
+          <p:nvPr/>
+        </p:nvSpPr>
+        <p:spPr>
+          <a:xfrm>
+            <a:off x="822960" y="2087372"/>
+            <a:ext cx="10545775" cy="560324"/>
+          </a:xfrm>
+          <a:prstGeom prst="rect">
+            <a:avLst/>
+          </a:prstGeom>
+          <a:noFill/>
+        </p:spPr>
+        <p:txBody>
+          <a:bodyPr wrap="square">
+            <a:spAutoFit/>
+          </a:bodyPr>
+          <a:lstStyle/>
+          <a:p>
+            <a:pPr algn="l"/>
+            <a:r>
+              <a:rPr sz="2600" b="0">
+                <a:solidFill>
+                  <a:srgbClr val="1A1A1A"/>
+                </a:solidFill>
+                <a:latin typeface="Leelawadee UI"/>
+                <a:ea typeface="Leelawadee UI"/>
+                <a:cs typeface="Leelawadee UI"/>
+              </a:rPr>
+              <a:t>• ส่วน B ⏱ ~45 นาที — เขียนเทสต์อย่างน้อย 5 ตัวให้ผ่าน</a:t>
+            </a:r>
+          </a:p>
+        </p:txBody>
+      </p:sp>
+      <p:sp>
+        <p:nvSpPr>
+          <p:cNvPr id="5" name="TextBox 4"/>
+          <p:cNvSpPr txBox="1"/>
+          <p:nvPr/>
+        </p:nvSpPr>
+        <p:spPr>
+          <a:xfrm>
+            <a:off x="822960" y="2702560"/>
+            <a:ext cx="10545775" cy="560324"/>
+          </a:xfrm>
+          <a:prstGeom prst="rect">
+            <a:avLst/>
+          </a:prstGeom>
+          <a:noFill/>
+        </p:spPr>
+        <p:txBody>
+          <a:bodyPr wrap="square">
+            <a:spAutoFit/>
+          </a:bodyPr>
+          <a:lstStyle/>
+          <a:p>
+            <a:pPr algn="l"/>
+            <a:r>
+              <a:rPr sz="2600" b="0">
+                <a:solidFill>
+                  <a:srgbClr val="1A1A1A"/>
+                </a:solidFill>
+                <a:latin typeface="Leelawadee UI"/>
+                <a:ea typeface="Leelawadee UI"/>
+                <a:cs typeface="Leelawadee UI"/>
+              </a:rPr>
+              <a:t>• ส่วน C ⏱ ~20 นาที — เก็บของส่งมอบ + ซ้อมนำเสนอ 1 รอบ</a:t>
+            </a:r>
+          </a:p>
+        </p:txBody>
+      </p:sp>
+      <p:sp>
+        <p:nvSpPr>
+          <p:cNvPr id="6" name="TextBox 5"/>
+          <p:cNvSpPr txBox="1"/>
+          <p:nvPr/>
+        </p:nvSpPr>
+        <p:spPr>
+          <a:xfrm>
+            <a:off x="822960" y="3317748"/>
+            <a:ext cx="10545775" cy="560324"/>
+          </a:xfrm>
+          <a:prstGeom prst="rect">
+            <a:avLst/>
+          </a:prstGeom>
+          <a:noFill/>
+        </p:spPr>
+        <p:txBody>
+          <a:bodyPr wrap="square">
+            <a:spAutoFit/>
+          </a:bodyPr>
+          <a:lstStyle/>
+          <a:p>
+            <a:pPr algn="l"/>
+            <a:r>
+              <a:rPr sz="2600" b="0">
+                <a:solidFill>
+                  <a:srgbClr val="1A1A1A"/>
+                </a:solidFill>
+                <a:latin typeface="Leelawadee UI"/>
+                <a:ea typeface="Leelawadee UI"/>
+                <a:cs typeface="Leelawadee UI"/>
+              </a:rPr>
+              <a:t>• 14:45 เป็นต้นไป — 🎤 Sprint 1 Review 3 ห้องขนานกัน</a:t>
+            </a:r>
+          </a:p>
+        </p:txBody>
+      </p:sp>
+      <p:sp>
+        <p:nvSpPr>
+          <p:cNvPr id="7" name="TextBox 6"/>
+          <p:cNvSpPr txBox="1"/>
+          <p:nvPr/>
+        </p:nvSpPr>
+        <p:spPr>
+          <a:xfrm>
+            <a:off x="822960" y="6355080"/>
+            <a:ext cx="10545775" cy="320040"/>
+          </a:xfrm>
+          <a:prstGeom prst="rect">
+            <a:avLst/>
+          </a:prstGeom>
+          <a:noFill/>
+        </p:spPr>
+        <p:txBody>
+          <a:bodyPr wrap="square">
+            <a:spAutoFit/>
+          </a:bodyPr>
+          <a:lstStyle/>
+          <a:p>
+            <a:r>
+              <a:rPr sz="1200" b="0">
+                <a:solidFill>
+                  <a:srgbClr val="6B6B6B"/>
+                </a:solidFill>
+                <a:latin typeface="Leelawadee UI"/>
+                <a:ea typeface="Leelawadee UI"/>
+                <a:cs typeface="Leelawadee UI"/>
+              </a:rPr>
+              <a:t>RAISE 2 · เดือนที่ 2 · สัปดาห์ที่ 9          76</a:t>
+            </a:r>
+          </a:p>
+        </p:txBody>
+      </p:sp>
+    </p:spTree>
+  </p:cSld>
+  <p:clrMapOvr>
+    <a:masterClrMapping/>
+  </p:clrMapOvr>
+</p:sld>
+</file>
+
+<file path=ppt/slides/slide77.xml><?xml version="1.0" encoding="utf-8"?>
+<p:sld xmlns:a="http://schemas.openxmlformats.org/drawingml/2006/main" xmlns:p="http://schemas.openxmlformats.org/presentationml/2006/main" xmlns:r="http://schemas.openxmlformats.org/officeDocument/2006/relationships">
+  <p:cSld>
+    <p:spTree>
+      <p:nvGrpSpPr>
+        <p:cNvPr id="1" name=""/>
+        <p:cNvGrpSpPr/>
+        <p:nvPr/>
+      </p:nvGrpSpPr>
+      <p:grpSpPr/>
+      <p:sp>
+        <p:nvSpPr>
+          <p:cNvPr id="2" name="TextBox 1"/>
+          <p:cNvSpPr txBox="1"/>
+          <p:nvPr/>
+        </p:nvSpPr>
+        <p:spPr>
+          <a:xfrm>
             <a:off x="822960" y="2011680"/>
             <a:ext cx="10545775" cy="2743200"/>
           </a:xfrm>
@@ -27122,7 +27958,7 @@
                 <a:ea typeface="Leelawadee UI"/>
                 <a:cs typeface="Leelawadee UI"/>
               </a:rPr>
-              <a:t>RAISE 2 · เดือนที่ 2 · สัปดาห์ที่ 9          75</a:t>
+              <a:t>RAISE 2 · เดือนที่ 2 · สัปดาห์ที่ 9          77</a:t>
             </a:r>
           </a:p>
         </p:txBody>

--- a/materials/week9/w9-slides.pptx
+++ b/materials/week9/w9-slides.pptx
@@ -582,7 +582,7 @@
           <a:lstStyle/>
           <a:p>
             <a:r>
-              <a:t>เปิดด้วยประโยคนี้ — "สัปดาห์นี้เราจะไม่เริ่มของใหม่ที่ใหญ่แล้วนะครับ วันนี้คือวันที่เราพิสูจน์ว่าระบบของกลุ่มทำงานได้จริง แล้วเอาไปนำเสนอ" · ย้ำว่าเป้าหมายวันนี้คือ พิสูจน์และส่งมอบ ไม่ใช่สร้างของใหม่</a:t>
+              <a:t>เปิดด้วยประโยคนี้ — "สัปดาห์นี้เราจะไม่เริ่มของใหม่ที่ใหญ่แล้วนะครับ วันนี้คือวันที่เราพิสูจน์ว่าระบบของคุณทำงานได้จริง แล้วเก็บของส่งมอบให้ครบ" · ย้ำว่าเป้าหมายวันนี้คือ พิสูจน์และส่งมอบ ไม่ใช่สร้างของใหม่</a:t>
             </a:r>
           </a:p>
         </p:txBody>
@@ -1352,7 +1352,7 @@
           <a:lstStyle/>
           <a:p>
             <a:r>
-              <a:t>พูดว่า "สามชั่วโมงนี้เราจะให้ AI ทดสอบระบบแทนเรา แล้วซ้อมนำเสนอ แล้วเก็บของส่งมอบให้ครบ" · บอกว่าบ่ายนี้มี Sprint 1 Review จริง ทุกกลุ่มได้ขึ้น ไม่มีกลุ่มไหนนั่งดูอย่างเดียว</a:t>
+              <a:t>พูดว่า "สามชั่วโมงนี้เราจะให้ AI ทดสอบระบบแทนเรา แล้วเก็บของส่งมอบให้ครบ" · บอกว่าสัปดาห์นี้ไม่มีการนำเสนอหน้าห้อง ใช้คลิปสาธิต 3 นาทีกับ Consult รายคนแทน</a:t>
             </a:r>
           </a:p>
         </p:txBody>
@@ -1632,7 +1632,7 @@
           <a:lstStyle/>
           <a:p>
             <a:r>
-              <a:t>พูดว่า "ขั้นนี้คนติดกันเยอะ ถือว่าปกติครับ" · ย้ำว่าไฟล์ตั้งค่า MCP ถูกอ่านตอนเปิดโปรแกรมเท่านั้น ปิดเปิดใหม่จึงช่วยได้บ่อย · บอกว่าถ้าเกิน 15 นาทีให้เข้าคิวถามทันที อย่านั่งไล่แก้ทั้งกลุ่ม</a:t>
+              <a:t>พูดว่า "ขั้นนี้คนติดกันเยอะ ถือว่าปกติครับ" · ย้ำว่าไฟล์ตั้งค่า MCP ถูกอ่านตอนเปิดโปรแกรมเท่านั้น ปิดเปิดใหม่จึงช่วยได้บ่อย · บอกว่าถ้าเกิน 15 นาทีให้เข้าคิวถามทันที อย่านั่งไล่แก้ทุกคน</a:t>
             </a:r>
           </a:p>
         </p:txBody>
@@ -1912,7 +1912,7 @@
           <a:lstStyle/>
           <a:p>
             <a:r>
-              <a:t>พูดว่า "ขั้นนี้ห้ามข้ามครับ — ถ้าเราไม่เปิดอ่าน เราจะตอบไม่ได้ตอนนำเสนอว่าใครเป็นคนทดสอบระบบเรา" · เปิดไฟล์ให้ห้องดูจริงบนจอ แล้วชี้ทีละบรรทัดว่าตรงไหนคือชื่อ ตรงไหนคือหน้าที่ ตรงไหนคือขอบเขต · บอกว่าถ้าขาด ให้พิมพ์กลับไปว่า "ในไฟล์ตั้งค่ายังไม่มี … ช่วยเพิ่มให้ด้วย"</a:t>
+              <a:t>พูดว่า "ขั้นนี้ห้ามข้ามครับ — ถ้าเราไม่เปิดอ่าน เราจะตอบไม่ได้ตอน Consult ว่าใครเป็นคนทดสอบระบบเรา" · เปิดไฟล์ให้ห้องดูจริงบนจอ แล้วชี้ทีละบรรทัดว่าตรงไหนคือชื่อ ตรงไหนคือหน้าที่ ตรงไหนคือขอบเขต · บอกว่าถ้าขาด ให้พิมพ์กลับไปว่า "ในไฟล์ตั้งค่ายังไม่มี … ช่วยเพิ่มให้ด้วย"</a:t>
             </a:r>
           </a:p>
         </p:txBody>
@@ -1982,7 +1982,7 @@
           <a:lstStyle/>
           <a:p>
             <a:r>
-              <a:t>พูดว่า "เมื่อกี้ /mcp บอกเราว่าเชื่อมต่อแล้ว ตรงนี้คือการยืนยันซ้ำด้วยของจริง — ถ้ามันตอบกลับมาว่าเห็นหัวข้ออะไร ปุ่มอะไร แปลว่าใช้งานได้จริงแล้ว" · ย้ำลำดับสองขั้น: พิมพ์ /mcp ดูสถานะก่อน แล้วค่อยสั่งเปิดเบราว์เซอร์ยืนยัน · บอกว่านี่คือ Checkpoint แรกที่กลุ่มต้องผ่านในบ่ายนี้</a:t>
+              <a:t>พูดว่า "เมื่อกี้ /mcp บอกเราว่าเชื่อมต่อแล้ว ตรงนี้คือการยืนยันซ้ำด้วยของจริง — ถ้ามันตอบกลับมาว่าเห็นหัวข้ออะไร ปุ่มอะไร แปลว่าใช้งานได้จริงแล้ว" · ย้ำลำดับสองขั้น: พิมพ์ /mcp ดูสถานะก่อน แล้วค่อยสั่งเปิดเบราว์เซอร์ยืนยัน · บอกว่านี่คือ Checkpoint แรกที่ต้องผ่านในบ่ายนี้</a:t>
             </a:r>
           </a:p>
         </p:txBody>
@@ -2192,7 +2192,7 @@
           <a:lstStyle/>
           <a:p>
             <a:r>
-              <a:t>พูดว่า "ช่วงหลังพักคือช่วงที่สนุกที่สุดของ Module นี้ อย่าหายไปนะครับ" · เตือนให้กลุ่มเปิด URL ของกลุ่มตัวเองค้างไว้</a:t>
+              <a:t>พูดว่า "ช่วงหลังพักคือช่วงที่สนุกที่สุดของ Module นี้ อย่าหายไปนะครับ" · เตือนให้เปิด URL ของตัวเองค้างไว้</a:t>
             </a:r>
           </a:p>
         </p:txBody>
@@ -2262,7 +2262,7 @@
           <a:lstStyle/>
           <a:p>
             <a:r>
-              <a:t>พูดว่า "คนส่วนใหญ่ทดสอบแต่กลุ่มแรก ซึ่งเป็นกลุ่มที่พังน้อยที่สุด" · บอกว่าบ่ายนี้ต้องมีอย่างน้อยกลุ่ม 1 · 2 · 3 และถ้าระบบกลุ่มมีปุ่ม AI ให้มีกลุ่ม 4 ด้วย · กลุ่ม 5 (ข้อมูลว่าง) เป็นงานต่อยอด</a:t>
+              <a:t>พูดว่า "คนส่วนใหญ่ทดสอบแต่ห้องแรก ซึ่งเป็นคนที่พังน้อยที่สุด" · บอกว่าบ่ายนี้ต้องมีอย่างน้อยแบบ 1 · 2 · 3 และถ้าระบบของคุณมีปุ่ม AI ให้มีแบบ 4 ด้วย · แบบ 5 (ข้อมูลว่าง) เป็นงานต่อยอด</a:t>
             </a:r>
           </a:p>
         </p:txBody>
@@ -2612,7 +2612,7 @@
           <a:lstStyle/>
           <a:p>
             <a:r>
-              <a:t>อ่าน prompt ออกเสียงแล้วชี้บรรทัดดาว บอกว่า "ถ้าไม่เติมประโยคนี้ เทสต์จะผ่านทั้งที่ผู้ใช้ยังงงอยู่หน้าจอ" · บอกว่ารูปแบบนี้กลุ่มเอาไปใช้กับฟอร์มของตัวเองได้ทันที</a:t>
+              <a:t>อ่าน prompt ออกเสียงแล้วชี้บรรทัดดาว บอกว่า "ถ้าไม่เติมประโยคนี้ เทสต์จะผ่านทั้งที่ผู้ใช้ยังงงอยู่หน้าจอ" · บอกว่ารูปแบบนี้เอาไปใช้กับฟอร์มของตัวเองได้ทันที</a:t>
             </a:r>
           </a:p>
         </p:txBody>
@@ -2752,7 +2752,7 @@
           <a:lstStyle/>
           <a:p>
             <a:r>
-              <a:t>ย้ำว่าตอนแก้แผนให้พิมพ์ว่า "เทสต์นี้ผ่านเมื่อระบบไม่ยอมให้เข้า และมีข้อความบอกผู้ใช้ · ถ้าเปิดดูได้ให้รายงานว่าไม่ผ่านพร้อมบอกว่าเห็นข้อมูลอะไร" · บอกว่ารูปแบบนี้คือรูปแบบเดียวกับที่กลุ่มจะใช้ตอนบ่าย</a:t>
+              <a:t>ย้ำว่าตอนแก้แผนให้พิมพ์ว่า "เทสต์นี้ผ่านเมื่อระบบไม่ยอมให้เข้า และมีข้อความบอกผู้ใช้ · ถ้าเปิดดูได้ให้รายงานว่าไม่ผ่านพร้อมบอกว่าเห็นข้อมูลอะไร" · บอกว่ารูปแบบนี้คือรูปแบบเดียวกับที่จะใช้ตอนบ่าย</a:t>
             </a:r>
           </a:p>
         </p:txBody>
@@ -2892,7 +2892,7 @@
           <a:lstStyle/>
           <a:p>
             <a:r>
-              <a:t>หยุดค้างที่กล่องเข้มกล่องแรกแล้วพูดว่า "กล่องนี้คือของใหม่ของวันนี้ — เราจะให้ AI อีกตัวเปิดเบราว์เซอร์เข้าไปกดใช้ระบบของเราจริง ๆ" · ไล่นิ้วไปกล่องที่สอง "บ่ายนี้ทุกกลุ่มขึ้นนำเสนอ และทุกคนในกลุ่มต้องพูด" · จบที่กล่องขวาสุด "ปลายทางคือของส่งมอบ 5 รายการให้ Module 3" · บอกให้ถ่ายรูปสไลด์นี้ไว้เป็นแผนที่ทั้งวัน</a:t>
+              <a:t>หยุดค้างที่กล่องเข้มกล่องแรกแล้วพูดว่า "กล่องนี้คือของใหม่ของวันนี้ — เราจะให้ AI อีกตัวเปิดเบราว์เซอร์เข้าไปกดใช้ระบบของเราจริง ๆ" · ไล่นิ้วไปกล่องที่สอง "บ่ายนี้ทุกคนอัดคลิป 3 นาทีของระบบตัวเอง" · จบที่กล่องขวาสุด "ปลายทางคือของส่งมอบ 5 รายการให้ Module 3" · บอกให้ถ่ายรูปสไลด์นี้ไว้เป็นแผนที่ทั้งวัน</a:t>
             </a:r>
           </a:p>
         </p:txBody>
@@ -2962,7 +2962,7 @@
           <a:lstStyle/>
           <a:p>
             <a:r>
-              <a:t>อ่าน prompt ออกเสียง แล้วบอกว่า "เทสต์ตัวนี้กับเทสต์ความปลอดภัยเป็นญาติกัน — ทั้งคู่ทดสอบวันที่แย่ ไม่ใช่วันที่ดี" · ย้ำว่าถ้าระบบของกลุ่มไม่มีปุ่ม AI ให้ข้ามเทสต์ตัวนี้ได้ แต่ต้องมีเทสต์ครบ 5 ตัวจากกลุ่มอื่นแทน</a:t>
+              <a:t>อ่าน prompt ออกเสียง แล้วบอกว่า "เทสต์ตัวนี้กับเทสต์ความปลอดภัยเป็นญาติกัน — ทั้งคู่ทดสอบวันที่แย่ ไม่ใช่วันที่ดี" · ย้ำว่าถ้าระบบของคุณไม่มีปุ่ม AI ให้ข้ามเทสต์ตัวนี้ได้ แต่ต้องมีเทสต์ครบ 5 ตัวจากเพื่อนแทน</a:t>
             </a:r>
           </a:p>
         </p:txBody>
@@ -3172,7 +3172,7 @@
           <a:lstStyle/>
           <a:p>
             <a:r>
-              <a:t>พูดว่า "วิธีตัดสินคือเปิดเว็บกดเองด้วยมือ 30 วินาที จบ" · ย้ำว่าอย่าเดา ให้กดจริง · บอกว่าในกลุ่มให้คนที่ไม่ได้พิมพ์เป็นคนกดทดสอบด้วยมือ</a:t>
+              <a:t>พูดว่า "วิธีตัดสินคือเปิดเว็บกดเองด้วยมือ 30 วินาที จบ" · ย้ำว่าอย่าเดา ให้กดจริง · บอกว่าในห้องย่อยให้คนที่ไม่ได้พิมพ์เป็นคนกดทดสอบด้วยมือ</a:t>
             </a:r>
           </a:p>
         </p:txBody>
@@ -3382,7 +3382,7 @@
           <a:lstStyle/>
           <a:p>
             <a:r>
-              <a:t>ให้แต่ละกลุ่มพิมพ์ 🟢🟡🔴 ลงแชท · จดชื่อกลุ่มที่พิมพ์ 🔴 ไว้ให้ TA ตามในคาบบ่ายทันทีที่เปิด breakout</a:t>
+              <a:t>ให้แต่ละคนพิมพ์ 🟢🟡🔴 ลงแชท · จดชื่อคนที่พิมพ์ 🔴 ไว้ให้ TA ตามในคาบบ่ายทันทีที่เปิด breakout</a:t>
             </a:r>
           </a:p>
         </p:txBody>
@@ -3452,7 +3452,7 @@
           <a:lstStyle/>
           <a:p>
             <a:r>
-              <a:t>ลดความกดดันก่อนเข้าเนื้อหา — "บ่ายนี้ทุกกลุ่มจะได้นำเสนอ 5 นาที ไม่ใช่การสอบ และไม่ใช่การประกวดว่าระบบใครสวยกว่า สิ่งที่เราอยากฟังคือ กลุ่มคุณเจอปัญหาอะไรและแก้ยังไง" · บอกล่วงหน้าว่าจะแยกเป็น 3 ห้องขนานกัน จะได้ไม่ตกใจตอนถูกย้ายห้อง</a:t>
+              <a:t>ลดความกดดันก่อนเข้าเนื้อหา — "ช่วงนี้ไม่มีการนำเสนอหน้าห้องนะครับ เราจะคุยกันว่า Sprint Review คืออะไร แล้วคุณจะสรุป Sprint ของตัวเองอย่างไร" · บอกว่าของจริงคือคลิป 3 นาทีกับ Consult รายคน</a:t>
             </a:r>
           </a:p>
         </p:txBody>
@@ -3522,7 +3522,7 @@
           <a:lstStyle/>
           <a:p>
             <a:r>
-              <a:t>พูดว่า "ถ้านำเสนอจบแล้วไม่มีใครถามอะไรเลย แปลว่าเรายังไม่ได้อะไรกลับมา" · บอกว่าเราจะบังคับให้ผู้ฟังเขียน feedback ทุกคน</a:t>
+              <a:t>พูดว่า "ถ้าจบ Sprint แล้วไม่มีอะไรเข้า Backlog รอบหน้าเลย แปลว่าเรายังไม่ได้มองงานตัวเองจริง" · บอกว่าวันนี้ feedback มาจากเทสต์ที่ยัง fail จาก Reviewer และจาก Consult</a:t>
             </a:r>
           </a:p>
         </p:txBody>
@@ -3592,7 +3592,7 @@
           <a:lstStyle/>
           <a:p>
             <a:r>
-              <a:t>พูดว่า "ทุกกลุ่มได้นำเสนอ ไม่มีกลุ่มไหนนั่งดูอย่างเดียว" · บอกว่าลำดับผู้นำเสนอและเลขห้องส่งให้แล้วในใบงาน ให้เปิดดูตอนพักเที่ยง · ย้ำว่าเวลาแน่นมาก เข้าห้องช้าคือเสียคิวของกลุ่มตัวเอง</a:t>
+              <a:t>พูดว่า "สัปดาห์นี้ไม่มีการนำเสนอหน้าห้องนะครับ เวลาที่ได้คืนมา ผมยกให้คุณทำระบบของตัวเองในคาบ ตอนที่ผมกับ TA ยังอยู่ช่วยได้" · ย้ำว่าใครยังขาดของส่งมอบข้อไหน บ่ายนี้คือโอกาสที่ดีที่สุด</a:t>
             </a:r>
           </a:p>
         </p:txBody>
@@ -3732,7 +3732,7 @@
           <a:lstStyle/>
           <a:p>
             <a:r>
-              <a:t>ย้ำให้ชัดเพราะทุกรุ่นมีคนเข้าใจผิด · บอกว่าถ้าโครงงานของกลุ่มยังไม่เสร็จ ให้นำเสนอเท่าที่มีจริง ไม่ต้องแต่ง — สิ่งที่ยังไม่เสร็จให้พูดออกมาตรง ๆ แล้วบอกว่าอยู่ใน Backlog Sprint 2 แล้ว</a:t>
+              <a:t>ย้ำให้ชัดเพราะทุกรุ่นมีคนเข้าใจผิด · บอกว่าถ้าหัวข้อของคุณยังไม่เสร็จ ให้อัดเท่าที่มีจริง ไม่ต้องแต่ง — สิ่งที่ยังไม่เสร็จให้พูดออกมาตรง ๆ แล้วบอกว่าอยู่ใน Backlog Sprint 2 แล้ว</a:t>
             </a:r>
           </a:p>
         </p:txBody>
@@ -3802,7 +3802,7 @@
           <a:lstStyle/>
           <a:p>
             <a:r>
-              <a:t>พูดตรง ๆ ว่า "ข้อนี้ผมพูดล่วงหน้าตั้งแต่เช้า เพราะมันแก้ตอนบ่ายไม่ทัน" · บอกให้แบ่งท่อนกันตั้งแต่ตอนพักเที่ยง และให้คนที่พิมพ์น้อยที่สุดในกลุ่มเป็นคนสาธิตสด · เชื่อมกับกติกา commit ในชื่อตัวเอง</a:t>
+              <a:t>พูดตรง ๆ ว่า "ข้อนี้ผมพูดล่วงหน้าตั้งแต่เช้า เพราะมันแก้ตอนบ่ายไม่ทัน" · แนะให้เปิด CLAUDE.md กับ git log ของตัวเองอ่านทบทวนก่อนเข้า Consult · เชื่อมกับกติกา commit ในชื่อตัวเอง</a:t>
             </a:r>
           </a:p>
         </p:txBody>
@@ -3872,7 +3872,7 @@
           <a:lstStyle/>
           <a:p>
             <a:r>
-              <a:t>พูดว่า "ช่องที่ 3 คือหัวใจ อีกสี่ช่องคือกรอบให้ช่องที่ 3 เข้าใจได้" · เตือนว่าห้ามใช้เวลาไปกับสไลด์แนะนำตัวสมาชิก</a:t>
+              <a:t>พูดว่า "ฉากที่ 4 คือฉากที่คนลืมบ่อยที่สุด และเป็นฉากที่ผมดูก่อนเพื่อน" · บอกว่าไม่ต้องพูดเก่ง ขอให้เห็นของจริงบนจอ</a:t>
             </a:r>
           </a:p>
         </p:txBody>
@@ -3942,7 +3942,7 @@
           <a:lstStyle/>
           <a:p>
             <a:r>
-              <a:t>พูดว่า "จับเวลาเข้ม มีนาฬิกาขึ้นหน้าจอ หมดเวลาแล้วหยุดจริง" · ชี้บรรทัดที่สองแล้วบอกว่า "คนที่พิมพ์น้อยที่สุดในกลุ่มเป็นคนสาธิต เพราะสาธิตได้แปลว่าเข้าใจจริง" · ให้ซ้อมกับกลุ่มตอนบ่ายอย่างน้อย 1 รอบ</a:t>
+              <a:t>ชี้บรรทัดที่สองแล้วบอกว่า "ท่อนนี้ยาวที่สุด เพราะคือของจริงที่คุณสร้าง" · ย้ำว่าอัดใหม่ได้ไม่จำกัด และให้อัดตอนบ่ายตอน TA ยังอยู่</a:t>
             </a:r>
           </a:p>
         </p:txBody>
@@ -4012,7 +4012,7 @@
           <a:lstStyle/>
           <a:p>
             <a:r>
-              <a:t>พูดว่า "การตอบว่ายังไม่ทราบแล้วจดไว้ ได้คะแนนมากกว่าการเดา" · บอกว่าผู้สอนและ TA จะเป็นคนถามอย่างน้อยกลุ่มละ 1 คำถาม และจะถามเจาะไปที่คนที่ยังไม่ได้พูด</a:t>
+              <a:t>พูดว่า "การตอบว่ายังไม่ทราบแล้วจดไว้ ได้คะแนนมากกว่าการเดา" · บอกว่าคิว Consult อาทิตย์ 20 และอังคาร 22 ก.ย. จองในลิงก์ที่จะวางในแชทตอนบ่าย</a:t>
             </a:r>
           </a:p>
         </p:txBody>
@@ -4082,7 +4082,7 @@
           <a:lstStyle/>
           <a:p>
             <a:r>
-              <a:t>พูดว่า "ประกาศเกณฑ์นี้ก่อนเริ่มโหวตทุกห้อง" · บอกว่ากลุ่มที่พังเยอะแล้วเล่าได้ว่าแก้อย่างไร มักได้รับเลือก · ให้คนคุมห้องเป็นคนสรุปผลโหวต ไม่ปล่อยให้เถียงกันในแชท</a:t>
+              <a:t>พูดว่า "ผมประกาศเกณฑ์นี้ล่วงหน้าเพราะอยากให้ทุกคนเตรียมถูกจุด" · บอกว่าคนที่พังเยอะแล้วเล่าได้ว่าแก้อย่างไร คือคนที่เรียนรู้มากที่สุด</a:t>
             </a:r>
           </a:p>
         </p:txBody>
@@ -4152,7 +4152,7 @@
           <a:lstStyle/>
           <a:p>
             <a:r>
-              <a:t>พูดว่า "การสาธิตพังไม่หักคะแนน แต่การไม่เตรียมสำรองหักคะแนน" · ให้ทุกกลุ่มอัดวิดีโอสำรองตอนบ่ายก่อนเข้าห้องนำเสนอ · บอกว่าคนที่แชร์จอควรเป็นคนเดียวกันทั้ง 5 นาที เพื่อไม่ให้เสียเวลาสลับจอ</a:t>
+              <a:t>พูดว่า "อัดใหม่ได้ไม่จำกัด ไม่มีใครดูรอบซ้อมของคุณ" · ให้ทุกคนอัดตอนบ่ายก่อนเลิกคาบ อย่ายกไปอัดที่บ้านคนเดียว</a:t>
             </a:r>
           </a:p>
         </p:txBody>
@@ -4222,7 +4222,7 @@
           <a:lstStyle/>
           <a:p>
             <a:r>
-              <a:t>พูดว่า "คนฟังจำได้ว่ากลุ่มคุณรับมือยังไง มากกว่าจำว่ามันพัง" · นี่คือประโยคที่ควรพูดจริง ๆ ในห้อง</a:t>
+              <a:t>พูดว่า "ระบบพังตอนอัดไม่หักคะแนน แต่การไม่บอกใครเลยแล้วส่งคลิปที่ไม่มีอะไรทำงาน หักครับ" · นี่คือประโยคที่ควรพูดจริง ๆ ในห้อง</a:t>
             </a:r>
           </a:p>
         </p:txBody>
@@ -4292,7 +4292,7 @@
           <a:lstStyle/>
           <a:p>
             <a:r>
-              <a:t>พูดว่า "feedback ที่ไม่ได้จดภายในหนึ่งนาที จะหายไปเสมอ" · ให้กลุ่มมอบหมายคนหนึ่งเปิดไฟล์ Backlog ค้างไว้ตลอดตอนที่กลุ่มตัวเองนำเสนอ</a:t>
+              <a:t>พูดว่า "สิ่งที่ไม่ได้จดภายในหนึ่งนาที จะหายไปเสมอ" · แหล่ง feedback มี 3 ทาง — เทสต์ที่ยัง fail · สิ่งที่ Reviewer บอก · สิ่งที่ผู้สอนถามใน Consult</a:t>
             </a:r>
           </a:p>
         </p:txBody>
@@ -4362,7 +4362,7 @@
           <a:lstStyle/>
           <a:p>
             <a:r>
-              <a:t>พูดว่า "ผู้ฟังทุกคนกรอกอย่างน้อย 1 ช่องต่อกลุ่มที่นำเสนอ 1 กลุ่ม กรอกได้ภายใน 30 วินาที" · บอกว่าลิงก์ฟอร์มอยู่ในใบงาน และคนคุมห้องจะส่งซ้ำในแชทของห้องย่อย</a:t>
+              <a:t>พูดว่า "สามบรรทัดนี้เขียนได้ภายใน 2 นาที และมันคือ Backlog Sprint 2 ฉบับย่อ" · บอกว่าให้แนบสามบรรทัดนี้ไปกับงานที่ส่งใน Google Classroom</a:t>
             </a:r>
           </a:p>
         </p:txBody>
@@ -4432,7 +4432,7 @@
           <a:lstStyle/>
           <a:p>
             <a:r>
-              <a:t>พูดว่า "สี่สัปดาห์ที่แล้วหลายคนยังไม่เคยเปิด terminal เลย วันนี้ทุกกลุ่มมีเว็บที่มี URL จริงแล้ว" · ให้แต่ละกลุ่มพิมพ์ URL ของกลุ่มตัวเองลงแชท 1 บรรทัด</a:t>
+              <a:t>พูดว่า "สี่สัปดาห์ที่แล้วหลายคนยังไม่เคยเปิด terminal เลย วันนี้ทุกคนมีเว็บที่มี URL จริงแล้ว" · ให้แต่ละคนพิมพ์ URL ของตัวเองลงแชท 1 บรรทัด</a:t>
             </a:r>
           </a:p>
         </p:txBody>
@@ -4642,7 +4642,7 @@
           <a:lstStyle/>
           <a:p>
             <a:r>
-              <a:t>ให้ทุกกลุ่มพิมพ์ชื่อคนที่จะพูดช่องที่ 3 (สาธิตสด) ลงแชทเดี๋ยวนี้ 30 วินาที · อ่านออกเสียง 3–4 ชื่อให้ห้องฟัง เพื่อให้รู้ว่าเอาจริง</a:t>
+              <a:t>ให้ทุกคนพิมพ์ลงแชทเดี๋ยวนี้ว่าฉากที่ 4 (พิสูจน์ว่าคนอื่นเปิดไม่ได้) ของตัวเองจะถ่ายอย่างไร 30 วินาที · อ่านออกเสียง 3–4 คำตอบให้ห้องฟัง</a:t>
             </a:r>
           </a:p>
         </p:txBody>
@@ -4712,7 +4712,7 @@
           <a:lstStyle/>
           <a:p>
             <a:r>
-              <a:t>เปิดช่วงด้วย — "สี่สิบห้านาทีสุดท้ายนี้ไม่ใช่การสรุปสวย ๆ นะครับ เราจะไล่ทีละรายการว่าของที่ต้องส่งครบหรือยัง" · ให้ทุกกลุ่มเปิดโฟลเดอร์โครงงานของตัวเองค้างไว้ข้างจอ</a:t>
+              <a:t>เปิดช่วงด้วย — "สี่สิบห้านาทีสุดท้ายนี้ไม่ใช่การสรุปสวย ๆ นะครับ เราจะไล่ทีละรายการว่าของที่ต้องส่งครบหรือยัง" · ให้ทุกคนเปิดโฟลเดอร์โครงงานของตัวเองค้างไว้ข้างจอ</a:t>
             </a:r>
           </a:p>
         </p:txBody>
@@ -4852,7 +4852,7 @@
           <a:lstStyle/>
           <a:p>
             <a:r>
-              <a:t>พูดว่า "URL ที่เปิดได้เฉพาะบนเครื่องตัวเอง ยังไม่นับว่าออนไลน์" · ให้จับคู่กลุ่มสลับกันเปิด URL ของอีกกลุ่มเดี๋ยวนี้ 1 นาที แล้วรายงานในแชท</a:t>
+              <a:t>พูดว่า "URL ที่เปิดได้เฉพาะบนเครื่องตัวเอง ยังไม่นับว่าออนไลน์" · ให้จับคู่กันสลับกันเปิด URL ของเพื่อนเดี๋ยวนี้ 1 นาที แล้วรายงานในแชท</a:t>
             </a:r>
           </a:p>
         </p:txBody>
@@ -4922,7 +4922,7 @@
           <a:lstStyle/>
           <a:p>
             <a:r>
-              <a:t>พูดตรง ๆ ว่า "ข้อนี้เป็นเกณฑ์รายบุคคล ไม่ใช่รายกลุ่ม" · ให้ทุกกลุ่มเปิดหน้าประวัติ commit ของ repo ตัวเองเดี๋ยวนี้ แล้วนับว่าเห็นชื่อครบทุกคนไหม · ใครยังไม่มี ให้แก้ตั้งแต่บ่ายนี้ อย่ารอถึงศุกร์</a:t>
+              <a:t>พูดตรง ๆ ว่า "ข้อนี้เป็นเกณฑ์รายคน" · ให้ทุกคนเปิดหน้าประวัติ commit ของ repo ตัวเองเดี๋ยวนี้ แล้วดูว่ามีชื่อตัวเองจริงไหม · ใครยังไม่มี ให้แก้ตั้งแต่บ่ายนี้ อย่ารอถึงศุกร์</a:t>
             </a:r>
           </a:p>
         </p:txBody>
@@ -4992,7 +4992,7 @@
           <a:lstStyle/>
           <a:p>
             <a:r>
-              <a:t>พูดว่า "ผมรู้ว่าบางกลุ่มมีคนหนึ่งที่พิมพ์เร็วกว่าคนอื่นมาก และมันเลยกลายเป็นแบบนี้ ไม่ใช่ความผิดใคร แต่ต้องแก้วันนี้" · บอกว่า TA จะเดินตรวจหน้าประวัติ commit ของทุกกลุ่มในช่วง 15:35 ตามที่นัดไว้</a:t>
+              <a:t>พูดว่า "บางคนดูคนนำจอทำแล้วไม่ได้ทำเอง มันเลยกลายเป็นแบบนี้ ไม่ใช่ความผิดใคร แต่ต้องแก้วันนี้" · บอกว่า TA จะเดินตรวจหน้าประวัติ commit ของทุกคนในช่วง 15:35 ตามที่นัดไว้</a:t>
             </a:r>
           </a:p>
         </p:txBody>
@@ -5132,7 +5132,7 @@
           <a:lstStyle/>
           <a:p>
             <a:r>
-              <a:t>พูดว่า "ถ้าเขียนว่า ปรับ UI ให้ดีขึ้น Module 3 หยิบไปทำต่อไม่ได้ ต้องเขียนว่า ทำให้ปุ่มบันทึกอยู่ในจอบนมือถือ" · ให้กลุ่มเขียนอย่างน้อย 5 ข้อ</a:t>
+              <a:t>พูดว่า "ถ้าเขียนว่า ปรับ UI ให้ดีขึ้น Module 3 หยิบไปทำต่อไม่ได้ ต้องเขียนว่า ทำให้ปุ่มบันทึกอยู่ในจอบนมือถือ" · ให้เขียนอย่างน้อย 5 ข้อ</a:t>
             </a:r>
           </a:p>
         </p:txBody>
@@ -5202,7 +5202,7 @@
           <a:lstStyle/>
           <a:p>
             <a:r>
-              <a:t>อ่านออกเสียงทีละข้อ แล้วพูดว่า "สี่ข้อนี้คือเกณฑ์ปิด Module ไม่ใช่ข้อแนะนำ" · ชี้ข้อ 2 แล้วย้ำว่าเป็นเกณฑ์ประเมินรายบุคคล ไม่ใช่รายกลุ่ม</a:t>
+              <a:t>อ่านออกเสียงทีละข้อ แล้วพูดว่า "สี่ข้อนี้คือเกณฑ์ปิด Module ไม่ใช่ข้อแนะนำ" · ชี้ข้อ 2 แล้วย้ำว่าเป็นเกณฑ์ประเมินรายคน ทุกคนต้องมีคลิปของระบบตัวเอง</a:t>
             </a:r>
           </a:p>
         </p:txBody>
@@ -5272,7 +5272,7 @@
           <a:lstStyle/>
           <a:p>
             <a:r>
-              <a:t>พูดว่า "ผมรู้ว่าหลายกลุ่มอยากทำหน้าสรุปหรือกราฟตั้งแต่วันนี้ ขอให้เก็บไว้ก่อน เพราะ Module 3 สอนเรื่องนี้ทั้ง Module และจะทำได้ดีกว่ามาก" · ย้ำว่าจดลง Backlog ถือว่าไม่เสียของ</a:t>
+              <a:t>พูดว่า "ผมรู้ว่าหลายคนอยากทำหน้าสรุปหรือกราฟตั้งแต่วันนี้ ขอให้เก็บไว้ก่อน เพราะ Module 3 สอนเรื่องนี้ทั้ง Module และจะทำได้ดีกว่ามาก" · ย้ำว่าจดลง Backlog ถือว่าไม่เสียของ</a:t>
             </a:r>
           </a:p>
         </p:txBody>
@@ -5342,7 +5342,7 @@
           <a:lstStyle/>
           <a:p>
             <a:r>
-              <a:t>พูดว่า "เขียนสามหัวข้อนี้ ครึ่งหน้ากระดาษพอ" · ย้ำว่า "ข้อ 5 ไม่ใช่การสารภาพผิด — กลุ่มที่รู้ว่าตัวเองทำลวกตรงไหน คือกลุ่มที่ควบคุมงานอยู่" · บอกว่าไฟล์นี้ทำให้ผู้สอน Module 3 ช่วยได้ตรงจุดตั้งแต่วันแรก</a:t>
+              <a:t>พูดว่า "เขียนสามหัวข้อนี้ ครึ่งหน้ากระดาษพอ" · ย้ำว่า "ข้อ 5 ไม่ใช่การสารภาพผิด — คนที่รู้ว่าตัวเองทำลวกตรงไหน คือคนที่ควบคุมงานอยู่" · บอกว่าไฟล์นี้ทำให้ผู้สอน Module 3 ช่วยได้ตรงจุดตั้งแต่วันแรก</a:t>
             </a:r>
           </a:p>
         </p:txBody>
@@ -5412,7 +5412,7 @@
           <a:lstStyle/>
           <a:p>
             <a:r>
-              <a:t>พูดว่า "หลายกลุ่มคิดว่าระบบตัวเองเกือบครบแล้ว พอไล่จริงมักเจอว่าขาดสองสามข้อ" · ย้ำว่าไล่วันนี้เพื่อ จดไว้ ไม่ใช่เพื่อรีบทำให้เสร็จตอนบ่าย</a:t>
+              <a:t>พูดว่า "หลายคนคิดว่าระบบตัวเองเกือบครบแล้ว พอไล่จริงมักเจอว่าขาดสองสามข้อ" · ย้ำว่าไล่วันนี้เพื่อ จดไว้ ไม่ใช่เพื่อรีบทำให้เสร็จตอนบ่าย</a:t>
             </a:r>
           </a:p>
         </p:txBody>
@@ -5552,7 +5552,7 @@
           <a:lstStyle/>
           <a:p>
             <a:r>
-              <a:t>ชี้บรรทัด ⚠️ และ ❌ แล้วพูดว่า "สองบรรทัดนี้ของ FixIt ผมไม่ได้ทำวันนี้ครับ ผมจดลง Backlog Sprint 2" · ให้กลุ่มทำตารางแบบนี้ของตัวเองตอนบ่าย</a:t>
+              <a:t>ชี้บรรทัด ⚠️ และ ❌ แล้วพูดว่า "สองบรรทัดนี้ของ FixIt ผมไม่ได้ทำวันนี้ครับ ผมจดลง Backlog Sprint 2" · ให้ทำตารางแบบนี้ของตัวเองตอนบ่าย</a:t>
             </a:r>
           </a:p>
         </p:txBody>
@@ -5622,7 +5622,7 @@
           <a:lstStyle/>
           <a:p>
             <a:r>
-              <a:t>ให้ทุกกลุ่มพิมพ์ลงแชทว่าตอนนี้ขาดของส่งมอบข้อไหนบ้าง เป็นตัวเลข เช่น "กลุ่ม 4 — ขาดข้อ 3 กับ 5" · TA จดไว้ใช้จัดคิว Consult วันอาทิตย์</a:t>
+              <a:t>ให้ทุกคนพิมพ์ลงแชทว่าตอนนี้ขาดของส่งมอบข้อไหนบ้าง เป็นตัวเลข เช่น "ขาดข้อ 3 กับ 5" · TA จดไว้ใช้จัดคิว Consult วันอาทิตย์</a:t>
             </a:r>
           </a:p>
         </p:txBody>
@@ -5692,7 +5692,7 @@
           <a:lstStyle/>
           <a:p>
             <a:r>
-              <a:t>ปิดคาบเช้าด้วยการชี้เป้าบ่ายให้ชัด — "บ่ายนี้ 13:00 ถึง 14:45 คือทำเทสต์ให้ผ่าน แล้ว 14:45 คือนำเสนอจริง เวลาแน่นมาก" · ย้ำให้กินข้าวจริง ๆ และให้แบ่งท่อนพูดกันตอนพักเที่ยงเลย</a:t>
+              <a:t>ปิดคาบเช้าด้วยการชี้เป้าบ่ายให้ชัด — "บ่ายนี้ครึ่งแรกทำเทสต์ให้ผ่าน ครึ่งหลังอัดคลิปแล้วยกไปใส่หัวข้อของตัวเอง" · ย้ำให้กินข้าวจริง ๆ และให้เปิดใบงานอ่านตอนพักเที่ยง</a:t>
             </a:r>
           </a:p>
         </p:txBody>
@@ -5762,7 +5762,7 @@
           <a:lstStyle/>
           <a:p>
             <a:r>
-              <a:t>ฉายค้างไว้ 1 นาทีเต็ม แล้วพูดว่า "ช่องขวาสุดคือของกลุ่มคุณ และมีแต่พวกคุณที่เติมได้" · ให้แต่ละกลุ่มพิมพ์คำตอบช่องขวาสุดแถวแรกลงแชท</a:t>
+              <a:t>ฉายค้างไว้ 1 นาทีเต็ม แล้วพูดว่า "ช่องขวาสุดคือของคุณ และมีแต่พวกคุณที่เติมได้" · ให้แต่ละคนพิมพ์คำตอบช่องขวาสุดแถวแรกลงแชท</a:t>
             </a:r>
           </a:p>
         </p:txBody>
@@ -5832,7 +5832,7 @@
           <a:lstStyle/>
           <a:p>
             <a:r>
-              <a:t>พูดว่า "โครงเดียวกัน เปลี่ยนชื่อเรื่อง" · ย้ำว่า LeaveEasy อยู่ในใบงานเป็นตัวอย่างเทียบ ไม่ใช่สิ่งที่กลุ่มต้องสร้าง · ให้ถ่ายรูปสไลด์นี้เก็บไว้</a:t>
+              <a:t>พูดว่า "โครงเดียวกัน เปลี่ยนชื่อเรื่อง" · ย้ำว่าบ่ายนี้ทำเทสต์กับ LeaveEasy ก่อน แล้วยกวิธีเดียวกันไปใส่หัวข้อของตัวเอง · ให้ถ่ายรูปสไลด์นี้เก็บไว้</a:t>
             </a:r>
           </a:p>
         </p:txBody>
@@ -5902,7 +5902,7 @@
           <a:lstStyle/>
           <a:p>
             <a:r>
-              <a:t>ย้ำว่า "ถ้าเวลาไม่พอ ให้ถึง Checkpoint 2 เป็นอย่างน้อย แล้วไปซ้อมนำเสนอ เพราะ Sprint Review เริ่มตรงเวลาแน่นอน" · บอกว่าใบงานแจกไว้แล้วตั้งแต่เช้า และมีคลิปสั้นประกอบทุก Checkpoint</a:t>
+              <a:t>ย้ำว่า "ถ้าเวลาไม่พอ ให้ถึง Checkpoint 2 เป็นอย่างน้อย ที่เหลือทำต่อในการบ้านและ Consult ได้" · บอกว่าใบงานแจกไว้แล้วตั้งแต่เช้า และมีคลิปสั้นประกอบทุก Checkpoint</a:t>
             </a:r>
           </a:p>
         </p:txBody>
@@ -5972,7 +5972,7 @@
           <a:lstStyle/>
           <a:p>
             <a:r>
-              <a:t>พูดว่า "ช่วงนี้ผมให้เวลาบรรทัดเดียวบนสไลด์เท่านั้น เพราะคาบวันนี้ไม่ใช่คาบเติมฟีเจอร์แล้ว" · MVP แปลว่า ชุดฟีเจอร์ขั้นต่ำที่ทำให้ระบบใช้งานได้จริง · ย้ำว่าให้กลุ่มนัดกันเก็บงานค้างระหว่างสัปดาห์ และส่งผ่าน Google Classroom</a:t>
+              <a:t>พูดว่า "ช่วงนี้ผมให้เวลาบรรทัดเดียวบนสไลด์เท่านั้น เพราะคาบวันนี้ไม่ใช่คาบเติมฟีเจอร์แล้ว" · MVP แปลว่า ชุดฟีเจอร์ขั้นต่ำที่ทำให้ระบบใช้งานได้จริง · ย้ำว่าให้เก็บงานค้างระหว่างสัปดาห์ และส่งผ่าน Google Classroom</a:t>
             </a:r>
           </a:p>
         </p:txBody>
@@ -6042,7 +6042,7 @@
           <a:lstStyle/>
           <a:p>
             <a:r>
-              <a:t>ให้ทุกกลุ่มพิมพ์คำตอบลงแชท 1 บรรทัดก่อนออกจากห้อง · อ่านออกเสียง 3–4 คำตอบให้ห้องฟัง แล้วปิดคาบ</a:t>
+              <a:t>ให้ทุกคนพิมพ์คำตอบลงแชท 1 บรรทัดก่อนออกจากห้อง · อ่านออกเสียง 3–4 คำตอบให้ห้องฟัง แล้วปิดคาบ</a:t>
             </a:r>
           </a:p>
         </p:txBody>
@@ -15945,7 +15945,7 @@
                 <a:ea typeface="Leelawadee UI"/>
                 <a:cs typeface="Leelawadee UI"/>
               </a:rPr>
-              <a:t>ทดสอบอะไรบ้าง — 5 กลุ่ม</a:t>
+              <a:t>ทดสอบอะไรบ้าง — 5 แบบ</a:t>
             </a:r>
           </a:p>
         </p:txBody>
@@ -20879,7 +20879,7 @@
         <p:spPr>
           <a:xfrm>
             <a:off x="822960" y="2702560"/>
-            <a:ext cx="10545775" cy="1029208"/>
+            <a:ext cx="10545775" cy="560324"/>
           </a:xfrm>
           <a:prstGeom prst="rect">
             <a:avLst/>
@@ -20902,7 +20902,7 @@
                 <a:ea typeface="Leelawadee UI"/>
                 <a:cs typeface="Leelawadee UI"/>
               </a:rPr>
-              <a:t>• กลุ่มที่ได้ feedback แรง ๆ คือกลุ่มที่ได้ประโยชน์มากที่สุด</a:t>
+              <a:t>• คนที่ได้ feedback แรง ๆ คือคนที่ได้ประโยชน์มากที่สุด</a:t>
             </a:r>
           </a:p>
         </p:txBody>
@@ -20915,7 +20915,7 @@
         </p:nvSpPr>
         <p:spPr>
           <a:xfrm>
-            <a:off x="822960" y="3786632"/>
+            <a:off x="822960" y="3317748"/>
             <a:ext cx="10545775" cy="560324"/>
           </a:xfrm>
           <a:prstGeom prst="rect">
@@ -21188,7 +21188,7 @@
                 <a:ea typeface="Leelawadee UI"/>
                 <a:cs typeface="Leelawadee UI"/>
               </a:rPr>
-              <a:t>นำเสนอ Sprint 1</a:t>
+              <a:t>อัดคลิปสาธิต</a:t>
             </a:r>
           </a:p>
         </p:txBody>
@@ -21394,7 +21394,7 @@
         <p:spPr>
           <a:xfrm>
             <a:off x="822960" y="1472184"/>
-            <a:ext cx="10545775" cy="2231136"/>
+            <a:ext cx="10545775" cy="1920240"/>
           </a:xfrm>
           <a:prstGeom prst="rect">
             <a:avLst/>
@@ -21434,7 +21434,7 @@
                 <a:ea typeface="Consolas"/>
                 <a:cs typeface="Consolas"/>
               </a:rPr>
-              <a:t>13:00 – 14:45  🔧 กลุ่มตั้ง Tester + Playwright</a:t>
+              <a:t>13:00 – 14:20  🧪 ตั้ง Tester + Playwright</a:t>
             </a:r>
           </a:p>
           <a:p>
@@ -21448,7 +21448,7 @@
                 <a:ea typeface="Consolas"/>
                 <a:cs typeface="Consolas"/>
               </a:rPr>
-              <a:t>                  และเขียนเทสต์ให้ผ่าน</a:t>
+              <a:t>                  แล้วเขียนเทสต์ให้ผ่าน 5 ตัว</a:t>
             </a:r>
           </a:p>
           <a:p>
@@ -21462,7 +21462,7 @@
                 <a:ea typeface="Consolas"/>
                 <a:cs typeface="Consolas"/>
               </a:rPr>
-              <a:t>14:45 – 15:45  🔀 Sprint 1 Review · 3 ห้องขนานกัน</a:t>
+              <a:t>14:30 – 15:00  📦 เก็บของส่งมอบ + อัดคลิป 3 นาที</a:t>
             </a:r>
           </a:p>
           <a:p>
@@ -21476,7 +21476,7 @@
                 <a:ea typeface="Consolas"/>
                 <a:cs typeface="Consolas"/>
               </a:rPr>
-              <a:t>                  ห้องละ 3–4 กลุ่ม · กลุ่มละ 5 นาที</a:t>
+              <a:t>15:00 – 15:45  🏠 ยกทุกอย่างไปใส่หัวข้อของตัวเอง</a:t>
             </a:r>
           </a:p>
           <a:p>
@@ -21490,21 +21490,7 @@
                 <a:ea typeface="Consolas"/>
                 <a:cs typeface="Consolas"/>
               </a:rPr>
-              <a:t>                  + ถาม-ตอบ 3 นาที</a:t>
-            </a:r>
-          </a:p>
-          <a:p>
-            <a:pPr algn="l"/>
-            <a:r>
-              <a:rPr sz="1800" b="0">
-                <a:solidFill>
-                  <a:srgbClr val="1A1A1A"/>
-                </a:solidFill>
-                <a:latin typeface="Consolas"/>
-                <a:ea typeface="Consolas"/>
-                <a:cs typeface="Consolas"/>
-              </a:rPr>
-              <a:t>15:45 – 16:00  🏆 รวมห้องใหญ่ · ตัวแทน 3 กลุ่ม · ปิด Module</a:t>
+              <a:t>                  ผู้สอนและ TA เดินช่วยรายคน</a:t>
             </a:r>
           </a:p>
         </p:txBody>
@@ -21595,7 +21581,7 @@
                 <a:ea typeface="Leelawadee UI"/>
                 <a:cs typeface="Leelawadee UI"/>
               </a:rPr>
-              <a:t>นำเสนอด้วยโครงงานของกลุ่มเอง</a:t>
+              <a:t>🎥 คลิปสาธิตด้วยหัวข้อของตัวเอง</a:t>
             </a:r>
           </a:p>
         </p:txBody>
@@ -21706,7 +21692,7 @@
                 <a:ea typeface="Leelawadee UI"/>
                 <a:cs typeface="Leelawadee UI"/>
               </a:rPr>
-              <a:t>• สิ่งที่นำเสนอคือโครงงานของกลุ่มคุณ</a:t>
+              <a:t>• สิ่งที่อยู่ในคลิปคือระบบของคุณ</a:t>
             </a:r>
           </a:p>
         </p:txBody>
@@ -21797,7 +21783,7 @@
                 <a:ea typeface="Leelawadee UI"/>
                 <a:cs typeface="Leelawadee UI"/>
               </a:rPr>
-              <a:t>👥 ทุกคนในกลุ่มต้องพูด</a:t>
+              <a:t>👤 คุณต้องอธิบายระบบตัวเองได้</a:t>
             </a:r>
           </a:p>
         </p:txBody>
@@ -21834,7 +21820,7 @@
                 <a:ea typeface="Leelawadee UI"/>
                 <a:cs typeface="Leelawadee UI"/>
               </a:rPr>
-              <a:t>• แบ่งกันเล่าคนละท่อน ไม่ใช่ตัวแทนพูดคนเดียว</a:t>
+              <a:t>• ผู้สอนจะถามใน Consult รายคน ว่าคุณสั่งอะไรไป</a:t>
             </a:r>
           </a:p>
         </p:txBody>
@@ -21871,7 +21857,7 @@
                 <a:ea typeface="Leelawadee UI"/>
                 <a:cs typeface="Leelawadee UI"/>
               </a:rPr>
-              <a:t>• ข้อนี้เป็นเกณฑ์ประเมินรายบุคคล</a:t>
+              <a:t>• ข้อนี้เป็นเกณฑ์ผ่าน ไม่ใช่คะแนนเสริม</a:t>
             </a:r>
           </a:p>
         </p:txBody>
@@ -21908,7 +21894,7 @@
                 <a:ea typeface="Leelawadee UI"/>
                 <a:cs typeface="Leelawadee UI"/>
               </a:rPr>
-              <a:t>• คนที่ไม่ได้พูดและตอบคำถามไม่ได้ = ยังไม่ผ่าน</a:t>
+              <a:t>• อธิบายไม่ได้ = ยังไม่ผ่าน</a:t>
             </a:r>
           </a:p>
         </p:txBody>
@@ -21945,7 +21931,7 @@
                 <a:ea typeface="Leelawadee UI"/>
                 <a:cs typeface="Leelawadee UI"/>
               </a:rPr>
-              <a:t>• แม้ระบบของกลุ่มจะทำงานได้ครบก็ตาม</a:t>
+              <a:t>• แม้ระบบของคุณจะทำงานได้ครบก็ตาม</a:t>
             </a:r>
           </a:p>
         </p:txBody>
@@ -22036,7 +22022,7 @@
                 <a:ea typeface="Leelawadee UI"/>
                 <a:cs typeface="Leelawadee UI"/>
               </a:rPr>
-              <a:t>โครงนำเสนอ 5 นาที — 5 ช่อง</a:t>
+              <a:t>โครงคลิป 3 นาที — 4 ฉาก</a:t>
             </a:r>
           </a:p>
         </p:txBody>
@@ -22073,7 +22059,7 @@
                 <a:ea typeface="Leelawadee UI"/>
                 <a:cs typeface="Leelawadee UI"/>
               </a:rPr>
-              <a:t>• 1️⃣ ปัญหาคืออะไร</a:t>
+              <a:t>• 1️⃣ เปิด URL จริง ให้เห็นแถบที่อยู่</a:t>
             </a:r>
           </a:p>
         </p:txBody>
@@ -22110,7 +22096,7 @@
                 <a:ea typeface="Leelawadee UI"/>
                 <a:cs typeface="Leelawadee UI"/>
               </a:rPr>
-              <a:t>• 2️⃣ ผู้ใช้เป็นใคร</a:t>
+              <a:t>• 2️⃣ ล็อกอิน แล้วใช้งานเส้นทางหลัก 1 รอบ</a:t>
             </a:r>
           </a:p>
         </p:txBody>
@@ -22147,7 +22133,7 @@
                 <a:ea typeface="Leelawadee UI"/>
                 <a:cs typeface="Leelawadee UI"/>
               </a:rPr>
-              <a:t>• 3️⃣ สาธิตสดบน URL จริง ← ใช้เวลามากที่สุด</a:t>
+              <a:t>• 3️⃣ กดปุ่ม AI ให้เห็นว่าทำงานได้</a:t>
             </a:r>
           </a:p>
         </p:txBody>
@@ -22184,7 +22170,7 @@
                 <a:ea typeface="Leelawadee UI"/>
                 <a:cs typeface="Leelawadee UI"/>
               </a:rPr>
-              <a:t>• 4️⃣ สิ่งที่เรียนรู้ — อะไรพัง แก้อย่างไร</a:t>
+              <a:t>• 4️⃣ พิสูจน์ว่าคนอื่นเปิดดูไม่ได้</a:t>
             </a:r>
           </a:p>
         </p:txBody>
@@ -22192,43 +22178,6 @@
       <p:sp>
         <p:nvSpPr>
           <p:cNvPr id="7" name="TextBox 6"/>
-          <p:cNvSpPr txBox="1"/>
-          <p:nvPr/>
-        </p:nvSpPr>
-        <p:spPr>
-          <a:xfrm>
-            <a:off x="822960" y="3932936"/>
-            <a:ext cx="10545775" cy="560324"/>
-          </a:xfrm>
-          <a:prstGeom prst="rect">
-            <a:avLst/>
-          </a:prstGeom>
-          <a:noFill/>
-        </p:spPr>
-        <p:txBody>
-          <a:bodyPr wrap="square">
-            <a:spAutoFit/>
-          </a:bodyPr>
-          <a:lstStyle/>
-          <a:p>
-            <a:pPr algn="l"/>
-            <a:r>
-              <a:rPr sz="2600" b="0">
-                <a:solidFill>
-                  <a:srgbClr val="1A1A1A"/>
-                </a:solidFill>
-                <a:latin typeface="Leelawadee UI"/>
-                <a:ea typeface="Leelawadee UI"/>
-                <a:cs typeface="Leelawadee UI"/>
-              </a:rPr>
-              <a:t>• 5️⃣ จะทำอะไรต่อใน Sprint 2</a:t>
-            </a:r>
-          </a:p>
-        </p:txBody>
-      </p:sp>
-      <p:sp>
-        <p:nvSpPr>
-          <p:cNvPr id="8" name="TextBox 7"/>
           <p:cNvSpPr txBox="1"/>
           <p:nvPr/>
         </p:nvSpPr>
@@ -22312,7 +22261,7 @@
                 <a:ea typeface="Leelawadee UI"/>
                 <a:cs typeface="Leelawadee UI"/>
               </a:rPr>
-              <a:t>5 นาทีนั้นใช้อย่างไร — และใครพูดช่องไหน</a:t>
+              <a:t>3 นาทีนั้นใช้อย่างไร</a:t>
             </a:r>
           </a:p>
         </p:txBody>
@@ -22366,7 +22315,7 @@
                 <a:ea typeface="Consolas"/>
                 <a:cs typeface="Consolas"/>
               </a:rPr>
-              <a:t>0:00 – 0:45   ปัญหา + ผู้ใช้เป็นใคร        คนที่ 1</a:t>
+              <a:t>0:00 – 0:20   เปิด URL จริง · บอกว่าระบบนี้ทำอะไร</a:t>
             </a:r>
           </a:p>
           <a:p>
@@ -22380,7 +22329,7 @@
                 <a:ea typeface="Consolas"/>
                 <a:cs typeface="Consolas"/>
               </a:rPr>
-              <a:t>0:45 – 3:00   🖥️ สาธิตสดบน URL จริง        คนที่ 2 (คนที่พิมพ์น้อยสุด)</a:t>
+              <a:t>0:20 – 1:40   🖥️ ใช้งานเส้นทางหลักจนจบ 1 รอบ</a:t>
             </a:r>
           </a:p>
           <a:p>
@@ -22394,7 +22343,7 @@
                 <a:ea typeface="Consolas"/>
                 <a:cs typeface="Consolas"/>
               </a:rPr>
-              <a:t>3:00 – 4:00   สิ่งที่เรียนรู้ · อะไรพัง      คนที่ 3</a:t>
+              <a:t>1:40 – 2:20   🤖 กดปุ่ม AI ให้เห็นผล</a:t>
             </a:r>
           </a:p>
           <a:p>
@@ -22408,7 +22357,7 @@
                 <a:ea typeface="Consolas"/>
                 <a:cs typeface="Consolas"/>
               </a:rPr>
-              <a:t>4:00 – 5:00   Backlog Sprint 2             คนที่ 4 หรือวนกลับคนที่ 1</a:t>
+              <a:t>2:20 – 3:00   🔒 หน้าต่างส่วนตัว · เปิดไม่ได้</a:t>
             </a:r>
           </a:p>
         </p:txBody>
@@ -22499,7 +22448,7 @@
                 <a:ea typeface="Leelawadee UI"/>
                 <a:cs typeface="Leelawadee UI"/>
               </a:rPr>
-              <a:t>ถาม-ตอบ 3 นาที — ใครตอบ</a:t>
+              <a:t>💬 Consult รายคน — ผู้สอนจะถามอะไร</a:t>
             </a:r>
           </a:p>
         </p:txBody>
@@ -22536,7 +22485,7 @@
                 <a:ea typeface="Leelawadee UI"/>
                 <a:cs typeface="Leelawadee UI"/>
               </a:rPr>
-              <a:t>• ผู้ฟังถาม กลุ่ม ไม่ได้ถามคนใดคนหนึ่ง</a:t>
+              <a:t>• เปิดระบบของคุณสาธิตสดให้ดู</a:t>
             </a:r>
           </a:p>
         </p:txBody>
@@ -22573,7 +22522,7 @@
                 <a:ea typeface="Leelawadee UI"/>
                 <a:cs typeface="Leelawadee UI"/>
               </a:rPr>
-              <a:t>• คนที่ทำส่วนนั้นเป็นคนตอบ</a:t>
+              <a:t>• "ส่วนนี้คุณสั่ง AI ว่าอย่างไร"</a:t>
             </a:r>
           </a:p>
         </p:txBody>
@@ -22610,7 +22559,7 @@
                 <a:ea typeface="Leelawadee UI"/>
                 <a:cs typeface="Leelawadee UI"/>
               </a:rPr>
-              <a:t>• ตอบไม่ได้ ให้พูดว่า "ยังไม่ทราบ จะไปหาคำตอบมา"</a:t>
+              <a:t>• "ทำไมถึงเลือกทำแบบนี้"</a:t>
             </a:r>
           </a:p>
         </p:txBody>
@@ -22647,7 +22596,7 @@
                 <a:ea typeface="Leelawadee UI"/>
                 <a:cs typeface="Leelawadee UI"/>
               </a:rPr>
-              <a:t>• แล้วจดลง Backlog ทันที ไม่ต้องเดา</a:t>
+              <a:t>• ตอบไม่ได้ ให้พูดว่า "ยังไม่ทราบ จะไปหาคำตอบมา"</a:t>
             </a:r>
           </a:p>
         </p:txBody>
@@ -22738,7 +22687,7 @@
                 <a:ea typeface="Leelawadee UI"/>
                 <a:cs typeface="Leelawadee UI"/>
               </a:rPr>
-              <a:t>เกณฑ์เลือกตัวแทนห้อง</a:t>
+              <a:t>สิ่งที่ผู้สอนดูใน Consult</a:t>
             </a:r>
           </a:p>
         </p:txBody>
@@ -22812,7 +22761,7 @@
                 <a:ea typeface="Leelawadee UI"/>
                 <a:cs typeface="Leelawadee UI"/>
               </a:rPr>
-              <a:t>• ❌ ไม่ใช่กลุ่มที่ทำฟีเจอร์เยอะที่สุด</a:t>
+              <a:t>• ❌ ไม่ใช่คนที่ทำฟีเจอร์เยอะที่สุด</a:t>
             </a:r>
           </a:p>
         </p:txBody>
@@ -22849,7 +22798,7 @@
                 <a:ea typeface="Leelawadee UI"/>
                 <a:cs typeface="Leelawadee UI"/>
               </a:rPr>
-              <a:t>• ✅ กลุ่มที่เล่าเส้นทางแก้ปัญหาได้ดีที่สุด</a:t>
+              <a:t>• ✅ ข้อมูลไม่รั่ว และเทสต์ผ่านจริง</a:t>
             </a:r>
           </a:p>
         </p:txBody>
@@ -22886,7 +22835,7 @@
                 <a:ea typeface="Leelawadee UI"/>
                 <a:cs typeface="Leelawadee UI"/>
               </a:rPr>
-              <a:t>• ✅ และทุกคนในกลุ่มพูดได้จริง</a:t>
+              <a:t>• ✅ และคุณเล่าเส้นทางแก้ปัญหาของตัวเองได้</a:t>
             </a:r>
           </a:p>
         </p:txBody>
@@ -22977,7 +22926,7 @@
                 <a:ea typeface="Leelawadee UI"/>
                 <a:cs typeface="Leelawadee UI"/>
               </a:rPr>
-              <a:t>การสาธิตสดให้ไม่พัง — เตรียม 5 อย่าง</a:t>
+              <a:t>อัดคลิปให้ไม่พัง — เตรียม 5 อย่าง</a:t>
             </a:r>
           </a:p>
         </p:txBody>
@@ -23051,7 +23000,7 @@
                 <a:ea typeface="Leelawadee UI"/>
                 <a:cs typeface="Leelawadee UI"/>
               </a:rPr>
-              <a:t>• 🔑 ล็อกอินค้างไว้ทั้งสองบัญชีก่อนถึงคิว</a:t>
+              <a:t>• 🔑 ล็อกอินค้างไว้ทั้งสองบัญชีก่อนเริ่มอัด</a:t>
             </a:r>
           </a:p>
         </p:txBody>
@@ -23125,7 +23074,7 @@
                 <a:ea typeface="Leelawadee UI"/>
                 <a:cs typeface="Leelawadee UI"/>
               </a:rPr>
-              <a:t>• 🎥 อัดวิดีโอสำรอง 1 นาทีเก็บไว้</a:t>
+              <a:t>• 🔇 ปิดการแจ้งเตือนบนเครื่องก่อนอัด</a:t>
             </a:r>
           </a:p>
         </p:txBody>
@@ -23162,7 +23111,7 @@
                 <a:ea typeface="Leelawadee UI"/>
                 <a:cs typeface="Leelawadee UI"/>
               </a:rPr>
-              <a:t>• ⏱️ ซ้อมจับเวลาอย่างน้อย 1 รอบ</a:t>
+              <a:t>• ⏱️ อัดรอบแรกเป็นรอบซ้อม แล้วอัดใหม่</a:t>
             </a:r>
           </a:p>
         </p:txBody>
@@ -23253,7 +23202,7 @@
                 <a:ea typeface="Leelawadee UI"/>
                 <a:cs typeface="Leelawadee UI"/>
               </a:rPr>
-              <a:t>🆘 ถ้าสาธิตสดพังตอนนำเสนอ</a:t>
+              <a:t>🆘 ถ้าอัดแล้วระบบพัง</a:t>
             </a:r>
           </a:p>
         </p:txBody>
@@ -23290,7 +23239,7 @@
                 <a:ea typeface="Leelawadee UI"/>
                 <a:cs typeface="Leelawadee UI"/>
               </a:rPr>
-              <a:t>• เปิดวิดีโอสำรอง 1 นาทีทันที ไม่ต้องขอโทษยาว</a:t>
+              <a:t>• หยุดอัด แก้ก่อน แล้วค่อยอัดใหม่</a:t>
             </a:r>
           </a:p>
         </p:txBody>
@@ -23327,7 +23276,7 @@
                 <a:ea typeface="Leelawadee UI"/>
                 <a:cs typeface="Leelawadee UI"/>
               </a:rPr>
-              <a:t>• เล่าต่อว่าจะเกิดอะไรขึ้นถ้ามันทำงาน</a:t>
+              <a:t>• แก้ไม่ได้ในคาบ → ให้ TA ดูทันทีตอนยังอยู่</a:t>
             </a:r>
           </a:p>
         </p:txBody>
@@ -23364,7 +23313,7 @@
                 <a:ea typeface="Leelawadee UI"/>
                 <a:cs typeface="Leelawadee UI"/>
               </a:rPr>
-              <a:t>• ถ้ามีเวลาเหลือ ค่อยกลับมาลองสด</a:t>
+              <a:t>• ยังไม่ได้ → จดลง Backlog แล้วอัดเท่าที่ทำงานได้</a:t>
             </a:r>
           </a:p>
         </p:txBody>
@@ -23529,7 +23478,7 @@
                 <a:ea typeface="Leelawadee UI"/>
                 <a:cs typeface="Leelawadee UI"/>
               </a:rPr>
-              <a:t>• ทุก feedback ที่ได้ ต้องจดลง Backlog ทันที</a:t>
+              <a:t>• ทุกอย่างที่ยังไม่เสร็จ ต้องจดลง Backlog ทันที</a:t>
             </a:r>
           </a:p>
         </p:txBody>
@@ -24200,7 +24149,7 @@
                 <a:ea typeface="Leelawadee UI"/>
                 <a:cs typeface="Leelawadee UI"/>
               </a:rPr>
-              <a:t>แบบฟอร์ม feedback 3 ช่อง</a:t>
+              <a:t>ตรวจตัวเองก่อนส่ง — 3 ช่อง</a:t>
             </a:r>
           </a:p>
         </p:txBody>
@@ -24254,7 +24203,7 @@
                 <a:ea typeface="Consolas"/>
                 <a:cs typeface="Consolas"/>
               </a:rPr>
-              <a:t>กลุ่มที่นำเสนอ: ______________</a:t>
+              <a:t>ระบบของผม/ดิฉัน: ______________</a:t>
             </a:r>
           </a:p>
           <a:p>
@@ -24282,7 +24231,7 @@
                 <a:ea typeface="Consolas"/>
                 <a:cs typeface="Consolas"/>
               </a:rPr>
-              <a:t>1. ชอบอะไร      → ................................</a:t>
+              <a:t>1. อะไรทำงานแล้ว   → ................................</a:t>
             </a:r>
           </a:p>
           <a:p>
@@ -24296,7 +24245,7 @@
                 <a:ea typeface="Consolas"/>
                 <a:cs typeface="Consolas"/>
               </a:rPr>
-              <a:t>2. สงสัยอะไร    → ................................</a:t>
+              <a:t>2. อะไรยังไม่เสร็จ  → ................................</a:t>
             </a:r>
           </a:p>
           <a:p>
@@ -24310,7 +24259,7 @@
                 <a:ea typeface="Consolas"/>
                 <a:cs typeface="Consolas"/>
               </a:rPr>
-              <a:t>3. เสนออะไร     → ................................</a:t>
+              <a:t>3. รอบหน้าจะทำอะไร → ................................</a:t>
             </a:r>
           </a:p>
         </p:txBody>
@@ -24964,7 +24913,7 @@
                 <a:ea typeface="Leelawadee UI"/>
                 <a:cs typeface="Leelawadee UI"/>
               </a:rPr>
-              <a:t>• โครงนำเสนอ 5 นาทีที่แบ่งท่อนกันครบทุกคน</a:t>
+              <a:t>• โครงคลิป 3 นาทีที่ครบทั้ง 4 ฉาก</a:t>
             </a:r>
           </a:p>
         </p:txBody>
@@ -25001,7 +24950,7 @@
                 <a:ea typeface="Leelawadee UI"/>
                 <a:cs typeface="Leelawadee UI"/>
               </a:rPr>
-              <a:t>• แผนสำรองถ้าสาธิตสดพัง</a:t>
+              <a:t>• แผนสำรองถ้าระบบพังตอนอัด</a:t>
             </a:r>
           </a:p>
         </p:txBody>
@@ -25613,7 +25562,7 @@
                 <a:ea typeface="Leelawadee UI"/>
                 <a:cs typeface="Leelawadee UI"/>
               </a:rPr>
-              <a:t>• ให้เพื่อนอีกกลุ่มลองเปิด แล้วบอกว่าเห็นอะไร</a:t>
+              <a:t>• ให้เพื่อนเพื่อนลองเปิด แล้วบอกว่าเห็นอะไร</a:t>
             </a:r>
           </a:p>
         </p:txBody>
@@ -25852,7 +25801,7 @@
                 <a:ea typeface="Leelawadee UI"/>
                 <a:cs typeface="Leelawadee UI"/>
               </a:rPr>
-              <a:t>• ทุกคนในกลุ่มต้องมี commit ในชื่อตัวเอง</a:t>
+              <a:t>• ทุกคนต้องมี commit ในชื่อตัวเอง</a:t>
             </a:r>
           </a:p>
         </p:txBody>
@@ -26054,7 +26003,7 @@
                 <a:ea typeface="Leelawadee UI"/>
                 <a:cs typeface="Leelawadee UI"/>
               </a:rPr>
-              <a:t>• ให้คนนั้นเป็นคนคุมคีย์บอร์ดในช่วงถัดไปทันที</a:t>
+              <a:t>• ให้คนนั้นเป็นคนนำจอในช่วงถัดไปทันที</a:t>
             </a:r>
           </a:p>
         </p:txBody>
@@ -27303,7 +27252,7 @@
                 <a:ea typeface="Consolas"/>
                 <a:cs typeface="Consolas"/>
               </a:rPr>
-              <a:t>บันทึกส่งต่อ Module 3 — &lt;ชื่อโครงงานของกลุ่ม&gt;</a:t>
+              <a:t>บันทึกส่งต่อ Module 3 — &lt;ชื่อหัวข้อของคุณ&gt;</a:t>
             </a:r>
           </a:p>
           <a:p>
@@ -28452,7 +28401,7 @@
                 <a:ea typeface="Leelawadee UI"/>
                 <a:cs typeface="Leelawadee UI"/>
               </a:rPr>
-              <a:t>• ประวัติ commit ที่เห็นชื่อครบทุกคนในกลุ่ม</a:t>
+              <a:t>• ประวัติ commit ที่เห็นชื่อครบทุกคนในห้องย่อย</a:t>
             </a:r>
           </a:p>
         </p:txBody>
@@ -28526,7 +28475,7 @@
                 <a:ea typeface="Leelawadee UI"/>
                 <a:cs typeface="Leelawadee UI"/>
               </a:rPr>
-              <a:t>• ตารางไล่ Feature List ของโครงงานกลุ่มคุณ</a:t>
+              <a:t>• ตารางไล่ Feature List ของหัวข้อของคุณ</a:t>
             </a:r>
           </a:p>
         </p:txBody>
@@ -28728,7 +28677,7 @@
         <p:spPr>
           <a:xfrm>
             <a:off x="822960" y="502920"/>
-            <a:ext cx="10545775" cy="1408176"/>
+            <a:ext cx="10545775" cy="804672"/>
           </a:xfrm>
           <a:prstGeom prst="rect">
             <a:avLst/>
@@ -28751,7 +28700,7 @@
                 <a:ea typeface="Leelawadee UI"/>
                 <a:cs typeface="Leelawadee UI"/>
               </a:rPr>
-              <a:t>ตารางเทียบ 🎬 FixIt ↔ 🔧 LeaveEasy ↔ กลุ่มคุณ</a:t>
+              <a:t>ตารางเทียบ 🎬 FixIt ↔ 🔧 LeaveEasy ↔ คุณ</a:t>
             </a:r>
           </a:p>
         </p:txBody>
@@ -28765,7 +28714,7 @@
           <p:nvPr/>
         </p:nvGraphicFramePr>
         <p:xfrm>
-          <a:off x="822960" y="2075688"/>
+          <a:off x="822960" y="1472184"/>
           <a:ext cx="10545775" cy="2011680"/>
         </p:xfrm>
         <a:graphic>
@@ -28845,7 +28794,7 @@
                           <a:ea typeface="Leelawadee UI"/>
                           <a:cs typeface="Leelawadee UI"/>
                         </a:rPr>
-                        <a:t>👥 กลุ่มคุณ</a:t>
+                        <a:t>👥 คุณ</a:t>
                       </a:r>
                     </a:p>
                   </a:txBody>
@@ -29452,7 +29401,7 @@
                 <a:ea typeface="Leelawadee UI"/>
                 <a:cs typeface="Leelawadee UI"/>
               </a:rPr>
-              <a:t>• 🎤 นำเสนอสด และทุกคนในกลุ่มพูด</a:t>
+              <a:t>• 🎥 คลิปสาธิต 3 นาที ที่เห็นระบบทำงานจริง</a:t>
             </a:r>
           </a:p>
         </p:txBody>
@@ -29617,7 +29566,7 @@
                 <a:ea typeface="Leelawadee UI"/>
                 <a:cs typeface="Leelawadee UI"/>
               </a:rPr>
-              <a:t>บ่ายนี้ใน Workshop กลุ่มคุณจะทำอะไร</a:t>
+              <a:t>บ่ายนี้ใน Workshop คุณจะทำอะไร</a:t>
             </a:r>
           </a:p>
         </p:txBody>
@@ -29654,7 +29603,7 @@
                 <a:ea typeface="Leelawadee UI"/>
                 <a:cs typeface="Leelawadee UI"/>
               </a:rPr>
-              <a:t>• ส่วน A ⏱ ~30 นาที — เชื่อม Playwright + ตั้ง Tester</a:t>
+              <a:t>• ส่วน A ⏱ ~25 นาที — เชื่อม Playwright + ตั้ง Tester</a:t>
             </a:r>
           </a:p>
         </p:txBody>
@@ -29728,7 +29677,7 @@
                 <a:ea typeface="Leelawadee UI"/>
                 <a:cs typeface="Leelawadee UI"/>
               </a:rPr>
-              <a:t>• ส่วน C ⏱ ~20 นาที — เก็บของส่งมอบ + ซ้อมนำเสนอ 1 รอบ</a:t>
+              <a:t>• ส่วน C ⏱ ~25 นาที — เก็บของส่งมอบ + อัดคลิป 3 นาที</a:t>
             </a:r>
           </a:p>
         </p:txBody>
@@ -29765,7 +29714,7 @@
                 <a:ea typeface="Leelawadee UI"/>
                 <a:cs typeface="Leelawadee UI"/>
               </a:rPr>
-              <a:t>• 14:45 เป็นต้นไป — 🎤 Sprint 1 Review 3 ห้องขนานกัน</a:t>
+              <a:t>• ส่วน D ⏱ ~45 นาที — 🏠 ยกไปใส่หัวข้อของตัวเองในคาบ</a:t>
             </a:r>
           </a:p>
         </p:txBody>
@@ -29856,7 +29805,7 @@
                 <a:ea typeface="Leelawadee UI"/>
                 <a:cs typeface="Leelawadee UI"/>
               </a:rPr>
-              <a:t>ขั้นตอนที่เพิ่งเห็นกับ FixIt — ในโครงงานของกลุ่มคุณคืออะไร</a:t>
+              <a:t>ขั้นตอนที่เพิ่งเห็นกับ FixIt — ในหัวข้อของคุณคืออะไร</a:t>
             </a:r>
           </a:p>
         </p:txBody>
@@ -29947,7 +29896,7 @@
                 <a:ea typeface="Leelawadee UI"/>
                 <a:cs typeface="Leelawadee UI"/>
               </a:rPr>
-              <a:t>⚠️ ก่อนนำเสนอ — ไล่ Feature List อีกครั้ง</a:t>
+              <a:t>⚠️ ก่อนปิด Module — ไล่ Feature List อีกครั้ง</a:t>
             </a:r>
           </a:p>
         </p:txBody>

--- a/materials/week9/w9-slides.pptx
+++ b/materials/week9/w9-slides.pptx
@@ -1282,7 +1282,7 @@
           <a:lstStyle/>
           <a:p>
             <a:r>
-              <a:t>พูดว่า "ก่อนจะไปสั่งอะไรกับหุ่นยนต์ ผมถามเครื่องตัวเองก่อนครับว่าเชื่อมติดหรือยัง คำสั่งเดียวจบ ไม่ต้องเดา" · สลับไปหน้าจอจริง เดินตาม w9-demo-fixit.md ช่วงที่ 1A (ขั้นที่ 1–3)</a:t>
+              <a:t>📍 สคริปต์สาธิต: w9-demo-fixit.md → ขั้นที่ 1–3 · จบแล้วกลับเข้าสไลด์หน้า 21 · พูดว่า "ก่อนจะไปสั่งอะไรกับหุ่นยนต์ ผมถามเครื่องตัวเองก่อนครับว่าเชื่อมติดหรือยัง คำสั่งเดียวจบ ไม่ต้องเดา"</a:t>
             </a:r>
           </a:p>
         </p:txBody>
@@ -2402,7 +2402,7 @@
           <a:lstStyle/>
           <a:p>
             <a:r>
-              <a:t>พูดว่า "เส้นทางหลักของ FixIt คือชีวิตจริงของผู้ใช้ทุกวัน ถ้าเส้นนี้พัง ระบบใช้ไม่ได้เลย" · สลับไปหน้าจอจริง เดินตาม w9-demo-fixit.md ช่วงที่ 1B (ขั้นที่ 4–8)</a:t>
+              <a:t>📍 สคริปต์สาธิต: w9-demo-fixit.md → ขั้นที่ 4–8 (รวมจุดที่ตั้งใจให้พัง) · จบแล้วกลับเข้าสไลด์หน้า 35 · พูดว่า "เส้นทางหลักของ FixIt คือชีวิตจริงของผู้ใช้ทุกวัน ถ้าเส้นนี้พัง ระบบใช้ไม่ได้เลย"</a:t>
             </a:r>
           </a:p>
         </p:txBody>
@@ -4362,7 +4362,7 @@
           <a:lstStyle/>
           <a:p>
             <a:r>
-              <a:t>พูดว่า "สามบรรทัดนี้เขียนได้ภายใน 2 นาที และมันคือ Backlog Sprint 2 ฉบับย่อ" · บอกว่าให้แนบสามบรรทัดนี้ไปกับงานที่ส่งใน Google Classroom</a:t>
+              <a:t>พูดว่า "สามบรรทัดนี้เขียนได้ภายใน 2 นาที และมันคือ Backlog Sprint 2 ฉบับย่อ" · บอกว่าให้เก็บสามบรรทัดนี้เป็นไฟล์ BACKLOG.md ใน repo · ประกาศกำหนดส่ง: ใบงานที่ 4 (LeaveEasy + คลิป 3 นาที) ภายในจันทร์ 21 ก.ย. · การบ้านที่ 4 ปิด Module ภายในอังคาร 22 ก.ย. ส่งเป็น URL repo · URL ระบบ · ลิงก์คลิป ไม่ต้องแนบไฟล์</a:t>
             </a:r>
           </a:p>
         </p:txBody>
@@ -4502,7 +4502,7 @@
           <a:lstStyle/>
           <a:p>
             <a:r>
-              <a:t>พูดว่า "feedback ที่ไม่ได้จดภายในหนึ่งนาทีจะหายไปเสมอครับ ผมจะทำให้ดูว่าจดยังไงให้เอาไปทำต่อได้จริง" · สลับไปหน้าจอจริง เดินตาม w9-demo-fixit.md ช่วงที่ 2 (ขั้นที่ 9)</a:t>
+              <a:t>📍 สคริปต์สาธิต: w9-demo-fixit.md → ขั้นที่ 9 · จบแล้วกลับเข้าสไลด์หน้า 62 · พูดว่า "feedback ที่ไม่ได้จดภายในหนึ่งนาทีจะหายไปเสมอครับ ผมจะทำให้ดูว่าจดยังไงให้เอาไปทำต่อได้จริง"</a:t>
             </a:r>
           </a:p>
         </p:txBody>
@@ -5482,7 +5482,7 @@
           <a:lstStyle/>
           <a:p>
             <a:r>
-              <a:t>พูดว่า "ผมคิดมาตลอดว่า FixIt ของผมเกือบครบแล้ว เดี๋ยวมาไล่กันทีละบรรทัดต่อหน้าทุกคน ว่าจริงไหม" · สลับไปหน้าจอจริง เดินตาม w9-demo-fixit.md ช่วงที่ 3 (ขั้นที่ 10)</a:t>
+              <a:t>📍 สคริปต์สาธิต: w9-demo-fixit.md → ขั้นที่ 10 · จบแล้วกลับเข้าสไลด์หน้า 75 · พูดว่า "ผมคิดมาตลอดว่า FixIt ของผมเกือบครบแล้ว เดี๋ยวมาไล่กันทีละบรรทัดต่อหน้าทุกคน ว่าจริงไหม"</a:t>
             </a:r>
           </a:p>
         </p:txBody>

--- a/materials/week9/w9-slides.pptx
+++ b/materials/week9/w9-slides.pptx
@@ -4012,7 +4012,7 @@
           <a:lstStyle/>
           <a:p>
             <a:r>
-              <a:t>พูดว่า "การตอบว่ายังไม่ทราบแล้วจดไว้ ได้คะแนนมากกว่าการเดา" · บอกว่าคิว Consult อาทิตย์ 20 และอังคาร 22 ก.ย. จองในลิงก์ที่จะวางในแชทตอนบ่าย</a:t>
+              <a:t>พูดว่า "การตอบว่ายังไม่ทราบแล้วจดไว้ ได้คะแนนมากกว่าการเดา" · บอกว่าคิว Consult อาทิตย์ 20 และอังคาร 22 ก.ย. จองเองได้ที่ https://raise2-58508.web.app ช่องละ 30 นาที ใครจองก่อนได้ก่อน</a:t>
             </a:r>
           </a:p>
         </p:txBody>

--- a/materials/week9/w9-slides.pptx
+++ b/materials/week9/w9-slides.pptx
@@ -3802,7 +3802,7 @@
           <a:lstStyle/>
           <a:p>
             <a:r>
-              <a:t>พูดตรง ๆ ว่า "ข้อนี้ผมพูดล่วงหน้าตั้งแต่เช้า เพราะมันแก้ตอนบ่ายไม่ทัน" · แนะให้เปิด CLAUDE.md กับ git log ของตัวเองอ่านทบทวนก่อนเข้า Consult · เชื่อมกับกติกา commit ในชื่อตัวเอง</a:t>
+              <a:t>พูดตรง ๆ ว่า "ข้อนี้ผมพูดล่วงหน้าตั้งแต่เช้า เพราะมันแก้ตอนบ่ายไม่ทัน" · แนะให้เปิด CLAUDE.md อ่านทบทวน และสั่ง Claude ว่า "แสดงประวัติการปักหมุดของผมทั้งหมดให้ดูหน่อย" อ่านทบทวนก่อนเข้า Consult · เชื่อมกับกติกา commit ในชื่อตัวเอง</a:t>
             </a:r>
           </a:p>
         </p:txBody>

--- a/materials/week9/w9-slides.pptx
+++ b/materials/week9/w9-slides.pptx
@@ -4012,7 +4012,7 @@
           <a:lstStyle/>
           <a:p>
             <a:r>
-              <a:t>พูดว่า "การตอบว่ายังไม่ทราบแล้วจดไว้ ได้คะแนนมากกว่าการเดา" · บอกว่าคิว Consult อาทิตย์ 20 และอังคาร 22 ก.ย. จองเองได้ที่ https://raise2-58508.web.app ช่องละ 30 นาที ใครจองก่อนได้ก่อน</a:t>
+              <a:t>พูดว่า "การตอบว่ายังไม่ทราบแล้วจดไว้ ได้คะแนนมากกว่าการเดา" · บอกว่าคิว Consult อาทิตย์ 20 และพุธ 23 ก.ย. จองเองได้ที่ https://raise2-58508.web.app ช่องละ 30 นาที ใครจองก่อนได้ก่อน</a:t>
             </a:r>
           </a:p>
         </p:txBody>
@@ -4362,7 +4362,7 @@
           <a:lstStyle/>
           <a:p>
             <a:r>
-              <a:t>พูดว่า "สามบรรทัดนี้เขียนได้ภายใน 2 นาที และมันคือ Backlog Sprint 2 ฉบับย่อ" · บอกว่าให้เก็บสามบรรทัดนี้เป็นไฟล์ BACKLOG.md ใน repo · ประกาศกำหนดส่ง: ใบงานที่ 4 (LeaveEasy + คลิป 3 นาที) ภายในจันทร์ 21 ก.ย. · การบ้านที่ 4 ปิด Module ภายในอังคาร 22 ก.ย. ส่งเป็น URL repo · URL ระบบ · ลิงก์คลิป ไม่ต้องแนบไฟล์</a:t>
+              <a:t>พูดว่า "สามบรรทัดนี้เขียนได้ภายใน 2 นาที และมันคือ Backlog Sprint 2 ฉบับย่อ" · บอกว่าให้เก็บสามบรรทัดนี้เป็นไฟล์ BACKLOG.md ใน repo · ประกาศกำหนดส่ง: ใบงานที่ 4 ภายในจันทร์ 21 ก.ย. · การบ้านที่ 4 ปิด Module ภายในอังคาร 22 ก.ย. ส่ง URL repo ลิงก์เดียวเท่านั้น ไม่ต้องแนบไฟล์ · URL ระบบและลิงก์คลิป 3 นาที ให้เขียนไว้บนสุดของ README.md ในrepo</a:t>
             </a:r>
           </a:p>
         </p:txBody>
@@ -5902,7 +5902,7 @@
           <a:lstStyle/>
           <a:p>
             <a:r>
-              <a:t>ย้ำว่า "ถ้าเวลาไม่พอ ให้ถึง Checkpoint 2 เป็นอย่างน้อย ที่เหลือทำต่อในการบ้านและ Consult ได้" · บอกว่าใบงานแจกไว้แล้วตั้งแต่เช้า และมีคลิปสั้นประกอบทุก Checkpoint</a:t>
+              <a:t>บอกก่อนว่า "ใบงานวันนี้ออกแบบให้เสร็จใน 2 ชั่วโมง เวลาที่เหลือคือเวลาสำรอง ไม่มีงานต่อยอดให้ทำเพิ่ม" · ย้ำว่า "ถ้าเวลาไม่พอ ให้ถึง Checkpoint 2 เป็นอย่างน้อย ที่เหลือทำต่อในการบ้านและ Consult ได้" · บอกว่าใบงานแจกไว้แล้วตั้งแต่เช้า และมีคลิปสั้นประกอบทุก Checkpoint</a:t>
             </a:r>
           </a:p>
         </p:txBody>
@@ -29603,7 +29603,7 @@
                 <a:ea typeface="Leelawadee UI"/>
                 <a:cs typeface="Leelawadee UI"/>
               </a:rPr>
-              <a:t>• ส่วน A ⏱ ~25 นาที — เชื่อม Playwright + ตั้ง Tester</a:t>
+              <a:t>• ส่วน A ⏱ ~20 นาที — เชื่อม Playwright + ตั้ง Tester</a:t>
             </a:r>
           </a:p>
         </p:txBody>
@@ -29640,7 +29640,7 @@
                 <a:ea typeface="Leelawadee UI"/>
                 <a:cs typeface="Leelawadee UI"/>
               </a:rPr>
-              <a:t>• ส่วน B ⏱ ~45 นาที — เขียนเทสต์อย่างน้อย 5 ตัวให้ผ่าน</a:t>
+              <a:t>• ส่วน B ⏱ ~37 นาที — เขียนเทสต์อย่างน้อย 5 ตัวให้ผ่าน</a:t>
             </a:r>
           </a:p>
         </p:txBody>
@@ -29677,7 +29677,7 @@
                 <a:ea typeface="Leelawadee UI"/>
                 <a:cs typeface="Leelawadee UI"/>
               </a:rPr>
-              <a:t>• ส่วน C ⏱ ~25 นาที — เก็บของส่งมอบ + อัดคลิป 3 นาที</a:t>
+              <a:t>• ส่วน C ⏱ ~20 นาที — เก็บของส่งมอบ + อัดคลิป 3 นาที</a:t>
             </a:r>
           </a:p>
         </p:txBody>
@@ -29714,7 +29714,7 @@
                 <a:ea typeface="Leelawadee UI"/>
                 <a:cs typeface="Leelawadee UI"/>
               </a:rPr>
-              <a:t>• ส่วน D ⏱ ~45 นาที — 🏠 ยกไปใส่หัวข้อของตัวเองในคาบ</a:t>
+              <a:t>• ส่วน D ⏱ ~30 นาที — 🏠 ยกไปใส่หัวข้อของตัวเองในคาบ</a:t>
             </a:r>
           </a:p>
         </p:txBody>

--- a/materials/week9/w9-slides.pptx
+++ b/materials/week9/w9-slides.pptx
@@ -2471,7 +2471,7 @@
           <a:lstStyle/>
           <a:p>
             <a:r>
-              <a:t>📍 สคริปต์สาธิต: w9-demo-fixit.md → ขั้นที่ 4–8 (รวมจุดที่ตั้งใจให้พัง) · จบแล้วกลับเข้าสไลด์หน้า 35 · พูดว่า "เส้นทางหลักของ FixIt คือชีวิตจริงของผู้ใช้ทุกวัน ถ้าเส้นนี้พัง ระบบใช้ไม่ได้เลย"</a:t>
+              <a:t>📍 สคริปต์สาธิต: w9-demo-fixit.md → ขั้นที่ 4–8 (รวมจุดที่ตั้งใจให้พัง) · จบแล้วกลับเข้าสไลด์หน้า 36 · พูดว่า "เส้นทางหลักของ FixIt คือชีวิตจริงของผู้ใช้ทุกวัน ถ้าเส้นนี้พัง ระบบใช้ไม่ได้เลย"</a:t>
             </a:r>
           </a:p>
         </p:txBody>
@@ -3521,7 +3521,7 @@
           <a:lstStyle/>
           <a:p>
             <a:r>
-              <a:t>ลดความกดดันก่อนเข้าเนื้อหา — "ช่วงนี้ไม่มีการนำเสนอหน้าห้องนะครับ เราจะคุยกันว่า Sprint Review คืออะไร แล้วคุณจะสรุป Sprint ของตัวเองอย่างไร" · บอกว่าของจริงคือรายงานผลการทดสอบกับ Consult รายคน</a:t>
+              <a:t>ลดความกดดันก่อนเข้าเนื้อหา — "ช่วงนี้ไม่มีการนำเสนอหน้าห้องนะครับ และไม่มีการรีวิวหน้าห้องด้วย เราจะคุยกันว่าคุณจะสรุปงานของตัวเองอย่างไร แล้วเอาสิ่งที่ยังไม่เสร็จไปไว้ที่ไหน" · บอกว่าของจริงคือรายงานผลการทดสอบกับ Consult รายคน</a:t>
             </a:r>
           </a:p>
         </p:txBody>
@@ -3591,7 +3591,7 @@
           <a:lstStyle/>
           <a:p>
             <a:r>
-              <a:t>พูดว่า "ถ้าจบ Sprint แล้วไม่มีอะไรเข้า Backlog รอบหน้าเลย แปลว่าเรายังไม่ได้มองงานตัวเองจริง" · บอกว่าวันนี้ feedback มาจากเทสต์ที่ยัง fail จาก Reviewer และจาก Consult</a:t>
+              <a:t>พูดว่า "ถ้าปิดรอบนี้แล้วไม่มีอะไรเข้า Backlog เลย แปลว่าเรายังไม่ได้มองงานตัวเองจริง" · บอกว่าวันนี้ feedback มาจากเทสต์ที่ยัง fail จาก Reviewer และจาก Consult · ย้ำว่าไม่มีการรีวิวหน้าห้อง ทุกอย่างคุยกันตัวต่อตัวใน Consult</a:t>
             </a:r>
           </a:p>
         </p:txBody>
@@ -4361,7 +4361,7 @@
           <a:lstStyle/>
           <a:p>
             <a:r>
-              <a:t>📍 สคริปต์สาธิต: w9-demo-fixit.md → ขั้นที่ 9 · จบแล้วกลับเข้าสไลด์หน้า 62 · พูดว่า "feedback ที่ไม่ได้จดภายในหนึ่งนาทีจะหายไปเสมอครับ ผมจะทำให้ดูว่าจดยังไงให้เอาไปทำต่อได้จริง"</a:t>
+              <a:t>📍 สคริปต์สาธิต: w9-demo-fixit.md → ขั้นที่ 9 · จบแล้วกลับเข้าสไลด์หน้า 61 · พูดว่า "feedback ที่ไม่ได้จดภายในหนึ่งนาทีจะหายไปเสมอครับ ผมจะทำให้ดูว่าจดยังไงให้เอาไปทำต่อได้จริง"</a:t>
             </a:r>
           </a:p>
         </p:txBody>
@@ -5411,7 +5411,7 @@
           <a:lstStyle/>
           <a:p>
             <a:r>
-              <a:t>📍 สคริปต์สาธิต: w9-demo-fixit.md → ขั้นที่ 10 · จบแล้วกลับเข้าสไลด์หน้า 75 · พูดว่า "ผมคิดมาตลอดว่า FixIt ของผมเกือบครบแล้ว เดี๋ยวมาไล่กันทีละบรรทัดต่อหน้าทุกคน ว่าจริงไหม"</a:t>
+              <a:t>📍 สคริปต์สาธิต: w9-demo-fixit.md → ขั้นที่ 10 · จบแล้วกลับเข้าสไลด์หน้า 74 · พูดว่า "ผมคิดมาตลอดว่า FixIt ของผมเกือบครบแล้ว เดี๋ยวมาไล่กันทีละบรรทัดต่อหน้าทุกคน ว่าจริงไหม"</a:t>
             </a:r>
           </a:p>
         </p:txBody>
@@ -9121,7 +9121,7 @@
                 <a:ea typeface="Leelawadee UI"/>
                 <a:cs typeface="Leelawadee UI"/>
               </a:rPr>
-              <a:t>Sprint 1 Review — ให้ AI ทดสอบแทนเรา แล้วเตรียมส่งมอบ</a:t>
+              <a:t>ให้ AI ทดสอบแทนเรา แล้วเตรียมส่งมอบ</a:t>
             </a:r>
           </a:p>
           <a:p>
@@ -15397,7 +15397,7 @@
                 <a:ea typeface="Leelawadee UI"/>
                 <a:cs typeface="Leelawadee UI"/>
               </a:rPr>
-              <a:t>• 🎤 ช่วงที่ 2 · 40 นาที — Sprint 1 Review</a:t>
+              <a:t>• 📋 ช่วงที่ 2 · 40 นาที — สรุปงานของตัวเอง + Consult</a:t>
             </a:r>
           </a:p>
         </p:txBody>
@@ -18453,7 +18453,7 @@
                 <a:ea typeface="Consolas"/>
                 <a:cs typeface="Consolas"/>
               </a:rPr>
-              <a:t>10:40 – 11:20   🎤 ช่วงที่ 2   Sprint 1 Review</a:t>
+              <a:t>10:40 – 11:20   📋 ช่วงที่ 2   สรุปงานของตัวเอง + Consult</a:t>
             </a:r>
           </a:p>
           <a:p>
@@ -20996,7 +20996,7 @@
                 <a:ea typeface="Leelawadee UI"/>
                 <a:cs typeface="Leelawadee UI"/>
               </a:rPr>
-              <a:t>🎤 ช่วงที่ 2 — Sprint 1 Review · 40 นาที</a:t>
+              <a:t>📋 ช่วงที่ 2 — สรุปงานของตัวเอง + Consult · 40 นาที</a:t>
             </a:r>
           </a:p>
         </p:txBody>
@@ -21437,7 +21437,7 @@
                 <a:ea typeface="Leelawadee UI"/>
                 <a:cs typeface="Leelawadee UI"/>
               </a:rPr>
-              <a:t>Sprint Review ไม่ใช่การอวดผลงาน</a:t>
+              <a:t>ปิดงานรอบนี้ = รับความจริงกลับมา</a:t>
             </a:r>
           </a:p>
         </p:txBody>
@@ -21474,7 +21474,7 @@
                 <a:ea typeface="Leelawadee UI"/>
                 <a:cs typeface="Leelawadee UI"/>
               </a:rPr>
-              <a:t>• คือการเอาของจริงไปให้คนใช้ดู แล้วรับความจริงกลับมา</a:t>
+              <a:t>• เอาของจริงไปให้คนใช้ดู แล้วฟังสิ่งที่เขาบอก</a:t>
             </a:r>
           </a:p>
         </p:txBody>
@@ -21585,7 +21585,7 @@
                 <a:ea typeface="Leelawadee UI"/>
                 <a:cs typeface="Leelawadee UI"/>
               </a:rPr>
-              <a:t>• (ต่อยอดจาก Agile ที่เรียนไว้ Module 1)</a:t>
+              <a:t>• สิ่งที่ยังไม่เสร็จ ไม่ได้หาย — ย้ายไป Backlog</a:t>
             </a:r>
           </a:p>
         </p:txBody>

--- a/materials/week9/w9-slides.pptx
+++ b/materials/week9/w9-slides.pptx
@@ -4291,7 +4291,7 @@
           <a:lstStyle/>
           <a:p>
             <a:r>
-              <a:t>พูดว่า "สามบรรทัดนี้เขียนได้ภายใน 2 นาที และมันคือ Backlog Sprint 2 ฉบับย่อ" · บอกว่าให้เก็บสามบรรทัดนี้เป็นไฟล์ BACKLOG.md ใน repo · ประกาศกำหนดส่ง: ใบงานที่ 4 ภายในจันทร์ 21 ก.ย. · การบ้านที่ 4 ปิด Module ภายในอังคาร 22 ก.ย. ส่ง URL repo ลิงก์เดียวเท่านั้น ไม่ต้องแนบไฟล์ · URL ระบบและลิงก์ไฟล์ docs/TEST-REPORT.md ให้เขียนไว้บนสุดของ README.md ในrepo</a:t>
+              <a:t>พูดว่า "สามบรรทัดนี้เขียนได้ภายใน 2 นาที และมันคือ Backlog Sprint 2 ฉบับย่อ" · บอกว่าให้เก็บสามบรรทัดนี้เป็นไฟล์ BACKLOG.md ใน repo · ประกาศกำหนดส่ง: ใบงานที่ 4 ภายในจันทร์ 21 ก.ย. · การบ้านที่ 4 ปิด Module ภายในอังคาร 22 ก.ย. ส่ง URL repo ลิงก์เดียวเท่านั้น ไม่ต้องแนบไฟล์ · URL ระบบและลิงก์ไฟล์ test-results.md ให้เขียนไว้บนสุดของ README.md ในrepo</a:t>
             </a:r>
           </a:p>
         </p:txBody>

--- a/materials/week9/w9-slides.pptx
+++ b/materials/week9/w9-slides.pptx
@@ -1351,7 +1351,7 @@
           <a:lstStyle/>
           <a:p>
             <a:r>
-              <a:t>พูดว่า "สามชั่วโมงนี้เราจะให้ AI ทดสอบระบบแทนเรา แล้วเก็บของส่งมอบให้ครบ" · บอกว่าสัปดาห์นี้ไม่มีการนำเสนอหน้าห้องและไม่ต้องอัดคลิป ใช้รายงานผลการทดสอบกับ Consult รายคนแทน</a:t>
+              <a:t>พูดว่า "สามชั่วโมงนี้เราจะให้ AI ทดสอบระบบแทนเรา แล้วเก็บของส่งมอบให้ครบ" · บอกว่าสัปดาห์นี้ไม่มีการนำเสนอหน้าห้อง ไม่ต้องอัดคลิป และไม่บังคับจองคิวปรึกษา — หลักฐานคือรายงานผลการทดสอบใน repo · ใครอยากคุยตัวต่อตัวจองคิว Consult เองได้</a:t>
             </a:r>
           </a:p>
         </p:txBody>
@@ -3521,7 +3521,7 @@
           <a:lstStyle/>
           <a:p>
             <a:r>
-              <a:t>ลดความกดดันก่อนเข้าเนื้อหา — "ช่วงนี้ไม่มีการนำเสนอหน้าห้องนะครับ และไม่มีการรีวิวหน้าห้องด้วย เราจะคุยกันว่าคุณจะสรุปงานของตัวเองอย่างไร แล้วเอาสิ่งที่ยังไม่เสร็จไปไว้ที่ไหน" · บอกว่าของจริงคือรายงานผลการทดสอบกับ Consult รายคน</a:t>
+              <a:t>ลดความกดดันก่อนเข้าเนื้อหา — "ช่วงนี้ไม่มีการนำเสนอหน้าห้องนะครับ และไม่มีการรีวิวหน้าห้องด้วย เราจะคุยกันว่าคุณจะสรุปงานของตัวเองอย่างไร แล้วเอาสิ่งที่ยังไม่เสร็จไปไว้ที่ไหน" · บอกว่าของจริงคือรายงานผลการทดสอบใน repo · คิว Consult เปิดไว้ให้จองเอง ไม่บังคับ</a:t>
             </a:r>
           </a:p>
         </p:txBody>
@@ -3591,7 +3591,7 @@
           <a:lstStyle/>
           <a:p>
             <a:r>
-              <a:t>พูดว่า "ถ้าปิดรอบนี้แล้วไม่มีอะไรเข้า Backlog เลย แปลว่าเรายังไม่ได้มองงานตัวเองจริง" · บอกว่าวันนี้ feedback มาจากเทสต์ที่ยัง fail จาก Reviewer และจาก Consult · ย้ำว่าไม่มีการรีวิวหน้าห้อง ทุกอย่างคุยกันตัวต่อตัวใน Consult</a:t>
+              <a:t>พูดว่า "ถ้าปิดรอบนี้แล้วไม่มีอะไรเข้า Backlog เลย แปลว่าเรายังไม่ได้มองงานตัวเองจริง" · บอกว่าวันนี้ feedback มาจากเทสต์ที่ยัง fail และจาก Reviewer · ย้ำว่าไม่มีการรีวิวหน้าห้อง และไม่ต้องจองคิวปรึกษาถ้าไม่ติดอะไร</a:t>
             </a:r>
           </a:p>
         </p:txBody>
@@ -3871,7 +3871,7 @@
           <a:lstStyle/>
           <a:p>
             <a:r>
-              <a:t>พูดตรง ๆ ว่า "ข้อนี้ผมพูดล่วงหน้าตั้งแต่เช้า เพราะมันแก้ตอนบ่ายไม่ทัน" · แนะให้เปิด CLAUDE.md อ่านทบทวน และสั่ง Claude ว่า "แสดงประวัติการปักหมุดของผมทั้งหมดให้ดูหน่อย" อ่านทบทวนก่อนเข้า Consult · เชื่อมกับกติกา commit ในชื่อตัวเอง</a:t>
+              <a:t>พูดตรง ๆ ว่า "ข้อนี้ผมพูดล่วงหน้าตั้งแต่เช้า เพราะมันแก้ตอนบ่ายไม่ทัน" · แนะให้เปิด CLAUDE.md อ่านทบทวน และสั่ง Claude ว่า "แสดงประวัติการปักหมุดของผมทั้งหมดให้ดูหน่อย" · ย้ำว่าไม่ต้องจองคิวปรึกษาถ้าไม่ติดอะไร ผมอ่านจาก repo กับรายงานผลทดสอบเป็นหลัก</a:t>
             </a:r>
           </a:p>
         </p:txBody>
@@ -4011,7 +4011,7 @@
           <a:lstStyle/>
           <a:p>
             <a:r>
-              <a:t>พูดว่า "การตอบว่ายังไม่ทราบแล้วจดไว้ ได้คะแนนมากกว่าการเดา" · บอกว่าคิว Consult อาทิตย์ 20 และพุธ 23 ก.ย. จองเองได้ที่ https://raise2-58508.web.app ช่องละ 30 นาที ใครจองก่อนได้ก่อน</a:t>
+              <a:t>ย้ำว่า "ไม่ได้บังคับให้ทุกคนจองนะครับ ใครงานเดินดีแล้วก็ส่ง repo อย่างเดียวจบ" · บอกลิงก์จอง https://raise2-58508.web.app ใครจองก่อนได้ก่อน · เสริมว่า "การตอบว่ายังไม่ทราบแล้วจดไว้ ได้คะแนนมากกว่าการเดา"</a:t>
             </a:r>
           </a:p>
         </p:txBody>
@@ -4221,7 +4221,7 @@
           <a:lstStyle/>
           <a:p>
             <a:r>
-              <a:t>พูดว่า "สิ่งที่ไม่ได้จดภายในหนึ่งนาที จะหายไปเสมอ" · แหล่ง feedback มี 3 ทาง — เทสต์ที่ยัง fail · สิ่งที่ Reviewer บอก · สิ่งที่ผู้สอนถามใน Consult</a:t>
+              <a:t>พูดว่า "สิ่งที่ไม่ได้จดภายในหนึ่งนาที จะหายไปเสมอ" · แหล่ง feedback มี 3 ทาง — เทสต์ที่ยัง fail · สิ่งที่ Reviewer บอก · สิ่งที่ผู้สอนคอมเมนต์กลับมา</a:t>
             </a:r>
           </a:p>
         </p:txBody>
@@ -5831,7 +5831,7 @@
           <a:lstStyle/>
           <a:p>
             <a:r>
-              <a:t>บอกก่อนว่า "ใบงานวันนี้ออกแบบให้เสร็จใน 2 ชั่วโมง เวลาที่เหลือคือเวลาสำรอง ไม่มีงานต่อยอดให้ทำเพิ่ม" · ย้ำว่า "ถ้าเวลาไม่พอ ให้ถึง Checkpoint 2 เป็นอย่างน้อย ที่เหลือทำต่อในการบ้านและ Consult ได้" · บอกว่าใบงานแจกไว้แล้วตั้งแต่เช้า และมีคลิปสอนสั้นของผู้สอนประกอบทุก Checkpoint</a:t>
+              <a:t>บอกก่อนว่า "ใบงานวันนี้ออกแบบให้เสร็จใน 2 ชั่วโมง เวลาที่เหลือคือเวลาสำรอง ไม่มีงานต่อยอดให้ทำเพิ่ม" · ย้ำว่า "ถ้าเวลาไม่พอ ให้ถึง Checkpoint 2 เป็นอย่างน้อย ที่เหลือทำต่อในการบ้านได้" · บอกว่าใบงานแจกไว้แล้วตั้งแต่เช้า และมีคลิปสอนสั้นของผู้สอนประกอบทุก Checkpoint</a:t>
             </a:r>
           </a:p>
         </p:txBody>
@@ -15374,6 +15374,43 @@
         <p:spPr>
           <a:xfrm>
             <a:off x="822960" y="2556256"/>
+            <a:ext cx="10545775" cy="1029208"/>
+          </a:xfrm>
+          <a:prstGeom prst="rect">
+            <a:avLst/>
+          </a:prstGeom>
+          <a:noFill/>
+        </p:spPr>
+        <p:txBody>
+          <a:bodyPr wrap="square">
+            <a:spAutoFit/>
+          </a:bodyPr>
+          <a:lstStyle/>
+          <a:p>
+            <a:pPr algn="l"/>
+            <a:r>
+              <a:rPr sz="2600" b="0">
+                <a:solidFill>
+                  <a:srgbClr val="1A1A1A"/>
+                </a:solidFill>
+                <a:latin typeface="Leelawadee UI"/>
+                <a:ea typeface="Leelawadee UI"/>
+                <a:cs typeface="Leelawadee UI"/>
+              </a:rPr>
+              <a:t>• 📋 ช่วงที่ 2 · 40 นาที — สรุปงานของตัวเอง + ปิด Module</a:t>
+            </a:r>
+          </a:p>
+        </p:txBody>
+      </p:sp>
+      <p:sp>
+        <p:nvSpPr>
+          <p:cNvPr id="5" name="TextBox 4"/>
+          <p:cNvSpPr txBox="1"/>
+          <p:nvPr/>
+        </p:nvSpPr>
+        <p:spPr>
+          <a:xfrm>
+            <a:off x="822960" y="3640328"/>
             <a:ext cx="10545775" cy="560324"/>
           </a:xfrm>
           <a:prstGeom prst="rect">
@@ -15397,43 +15434,6 @@
                 <a:ea typeface="Leelawadee UI"/>
                 <a:cs typeface="Leelawadee UI"/>
               </a:rPr>
-              <a:t>• 📋 ช่วงที่ 2 · 40 นาที — สรุปงานของตัวเอง + Consult</a:t>
-            </a:r>
-          </a:p>
-        </p:txBody>
-      </p:sp>
-      <p:sp>
-        <p:nvSpPr>
-          <p:cNvPr id="5" name="TextBox 4"/>
-          <p:cNvSpPr txBox="1"/>
-          <p:nvPr/>
-        </p:nvSpPr>
-        <p:spPr>
-          <a:xfrm>
-            <a:off x="822960" y="3171444"/>
-            <a:ext cx="10545775" cy="560324"/>
-          </a:xfrm>
-          <a:prstGeom prst="rect">
-            <a:avLst/>
-          </a:prstGeom>
-          <a:noFill/>
-        </p:spPr>
-        <p:txBody>
-          <a:bodyPr wrap="square">
-            <a:spAutoFit/>
-          </a:bodyPr>
-          <a:lstStyle/>
-          <a:p>
-            <a:pPr algn="l"/>
-            <a:r>
-              <a:rPr sz="2600" b="0">
-                <a:solidFill>
-                  <a:srgbClr val="1A1A1A"/>
-                </a:solidFill>
-                <a:latin typeface="Leelawadee UI"/>
-                <a:ea typeface="Leelawadee UI"/>
-                <a:cs typeface="Leelawadee UI"/>
-              </a:rPr>
               <a:t>• 📦 ช่วงที่ 3 · 35 นาที — เตรียมส่งมอบให้ Module 3</a:t>
             </a:r>
           </a:p>
@@ -15447,7 +15447,7 @@
         </p:nvSpPr>
         <p:spPr>
           <a:xfrm>
-            <a:off x="822960" y="3786632"/>
+            <a:off x="822960" y="4255516"/>
             <a:ext cx="10545775" cy="560324"/>
           </a:xfrm>
           <a:prstGeom prst="rect">
@@ -18453,7 +18453,7 @@
                 <a:ea typeface="Consolas"/>
                 <a:cs typeface="Consolas"/>
               </a:rPr>
-              <a:t>10:40 – 11:20   📋 ช่วงที่ 2   สรุปงานของตัวเอง + Consult</a:t>
+              <a:t>10:40 – 11:20   📋 ช่วงที่ 2   สรุปงานของตัวเอง + ปิด Module</a:t>
             </a:r>
           </a:p>
           <a:p>
@@ -20996,7 +20996,7 @@
                 <a:ea typeface="Leelawadee UI"/>
                 <a:cs typeface="Leelawadee UI"/>
               </a:rPr>
-              <a:t>📋 ช่วงที่ 2 — สรุปงานของตัวเอง + Consult · 40 นาที</a:t>
+              <a:t>📋 ช่วงที่ 2 — สรุปงานของตัวเอง + ปิด Module · 40 นาที</a:t>
             </a:r>
           </a:p>
         </p:txBody>
@@ -22116,7 +22116,7 @@
                 <a:ea typeface="Leelawadee UI"/>
                 <a:cs typeface="Leelawadee UI"/>
               </a:rPr>
-              <a:t>• ผู้สอนจะถามใน Consult รายคน ว่าคุณสั่งอะไรไป</a:t>
+              <a:t>• ผู้สอนอาจถามเพิ่มหลังอ่าน repo ของคุณ</a:t>
             </a:r>
           </a:p>
         </p:txBody>
@@ -22557,7 +22557,7 @@
                 <a:ea typeface="Leelawadee UI"/>
                 <a:cs typeface="Leelawadee UI"/>
               </a:rPr>
-              <a:t>💬 Consult รายคน — ผู้สอนจะถามอะไร</a:t>
+              <a:t>💬 Consult — จองเองได้ ไม่บังคับ</a:t>
             </a:r>
           </a:p>
         </p:txBody>
@@ -22594,7 +22594,7 @@
                 <a:ea typeface="Leelawadee UI"/>
                 <a:cs typeface="Leelawadee UI"/>
               </a:rPr>
-              <a:t>• เปิดระบบของคุณสาธิตสดให้ดู</a:t>
+              <a:t>• ติดตรงไหน หรืออยากให้ผู้สอนดูงานตัวต่อตัว</a:t>
             </a:r>
           </a:p>
         </p:txBody>
@@ -22631,7 +22631,7 @@
                 <a:ea typeface="Leelawadee UI"/>
                 <a:cs typeface="Leelawadee UI"/>
               </a:rPr>
-              <a:t>• "ส่วนนี้คุณสั่ง AI ว่าอย่างไร"</a:t>
+              <a:t>• อาทิตย์ 20 / พุธ 23 ก.ย. · ช่องละ 30 นาที</a:t>
             </a:r>
           </a:p>
         </p:txBody>
@@ -22668,7 +22668,7 @@
                 <a:ea typeface="Leelawadee UI"/>
                 <a:cs typeface="Leelawadee UI"/>
               </a:rPr>
-              <a:t>• "ทำไมถึงเลือกทำแบบนี้"</a:t>
+              <a:t>• คำถามที่มัก ถาม: "ส่วนนี้คุณสั่ง AI ว่าอย่างไร"</a:t>
             </a:r>
           </a:p>
         </p:txBody>
@@ -22796,7 +22796,7 @@
                 <a:ea typeface="Leelawadee UI"/>
                 <a:cs typeface="Leelawadee UI"/>
               </a:rPr>
-              <a:t>สิ่งที่ผู้สอนดูใน Consult</a:t>
+              <a:t>สิ่งที่ผู้สอนดูตอนตรวจงาน</a:t>
             </a:r>
           </a:p>
         </p:txBody>

--- a/materials/week9/w9-slides.pptx
+++ b/materials/week9/w9-slides.pptx
@@ -5831,7 +5831,7 @@
           <a:lstStyle/>
           <a:p>
             <a:r>
-              <a:t>บอกก่อนว่า "ใบงานวันนี้ออกแบบให้เสร็จใน 2 ชั่วโมง เวลาที่เหลือคือเวลาสำรอง ไม่มีงานต่อยอดให้ทำเพิ่ม" · ย้ำว่า "ถ้าเวลาไม่พอ ให้ถึง Checkpoint 2 เป็นอย่างน้อย ที่เหลือทำต่อในการบ้านได้" · บอกว่าใบงานแจกไว้แล้วตั้งแต่เช้า และมีคลิปสอนสั้นของผู้สอนประกอบทุก Checkpoint</a:t>
+              <a:t>บอกก่อนว่า "ใบงานวันนี้ออกแบบให้เสร็จใน 2 ชั่วโมง เวลาที่เหลือคือเวลาสำรอง ไม่มีงานต่อยอดให้ทำเพิ่ม" · ย้ำว่า "ใบงานวันนี้มี 3 ส่วน จบราวบ่ายสองครึ่ง แล้วเวลาที่เหลือยกให้คุณเริ่มการบ้านกับหัวข้อตัวเองตอนที่ผมกับ TA ยังอยู่" · ถ้าเวลาไม่พอ ให้ถึง Checkpoint 2 เป็นอย่างน้อย · บอกว่าใบงานแจกไว้แล้วตั้งแต่เช้า และมีคลิปสอนสั้นของผู้สอนประกอบทุก Checkpoint</a:t>
             </a:r>
           </a:p>
         </p:txBody>
@@ -21730,7 +21730,7 @@
                 <a:ea typeface="Consolas"/>
                 <a:cs typeface="Consolas"/>
               </a:rPr>
-              <a:t>13:00 – 14:20  🧪 ตั้ง Tester + Playwright</a:t>
+              <a:t>13:05 – 14:05  🧪 ตั้ง Tester + Playwright</a:t>
             </a:r>
           </a:p>
           <a:p>
@@ -21758,7 +21758,7 @@
                 <a:ea typeface="Consolas"/>
                 <a:cs typeface="Consolas"/>
               </a:rPr>
-              <a:t>14:15 – 15:05  📦 เก็บของส่งมอบ + รายงานผลทดสอบ</a:t>
+              <a:t>14:05 – 14:25  📦 เก็บของส่งมอบ + รายงานผลทดสอบ</a:t>
             </a:r>
           </a:p>
           <a:p>
@@ -21772,7 +21772,7 @@
                 <a:ea typeface="Consolas"/>
                 <a:cs typeface="Consolas"/>
               </a:rPr>
-              <a:t>15:00 – 15:45  🏠 ยกทุกอย่างไปใส่หัวข้อของตัวเอง</a:t>
+              <a:t>14:35 – 16:00  🏠 เริ่มการบ้าน กับหัวข้อของตัวเอง</a:t>
             </a:r>
           </a:p>
           <a:p>
@@ -29308,7 +29308,7 @@
                 <a:ea typeface="Leelawadee UI"/>
                 <a:cs typeface="Leelawadee UI"/>
               </a:rPr>
-              <a:t>• ส่วน D ⏱ ~30 นาที — 🏠 ยกไปใส่หัวข้อของตัวเองในคาบ</a:t>
+              <a:t>• ⏰ เวลาที่เหลือ — 🏠 เริ่มการบ้านที่ 4 กับหัวข้อตัวเอง</a:t>
             </a:r>
           </a:p>
         </p:txBody>

--- a/materials/week9/w9-slides.pptx
+++ b/materials/week9/w9-slides.pptx
@@ -791,7 +791,7 @@
           <a:lstStyle/>
           <a:p>
             <a:r>
-              <a:t>ทวน Reviewer สั้น ๆ 1 นาที ห้ามสอนซ้ำ เพราะทำไปแล้วสัปดาห์ที่ 8 · พูดว่า "Reviewer อ่านแบบแปลนบ้าน Tester เดินเข้าไปในบ้านแล้วลองเปิดประตูทุกบาน" · ย้ำว่าสองตัวนี้เจอปัญหาคนละแบบ</a:t>
+              <a:t>พูดว่า "ทุกสัปดาห์ที่ผ่านมา คนตรวจว่าระบบยังใช้ได้คือเราเอง และเราตรวจได้เท่าที่เรามีเวลา" · โยงเข้าวันนี้ — "วันนี้เราจะให้ AI อีกตัวเปิดเบราว์เซอร์กดใช้ระบบเราแทน"</a:t>
             </a:r>
           </a:p>
         </p:txBody>
@@ -861,7 +861,7 @@
           <a:lstStyle/>
           <a:p>
             <a:r>
-              <a:t>ชี้แถบบนก่อนแล้วพูดว่า "อันนี้คือของสัปดาห์ที่แล้ว มีประโยชน์ แต่มันเดาจากโค้ด" · เลื่อนลงชี้กล่องเข้มในแถบล่าง พูดช้า ๆ ว่า "กล่องนี้คือของใหม่วันนี้ — มันกดจริง มันจึงตอบได้ว่าพังจริงหรือไม่พัง" · ย้ำว่านี่ไม่ใช่การบอกว่า Reviewer ผิด สองอย่างนี้ใช้คู่กัน</a:t>
+              <a:t>ชี้แถบบนก่อนแล้วพูดว่า "แบบนี้มีประโยชน์ แต่มันเดาจากโค้ด" · เลื่อนลงชี้กล่องเข้มในแถบล่าง พูดช้า ๆ ว่า "กล่องนี้คือของใหม่วันนี้ — มันกดจริง มันจึงตอบได้ว่าพังจริงหรือไม่พัง"</a:t>
             </a:r>
           </a:p>
         </p:txBody>
@@ -9676,7 +9676,7 @@
                 <a:ea typeface="Leelawadee UI"/>
                 <a:cs typeface="Leelawadee UI"/>
               </a:rPr>
-              <a:t>สัปดาห์ที่แล้วเรามี 🔍 Reviewer แล้ว</a:t>
+              <a:t>อ่านโค้ดอย่างเดียวไม่พอ</a:t>
             </a:r>
           </a:p>
         </p:txBody>
@@ -9713,7 +9713,7 @@
                 <a:ea typeface="Leelawadee UI"/>
                 <a:cs typeface="Leelawadee UI"/>
               </a:rPr>
-              <a:t>• สัปดาห์ที่ 8 เราตั้ง Reviewer ให้อ่านโค้ดแล้วรายงาน</a:t>
+              <a:t>• ที่ผ่านมาเราตรวจงานด้วยการอ่านโค้ดกับกดเองทีละหน้า</a:t>
             </a:r>
           </a:p>
         </p:txBody>
@@ -9750,7 +9750,7 @@
                 <a:ea typeface="Leelawadee UI"/>
                 <a:cs typeface="Leelawadee UI"/>
               </a:rPr>
-              <a:t>• Reviewer เห็นโค้ด แต่ไม่เคยกดปุ่มในเว็บของเราเลย</a:t>
+              <a:t>• อ่านแล้วดูดี ไม่ได้แปลว่ากดแล้วไม่พัง</a:t>
             </a:r>
           </a:p>
         </p:txBody>
@@ -9787,7 +9787,7 @@
                 <a:ea typeface="Leelawadee UI"/>
                 <a:cs typeface="Leelawadee UI"/>
               </a:rPr>
-              <a:t>• รายงานที่บอกว่าผ่าน ไม่ใช่ใบรับประกัน</a:t>
+              <a:t>• และกดเองทุกรอบที่แก้โค้ด เราไม่มีเวลา</a:t>
             </a:r>
           </a:p>
         </p:txBody>
@@ -9824,7 +9824,7 @@
                 <a:ea typeface="Leelawadee UI"/>
                 <a:cs typeface="Leelawadee UI"/>
               </a:rPr>
-              <a:t>• สัปดาห์นี้เราเติมอีกตัว — 🧪 Tester</a:t>
+              <a:t>• สัปดาห์นี้เราตั้งผู้ช่วยอีกตัว — 🧪 Tester</a:t>
             </a:r>
           </a:p>
         </p:txBody>
@@ -9915,7 +9915,7 @@
                 <a:ea typeface="Leelawadee UI"/>
                 <a:cs typeface="Leelawadee UI"/>
               </a:rPr>
-              <a:t>🔍 อ่านโค้ด ≠ 🧪 ใช้งานจริง</a:t>
+              <a:t>👀 อ่านโค้ด ≠ 🧪 ใช้งานจริง</a:t>
             </a:r>
           </a:p>
         </p:txBody>
@@ -9996,7 +9996,7 @@
                 <a:ea typeface="Leelawadee UI"/>
                 <a:cs typeface="Leelawadee UI"/>
               </a:rPr>
-              <a:t>🔍 Reviewer (สัปดาห์ที่ 8)</a:t>
+              <a:t>👀 อ่านโค้ดเอง</a:t>
             </a:r>
           </a:p>
         </p:txBody>
@@ -10053,7 +10053,7 @@
                 <a:ea typeface="Leelawadee UI"/>
                 <a:cs typeface="Leelawadee UI"/>
               </a:rPr>
-              <a:t>อ่านโค้ด</a:t>
+              <a:t>เห็นแต่ตัวอักษร</a:t>
             </a:r>
           </a:p>
         </p:txBody>
@@ -26641,7 +26641,7 @@
         <p:spPr>
           <a:xfrm>
             <a:off x="822960" y="2702560"/>
-            <a:ext cx="10545775" cy="1029208"/>
+            <a:ext cx="10545775" cy="560324"/>
           </a:xfrm>
           <a:prstGeom prst="rect">
             <a:avLst/>
@@ -26664,7 +26664,7 @@
                 <a:ea typeface="Leelawadee UI"/>
                 <a:cs typeface="Leelawadee UI"/>
               </a:rPr>
-              <a:t>• สัปดาห์ที่ 8 — ปิดข้อมูลรายห้อง มีผู้ช่วย AI มี Reviewer</a:t>
+              <a:t>• สัปดาห์ที่ 8 — ระบบมีผู้ช่วย AI 2 ระดับ</a:t>
             </a:r>
           </a:p>
         </p:txBody>
@@ -26677,7 +26677,7 @@
         </p:nvSpPr>
         <p:spPr>
           <a:xfrm>
-            <a:off x="822960" y="3786632"/>
+            <a:off x="822960" y="3317748"/>
             <a:ext cx="10545775" cy="560324"/>
           </a:xfrm>
           <a:prstGeom prst="rect">
